--- a/Linear_Algebra/w9_Matrix_Decomposition.pptx
+++ b/Linear_Algebra/w9_Matrix_Decomposition.pptx
@@ -5,10 +5,10 @@
     <p:sldMasterId id="2147483660" r:id="rId1"/>
   </p:sldMasterIdLst>
   <p:notesMasterIdLst>
-    <p:notesMasterId r:id="rId28"/>
+    <p:notesMasterId r:id="rId30"/>
   </p:notesMasterIdLst>
   <p:handoutMasterIdLst>
-    <p:handoutMasterId r:id="rId29"/>
+    <p:handoutMasterId r:id="rId31"/>
   </p:handoutMasterIdLst>
   <p:sldIdLst>
     <p:sldId id="256" r:id="rId2"/>
@@ -37,6 +37,8 @@
     <p:sldId id="1109" r:id="rId25"/>
     <p:sldId id="1110" r:id="rId26"/>
     <p:sldId id="1111" r:id="rId27"/>
+    <p:sldId id="1122" r:id="rId28"/>
+    <p:sldId id="1123" r:id="rId29"/>
   </p:sldIdLst>
   <p:sldSz cx="12192000" cy="6858000"/>
   <p:notesSz cx="6858000" cy="9144000"/>
@@ -170,6 +172,8 @@
             <p14:sldId id="1109"/>
             <p14:sldId id="1110"/>
             <p14:sldId id="1111"/>
+            <p14:sldId id="1122"/>
+            <p14:sldId id="1123"/>
           </p14:sldIdLst>
         </p14:section>
         <p14:section name="자세한 정보" id="{2CC34DB2-6590-42C0-AD4B-A04C6060184E}">
@@ -294,7 +298,7 @@
                 <a:latin typeface="맑은 고딕" panose="020B0503020000020004" pitchFamily="50" charset="-127"/>
                 <a:ea typeface="맑은 고딕" panose="020B0503020000020004" pitchFamily="50" charset="-127"/>
               </a:rPr>
-              <a:t>2026-06-03</a:t>
+              <a:t>2026-06-04</a:t>
             </a:fld>
             <a:endParaRPr lang="ko-KR" altLang="en-US">
               <a:latin typeface="맑은 고딕" panose="020B0503020000020004" pitchFamily="50" charset="-127"/>
@@ -480,7 +484,7 @@
           <a:p>
             <a:fld id="{43E1C3DD-4A19-441D-907C-380838DB51C4}" type="datetime1">
               <a:rPr lang="ko-KR" altLang="en-US" noProof="0" smtClean="0"/>
-              <a:t>2026-06-03</a:t>
+              <a:t>2026-06-04</a:t>
             </a:fld>
             <a:endParaRPr lang="ko-KR" altLang="en-US" noProof="0"/>
           </a:p>
@@ -2984,6 +2988,242 @@
 </p:notes>
 </file>
 
+<file path=ppt/notesSlides/notesSlide27.xml><?xml version="1.0" encoding="utf-8"?>
+<p:notes xmlns:a="http://schemas.openxmlformats.org/drawingml/2006/main" xmlns:r="http://schemas.openxmlformats.org/officeDocument/2006/relationships" xmlns:p="http://schemas.openxmlformats.org/presentationml/2006/main">
+  <p:cSld>
+    <p:spTree>
+      <p:nvGrpSpPr>
+        <p:cNvPr id="1" name="">
+          <a:extLst>
+            <a:ext uri="{FF2B5EF4-FFF2-40B4-BE49-F238E27FC236}">
+              <a16:creationId xmlns:a16="http://schemas.microsoft.com/office/drawing/2014/main" id="{B7E7A15A-E275-B969-FA06-C33E02D420EE}"/>
+            </a:ext>
+          </a:extLst>
+        </p:cNvPr>
+        <p:cNvGrpSpPr/>
+        <p:nvPr/>
+      </p:nvGrpSpPr>
+      <p:grpSpPr>
+        <a:xfrm>
+          <a:off x="0" y="0"/>
+          <a:ext cx="0" cy="0"/>
+          <a:chOff x="0" y="0"/>
+          <a:chExt cx="0" cy="0"/>
+        </a:xfrm>
+      </p:grpSpPr>
+      <p:sp>
+        <p:nvSpPr>
+          <p:cNvPr id="2" name="슬라이드 이미지 개체 틀 1">
+            <a:extLst>
+              <a:ext uri="{FF2B5EF4-FFF2-40B4-BE49-F238E27FC236}">
+                <a16:creationId xmlns:a16="http://schemas.microsoft.com/office/drawing/2014/main" id="{90A40E47-9B92-D965-8727-73000D39FB51}"/>
+              </a:ext>
+            </a:extLst>
+          </p:cNvPr>
+          <p:cNvSpPr>
+            <a:spLocks noGrp="1" noRot="1" noChangeAspect="1"/>
+          </p:cNvSpPr>
+          <p:nvPr>
+            <p:ph type="sldImg"/>
+          </p:nvPr>
+        </p:nvSpPr>
+        <p:spPr/>
+      </p:sp>
+      <p:sp>
+        <p:nvSpPr>
+          <p:cNvPr id="3" name="슬라이드 노트 개체 틀 2">
+            <a:extLst>
+              <a:ext uri="{FF2B5EF4-FFF2-40B4-BE49-F238E27FC236}">
+                <a16:creationId xmlns:a16="http://schemas.microsoft.com/office/drawing/2014/main" id="{52CB2D76-B0AD-63C2-9BD2-9C6336B8238E}"/>
+              </a:ext>
+            </a:extLst>
+          </p:cNvPr>
+          <p:cNvSpPr>
+            <a:spLocks noGrp="1"/>
+          </p:cNvSpPr>
+          <p:nvPr>
+            <p:ph type="body" idx="1"/>
+          </p:nvPr>
+        </p:nvSpPr>
+        <p:spPr/>
+        <p:txBody>
+          <a:bodyPr/>
+          <a:lstStyle/>
+          <a:p>
+            <a:endParaRPr lang="ko-KR" altLang="en-US">
+              <a:latin typeface="맑은 고딕" panose="020B0503020000020004" pitchFamily="50" charset="-127"/>
+              <a:ea typeface="맑은 고딕" panose="020B0503020000020004" pitchFamily="50" charset="-127"/>
+            </a:endParaRPr>
+          </a:p>
+        </p:txBody>
+      </p:sp>
+      <p:sp>
+        <p:nvSpPr>
+          <p:cNvPr id="4" name="슬라이드 번호 개체 틀 3">
+            <a:extLst>
+              <a:ext uri="{FF2B5EF4-FFF2-40B4-BE49-F238E27FC236}">
+                <a16:creationId xmlns:a16="http://schemas.microsoft.com/office/drawing/2014/main" id="{D1C8F975-6A69-B4D1-6987-00918D0CC35C}"/>
+              </a:ext>
+            </a:extLst>
+          </p:cNvPr>
+          <p:cNvSpPr>
+            <a:spLocks noGrp="1"/>
+          </p:cNvSpPr>
+          <p:nvPr>
+            <p:ph type="sldNum" sz="quarter" idx="5"/>
+          </p:nvPr>
+        </p:nvSpPr>
+        <p:spPr/>
+        <p:txBody>
+          <a:bodyPr/>
+          <a:lstStyle/>
+          <a:p>
+            <a:pPr rtl="0"/>
+            <a:fld id="{DF61EA0F-A667-4B49-8422-0062BC55E249}" type="slidenum">
+              <a:rPr lang="en-US" altLang="ko-KR" smtClean="0">
+                <a:latin typeface="맑은 고딕" panose="020B0503020000020004" pitchFamily="50" charset="-127"/>
+                <a:ea typeface="맑은 고딕" panose="020B0503020000020004" pitchFamily="50" charset="-127"/>
+              </a:rPr>
+              <a:t>27</a:t>
+            </a:fld>
+            <a:endParaRPr lang="ko-KR" altLang="en-US">
+              <a:latin typeface="맑은 고딕" panose="020B0503020000020004" pitchFamily="50" charset="-127"/>
+              <a:ea typeface="맑은 고딕" panose="020B0503020000020004" pitchFamily="50" charset="-127"/>
+            </a:endParaRPr>
+          </a:p>
+        </p:txBody>
+      </p:sp>
+    </p:spTree>
+    <p:extLst>
+      <p:ext uri="{BB962C8B-B14F-4D97-AF65-F5344CB8AC3E}">
+        <p14:creationId xmlns:p14="http://schemas.microsoft.com/office/powerpoint/2010/main" val="3951859855"/>
+      </p:ext>
+    </p:extLst>
+  </p:cSld>
+  <p:clrMapOvr>
+    <a:masterClrMapping/>
+  </p:clrMapOvr>
+</p:notes>
+</file>
+
+<file path=ppt/notesSlides/notesSlide28.xml><?xml version="1.0" encoding="utf-8"?>
+<p:notes xmlns:a="http://schemas.openxmlformats.org/drawingml/2006/main" xmlns:r="http://schemas.openxmlformats.org/officeDocument/2006/relationships" xmlns:p="http://schemas.openxmlformats.org/presentationml/2006/main">
+  <p:cSld>
+    <p:spTree>
+      <p:nvGrpSpPr>
+        <p:cNvPr id="1" name="">
+          <a:extLst>
+            <a:ext uri="{FF2B5EF4-FFF2-40B4-BE49-F238E27FC236}">
+              <a16:creationId xmlns:a16="http://schemas.microsoft.com/office/drawing/2014/main" id="{E2CA2AA6-A259-DD38-A488-EBAB0A61A899}"/>
+            </a:ext>
+          </a:extLst>
+        </p:cNvPr>
+        <p:cNvGrpSpPr/>
+        <p:nvPr/>
+      </p:nvGrpSpPr>
+      <p:grpSpPr>
+        <a:xfrm>
+          <a:off x="0" y="0"/>
+          <a:ext cx="0" cy="0"/>
+          <a:chOff x="0" y="0"/>
+          <a:chExt cx="0" cy="0"/>
+        </a:xfrm>
+      </p:grpSpPr>
+      <p:sp>
+        <p:nvSpPr>
+          <p:cNvPr id="2" name="슬라이드 이미지 개체 틀 1">
+            <a:extLst>
+              <a:ext uri="{FF2B5EF4-FFF2-40B4-BE49-F238E27FC236}">
+                <a16:creationId xmlns:a16="http://schemas.microsoft.com/office/drawing/2014/main" id="{05F76AB9-41E6-7B10-8842-DE39BA46B56E}"/>
+              </a:ext>
+            </a:extLst>
+          </p:cNvPr>
+          <p:cNvSpPr>
+            <a:spLocks noGrp="1" noRot="1" noChangeAspect="1"/>
+          </p:cNvSpPr>
+          <p:nvPr>
+            <p:ph type="sldImg"/>
+          </p:nvPr>
+        </p:nvSpPr>
+        <p:spPr/>
+      </p:sp>
+      <p:sp>
+        <p:nvSpPr>
+          <p:cNvPr id="3" name="슬라이드 노트 개체 틀 2">
+            <a:extLst>
+              <a:ext uri="{FF2B5EF4-FFF2-40B4-BE49-F238E27FC236}">
+                <a16:creationId xmlns:a16="http://schemas.microsoft.com/office/drawing/2014/main" id="{3007FEA3-D444-EB0D-6A27-0465CBCA15F8}"/>
+              </a:ext>
+            </a:extLst>
+          </p:cNvPr>
+          <p:cNvSpPr>
+            <a:spLocks noGrp="1"/>
+          </p:cNvSpPr>
+          <p:nvPr>
+            <p:ph type="body" idx="1"/>
+          </p:nvPr>
+        </p:nvSpPr>
+        <p:spPr/>
+        <p:txBody>
+          <a:bodyPr/>
+          <a:lstStyle/>
+          <a:p>
+            <a:endParaRPr lang="ko-KR" altLang="en-US">
+              <a:latin typeface="맑은 고딕" panose="020B0503020000020004" pitchFamily="50" charset="-127"/>
+              <a:ea typeface="맑은 고딕" panose="020B0503020000020004" pitchFamily="50" charset="-127"/>
+            </a:endParaRPr>
+          </a:p>
+        </p:txBody>
+      </p:sp>
+      <p:sp>
+        <p:nvSpPr>
+          <p:cNvPr id="4" name="슬라이드 번호 개체 틀 3">
+            <a:extLst>
+              <a:ext uri="{FF2B5EF4-FFF2-40B4-BE49-F238E27FC236}">
+                <a16:creationId xmlns:a16="http://schemas.microsoft.com/office/drawing/2014/main" id="{93C6D1A2-AD66-0DF6-461E-EEE48BDD2A41}"/>
+              </a:ext>
+            </a:extLst>
+          </p:cNvPr>
+          <p:cNvSpPr>
+            <a:spLocks noGrp="1"/>
+          </p:cNvSpPr>
+          <p:nvPr>
+            <p:ph type="sldNum" sz="quarter" idx="5"/>
+          </p:nvPr>
+        </p:nvSpPr>
+        <p:spPr/>
+        <p:txBody>
+          <a:bodyPr/>
+          <a:lstStyle/>
+          <a:p>
+            <a:pPr rtl="0"/>
+            <a:fld id="{DF61EA0F-A667-4B49-8422-0062BC55E249}" type="slidenum">
+              <a:rPr lang="en-US" altLang="ko-KR" smtClean="0">
+                <a:latin typeface="맑은 고딕" panose="020B0503020000020004" pitchFamily="50" charset="-127"/>
+                <a:ea typeface="맑은 고딕" panose="020B0503020000020004" pitchFamily="50" charset="-127"/>
+              </a:rPr>
+              <a:t>28</a:t>
+            </a:fld>
+            <a:endParaRPr lang="ko-KR" altLang="en-US">
+              <a:latin typeface="맑은 고딕" panose="020B0503020000020004" pitchFamily="50" charset="-127"/>
+              <a:ea typeface="맑은 고딕" panose="020B0503020000020004" pitchFamily="50" charset="-127"/>
+            </a:endParaRPr>
+          </a:p>
+        </p:txBody>
+      </p:sp>
+    </p:spTree>
+    <p:extLst>
+      <p:ext uri="{BB962C8B-B14F-4D97-AF65-F5344CB8AC3E}">
+        <p14:creationId xmlns:p14="http://schemas.microsoft.com/office/powerpoint/2010/main" val="2194864028"/>
+      </p:ext>
+    </p:extLst>
+  </p:cSld>
+  <p:clrMapOvr>
+    <a:masterClrMapping/>
+  </p:clrMapOvr>
+</p:notes>
+</file>
+
 <file path=ppt/notesSlides/notesSlide3.xml><?xml version="1.0" encoding="utf-8"?>
 <p:notes xmlns:a="http://schemas.openxmlformats.org/drawingml/2006/main" xmlns:r="http://schemas.openxmlformats.org/officeDocument/2006/relationships" xmlns:p="http://schemas.openxmlformats.org/presentationml/2006/main">
   <p:cSld>
@@ -4278,7 +4518,7 @@
           <a:p>
             <a:fld id="{990475B5-67CA-4281-BDCA-DA943C3C8EB3}" type="datetime1">
               <a:rPr lang="ko-KR" altLang="en-US" noProof="0" smtClean="0"/>
-              <a:t>2026-06-03</a:t>
+              <a:t>2026-06-04</a:t>
             </a:fld>
             <a:endParaRPr lang="ko-KR" altLang="en-US" noProof="0"/>
           </a:p>
@@ -4935,7 +5175,7 @@
           <a:p>
             <a:fld id="{C655C81E-72E7-4D05-94B5-F45B321A525D}" type="datetime1">
               <a:rPr lang="ko-KR" altLang="en-US" noProof="0" smtClean="0"/>
-              <a:t>2026-06-03</a:t>
+              <a:t>2026-06-04</a:t>
             </a:fld>
             <a:endParaRPr lang="ko-KR" altLang="en-US" noProof="0" dirty="0">
               <a:latin typeface="맑은 고딕" panose="020B0503020000020004" pitchFamily="50" charset="-127"/>
@@ -16354,6 +16594,1851 @@
     <p:extLst>
       <p:ext uri="{BB962C8B-B14F-4D97-AF65-F5344CB8AC3E}">
         <p14:creationId xmlns:p14="http://schemas.microsoft.com/office/powerpoint/2010/main" val="579738356"/>
+      </p:ext>
+    </p:extLst>
+  </p:cSld>
+  <p:clrMapOvr>
+    <a:masterClrMapping/>
+  </p:clrMapOvr>
+  <mc:AlternateContent xmlns:mc="http://schemas.openxmlformats.org/markup-compatibility/2006" xmlns:p14="http://schemas.microsoft.com/office/powerpoint/2010/main">
+    <mc:Choice Requires="p14">
+      <p:transition p14:dur="10"/>
+    </mc:Choice>
+    <mc:Fallback xmlns="">
+      <p:transition/>
+    </mc:Fallback>
+  </mc:AlternateContent>
+</p:sld>
+</file>
+
+<file path=ppt/slides/slide27.xml><?xml version="1.0" encoding="utf-8"?>
+<p:sld xmlns:a="http://schemas.openxmlformats.org/drawingml/2006/main" xmlns:r="http://schemas.openxmlformats.org/officeDocument/2006/relationships" xmlns:p="http://schemas.openxmlformats.org/presentationml/2006/main">
+  <p:cSld>
+    <p:spTree>
+      <p:nvGrpSpPr>
+        <p:cNvPr id="1" name="">
+          <a:extLst>
+            <a:ext uri="{FF2B5EF4-FFF2-40B4-BE49-F238E27FC236}">
+              <a16:creationId xmlns:a16="http://schemas.microsoft.com/office/drawing/2014/main" id="{8AA390C4-14F6-FB87-40FE-629918C4C2BA}"/>
+            </a:ext>
+          </a:extLst>
+        </p:cNvPr>
+        <p:cNvGrpSpPr/>
+        <p:nvPr/>
+      </p:nvGrpSpPr>
+      <p:grpSpPr>
+        <a:xfrm>
+          <a:off x="0" y="0"/>
+          <a:ext cx="0" cy="0"/>
+          <a:chOff x="0" y="0"/>
+          <a:chExt cx="0" cy="0"/>
+        </a:xfrm>
+      </p:grpSpPr>
+      <p:sp>
+        <p:nvSpPr>
+          <p:cNvPr id="8" name="제목 7">
+            <a:extLst>
+              <a:ext uri="{FF2B5EF4-FFF2-40B4-BE49-F238E27FC236}">
+                <a16:creationId xmlns:a16="http://schemas.microsoft.com/office/drawing/2014/main" id="{024319DD-9CE3-D91F-DAA5-246904ADF298}"/>
+              </a:ext>
+            </a:extLst>
+          </p:cNvPr>
+          <p:cNvSpPr>
+            <a:spLocks noGrp="1"/>
+          </p:cNvSpPr>
+          <p:nvPr>
+            <p:ph type="title"/>
+          </p:nvPr>
+        </p:nvSpPr>
+        <p:spPr>
+          <a:xfrm>
+            <a:off x="521207" y="448056"/>
+            <a:ext cx="9727693" cy="640080"/>
+          </a:xfrm>
+        </p:spPr>
+        <p:txBody>
+          <a:bodyPr rtlCol="0">
+            <a:noAutofit/>
+          </a:bodyPr>
+          <a:lstStyle/>
+          <a:p>
+            <a:r>
+              <a:rPr lang="ko-KR" altLang="en-US" dirty="0">
+                <a:cs typeface="Segoe UI Light" panose="020B0502040204020203" pitchFamily="34" charset="0"/>
+              </a:rPr>
+              <a:t>토픽 모델링</a:t>
+            </a:r>
+            <a:r>
+              <a:rPr lang="en-US" altLang="ko-KR" dirty="0">
+                <a:cs typeface="Segoe UI Light" panose="020B0502040204020203" pitchFamily="34" charset="0"/>
+              </a:rPr>
+              <a:t>(Topic Modeling)</a:t>
+            </a:r>
+            <a:r>
+              <a:rPr lang="ko-KR" altLang="en-US" dirty="0">
+                <a:cs typeface="Segoe UI Light" panose="020B0502040204020203" pitchFamily="34" charset="0"/>
+              </a:rPr>
+              <a:t> </a:t>
+            </a:r>
+            <a:r>
+              <a:rPr lang="en-US" altLang="ko-KR" dirty="0">
+                <a:cs typeface="Segoe UI Light" panose="020B0502040204020203" pitchFamily="34" charset="0"/>
+              </a:rPr>
+              <a:t>Tasks</a:t>
+            </a:r>
+            <a:endParaRPr lang="ko-KR" altLang="en-US" dirty="0">
+              <a:cs typeface="Segoe UI Light" panose="020B0502040204020203" pitchFamily="34" charset="0"/>
+            </a:endParaRPr>
+          </a:p>
+        </p:txBody>
+      </p:sp>
+      <p:sp>
+        <p:nvSpPr>
+          <p:cNvPr id="12" name="슬라이드 번호 개체 틀 11">
+            <a:extLst>
+              <a:ext uri="{FF2B5EF4-FFF2-40B4-BE49-F238E27FC236}">
+                <a16:creationId xmlns:a16="http://schemas.microsoft.com/office/drawing/2014/main" id="{86F283BD-6908-7E72-6616-B56A21E11AC6}"/>
+              </a:ext>
+            </a:extLst>
+          </p:cNvPr>
+          <p:cNvSpPr>
+            <a:spLocks noGrp="1"/>
+          </p:cNvSpPr>
+          <p:nvPr>
+            <p:ph type="sldNum" sz="quarter" idx="4"/>
+          </p:nvPr>
+        </p:nvSpPr>
+        <p:spPr/>
+        <p:txBody>
+          <a:bodyPr/>
+          <a:lstStyle/>
+          <a:p>
+            <a:fld id="{9860EDB8-5305-433F-BE41-D7A86D811DB3}" type="slidenum">
+              <a:rPr lang="en-US" altLang="ko-KR" noProof="0" smtClean="0"/>
+              <a:pPr/>
+              <a:t>27</a:t>
+            </a:fld>
+            <a:endParaRPr lang="ko-KR" altLang="en-US" noProof="0"/>
+          </a:p>
+        </p:txBody>
+      </p:sp>
+      <p:pic>
+        <p:nvPicPr>
+          <p:cNvPr id="2" name="그림 1" descr="문자 메시지">
+            <a:extLst>
+              <a:ext uri="{FF2B5EF4-FFF2-40B4-BE49-F238E27FC236}">
+                <a16:creationId xmlns:a16="http://schemas.microsoft.com/office/drawing/2014/main" id="{04B6255F-E59F-E68B-8A50-CA49EFEEC6E2}"/>
+              </a:ext>
+            </a:extLst>
+          </p:cNvPr>
+          <p:cNvPicPr>
+            <a:picLocks noChangeAspect="1"/>
+          </p:cNvPicPr>
+          <p:nvPr/>
+        </p:nvPicPr>
+        <p:blipFill>
+          <a:blip r:embed="rId3"/>
+          <a:stretch>
+            <a:fillRect/>
+          </a:stretch>
+        </p:blipFill>
+        <p:spPr>
+          <a:xfrm>
+            <a:off x="10668000" y="109220"/>
+            <a:ext cx="1397000" cy="1047750"/>
+          </a:xfrm>
+          <a:prstGeom prst="rect">
+            <a:avLst/>
+          </a:prstGeom>
+        </p:spPr>
+      </p:pic>
+      <p:sp>
+        <p:nvSpPr>
+          <p:cNvPr id="5" name="TextBox 4">
+            <a:extLst>
+              <a:ext uri="{FF2B5EF4-FFF2-40B4-BE49-F238E27FC236}">
+                <a16:creationId xmlns:a16="http://schemas.microsoft.com/office/drawing/2014/main" id="{104CC7BC-A1BB-1C4A-CB52-2F70948C9681}"/>
+              </a:ext>
+            </a:extLst>
+          </p:cNvPr>
+          <p:cNvSpPr txBox="1"/>
+          <p:nvPr/>
+        </p:nvSpPr>
+        <p:spPr>
+          <a:xfrm>
+            <a:off x="648207" y="3074347"/>
+            <a:ext cx="4887508" cy="2964914"/>
+          </a:xfrm>
+          <a:prstGeom prst="rect">
+            <a:avLst/>
+          </a:prstGeom>
+          <a:solidFill>
+            <a:srgbClr val="76E3FF"/>
+          </a:solidFill>
+        </p:spPr>
+        <p:txBody>
+          <a:bodyPr wrap="square">
+            <a:spAutoFit/>
+          </a:bodyPr>
+          <a:lstStyle/>
+          <a:p>
+            <a:pPr>
+              <a:lnSpc>
+                <a:spcPts val="1575"/>
+              </a:lnSpc>
+              <a:buNone/>
+            </a:pPr>
+            <a:r>
+              <a:rPr lang="ko-KR" altLang="ko-KR" sz="1400" dirty="0" err="1">
+                <a:latin typeface="D2Coding" panose="020B0609020101020101" pitchFamily="49" charset="-127"/>
+                <a:ea typeface="D2Coding" panose="020B0609020101020101" pitchFamily="49" charset="-127"/>
+              </a:rPr>
+              <a:t>from</a:t>
+            </a:r>
+            <a:r>
+              <a:rPr lang="ko-KR" altLang="ko-KR" sz="1400" dirty="0">
+                <a:latin typeface="D2Coding" panose="020B0609020101020101" pitchFamily="49" charset="-127"/>
+                <a:ea typeface="D2Coding" panose="020B0609020101020101" pitchFamily="49" charset="-127"/>
+              </a:rPr>
+              <a:t> </a:t>
+            </a:r>
+            <a:r>
+              <a:rPr lang="ko-KR" altLang="ko-KR" sz="1400" dirty="0" err="1">
+                <a:latin typeface="D2Coding" panose="020B0609020101020101" pitchFamily="49" charset="-127"/>
+                <a:ea typeface="D2Coding" panose="020B0609020101020101" pitchFamily="49" charset="-127"/>
+              </a:rPr>
+              <a:t>sklearn.datasets</a:t>
+            </a:r>
+            <a:r>
+              <a:rPr lang="ko-KR" altLang="ko-KR" sz="1400" dirty="0">
+                <a:latin typeface="D2Coding" panose="020B0609020101020101" pitchFamily="49" charset="-127"/>
+                <a:ea typeface="D2Coding" panose="020B0609020101020101" pitchFamily="49" charset="-127"/>
+              </a:rPr>
+              <a:t> </a:t>
+            </a:r>
+            <a:r>
+              <a:rPr lang="ko-KR" altLang="ko-KR" sz="1400" dirty="0" err="1">
+                <a:latin typeface="D2Coding" panose="020B0609020101020101" pitchFamily="49" charset="-127"/>
+                <a:ea typeface="D2Coding" panose="020B0609020101020101" pitchFamily="49" charset="-127"/>
+              </a:rPr>
+              <a:t>import</a:t>
+            </a:r>
+            <a:r>
+              <a:rPr lang="ko-KR" altLang="ko-KR" sz="1400" dirty="0">
+                <a:latin typeface="D2Coding" panose="020B0609020101020101" pitchFamily="49" charset="-127"/>
+                <a:ea typeface="D2Coding" panose="020B0609020101020101" pitchFamily="49" charset="-127"/>
+              </a:rPr>
+              <a:t> fetch_20newsgroups</a:t>
+            </a:r>
+          </a:p>
+          <a:p>
+            <a:pPr>
+              <a:lnSpc>
+                <a:spcPts val="1575"/>
+              </a:lnSpc>
+              <a:buNone/>
+            </a:pPr>
+            <a:br>
+              <a:rPr lang="ko-KR" altLang="ko-KR" sz="1400" dirty="0">
+                <a:latin typeface="D2Coding" panose="020B0609020101020101" pitchFamily="49" charset="-127"/>
+                <a:ea typeface="D2Coding" panose="020B0609020101020101" pitchFamily="49" charset="-127"/>
+              </a:rPr>
+            </a:br>
+            <a:r>
+              <a:rPr lang="ko-KR" altLang="ko-KR" sz="1400" dirty="0" err="1">
+                <a:latin typeface="D2Coding" panose="020B0609020101020101" pitchFamily="49" charset="-127"/>
+                <a:ea typeface="D2Coding" panose="020B0609020101020101" pitchFamily="49" charset="-127"/>
+              </a:rPr>
+              <a:t>categories</a:t>
+            </a:r>
+            <a:r>
+              <a:rPr lang="ko-KR" altLang="ko-KR" sz="1400" dirty="0">
+                <a:latin typeface="D2Coding" panose="020B0609020101020101" pitchFamily="49" charset="-127"/>
+                <a:ea typeface="D2Coding" panose="020B0609020101020101" pitchFamily="49" charset="-127"/>
+              </a:rPr>
+              <a:t> = [</a:t>
+            </a:r>
+          </a:p>
+          <a:p>
+            <a:pPr>
+              <a:lnSpc>
+                <a:spcPts val="1575"/>
+              </a:lnSpc>
+              <a:buNone/>
+            </a:pPr>
+            <a:r>
+              <a:rPr lang="ko-KR" altLang="ko-KR" sz="1400" dirty="0">
+                <a:latin typeface="D2Coding" panose="020B0609020101020101" pitchFamily="49" charset="-127"/>
+                <a:ea typeface="D2Coding" panose="020B0609020101020101" pitchFamily="49" charset="-127"/>
+              </a:rPr>
+              <a:t>    '</a:t>
+            </a:r>
+            <a:r>
+              <a:rPr lang="ko-KR" altLang="ko-KR" sz="1400" dirty="0" err="1">
+                <a:latin typeface="D2Coding" panose="020B0609020101020101" pitchFamily="49" charset="-127"/>
+                <a:ea typeface="D2Coding" panose="020B0609020101020101" pitchFamily="49" charset="-127"/>
+              </a:rPr>
+              <a:t>sci.space</a:t>
+            </a:r>
+            <a:r>
+              <a:rPr lang="ko-KR" altLang="ko-KR" sz="1400" dirty="0">
+                <a:latin typeface="D2Coding" panose="020B0609020101020101" pitchFamily="49" charset="-127"/>
+                <a:ea typeface="D2Coding" panose="020B0609020101020101" pitchFamily="49" charset="-127"/>
+              </a:rPr>
+              <a:t>',</a:t>
+            </a:r>
+          </a:p>
+          <a:p>
+            <a:pPr>
+              <a:lnSpc>
+                <a:spcPts val="1575"/>
+              </a:lnSpc>
+              <a:buNone/>
+            </a:pPr>
+            <a:r>
+              <a:rPr lang="ko-KR" altLang="ko-KR" sz="1400" dirty="0">
+                <a:latin typeface="D2Coding" panose="020B0609020101020101" pitchFamily="49" charset="-127"/>
+                <a:ea typeface="D2Coding" panose="020B0609020101020101" pitchFamily="49" charset="-127"/>
+              </a:rPr>
+              <a:t>    '</a:t>
+            </a:r>
+            <a:r>
+              <a:rPr lang="ko-KR" altLang="ko-KR" sz="1400" dirty="0" err="1">
+                <a:latin typeface="D2Coding" panose="020B0609020101020101" pitchFamily="49" charset="-127"/>
+                <a:ea typeface="D2Coding" panose="020B0609020101020101" pitchFamily="49" charset="-127"/>
+              </a:rPr>
+              <a:t>rec.sport.baseball</a:t>
+            </a:r>
+            <a:r>
+              <a:rPr lang="ko-KR" altLang="ko-KR" sz="1400" dirty="0">
+                <a:latin typeface="D2Coding" panose="020B0609020101020101" pitchFamily="49" charset="-127"/>
+                <a:ea typeface="D2Coding" panose="020B0609020101020101" pitchFamily="49" charset="-127"/>
+              </a:rPr>
+              <a:t>',</a:t>
+            </a:r>
+          </a:p>
+          <a:p>
+            <a:pPr>
+              <a:lnSpc>
+                <a:spcPts val="1575"/>
+              </a:lnSpc>
+              <a:buNone/>
+            </a:pPr>
+            <a:r>
+              <a:rPr lang="ko-KR" altLang="ko-KR" sz="1400" dirty="0">
+                <a:latin typeface="D2Coding" panose="020B0609020101020101" pitchFamily="49" charset="-127"/>
+                <a:ea typeface="D2Coding" panose="020B0609020101020101" pitchFamily="49" charset="-127"/>
+              </a:rPr>
+              <a:t>    '</a:t>
+            </a:r>
+            <a:r>
+              <a:rPr lang="ko-KR" altLang="ko-KR" sz="1400" dirty="0" err="1">
+                <a:latin typeface="D2Coding" panose="020B0609020101020101" pitchFamily="49" charset="-127"/>
+                <a:ea typeface="D2Coding" panose="020B0609020101020101" pitchFamily="49" charset="-127"/>
+              </a:rPr>
+              <a:t>comp.graphics</a:t>
+            </a:r>
+            <a:r>
+              <a:rPr lang="ko-KR" altLang="ko-KR" sz="1400" dirty="0">
+                <a:latin typeface="D2Coding" panose="020B0609020101020101" pitchFamily="49" charset="-127"/>
+                <a:ea typeface="D2Coding" panose="020B0609020101020101" pitchFamily="49" charset="-127"/>
+              </a:rPr>
+              <a:t>',</a:t>
+            </a:r>
+          </a:p>
+          <a:p>
+            <a:pPr>
+              <a:lnSpc>
+                <a:spcPts val="1575"/>
+              </a:lnSpc>
+              <a:buNone/>
+            </a:pPr>
+            <a:r>
+              <a:rPr lang="ko-KR" altLang="ko-KR" sz="1400" dirty="0">
+                <a:latin typeface="D2Coding" panose="020B0609020101020101" pitchFamily="49" charset="-127"/>
+                <a:ea typeface="D2Coding" panose="020B0609020101020101" pitchFamily="49" charset="-127"/>
+              </a:rPr>
+              <a:t>    '</a:t>
+            </a:r>
+            <a:r>
+              <a:rPr lang="ko-KR" altLang="ko-KR" sz="1400" dirty="0" err="1">
+                <a:latin typeface="D2Coding" panose="020B0609020101020101" pitchFamily="49" charset="-127"/>
+                <a:ea typeface="D2Coding" panose="020B0609020101020101" pitchFamily="49" charset="-127"/>
+              </a:rPr>
+              <a:t>talk.politics.misc</a:t>
+            </a:r>
+            <a:r>
+              <a:rPr lang="ko-KR" altLang="ko-KR" sz="1400" dirty="0">
+                <a:latin typeface="D2Coding" panose="020B0609020101020101" pitchFamily="49" charset="-127"/>
+                <a:ea typeface="D2Coding" panose="020B0609020101020101" pitchFamily="49" charset="-127"/>
+              </a:rPr>
+              <a:t>'</a:t>
+            </a:r>
+          </a:p>
+          <a:p>
+            <a:pPr>
+              <a:lnSpc>
+                <a:spcPts val="1575"/>
+              </a:lnSpc>
+              <a:buNone/>
+            </a:pPr>
+            <a:r>
+              <a:rPr lang="ko-KR" altLang="ko-KR" sz="1400" dirty="0">
+                <a:latin typeface="D2Coding" panose="020B0609020101020101" pitchFamily="49" charset="-127"/>
+                <a:ea typeface="D2Coding" panose="020B0609020101020101" pitchFamily="49" charset="-127"/>
+              </a:rPr>
+              <a:t>]</a:t>
+            </a:r>
+          </a:p>
+          <a:p>
+            <a:pPr>
+              <a:lnSpc>
+                <a:spcPts val="1575"/>
+              </a:lnSpc>
+              <a:buNone/>
+            </a:pPr>
+            <a:r>
+              <a:rPr lang="ko-KR" altLang="ko-KR" sz="1400" dirty="0" err="1">
+                <a:latin typeface="D2Coding" panose="020B0609020101020101" pitchFamily="49" charset="-127"/>
+                <a:ea typeface="D2Coding" panose="020B0609020101020101" pitchFamily="49" charset="-127"/>
+              </a:rPr>
+              <a:t>news</a:t>
+            </a:r>
+            <a:r>
+              <a:rPr lang="ko-KR" altLang="ko-KR" sz="1400" dirty="0">
+                <a:latin typeface="D2Coding" panose="020B0609020101020101" pitchFamily="49" charset="-127"/>
+                <a:ea typeface="D2Coding" panose="020B0609020101020101" pitchFamily="49" charset="-127"/>
+              </a:rPr>
+              <a:t> = fetch_20newsgroups(</a:t>
+            </a:r>
+          </a:p>
+          <a:p>
+            <a:pPr>
+              <a:lnSpc>
+                <a:spcPts val="1575"/>
+              </a:lnSpc>
+              <a:buNone/>
+            </a:pPr>
+            <a:r>
+              <a:rPr lang="ko-KR" altLang="ko-KR" sz="1400" dirty="0">
+                <a:latin typeface="D2Coding" panose="020B0609020101020101" pitchFamily="49" charset="-127"/>
+                <a:ea typeface="D2Coding" panose="020B0609020101020101" pitchFamily="49" charset="-127"/>
+              </a:rPr>
+              <a:t>    </a:t>
+            </a:r>
+            <a:r>
+              <a:rPr lang="ko-KR" altLang="ko-KR" sz="1400" dirty="0" err="1">
+                <a:latin typeface="D2Coding" panose="020B0609020101020101" pitchFamily="49" charset="-127"/>
+                <a:ea typeface="D2Coding" panose="020B0609020101020101" pitchFamily="49" charset="-127"/>
+              </a:rPr>
+              <a:t>subset</a:t>
+            </a:r>
+            <a:r>
+              <a:rPr lang="ko-KR" altLang="ko-KR" sz="1400" dirty="0">
+                <a:latin typeface="D2Coding" panose="020B0609020101020101" pitchFamily="49" charset="-127"/>
+                <a:ea typeface="D2Coding" panose="020B0609020101020101" pitchFamily="49" charset="-127"/>
+              </a:rPr>
+              <a:t>='</a:t>
+            </a:r>
+            <a:r>
+              <a:rPr lang="ko-KR" altLang="ko-KR" sz="1400" dirty="0" err="1">
+                <a:latin typeface="D2Coding" panose="020B0609020101020101" pitchFamily="49" charset="-127"/>
+                <a:ea typeface="D2Coding" panose="020B0609020101020101" pitchFamily="49" charset="-127"/>
+              </a:rPr>
+              <a:t>all</a:t>
+            </a:r>
+            <a:r>
+              <a:rPr lang="ko-KR" altLang="ko-KR" sz="1400" dirty="0">
+                <a:latin typeface="D2Coding" panose="020B0609020101020101" pitchFamily="49" charset="-127"/>
+                <a:ea typeface="D2Coding" panose="020B0609020101020101" pitchFamily="49" charset="-127"/>
+              </a:rPr>
+              <a:t>',</a:t>
+            </a:r>
+          </a:p>
+          <a:p>
+            <a:pPr>
+              <a:lnSpc>
+                <a:spcPts val="1575"/>
+              </a:lnSpc>
+              <a:buNone/>
+            </a:pPr>
+            <a:r>
+              <a:rPr lang="ko-KR" altLang="ko-KR" sz="1400" dirty="0">
+                <a:latin typeface="D2Coding" panose="020B0609020101020101" pitchFamily="49" charset="-127"/>
+                <a:ea typeface="D2Coding" panose="020B0609020101020101" pitchFamily="49" charset="-127"/>
+              </a:rPr>
+              <a:t>    </a:t>
+            </a:r>
+            <a:r>
+              <a:rPr lang="ko-KR" altLang="ko-KR" sz="1400" dirty="0" err="1">
+                <a:latin typeface="D2Coding" panose="020B0609020101020101" pitchFamily="49" charset="-127"/>
+                <a:ea typeface="D2Coding" panose="020B0609020101020101" pitchFamily="49" charset="-127"/>
+              </a:rPr>
+              <a:t>categories</a:t>
+            </a:r>
+            <a:r>
+              <a:rPr lang="ko-KR" altLang="ko-KR" sz="1400" dirty="0">
+                <a:latin typeface="D2Coding" panose="020B0609020101020101" pitchFamily="49" charset="-127"/>
+                <a:ea typeface="D2Coding" panose="020B0609020101020101" pitchFamily="49" charset="-127"/>
+              </a:rPr>
+              <a:t>=</a:t>
+            </a:r>
+            <a:r>
+              <a:rPr lang="ko-KR" altLang="ko-KR" sz="1400" dirty="0" err="1">
+                <a:latin typeface="D2Coding" panose="020B0609020101020101" pitchFamily="49" charset="-127"/>
+                <a:ea typeface="D2Coding" panose="020B0609020101020101" pitchFamily="49" charset="-127"/>
+              </a:rPr>
+              <a:t>categories</a:t>
+            </a:r>
+            <a:r>
+              <a:rPr lang="ko-KR" altLang="ko-KR" sz="1400" dirty="0">
+                <a:latin typeface="D2Coding" panose="020B0609020101020101" pitchFamily="49" charset="-127"/>
+                <a:ea typeface="D2Coding" panose="020B0609020101020101" pitchFamily="49" charset="-127"/>
+              </a:rPr>
+              <a:t>,</a:t>
+            </a:r>
+          </a:p>
+          <a:p>
+            <a:pPr>
+              <a:lnSpc>
+                <a:spcPts val="1575"/>
+              </a:lnSpc>
+              <a:buNone/>
+            </a:pPr>
+            <a:r>
+              <a:rPr lang="ko-KR" altLang="ko-KR" sz="1400" dirty="0">
+                <a:latin typeface="D2Coding" panose="020B0609020101020101" pitchFamily="49" charset="-127"/>
+                <a:ea typeface="D2Coding" panose="020B0609020101020101" pitchFamily="49" charset="-127"/>
+              </a:rPr>
+              <a:t>    </a:t>
+            </a:r>
+            <a:r>
+              <a:rPr lang="ko-KR" altLang="ko-KR" sz="1400" dirty="0" err="1">
+                <a:latin typeface="D2Coding" panose="020B0609020101020101" pitchFamily="49" charset="-127"/>
+                <a:ea typeface="D2Coding" panose="020B0609020101020101" pitchFamily="49" charset="-127"/>
+              </a:rPr>
+              <a:t>remove</a:t>
+            </a:r>
+            <a:r>
+              <a:rPr lang="ko-KR" altLang="ko-KR" sz="1400" dirty="0">
+                <a:latin typeface="D2Coding" panose="020B0609020101020101" pitchFamily="49" charset="-127"/>
+                <a:ea typeface="D2Coding" panose="020B0609020101020101" pitchFamily="49" charset="-127"/>
+              </a:rPr>
+              <a:t>=('</a:t>
+            </a:r>
+            <a:r>
+              <a:rPr lang="ko-KR" altLang="ko-KR" sz="1400" dirty="0" err="1">
+                <a:latin typeface="D2Coding" panose="020B0609020101020101" pitchFamily="49" charset="-127"/>
+                <a:ea typeface="D2Coding" panose="020B0609020101020101" pitchFamily="49" charset="-127"/>
+              </a:rPr>
+              <a:t>headers</a:t>
+            </a:r>
+            <a:r>
+              <a:rPr lang="ko-KR" altLang="ko-KR" sz="1400" dirty="0">
+                <a:latin typeface="D2Coding" panose="020B0609020101020101" pitchFamily="49" charset="-127"/>
+                <a:ea typeface="D2Coding" panose="020B0609020101020101" pitchFamily="49" charset="-127"/>
+              </a:rPr>
+              <a:t>', '</a:t>
+            </a:r>
+            <a:r>
+              <a:rPr lang="ko-KR" altLang="ko-KR" sz="1400" dirty="0" err="1">
+                <a:latin typeface="D2Coding" panose="020B0609020101020101" pitchFamily="49" charset="-127"/>
+                <a:ea typeface="D2Coding" panose="020B0609020101020101" pitchFamily="49" charset="-127"/>
+              </a:rPr>
+              <a:t>footers</a:t>
+            </a:r>
+            <a:r>
+              <a:rPr lang="ko-KR" altLang="ko-KR" sz="1400" dirty="0">
+                <a:latin typeface="D2Coding" panose="020B0609020101020101" pitchFamily="49" charset="-127"/>
+                <a:ea typeface="D2Coding" panose="020B0609020101020101" pitchFamily="49" charset="-127"/>
+              </a:rPr>
+              <a:t>', '</a:t>
+            </a:r>
+            <a:r>
+              <a:rPr lang="ko-KR" altLang="ko-KR" sz="1400" dirty="0" err="1">
+                <a:latin typeface="D2Coding" panose="020B0609020101020101" pitchFamily="49" charset="-127"/>
+                <a:ea typeface="D2Coding" panose="020B0609020101020101" pitchFamily="49" charset="-127"/>
+              </a:rPr>
+              <a:t>quotes</a:t>
+            </a:r>
+            <a:r>
+              <a:rPr lang="ko-KR" altLang="ko-KR" sz="1400" dirty="0">
+                <a:latin typeface="D2Coding" panose="020B0609020101020101" pitchFamily="49" charset="-127"/>
+                <a:ea typeface="D2Coding" panose="020B0609020101020101" pitchFamily="49" charset="-127"/>
+              </a:rPr>
+              <a:t>')</a:t>
+            </a:r>
+          </a:p>
+          <a:p>
+            <a:pPr>
+              <a:lnSpc>
+                <a:spcPts val="1575"/>
+              </a:lnSpc>
+              <a:buNone/>
+            </a:pPr>
+            <a:r>
+              <a:rPr lang="ko-KR" altLang="ko-KR" sz="1400" dirty="0">
+                <a:latin typeface="D2Coding" panose="020B0609020101020101" pitchFamily="49" charset="-127"/>
+                <a:ea typeface="D2Coding" panose="020B0609020101020101" pitchFamily="49" charset="-127"/>
+              </a:rPr>
+              <a:t>)</a:t>
+            </a:r>
+          </a:p>
+          <a:p>
+            <a:pPr>
+              <a:lnSpc>
+                <a:spcPts val="1575"/>
+              </a:lnSpc>
+              <a:buNone/>
+            </a:pPr>
+            <a:r>
+              <a:rPr lang="en-US" altLang="ko-KR" sz="1400" dirty="0">
+                <a:latin typeface="D2Coding" panose="020B0609020101020101" pitchFamily="49" charset="-127"/>
+                <a:ea typeface="D2Coding" panose="020B0609020101020101" pitchFamily="49" charset="-127"/>
+              </a:rPr>
+              <a:t>corpus</a:t>
+            </a:r>
+            <a:r>
+              <a:rPr lang="ko-KR" altLang="ko-KR" sz="1400" dirty="0">
+                <a:latin typeface="D2Coding" panose="020B0609020101020101" pitchFamily="49" charset="-127"/>
+                <a:ea typeface="D2Coding" panose="020B0609020101020101" pitchFamily="49" charset="-127"/>
+              </a:rPr>
+              <a:t> = </a:t>
+            </a:r>
+            <a:r>
+              <a:rPr lang="ko-KR" altLang="ko-KR" sz="1400" dirty="0" err="1">
+                <a:latin typeface="D2Coding" panose="020B0609020101020101" pitchFamily="49" charset="-127"/>
+                <a:ea typeface="D2Coding" panose="020B0609020101020101" pitchFamily="49" charset="-127"/>
+              </a:rPr>
+              <a:t>news.data</a:t>
+            </a:r>
+            <a:endParaRPr lang="ko-KR" altLang="ko-KR" sz="1400" dirty="0">
+              <a:latin typeface="D2Coding" panose="020B0609020101020101" pitchFamily="49" charset="-127"/>
+              <a:ea typeface="D2Coding" panose="020B0609020101020101" pitchFamily="49" charset="-127"/>
+            </a:endParaRPr>
+          </a:p>
+        </p:txBody>
+      </p:sp>
+      <p:sp>
+        <p:nvSpPr>
+          <p:cNvPr id="6" name="TextBox 5">
+            <a:extLst>
+              <a:ext uri="{FF2B5EF4-FFF2-40B4-BE49-F238E27FC236}">
+                <a16:creationId xmlns:a16="http://schemas.microsoft.com/office/drawing/2014/main" id="{6DDE1382-6335-5B14-9698-6061C5986C79}"/>
+              </a:ext>
+            </a:extLst>
+          </p:cNvPr>
+          <p:cNvSpPr txBox="1"/>
+          <p:nvPr/>
+        </p:nvSpPr>
+        <p:spPr>
+          <a:xfrm>
+            <a:off x="648207" y="1282489"/>
+            <a:ext cx="11127319" cy="880819"/>
+          </a:xfrm>
+          <a:prstGeom prst="rect">
+            <a:avLst/>
+          </a:prstGeom>
+          <a:noFill/>
+        </p:spPr>
+        <p:txBody>
+          <a:bodyPr wrap="square" rtlCol="0">
+            <a:spAutoFit/>
+          </a:bodyPr>
+          <a:lstStyle/>
+          <a:p>
+            <a:pPr>
+              <a:lnSpc>
+                <a:spcPct val="150000"/>
+              </a:lnSpc>
+            </a:pPr>
+            <a:r>
+              <a:rPr lang="ko-KR" altLang="en-US" dirty="0" err="1">
+                <a:latin typeface="D2Coding" panose="020B0609020101020101" pitchFamily="49" charset="-127"/>
+                <a:ea typeface="D2Coding" panose="020B0609020101020101" pitchFamily="49" charset="-127"/>
+              </a:rPr>
+              <a:t>사이킷런</a:t>
+            </a:r>
+            <a:r>
+              <a:rPr lang="ko-KR" altLang="en-US" dirty="0">
+                <a:latin typeface="D2Coding" panose="020B0609020101020101" pitchFamily="49" charset="-127"/>
+                <a:ea typeface="D2Coding" panose="020B0609020101020101" pitchFamily="49" charset="-127"/>
+              </a:rPr>
+              <a:t> </a:t>
+            </a:r>
+            <a:r>
+              <a:rPr lang="en-US" altLang="ko-KR" dirty="0">
+                <a:latin typeface="D2Coding" panose="020B0609020101020101" pitchFamily="49" charset="-127"/>
+                <a:ea typeface="D2Coding" panose="020B0609020101020101" pitchFamily="49" charset="-127"/>
+              </a:rPr>
+              <a:t>Twenty Newsgroups</a:t>
+            </a:r>
+            <a:r>
+              <a:rPr lang="ko-KR" altLang="en-US" dirty="0">
+                <a:latin typeface="D2Coding" panose="020B0609020101020101" pitchFamily="49" charset="-127"/>
+                <a:ea typeface="D2Coding" panose="020B0609020101020101" pitchFamily="49" charset="-127"/>
+              </a:rPr>
+              <a:t>이라고 불리는 </a:t>
+            </a:r>
+            <a:r>
+              <a:rPr lang="en-US" altLang="ko-KR" dirty="0">
+                <a:latin typeface="D2Coding" panose="020B0609020101020101" pitchFamily="49" charset="-127"/>
+                <a:ea typeface="D2Coding" panose="020B0609020101020101" pitchFamily="49" charset="-127"/>
+              </a:rPr>
+              <a:t>4</a:t>
+            </a:r>
+            <a:r>
+              <a:rPr lang="ko-KR" altLang="en-US" dirty="0">
+                <a:latin typeface="D2Coding" panose="020B0609020101020101" pitchFamily="49" charset="-127"/>
+                <a:ea typeface="D2Coding" panose="020B0609020101020101" pitchFamily="49" charset="-127"/>
+              </a:rPr>
+              <a:t>개 주제를 가진 뉴스 기사를</a:t>
+            </a:r>
+            <a:r>
+              <a:rPr lang="en-US" altLang="ko-KR" dirty="0">
+                <a:latin typeface="D2Coding" panose="020B0609020101020101" pitchFamily="49" charset="-127"/>
+                <a:ea typeface="D2Coding" panose="020B0609020101020101" pitchFamily="49" charset="-127"/>
+              </a:rPr>
+              <a:t> </a:t>
+            </a:r>
+            <a:r>
+              <a:rPr lang="ko-KR" altLang="en-US" dirty="0">
+                <a:latin typeface="D2Coding" panose="020B0609020101020101" pitchFamily="49" charset="-127"/>
+                <a:ea typeface="D2Coding" panose="020B0609020101020101" pitchFamily="49" charset="-127"/>
+              </a:rPr>
+              <a:t>바탕으로 </a:t>
+            </a:r>
+            <a:r>
+              <a:rPr lang="ko-KR" altLang="en-US" dirty="0" err="1">
+                <a:latin typeface="D2Coding" panose="020B0609020101020101" pitchFamily="49" charset="-127"/>
+                <a:ea typeface="D2Coding" panose="020B0609020101020101" pitchFamily="49" charset="-127"/>
+              </a:rPr>
+              <a:t>데이터전처리</a:t>
+            </a:r>
+            <a:r>
+              <a:rPr lang="en-US" altLang="ko-KR" dirty="0">
+                <a:latin typeface="D2Coding" panose="020B0609020101020101" pitchFamily="49" charset="-127"/>
+                <a:ea typeface="D2Coding" panose="020B0609020101020101" pitchFamily="49" charset="-127"/>
+              </a:rPr>
+              <a:t>, </a:t>
+            </a:r>
+            <a:r>
+              <a:rPr lang="ko-KR" altLang="en-US" dirty="0">
+                <a:latin typeface="D2Coding" panose="020B0609020101020101" pitchFamily="49" charset="-127"/>
+                <a:ea typeface="D2Coding" panose="020B0609020101020101" pitchFamily="49" charset="-127"/>
+              </a:rPr>
+              <a:t>예측모형 생성</a:t>
+            </a:r>
+            <a:r>
+              <a:rPr lang="en-US" altLang="ko-KR" dirty="0">
+                <a:latin typeface="D2Coding" panose="020B0609020101020101" pitchFamily="49" charset="-127"/>
+                <a:ea typeface="D2Coding" panose="020B0609020101020101" pitchFamily="49" charset="-127"/>
+              </a:rPr>
+              <a:t>, </a:t>
+            </a:r>
+            <a:r>
+              <a:rPr lang="ko-KR" altLang="en-US" dirty="0">
+                <a:latin typeface="D2Coding" panose="020B0609020101020101" pitchFamily="49" charset="-127"/>
+                <a:ea typeface="D2Coding" panose="020B0609020101020101" pitchFamily="49" charset="-127"/>
+              </a:rPr>
+              <a:t>확률예상 등을 위해 아래 </a:t>
+            </a:r>
+            <a:r>
+              <a:rPr lang="en-US" altLang="ko-KR" dirty="0">
+                <a:latin typeface="D2Coding" panose="020B0609020101020101" pitchFamily="49" charset="-127"/>
+                <a:ea typeface="D2Coding" panose="020B0609020101020101" pitchFamily="49" charset="-127"/>
+              </a:rPr>
+              <a:t>3</a:t>
+            </a:r>
+            <a:r>
+              <a:rPr lang="ko-KR" altLang="en-US" dirty="0">
+                <a:latin typeface="D2Coding" panose="020B0609020101020101" pitchFamily="49" charset="-127"/>
+                <a:ea typeface="D2Coding" panose="020B0609020101020101" pitchFamily="49" charset="-127"/>
+              </a:rPr>
+              <a:t>가지 유형의 모듈을 적용하고 그 의미를 토론하자</a:t>
+            </a:r>
+          </a:p>
+        </p:txBody>
+      </p:sp>
+      <p:sp>
+        <p:nvSpPr>
+          <p:cNvPr id="9" name="TextBox 8">
+            <a:extLst>
+              <a:ext uri="{FF2B5EF4-FFF2-40B4-BE49-F238E27FC236}">
+                <a16:creationId xmlns:a16="http://schemas.microsoft.com/office/drawing/2014/main" id="{3C4622CD-24AE-9B70-7A66-EE7569ED0E73}"/>
+              </a:ext>
+            </a:extLst>
+          </p:cNvPr>
+          <p:cNvSpPr txBox="1"/>
+          <p:nvPr/>
+        </p:nvSpPr>
+        <p:spPr>
+          <a:xfrm>
+            <a:off x="6299200" y="3074347"/>
+            <a:ext cx="5552526" cy="502702"/>
+          </a:xfrm>
+          <a:prstGeom prst="rect">
+            <a:avLst/>
+          </a:prstGeom>
+          <a:solidFill>
+            <a:srgbClr val="76E3FF"/>
+          </a:solidFill>
+        </p:spPr>
+        <p:txBody>
+          <a:bodyPr wrap="square">
+            <a:spAutoFit/>
+          </a:bodyPr>
+          <a:lstStyle/>
+          <a:p>
+            <a:pPr>
+              <a:lnSpc>
+                <a:spcPts val="1575"/>
+              </a:lnSpc>
+            </a:pPr>
+            <a:r>
+              <a:rPr lang="ko-KR" altLang="ko-KR" sz="1400" dirty="0" err="1">
+                <a:latin typeface="D2Coding" panose="020B0609020101020101" pitchFamily="49" charset="-127"/>
+                <a:ea typeface="D2Coding" panose="020B0609020101020101" pitchFamily="49" charset="-127"/>
+              </a:rPr>
+              <a:t>from</a:t>
+            </a:r>
+            <a:r>
+              <a:rPr lang="ko-KR" altLang="ko-KR" sz="1400" dirty="0">
+                <a:latin typeface="D2Coding" panose="020B0609020101020101" pitchFamily="49" charset="-127"/>
+                <a:ea typeface="D2Coding" panose="020B0609020101020101" pitchFamily="49" charset="-127"/>
+              </a:rPr>
+              <a:t> </a:t>
+            </a:r>
+            <a:r>
+              <a:rPr lang="ko-KR" altLang="ko-KR" sz="1400" dirty="0" err="1">
+                <a:latin typeface="D2Coding" panose="020B0609020101020101" pitchFamily="49" charset="-127"/>
+                <a:ea typeface="D2Coding" panose="020B0609020101020101" pitchFamily="49" charset="-127"/>
+              </a:rPr>
+              <a:t>sklearn.feature_extraction.text</a:t>
+            </a:r>
+            <a:r>
+              <a:rPr lang="ko-KR" altLang="ko-KR" sz="1400" dirty="0">
+                <a:latin typeface="D2Coding" panose="020B0609020101020101" pitchFamily="49" charset="-127"/>
+                <a:ea typeface="D2Coding" panose="020B0609020101020101" pitchFamily="49" charset="-127"/>
+              </a:rPr>
+              <a:t> </a:t>
+            </a:r>
+            <a:r>
+              <a:rPr lang="ko-KR" altLang="ko-KR" sz="1400" dirty="0" err="1">
+                <a:latin typeface="D2Coding" panose="020B0609020101020101" pitchFamily="49" charset="-127"/>
+                <a:ea typeface="D2Coding" panose="020B0609020101020101" pitchFamily="49" charset="-127"/>
+              </a:rPr>
+              <a:t>import</a:t>
+            </a:r>
+            <a:r>
+              <a:rPr lang="ko-KR" altLang="ko-KR" sz="1400" dirty="0">
+                <a:latin typeface="D2Coding" panose="020B0609020101020101" pitchFamily="49" charset="-127"/>
+                <a:ea typeface="D2Coding" panose="020B0609020101020101" pitchFamily="49" charset="-127"/>
+              </a:rPr>
+              <a:t> </a:t>
+            </a:r>
+            <a:r>
+              <a:rPr lang="ko-KR" altLang="ko-KR" sz="1400" dirty="0" err="1">
+                <a:latin typeface="D2Coding" panose="020B0609020101020101" pitchFamily="49" charset="-127"/>
+                <a:ea typeface="D2Coding" panose="020B0609020101020101" pitchFamily="49" charset="-127"/>
+              </a:rPr>
+              <a:t>TfidfVectorizer</a:t>
+            </a:r>
+            <a:endParaRPr lang="ko-KR" altLang="ko-KR" sz="1400" dirty="0">
+              <a:latin typeface="D2Coding" panose="020B0609020101020101" pitchFamily="49" charset="-127"/>
+              <a:ea typeface="D2Coding" panose="020B0609020101020101" pitchFamily="49" charset="-127"/>
+            </a:endParaRPr>
+          </a:p>
+          <a:p>
+            <a:pPr>
+              <a:lnSpc>
+                <a:spcPts val="1575"/>
+              </a:lnSpc>
+            </a:pPr>
+            <a:r>
+              <a:rPr lang="ko-KR" altLang="ko-KR" sz="1400" dirty="0" err="1">
+                <a:latin typeface="D2Coding" panose="020B0609020101020101" pitchFamily="49" charset="-127"/>
+                <a:ea typeface="D2Coding" panose="020B0609020101020101" pitchFamily="49" charset="-127"/>
+              </a:rPr>
+              <a:t>from</a:t>
+            </a:r>
+            <a:r>
+              <a:rPr lang="ko-KR" altLang="ko-KR" sz="1400" dirty="0">
+                <a:latin typeface="D2Coding" panose="020B0609020101020101" pitchFamily="49" charset="-127"/>
+                <a:ea typeface="D2Coding" panose="020B0609020101020101" pitchFamily="49" charset="-127"/>
+              </a:rPr>
+              <a:t> </a:t>
+            </a:r>
+            <a:r>
+              <a:rPr lang="ko-KR" altLang="ko-KR" sz="1400" dirty="0" err="1">
+                <a:latin typeface="D2Coding" panose="020B0609020101020101" pitchFamily="49" charset="-127"/>
+                <a:ea typeface="D2Coding" panose="020B0609020101020101" pitchFamily="49" charset="-127"/>
+              </a:rPr>
+              <a:t>sklearn.decomposition</a:t>
+            </a:r>
+            <a:r>
+              <a:rPr lang="ko-KR" altLang="ko-KR" sz="1400" dirty="0">
+                <a:latin typeface="D2Coding" panose="020B0609020101020101" pitchFamily="49" charset="-127"/>
+                <a:ea typeface="D2Coding" panose="020B0609020101020101" pitchFamily="49" charset="-127"/>
+              </a:rPr>
+              <a:t> </a:t>
+            </a:r>
+            <a:r>
+              <a:rPr lang="ko-KR" altLang="ko-KR" sz="1400" dirty="0" err="1">
+                <a:latin typeface="D2Coding" panose="020B0609020101020101" pitchFamily="49" charset="-127"/>
+                <a:ea typeface="D2Coding" panose="020B0609020101020101" pitchFamily="49" charset="-127"/>
+              </a:rPr>
+              <a:t>import</a:t>
+            </a:r>
+            <a:r>
+              <a:rPr lang="ko-KR" altLang="ko-KR" sz="1400" dirty="0">
+                <a:latin typeface="D2Coding" panose="020B0609020101020101" pitchFamily="49" charset="-127"/>
+                <a:ea typeface="D2Coding" panose="020B0609020101020101" pitchFamily="49" charset="-127"/>
+              </a:rPr>
+              <a:t> </a:t>
+            </a:r>
+            <a:r>
+              <a:rPr lang="ko-KR" altLang="ko-KR" sz="1400" dirty="0" err="1">
+                <a:latin typeface="D2Coding" panose="020B0609020101020101" pitchFamily="49" charset="-127"/>
+                <a:ea typeface="D2Coding" panose="020B0609020101020101" pitchFamily="49" charset="-127"/>
+              </a:rPr>
+              <a:t>TruncatedSVD</a:t>
+            </a:r>
+            <a:endParaRPr lang="ko-KR" altLang="ko-KR" sz="1400" dirty="0">
+              <a:latin typeface="D2Coding" panose="020B0609020101020101" pitchFamily="49" charset="-127"/>
+              <a:ea typeface="D2Coding" panose="020B0609020101020101" pitchFamily="49" charset="-127"/>
+            </a:endParaRPr>
+          </a:p>
+        </p:txBody>
+      </p:sp>
+      <p:sp>
+        <p:nvSpPr>
+          <p:cNvPr id="11" name="TextBox 10">
+            <a:extLst>
+              <a:ext uri="{FF2B5EF4-FFF2-40B4-BE49-F238E27FC236}">
+                <a16:creationId xmlns:a16="http://schemas.microsoft.com/office/drawing/2014/main" id="{F459926B-980D-2D71-D86A-C4C1611B4F7F}"/>
+              </a:ext>
+            </a:extLst>
+          </p:cNvPr>
+          <p:cNvSpPr txBox="1"/>
+          <p:nvPr/>
+        </p:nvSpPr>
+        <p:spPr>
+          <a:xfrm>
+            <a:off x="6299200" y="4400384"/>
+            <a:ext cx="5552526" cy="502702"/>
+          </a:xfrm>
+          <a:prstGeom prst="rect">
+            <a:avLst/>
+          </a:prstGeom>
+          <a:solidFill>
+            <a:srgbClr val="76E3FF"/>
+          </a:solidFill>
+        </p:spPr>
+        <p:txBody>
+          <a:bodyPr wrap="square">
+            <a:spAutoFit/>
+          </a:bodyPr>
+          <a:lstStyle/>
+          <a:p>
+            <a:pPr>
+              <a:lnSpc>
+                <a:spcPts val="1575"/>
+              </a:lnSpc>
+            </a:pPr>
+            <a:r>
+              <a:rPr lang="ko-KR" altLang="ko-KR" sz="1400" dirty="0" err="1">
+                <a:latin typeface="D2Coding" panose="020B0609020101020101" pitchFamily="49" charset="-127"/>
+                <a:ea typeface="D2Coding" panose="020B0609020101020101" pitchFamily="49" charset="-127"/>
+              </a:rPr>
+              <a:t>from</a:t>
+            </a:r>
+            <a:r>
+              <a:rPr lang="ko-KR" altLang="ko-KR" sz="1400" dirty="0">
+                <a:latin typeface="D2Coding" panose="020B0609020101020101" pitchFamily="49" charset="-127"/>
+                <a:ea typeface="D2Coding" panose="020B0609020101020101" pitchFamily="49" charset="-127"/>
+              </a:rPr>
+              <a:t> </a:t>
+            </a:r>
+            <a:r>
+              <a:rPr lang="ko-KR" altLang="ko-KR" sz="1400" dirty="0" err="1">
+                <a:latin typeface="D2Coding" panose="020B0609020101020101" pitchFamily="49" charset="-127"/>
+                <a:ea typeface="D2Coding" panose="020B0609020101020101" pitchFamily="49" charset="-127"/>
+              </a:rPr>
+              <a:t>sklearn.feature_extraction.text</a:t>
+            </a:r>
+            <a:r>
+              <a:rPr lang="ko-KR" altLang="ko-KR" sz="1400" dirty="0">
+                <a:latin typeface="D2Coding" panose="020B0609020101020101" pitchFamily="49" charset="-127"/>
+                <a:ea typeface="D2Coding" panose="020B0609020101020101" pitchFamily="49" charset="-127"/>
+              </a:rPr>
+              <a:t> </a:t>
+            </a:r>
+            <a:r>
+              <a:rPr lang="ko-KR" altLang="ko-KR" sz="1400" dirty="0" err="1">
+                <a:latin typeface="D2Coding" panose="020B0609020101020101" pitchFamily="49" charset="-127"/>
+                <a:ea typeface="D2Coding" panose="020B0609020101020101" pitchFamily="49" charset="-127"/>
+              </a:rPr>
+              <a:t>import</a:t>
+            </a:r>
+            <a:r>
+              <a:rPr lang="ko-KR" altLang="ko-KR" sz="1400" dirty="0">
+                <a:latin typeface="D2Coding" panose="020B0609020101020101" pitchFamily="49" charset="-127"/>
+                <a:ea typeface="D2Coding" panose="020B0609020101020101" pitchFamily="49" charset="-127"/>
+              </a:rPr>
+              <a:t> </a:t>
+            </a:r>
+            <a:r>
+              <a:rPr lang="ko-KR" altLang="ko-KR" sz="1400" dirty="0" err="1">
+                <a:latin typeface="D2Coding" panose="020B0609020101020101" pitchFamily="49" charset="-127"/>
+                <a:ea typeface="D2Coding" panose="020B0609020101020101" pitchFamily="49" charset="-127"/>
+              </a:rPr>
+              <a:t>CountVectorizer</a:t>
+            </a:r>
+            <a:endParaRPr lang="en-US" altLang="ko-KR" sz="1400" dirty="0">
+              <a:latin typeface="D2Coding" panose="020B0609020101020101" pitchFamily="49" charset="-127"/>
+              <a:ea typeface="D2Coding" panose="020B0609020101020101" pitchFamily="49" charset="-127"/>
+            </a:endParaRPr>
+          </a:p>
+          <a:p>
+            <a:pPr>
+              <a:lnSpc>
+                <a:spcPts val="1575"/>
+              </a:lnSpc>
+            </a:pPr>
+            <a:r>
+              <a:rPr lang="ko-KR" altLang="ko-KR" sz="1400" dirty="0" err="1">
+                <a:latin typeface="D2Coding" panose="020B0609020101020101" pitchFamily="49" charset="-127"/>
+                <a:ea typeface="D2Coding" panose="020B0609020101020101" pitchFamily="49" charset="-127"/>
+              </a:rPr>
+              <a:t>from</a:t>
+            </a:r>
+            <a:r>
+              <a:rPr lang="ko-KR" altLang="ko-KR" sz="1400" dirty="0">
+                <a:latin typeface="D2Coding" panose="020B0609020101020101" pitchFamily="49" charset="-127"/>
+                <a:ea typeface="D2Coding" panose="020B0609020101020101" pitchFamily="49" charset="-127"/>
+              </a:rPr>
+              <a:t> </a:t>
+            </a:r>
+            <a:r>
+              <a:rPr lang="ko-KR" altLang="ko-KR" sz="1400" dirty="0" err="1">
+                <a:latin typeface="D2Coding" panose="020B0609020101020101" pitchFamily="49" charset="-127"/>
+                <a:ea typeface="D2Coding" panose="020B0609020101020101" pitchFamily="49" charset="-127"/>
+              </a:rPr>
+              <a:t>sklearn.decomposition</a:t>
+            </a:r>
+            <a:r>
+              <a:rPr lang="ko-KR" altLang="ko-KR" sz="1400" dirty="0">
+                <a:latin typeface="D2Coding" panose="020B0609020101020101" pitchFamily="49" charset="-127"/>
+                <a:ea typeface="D2Coding" panose="020B0609020101020101" pitchFamily="49" charset="-127"/>
+              </a:rPr>
+              <a:t> </a:t>
+            </a:r>
+            <a:r>
+              <a:rPr lang="ko-KR" altLang="ko-KR" sz="1400" dirty="0" err="1">
+                <a:latin typeface="D2Coding" panose="020B0609020101020101" pitchFamily="49" charset="-127"/>
+                <a:ea typeface="D2Coding" panose="020B0609020101020101" pitchFamily="49" charset="-127"/>
+              </a:rPr>
+              <a:t>import</a:t>
+            </a:r>
+            <a:r>
+              <a:rPr lang="ko-KR" altLang="ko-KR" sz="1400" dirty="0">
+                <a:latin typeface="D2Coding" panose="020B0609020101020101" pitchFamily="49" charset="-127"/>
+                <a:ea typeface="D2Coding" panose="020B0609020101020101" pitchFamily="49" charset="-127"/>
+              </a:rPr>
+              <a:t> </a:t>
+            </a:r>
+            <a:r>
+              <a:rPr lang="ko-KR" altLang="ko-KR" sz="1400" dirty="0" err="1">
+                <a:latin typeface="D2Coding" panose="020B0609020101020101" pitchFamily="49" charset="-127"/>
+                <a:ea typeface="D2Coding" panose="020B0609020101020101" pitchFamily="49" charset="-127"/>
+              </a:rPr>
+              <a:t>LatentDirichletAllocation</a:t>
+            </a:r>
+            <a:endParaRPr lang="ko-KR" altLang="en-US" sz="1400" dirty="0">
+              <a:latin typeface="D2Coding" panose="020B0609020101020101" pitchFamily="49" charset="-127"/>
+              <a:ea typeface="D2Coding" panose="020B0609020101020101" pitchFamily="49" charset="-127"/>
+            </a:endParaRPr>
+          </a:p>
+        </p:txBody>
+      </p:sp>
+      <p:sp>
+        <p:nvSpPr>
+          <p:cNvPr id="14" name="TextBox 13">
+            <a:extLst>
+              <a:ext uri="{FF2B5EF4-FFF2-40B4-BE49-F238E27FC236}">
+                <a16:creationId xmlns:a16="http://schemas.microsoft.com/office/drawing/2014/main" id="{45114ED3-BF52-53DE-CC63-F8FFB6A90629}"/>
+              </a:ext>
+            </a:extLst>
+          </p:cNvPr>
+          <p:cNvSpPr txBox="1"/>
+          <p:nvPr/>
+        </p:nvSpPr>
+        <p:spPr>
+          <a:xfrm>
+            <a:off x="6299200" y="5726422"/>
+            <a:ext cx="5552526" cy="307777"/>
+          </a:xfrm>
+          <a:prstGeom prst="rect">
+            <a:avLst/>
+          </a:prstGeom>
+          <a:solidFill>
+            <a:srgbClr val="76E3FF"/>
+          </a:solidFill>
+        </p:spPr>
+        <p:txBody>
+          <a:bodyPr wrap="square">
+            <a:spAutoFit/>
+          </a:bodyPr>
+          <a:lstStyle/>
+          <a:p>
+            <a:pPr rtl="0">
+              <a:buNone/>
+            </a:pPr>
+            <a:r>
+              <a:rPr lang="ko-KR" altLang="ko-KR" sz="1400" dirty="0" err="1">
+                <a:latin typeface="D2Coding" panose="020B0609020101020101" pitchFamily="49" charset="-127"/>
+                <a:ea typeface="D2Coding" panose="020B0609020101020101" pitchFamily="49" charset="-127"/>
+              </a:rPr>
+              <a:t>from</a:t>
+            </a:r>
+            <a:r>
+              <a:rPr lang="ko-KR" altLang="ko-KR" sz="1400" dirty="0">
+                <a:latin typeface="D2Coding" panose="020B0609020101020101" pitchFamily="49" charset="-127"/>
+                <a:ea typeface="D2Coding" panose="020B0609020101020101" pitchFamily="49" charset="-127"/>
+              </a:rPr>
+              <a:t> </a:t>
+            </a:r>
+            <a:r>
+              <a:rPr lang="ko-KR" altLang="ko-KR" sz="1400" dirty="0" err="1">
+                <a:latin typeface="D2Coding" panose="020B0609020101020101" pitchFamily="49" charset="-127"/>
+                <a:ea typeface="D2Coding" panose="020B0609020101020101" pitchFamily="49" charset="-127"/>
+              </a:rPr>
+              <a:t>gensim.models</a:t>
+            </a:r>
+            <a:r>
+              <a:rPr lang="ko-KR" altLang="ko-KR" sz="1400" dirty="0">
+                <a:latin typeface="D2Coding" panose="020B0609020101020101" pitchFamily="49" charset="-127"/>
+                <a:ea typeface="D2Coding" panose="020B0609020101020101" pitchFamily="49" charset="-127"/>
+              </a:rPr>
+              <a:t> </a:t>
+            </a:r>
+            <a:r>
+              <a:rPr lang="ko-KR" altLang="ko-KR" sz="1400" dirty="0" err="1">
+                <a:latin typeface="D2Coding" panose="020B0609020101020101" pitchFamily="49" charset="-127"/>
+                <a:ea typeface="D2Coding" panose="020B0609020101020101" pitchFamily="49" charset="-127"/>
+              </a:rPr>
+              <a:t>import</a:t>
+            </a:r>
+            <a:r>
+              <a:rPr lang="ko-KR" altLang="ko-KR" sz="1400" dirty="0">
+                <a:latin typeface="D2Coding" panose="020B0609020101020101" pitchFamily="49" charset="-127"/>
+                <a:ea typeface="D2Coding" panose="020B0609020101020101" pitchFamily="49" charset="-127"/>
+              </a:rPr>
+              <a:t> </a:t>
+            </a:r>
+            <a:r>
+              <a:rPr lang="ko-KR" altLang="ko-KR" sz="1400" dirty="0" err="1">
+                <a:latin typeface="D2Coding" panose="020B0609020101020101" pitchFamily="49" charset="-127"/>
+                <a:ea typeface="D2Coding" panose="020B0609020101020101" pitchFamily="49" charset="-127"/>
+              </a:rPr>
+              <a:t>LdaModel</a:t>
+            </a:r>
+            <a:endParaRPr lang="ko-KR" altLang="ko-KR" sz="1400" dirty="0">
+              <a:latin typeface="D2Coding" panose="020B0609020101020101" pitchFamily="49" charset="-127"/>
+              <a:ea typeface="D2Coding" panose="020B0609020101020101" pitchFamily="49" charset="-127"/>
+            </a:endParaRPr>
+          </a:p>
+        </p:txBody>
+      </p:sp>
+      <p:cxnSp>
+        <p:nvCxnSpPr>
+          <p:cNvPr id="16" name="연결선: 꺾임 15">
+            <a:extLst>
+              <a:ext uri="{FF2B5EF4-FFF2-40B4-BE49-F238E27FC236}">
+                <a16:creationId xmlns:a16="http://schemas.microsoft.com/office/drawing/2014/main" id="{6D30E75A-8AD7-9E47-24C3-C1644EE7A219}"/>
+              </a:ext>
+            </a:extLst>
+          </p:cNvPr>
+          <p:cNvCxnSpPr>
+            <a:stCxn id="5" idx="3"/>
+            <a:endCxn id="9" idx="1"/>
+          </p:cNvCxnSpPr>
+          <p:nvPr/>
+        </p:nvCxnSpPr>
+        <p:spPr>
+          <a:xfrm flipV="1">
+            <a:off x="5535715" y="3325698"/>
+            <a:ext cx="763485" cy="1231106"/>
+          </a:xfrm>
+          <a:prstGeom prst="bentConnector3">
+            <a:avLst/>
+          </a:prstGeom>
+        </p:spPr>
+        <p:style>
+          <a:lnRef idx="1">
+            <a:schemeClr val="dk1"/>
+          </a:lnRef>
+          <a:fillRef idx="0">
+            <a:schemeClr val="dk1"/>
+          </a:fillRef>
+          <a:effectRef idx="0">
+            <a:schemeClr val="dk1"/>
+          </a:effectRef>
+          <a:fontRef idx="minor">
+            <a:schemeClr val="tx1"/>
+          </a:fontRef>
+        </p:style>
+      </p:cxnSp>
+      <p:cxnSp>
+        <p:nvCxnSpPr>
+          <p:cNvPr id="17" name="연결선: 꺾임 16">
+            <a:extLst>
+              <a:ext uri="{FF2B5EF4-FFF2-40B4-BE49-F238E27FC236}">
+                <a16:creationId xmlns:a16="http://schemas.microsoft.com/office/drawing/2014/main" id="{ED87E8CD-6725-AC21-D88B-02B0EB34D384}"/>
+              </a:ext>
+            </a:extLst>
+          </p:cNvPr>
+          <p:cNvCxnSpPr>
+            <a:cxnSpLocks/>
+            <a:stCxn id="5" idx="3"/>
+            <a:endCxn id="14" idx="1"/>
+          </p:cNvCxnSpPr>
+          <p:nvPr/>
+        </p:nvCxnSpPr>
+        <p:spPr>
+          <a:xfrm>
+            <a:off x="5535715" y="4556804"/>
+            <a:ext cx="763485" cy="1323507"/>
+          </a:xfrm>
+          <a:prstGeom prst="bentConnector3">
+            <a:avLst/>
+          </a:prstGeom>
+        </p:spPr>
+        <p:style>
+          <a:lnRef idx="1">
+            <a:schemeClr val="dk1"/>
+          </a:lnRef>
+          <a:fillRef idx="0">
+            <a:schemeClr val="dk1"/>
+          </a:fillRef>
+          <a:effectRef idx="0">
+            <a:schemeClr val="dk1"/>
+          </a:effectRef>
+          <a:fontRef idx="minor">
+            <a:schemeClr val="tx1"/>
+          </a:fontRef>
+        </p:style>
+      </p:cxnSp>
+      <p:cxnSp>
+        <p:nvCxnSpPr>
+          <p:cNvPr id="20" name="연결선: 꺾임 19">
+            <a:extLst>
+              <a:ext uri="{FF2B5EF4-FFF2-40B4-BE49-F238E27FC236}">
+                <a16:creationId xmlns:a16="http://schemas.microsoft.com/office/drawing/2014/main" id="{A202E0CA-CDD3-6D1E-86CA-010EF94FF513}"/>
+              </a:ext>
+            </a:extLst>
+          </p:cNvPr>
+          <p:cNvCxnSpPr>
+            <a:cxnSpLocks/>
+            <a:stCxn id="5" idx="3"/>
+            <a:endCxn id="11" idx="1"/>
+          </p:cNvCxnSpPr>
+          <p:nvPr/>
+        </p:nvCxnSpPr>
+        <p:spPr>
+          <a:xfrm>
+            <a:off x="5535715" y="4556804"/>
+            <a:ext cx="763485" cy="94931"/>
+          </a:xfrm>
+          <a:prstGeom prst="bentConnector3">
+            <a:avLst>
+              <a:gd name="adj1" fmla="val 50000"/>
+            </a:avLst>
+          </a:prstGeom>
+        </p:spPr>
+        <p:style>
+          <a:lnRef idx="1">
+            <a:schemeClr val="dk1"/>
+          </a:lnRef>
+          <a:fillRef idx="0">
+            <a:schemeClr val="dk1"/>
+          </a:fillRef>
+          <a:effectRef idx="0">
+            <a:schemeClr val="dk1"/>
+          </a:effectRef>
+          <a:fontRef idx="minor">
+            <a:schemeClr val="tx1"/>
+          </a:fontRef>
+        </p:style>
+      </p:cxnSp>
+      <p:pic>
+        <p:nvPicPr>
+          <p:cNvPr id="35" name="그래픽 34" descr="배지 1 단색으로 채워진">
+            <a:extLst>
+              <a:ext uri="{FF2B5EF4-FFF2-40B4-BE49-F238E27FC236}">
+                <a16:creationId xmlns:a16="http://schemas.microsoft.com/office/drawing/2014/main" id="{A724849A-8496-EFD2-C4D2-E309679446A5}"/>
+              </a:ext>
+            </a:extLst>
+          </p:cNvPr>
+          <p:cNvPicPr>
+            <a:picLocks noChangeAspect="1"/>
+          </p:cNvPicPr>
+          <p:nvPr/>
+        </p:nvPicPr>
+        <p:blipFill>
+          <a:blip>
+            <a:extLst>
+              <a:ext uri="{96DAC541-7B7A-43D3-8B79-37D633B846F1}">
+                <asvg:svgBlip xmlns:asvg="http://schemas.microsoft.com/office/drawing/2016/SVG/main" r:embed="rId4"/>
+              </a:ext>
+            </a:extLst>
+          </a:blip>
+          <a:stretch>
+            <a:fillRect/>
+          </a:stretch>
+        </p:blipFill>
+        <p:spPr>
+          <a:xfrm>
+            <a:off x="6047849" y="2714855"/>
+            <a:ext cx="502702" cy="502702"/>
+          </a:xfrm>
+          <a:prstGeom prst="rect">
+            <a:avLst/>
+          </a:prstGeom>
+        </p:spPr>
+      </p:pic>
+      <p:pic>
+        <p:nvPicPr>
+          <p:cNvPr id="37" name="그래픽 36" descr="배지 단색으로 채워진">
+            <a:extLst>
+              <a:ext uri="{FF2B5EF4-FFF2-40B4-BE49-F238E27FC236}">
+                <a16:creationId xmlns:a16="http://schemas.microsoft.com/office/drawing/2014/main" id="{F091F8F6-5806-DDB6-1940-811BAF4FA132}"/>
+              </a:ext>
+            </a:extLst>
+          </p:cNvPr>
+          <p:cNvPicPr>
+            <a:picLocks noChangeAspect="1"/>
+          </p:cNvPicPr>
+          <p:nvPr/>
+        </p:nvPicPr>
+        <p:blipFill>
+          <a:blip>
+            <a:extLst>
+              <a:ext uri="{96DAC541-7B7A-43D3-8B79-37D633B846F1}">
+                <asvg:svgBlip xmlns:asvg="http://schemas.microsoft.com/office/drawing/2016/SVG/main" r:embed="rId5"/>
+              </a:ext>
+            </a:extLst>
+          </a:blip>
+          <a:stretch>
+            <a:fillRect/>
+          </a:stretch>
+        </p:blipFill>
+        <p:spPr>
+          <a:xfrm>
+            <a:off x="6047849" y="4020827"/>
+            <a:ext cx="502702" cy="502702"/>
+          </a:xfrm>
+          <a:prstGeom prst="rect">
+            <a:avLst/>
+          </a:prstGeom>
+        </p:spPr>
+      </p:pic>
+      <p:pic>
+        <p:nvPicPr>
+          <p:cNvPr id="41" name="그래픽 40" descr="배지 3 단색으로 채워진">
+            <a:extLst>
+              <a:ext uri="{FF2B5EF4-FFF2-40B4-BE49-F238E27FC236}">
+                <a16:creationId xmlns:a16="http://schemas.microsoft.com/office/drawing/2014/main" id="{1893EAEF-BB96-F2D6-3C7B-E333F9D51CE4}"/>
+              </a:ext>
+            </a:extLst>
+          </p:cNvPr>
+          <p:cNvPicPr>
+            <a:picLocks noChangeAspect="1"/>
+          </p:cNvPicPr>
+          <p:nvPr/>
+        </p:nvPicPr>
+        <p:blipFill>
+          <a:blip>
+            <a:extLst>
+              <a:ext uri="{96DAC541-7B7A-43D3-8B79-37D633B846F1}">
+                <asvg:svgBlip xmlns:asvg="http://schemas.microsoft.com/office/drawing/2016/SVG/main" r:embed="rId6"/>
+              </a:ext>
+            </a:extLst>
+          </a:blip>
+          <a:stretch>
+            <a:fillRect/>
+          </a:stretch>
+        </p:blipFill>
+        <p:spPr>
+          <a:xfrm>
+            <a:off x="6047849" y="5349865"/>
+            <a:ext cx="502702" cy="502702"/>
+          </a:xfrm>
+          <a:prstGeom prst="rect">
+            <a:avLst/>
+          </a:prstGeom>
+        </p:spPr>
+      </p:pic>
+    </p:spTree>
+    <p:extLst>
+      <p:ext uri="{BB962C8B-B14F-4D97-AF65-F5344CB8AC3E}">
+        <p14:creationId xmlns:p14="http://schemas.microsoft.com/office/powerpoint/2010/main" val="2500674717"/>
+      </p:ext>
+    </p:extLst>
+  </p:cSld>
+  <p:clrMapOvr>
+    <a:masterClrMapping/>
+  </p:clrMapOvr>
+  <mc:AlternateContent xmlns:mc="http://schemas.openxmlformats.org/markup-compatibility/2006" xmlns:p14="http://schemas.microsoft.com/office/powerpoint/2010/main">
+    <mc:Choice Requires="p14">
+      <p:transition p14:dur="10"/>
+    </mc:Choice>
+    <mc:Fallback xmlns="">
+      <p:transition/>
+    </mc:Fallback>
+  </mc:AlternateContent>
+</p:sld>
+</file>
+
+<file path=ppt/slides/slide28.xml><?xml version="1.0" encoding="utf-8"?>
+<p:sld xmlns:a="http://schemas.openxmlformats.org/drawingml/2006/main" xmlns:r="http://schemas.openxmlformats.org/officeDocument/2006/relationships" xmlns:p="http://schemas.openxmlformats.org/presentationml/2006/main">
+  <p:cSld>
+    <p:spTree>
+      <p:nvGrpSpPr>
+        <p:cNvPr id="1" name="">
+          <a:extLst>
+            <a:ext uri="{FF2B5EF4-FFF2-40B4-BE49-F238E27FC236}">
+              <a16:creationId xmlns:a16="http://schemas.microsoft.com/office/drawing/2014/main" id="{7B4AF176-0D71-5DD2-9F95-15E865D1F7B4}"/>
+            </a:ext>
+          </a:extLst>
+        </p:cNvPr>
+        <p:cNvGrpSpPr/>
+        <p:nvPr/>
+      </p:nvGrpSpPr>
+      <p:grpSpPr>
+        <a:xfrm>
+          <a:off x="0" y="0"/>
+          <a:ext cx="0" cy="0"/>
+          <a:chOff x="0" y="0"/>
+          <a:chExt cx="0" cy="0"/>
+        </a:xfrm>
+      </p:grpSpPr>
+      <p:sp>
+        <p:nvSpPr>
+          <p:cNvPr id="8" name="제목 7">
+            <a:extLst>
+              <a:ext uri="{FF2B5EF4-FFF2-40B4-BE49-F238E27FC236}">
+                <a16:creationId xmlns:a16="http://schemas.microsoft.com/office/drawing/2014/main" id="{5617D113-B427-37D6-9E83-6E7B8C17D1F9}"/>
+              </a:ext>
+            </a:extLst>
+          </p:cNvPr>
+          <p:cNvSpPr>
+            <a:spLocks noGrp="1"/>
+          </p:cNvSpPr>
+          <p:nvPr>
+            <p:ph type="title"/>
+          </p:nvPr>
+        </p:nvSpPr>
+        <p:spPr>
+          <a:xfrm>
+            <a:off x="521207" y="448056"/>
+            <a:ext cx="9727693" cy="640080"/>
+          </a:xfrm>
+        </p:spPr>
+        <p:txBody>
+          <a:bodyPr rtlCol="0">
+            <a:noAutofit/>
+          </a:bodyPr>
+          <a:lstStyle/>
+          <a:p>
+            <a:r>
+              <a:rPr lang="ko-KR" altLang="en-US" dirty="0">
+                <a:cs typeface="Segoe UI Light" panose="020B0502040204020203" pitchFamily="34" charset="0"/>
+              </a:rPr>
+              <a:t>토픽 모델링</a:t>
+            </a:r>
+            <a:r>
+              <a:rPr lang="en-US" altLang="ko-KR" dirty="0">
+                <a:cs typeface="Segoe UI Light" panose="020B0502040204020203" pitchFamily="34" charset="0"/>
+              </a:rPr>
+              <a:t>(Topic Modeling)</a:t>
+            </a:r>
+            <a:r>
+              <a:rPr lang="ko-KR" altLang="en-US" dirty="0">
+                <a:cs typeface="Segoe UI Light" panose="020B0502040204020203" pitchFamily="34" charset="0"/>
+              </a:rPr>
+              <a:t> </a:t>
+            </a:r>
+            <a:r>
+              <a:rPr lang="en-US" altLang="ko-KR" dirty="0">
+                <a:cs typeface="Segoe UI Light" panose="020B0502040204020203" pitchFamily="34" charset="0"/>
+              </a:rPr>
+              <a:t>Tasks</a:t>
+            </a:r>
+            <a:endParaRPr lang="ko-KR" altLang="en-US" dirty="0">
+              <a:cs typeface="Segoe UI Light" panose="020B0502040204020203" pitchFamily="34" charset="0"/>
+            </a:endParaRPr>
+          </a:p>
+        </p:txBody>
+      </p:sp>
+      <p:sp>
+        <p:nvSpPr>
+          <p:cNvPr id="12" name="슬라이드 번호 개체 틀 11">
+            <a:extLst>
+              <a:ext uri="{FF2B5EF4-FFF2-40B4-BE49-F238E27FC236}">
+                <a16:creationId xmlns:a16="http://schemas.microsoft.com/office/drawing/2014/main" id="{D40E18B5-91B8-6F32-7A39-509EB5910587}"/>
+              </a:ext>
+            </a:extLst>
+          </p:cNvPr>
+          <p:cNvSpPr>
+            <a:spLocks noGrp="1"/>
+          </p:cNvSpPr>
+          <p:nvPr>
+            <p:ph type="sldNum" sz="quarter" idx="4"/>
+          </p:nvPr>
+        </p:nvSpPr>
+        <p:spPr/>
+        <p:txBody>
+          <a:bodyPr/>
+          <a:lstStyle/>
+          <a:p>
+            <a:fld id="{9860EDB8-5305-433F-BE41-D7A86D811DB3}" type="slidenum">
+              <a:rPr lang="en-US" altLang="ko-KR" noProof="0" smtClean="0"/>
+              <a:pPr/>
+              <a:t>28</a:t>
+            </a:fld>
+            <a:endParaRPr lang="ko-KR" altLang="en-US" noProof="0"/>
+          </a:p>
+        </p:txBody>
+      </p:sp>
+      <p:pic>
+        <p:nvPicPr>
+          <p:cNvPr id="2" name="그림 1" descr="문자 메시지">
+            <a:extLst>
+              <a:ext uri="{FF2B5EF4-FFF2-40B4-BE49-F238E27FC236}">
+                <a16:creationId xmlns:a16="http://schemas.microsoft.com/office/drawing/2014/main" id="{0309E21B-87F3-6E4B-9C33-4580B152C41A}"/>
+              </a:ext>
+            </a:extLst>
+          </p:cNvPr>
+          <p:cNvPicPr>
+            <a:picLocks noChangeAspect="1"/>
+          </p:cNvPicPr>
+          <p:nvPr/>
+        </p:nvPicPr>
+        <p:blipFill>
+          <a:blip r:embed="rId3"/>
+          <a:stretch>
+            <a:fillRect/>
+          </a:stretch>
+        </p:blipFill>
+        <p:spPr>
+          <a:xfrm>
+            <a:off x="10668000" y="109220"/>
+            <a:ext cx="1397000" cy="1047750"/>
+          </a:xfrm>
+          <a:prstGeom prst="rect">
+            <a:avLst/>
+          </a:prstGeom>
+        </p:spPr>
+      </p:pic>
+      <p:sp>
+        <p:nvSpPr>
+          <p:cNvPr id="6" name="TextBox 5">
+            <a:extLst>
+              <a:ext uri="{FF2B5EF4-FFF2-40B4-BE49-F238E27FC236}">
+                <a16:creationId xmlns:a16="http://schemas.microsoft.com/office/drawing/2014/main" id="{E687996C-DCE1-990B-139F-E95F0830C360}"/>
+              </a:ext>
+            </a:extLst>
+          </p:cNvPr>
+          <p:cNvSpPr txBox="1"/>
+          <p:nvPr/>
+        </p:nvSpPr>
+        <p:spPr>
+          <a:xfrm>
+            <a:off x="648207" y="1282489"/>
+            <a:ext cx="11127319" cy="793166"/>
+          </a:xfrm>
+          <a:prstGeom prst="rect">
+            <a:avLst/>
+          </a:prstGeom>
+          <a:noFill/>
+        </p:spPr>
+        <p:txBody>
+          <a:bodyPr wrap="square" rtlCol="0">
+            <a:spAutoFit/>
+          </a:bodyPr>
+          <a:lstStyle/>
+          <a:p>
+            <a:pPr>
+              <a:lnSpc>
+                <a:spcPct val="150000"/>
+              </a:lnSpc>
+            </a:pPr>
+            <a:r>
+              <a:rPr lang="ko-KR" altLang="en-US" sz="1600" dirty="0" err="1">
+                <a:latin typeface="D2Coding" panose="020B0609020101020101" pitchFamily="49" charset="-127"/>
+                <a:ea typeface="D2Coding" panose="020B0609020101020101" pitchFamily="49" charset="-127"/>
+              </a:rPr>
+              <a:t>빅카인즈</a:t>
+            </a:r>
+            <a:r>
+              <a:rPr lang="en-US" altLang="ko-KR" sz="1600" dirty="0">
+                <a:latin typeface="D2Coding" panose="020B0609020101020101" pitchFamily="49" charset="-127"/>
+                <a:ea typeface="D2Coding" panose="020B0609020101020101" pitchFamily="49" charset="-127"/>
+              </a:rPr>
+              <a:t>(</a:t>
+            </a:r>
+            <a:r>
+              <a:rPr lang="en-US" altLang="ko-KR" sz="1600" dirty="0">
+                <a:latin typeface="D2Coding" panose="020B0609020101020101" pitchFamily="49" charset="-127"/>
+                <a:ea typeface="D2Coding" panose="020B0609020101020101" pitchFamily="49" charset="-127"/>
+                <a:hlinkClick r:id="rId4"/>
+              </a:rPr>
+              <a:t>www.bigkinds</a:t>
+            </a:r>
+            <a:r>
+              <a:rPr lang="en-US" altLang="ko-KR" sz="1600" dirty="0">
+                <a:latin typeface="D2Coding" panose="020B0609020101020101" pitchFamily="49" charset="-127"/>
+                <a:ea typeface="D2Coding" panose="020B0609020101020101" pitchFamily="49" charset="-127"/>
+              </a:rPr>
+              <a:t>) </a:t>
+            </a:r>
+            <a:r>
+              <a:rPr lang="ko-KR" altLang="en-US" sz="1600" dirty="0">
+                <a:latin typeface="D2Coding" panose="020B0609020101020101" pitchFamily="49" charset="-127"/>
+                <a:ea typeface="D2Coding" panose="020B0609020101020101" pitchFamily="49" charset="-127"/>
+              </a:rPr>
+              <a:t>에 가입하고 </a:t>
+            </a:r>
+            <a:r>
+              <a:rPr lang="en-US" altLang="ko-KR" sz="1600" dirty="0">
+                <a:latin typeface="D2Coding" panose="020B0609020101020101" pitchFamily="49" charset="-127"/>
+                <a:ea typeface="D2Coding" panose="020B0609020101020101" pitchFamily="49" charset="-127"/>
+              </a:rPr>
+              <a:t>“</a:t>
+            </a:r>
+            <a:r>
+              <a:rPr lang="ko-KR" altLang="en-US" sz="1600" dirty="0">
+                <a:latin typeface="D2Coding" panose="020B0609020101020101" pitchFamily="49" charset="-127"/>
+                <a:ea typeface="D2Coding" panose="020B0609020101020101" pitchFamily="49" charset="-127"/>
+              </a:rPr>
+              <a:t>오세훈</a:t>
+            </a:r>
+            <a:r>
+              <a:rPr lang="en-US" altLang="ko-KR" sz="1600" dirty="0">
+                <a:latin typeface="D2Coding" panose="020B0609020101020101" pitchFamily="49" charset="-127"/>
+                <a:ea typeface="D2Coding" panose="020B0609020101020101" pitchFamily="49" charset="-127"/>
+              </a:rPr>
+              <a:t>,</a:t>
+            </a:r>
+            <a:r>
+              <a:rPr lang="ko-KR" altLang="en-US" sz="1600" dirty="0">
+                <a:latin typeface="D2Coding" panose="020B0609020101020101" pitchFamily="49" charset="-127"/>
+                <a:ea typeface="D2Coding" panose="020B0609020101020101" pitchFamily="49" charset="-127"/>
+              </a:rPr>
+              <a:t> </a:t>
+            </a:r>
+            <a:r>
+              <a:rPr lang="ko-KR" altLang="en-US" sz="1600" dirty="0" err="1">
+                <a:latin typeface="D2Coding" panose="020B0609020101020101" pitchFamily="49" charset="-127"/>
+                <a:ea typeface="D2Coding" panose="020B0609020101020101" pitchFamily="49" charset="-127"/>
+              </a:rPr>
+              <a:t>정원오</a:t>
+            </a:r>
+            <a:r>
+              <a:rPr lang="en-US" altLang="ko-KR" sz="1600" dirty="0">
+                <a:latin typeface="D2Coding" panose="020B0609020101020101" pitchFamily="49" charset="-127"/>
+                <a:ea typeface="D2Coding" panose="020B0609020101020101" pitchFamily="49" charset="-127"/>
+              </a:rPr>
+              <a:t>” </a:t>
+            </a:r>
+            <a:r>
+              <a:rPr lang="ko-KR" altLang="en-US" sz="1600" dirty="0">
+                <a:latin typeface="D2Coding" panose="020B0609020101020101" pitchFamily="49" charset="-127"/>
+                <a:ea typeface="D2Coding" panose="020B0609020101020101" pitchFamily="49" charset="-127"/>
+              </a:rPr>
+              <a:t>로 검색한 온라인 기사의 </a:t>
+            </a:r>
+            <a:r>
+              <a:rPr lang="en-US" altLang="ko-KR" sz="1600" dirty="0">
+                <a:latin typeface="D2Coding" panose="020B0609020101020101" pitchFamily="49" charset="-127"/>
+                <a:ea typeface="D2Coding" panose="020B0609020101020101" pitchFamily="49" charset="-127"/>
+              </a:rPr>
+              <a:t>“</a:t>
+            </a:r>
+            <a:r>
+              <a:rPr lang="ko-KR" altLang="en-US" sz="1600" dirty="0">
+                <a:latin typeface="D2Coding" panose="020B0609020101020101" pitchFamily="49" charset="-127"/>
+                <a:ea typeface="D2Coding" panose="020B0609020101020101" pitchFamily="49" charset="-127"/>
+              </a:rPr>
+              <a:t>특성추출</a:t>
+            </a:r>
+            <a:r>
+              <a:rPr lang="en-US" altLang="ko-KR" sz="1600" dirty="0">
+                <a:latin typeface="D2Coding" panose="020B0609020101020101" pitchFamily="49" charset="-127"/>
+                <a:ea typeface="D2Coding" panose="020B0609020101020101" pitchFamily="49" charset="-127"/>
+              </a:rPr>
+              <a:t>(</a:t>
+            </a:r>
+            <a:r>
+              <a:rPr lang="ko-KR" altLang="en-US" sz="1600" dirty="0">
+                <a:latin typeface="D2Coding" panose="020B0609020101020101" pitchFamily="49" charset="-127"/>
+                <a:ea typeface="D2Coding" panose="020B0609020101020101" pitchFamily="49" charset="-127"/>
+              </a:rPr>
+              <a:t>가중치순 상위 </a:t>
+            </a:r>
+            <a:r>
+              <a:rPr lang="en-US" altLang="ko-KR" sz="1600" dirty="0">
+                <a:latin typeface="D2Coding" panose="020B0609020101020101" pitchFamily="49" charset="-127"/>
+                <a:ea typeface="D2Coding" panose="020B0609020101020101" pitchFamily="49" charset="-127"/>
+              </a:rPr>
+              <a:t>50</a:t>
+            </a:r>
+            <a:r>
+              <a:rPr lang="ko-KR" altLang="en-US" sz="1600" dirty="0">
+                <a:latin typeface="D2Coding" panose="020B0609020101020101" pitchFamily="49" charset="-127"/>
+                <a:ea typeface="D2Coding" panose="020B0609020101020101" pitchFamily="49" charset="-127"/>
+              </a:rPr>
+              <a:t>개</a:t>
+            </a:r>
+            <a:r>
+              <a:rPr lang="en-US" altLang="ko-KR" sz="1600" dirty="0">
+                <a:latin typeface="D2Coding" panose="020B0609020101020101" pitchFamily="49" charset="-127"/>
+                <a:ea typeface="D2Coding" panose="020B0609020101020101" pitchFamily="49" charset="-127"/>
+              </a:rPr>
+              <a:t>)”</a:t>
+            </a:r>
+            <a:r>
+              <a:rPr lang="ko-KR" altLang="en-US" sz="1600" dirty="0">
+                <a:latin typeface="D2Coding" panose="020B0609020101020101" pitchFamily="49" charset="-127"/>
+                <a:ea typeface="D2Coding" panose="020B0609020101020101" pitchFamily="49" charset="-127"/>
+              </a:rPr>
+              <a:t>의 단어를 </a:t>
+            </a:r>
+            <a:r>
+              <a:rPr lang="en-US" altLang="ko-KR" sz="1600" dirty="0">
+                <a:latin typeface="D2Coding" panose="020B0609020101020101" pitchFamily="49" charset="-127"/>
+                <a:ea typeface="D2Coding" panose="020B0609020101020101" pitchFamily="49" charset="-127"/>
+              </a:rPr>
+              <a:t>corpus</a:t>
+            </a:r>
+            <a:r>
+              <a:rPr lang="ko-KR" altLang="en-US" sz="1600" dirty="0">
+                <a:latin typeface="D2Coding" panose="020B0609020101020101" pitchFamily="49" charset="-127"/>
+                <a:ea typeface="D2Coding" panose="020B0609020101020101" pitchFamily="49" charset="-127"/>
+              </a:rPr>
+              <a:t>로 하여 </a:t>
+            </a:r>
+            <a:r>
+              <a:rPr lang="en-US" altLang="ko-KR" sz="1600" dirty="0">
+                <a:latin typeface="D2Coding" panose="020B0609020101020101" pitchFamily="49" charset="-127"/>
+                <a:ea typeface="D2Coding" panose="020B0609020101020101" pitchFamily="49" charset="-127"/>
+              </a:rPr>
+              <a:t>Topic Modeling</a:t>
+            </a:r>
+            <a:r>
+              <a:rPr lang="ko-KR" altLang="en-US" sz="1600" dirty="0">
+                <a:latin typeface="D2Coding" panose="020B0609020101020101" pitchFamily="49" charset="-127"/>
+                <a:ea typeface="D2Coding" panose="020B0609020101020101" pitchFamily="49" charset="-127"/>
+              </a:rPr>
+              <a:t>을 수행하여 어떤 주제</a:t>
+            </a:r>
+            <a:r>
+              <a:rPr lang="en-US" altLang="ko-KR" sz="1600" dirty="0">
+                <a:latin typeface="D2Coding" panose="020B0609020101020101" pitchFamily="49" charset="-127"/>
+                <a:ea typeface="D2Coding" panose="020B0609020101020101" pitchFamily="49" charset="-127"/>
+              </a:rPr>
+              <a:t>, </a:t>
+            </a:r>
+            <a:r>
+              <a:rPr lang="ko-KR" altLang="en-US" sz="1600" dirty="0">
+                <a:latin typeface="D2Coding" panose="020B0609020101020101" pitchFamily="49" charset="-127"/>
+                <a:ea typeface="D2Coding" panose="020B0609020101020101" pitchFamily="49" charset="-127"/>
+              </a:rPr>
+              <a:t>이슈</a:t>
+            </a:r>
+            <a:r>
+              <a:rPr lang="en-US" altLang="ko-KR" sz="1600" dirty="0">
+                <a:latin typeface="D2Coding" panose="020B0609020101020101" pitchFamily="49" charset="-127"/>
+                <a:ea typeface="D2Coding" panose="020B0609020101020101" pitchFamily="49" charset="-127"/>
+              </a:rPr>
+              <a:t>(Topic)</a:t>
+            </a:r>
+            <a:r>
+              <a:rPr lang="ko-KR" altLang="en-US" sz="1600" dirty="0">
+                <a:latin typeface="D2Coding" panose="020B0609020101020101" pitchFamily="49" charset="-127"/>
+                <a:ea typeface="D2Coding" panose="020B0609020101020101" pitchFamily="49" charset="-127"/>
+              </a:rPr>
+              <a:t>들이 언급되었는지 확인하자</a:t>
+            </a:r>
+          </a:p>
+        </p:txBody>
+      </p:sp>
+      <p:pic>
+        <p:nvPicPr>
+          <p:cNvPr id="4" name="그림 3">
+            <a:extLst>
+              <a:ext uri="{FF2B5EF4-FFF2-40B4-BE49-F238E27FC236}">
+                <a16:creationId xmlns:a16="http://schemas.microsoft.com/office/drawing/2014/main" id="{7D13F4AC-CD35-4AA2-3EFE-DDF05F6103F1}"/>
+              </a:ext>
+            </a:extLst>
+          </p:cNvPr>
+          <p:cNvPicPr>
+            <a:picLocks noChangeAspect="1"/>
+          </p:cNvPicPr>
+          <p:nvPr/>
+        </p:nvPicPr>
+        <p:blipFill>
+          <a:blip r:embed="rId5"/>
+          <a:stretch>
+            <a:fillRect/>
+          </a:stretch>
+        </p:blipFill>
+        <p:spPr>
+          <a:xfrm>
+            <a:off x="4589635" y="2431990"/>
+            <a:ext cx="6955820" cy="2644730"/>
+          </a:xfrm>
+          <a:prstGeom prst="rect">
+            <a:avLst/>
+          </a:prstGeom>
+        </p:spPr>
+      </p:pic>
+      <p:pic>
+        <p:nvPicPr>
+          <p:cNvPr id="10" name="그림 9">
+            <a:extLst>
+              <a:ext uri="{FF2B5EF4-FFF2-40B4-BE49-F238E27FC236}">
+                <a16:creationId xmlns:a16="http://schemas.microsoft.com/office/drawing/2014/main" id="{8D138E4A-0200-00A9-25E0-E0C644162177}"/>
+              </a:ext>
+            </a:extLst>
+          </p:cNvPr>
+          <p:cNvPicPr>
+            <a:picLocks noChangeAspect="1"/>
+          </p:cNvPicPr>
+          <p:nvPr/>
+        </p:nvPicPr>
+        <p:blipFill>
+          <a:blip r:embed="rId6"/>
+          <a:stretch>
+            <a:fillRect/>
+          </a:stretch>
+        </p:blipFill>
+        <p:spPr>
+          <a:xfrm>
+            <a:off x="792704" y="3401112"/>
+            <a:ext cx="4758351" cy="2762468"/>
+          </a:xfrm>
+          <a:prstGeom prst="rect">
+            <a:avLst/>
+          </a:prstGeom>
+        </p:spPr>
+      </p:pic>
+    </p:spTree>
+    <p:extLst>
+      <p:ext uri="{BB962C8B-B14F-4D97-AF65-F5344CB8AC3E}">
+        <p14:creationId xmlns:p14="http://schemas.microsoft.com/office/powerpoint/2010/main" val="3669820206"/>
       </p:ext>
     </p:extLst>
   </p:cSld>

--- a/Linear_Algebra/w9_Matrix_Decomposition.pptx
+++ b/Linear_Algebra/w9_Matrix_Decomposition.pptx
@@ -5,40 +5,42 @@
     <p:sldMasterId id="2147483660" r:id="rId1"/>
   </p:sldMasterIdLst>
   <p:notesMasterIdLst>
-    <p:notesMasterId r:id="rId30"/>
+    <p:notesMasterId r:id="rId32"/>
   </p:notesMasterIdLst>
   <p:handoutMasterIdLst>
-    <p:handoutMasterId r:id="rId31"/>
+    <p:handoutMasterId r:id="rId33"/>
   </p:handoutMasterIdLst>
   <p:sldIdLst>
     <p:sldId id="256" r:id="rId2"/>
     <p:sldId id="1094" r:id="rId3"/>
     <p:sldId id="1113" r:id="rId4"/>
-    <p:sldId id="1114" r:id="rId5"/>
-    <p:sldId id="1116" r:id="rId6"/>
-    <p:sldId id="1117" r:id="rId7"/>
-    <p:sldId id="1121" r:id="rId8"/>
-    <p:sldId id="1118" r:id="rId9"/>
-    <p:sldId id="307" r:id="rId10"/>
-    <p:sldId id="1096" r:id="rId11"/>
-    <p:sldId id="1097" r:id="rId12"/>
-    <p:sldId id="1095" r:id="rId13"/>
-    <p:sldId id="1098" r:id="rId14"/>
-    <p:sldId id="1119" r:id="rId15"/>
-    <p:sldId id="1099" r:id="rId16"/>
-    <p:sldId id="1104" r:id="rId17"/>
-    <p:sldId id="1103" r:id="rId18"/>
-    <p:sldId id="1105" r:id="rId19"/>
-    <p:sldId id="1106" r:id="rId20"/>
-    <p:sldId id="1120" r:id="rId21"/>
-    <p:sldId id="1102" r:id="rId22"/>
-    <p:sldId id="1107" r:id="rId23"/>
-    <p:sldId id="1108" r:id="rId24"/>
-    <p:sldId id="1109" r:id="rId25"/>
-    <p:sldId id="1110" r:id="rId26"/>
-    <p:sldId id="1111" r:id="rId27"/>
-    <p:sldId id="1122" r:id="rId28"/>
-    <p:sldId id="1123" r:id="rId29"/>
+    <p:sldId id="1125" r:id="rId5"/>
+    <p:sldId id="1124" r:id="rId6"/>
+    <p:sldId id="1114" r:id="rId7"/>
+    <p:sldId id="1116" r:id="rId8"/>
+    <p:sldId id="1117" r:id="rId9"/>
+    <p:sldId id="1121" r:id="rId10"/>
+    <p:sldId id="1118" r:id="rId11"/>
+    <p:sldId id="307" r:id="rId12"/>
+    <p:sldId id="1096" r:id="rId13"/>
+    <p:sldId id="1097" r:id="rId14"/>
+    <p:sldId id="1095" r:id="rId15"/>
+    <p:sldId id="1098" r:id="rId16"/>
+    <p:sldId id="1119" r:id="rId17"/>
+    <p:sldId id="1099" r:id="rId18"/>
+    <p:sldId id="1104" r:id="rId19"/>
+    <p:sldId id="1103" r:id="rId20"/>
+    <p:sldId id="1105" r:id="rId21"/>
+    <p:sldId id="1106" r:id="rId22"/>
+    <p:sldId id="1120" r:id="rId23"/>
+    <p:sldId id="1102" r:id="rId24"/>
+    <p:sldId id="1107" r:id="rId25"/>
+    <p:sldId id="1108" r:id="rId26"/>
+    <p:sldId id="1109" r:id="rId27"/>
+    <p:sldId id="1110" r:id="rId28"/>
+    <p:sldId id="1111" r:id="rId29"/>
+    <p:sldId id="1122" r:id="rId30"/>
+    <p:sldId id="1123" r:id="rId31"/>
   </p:sldIdLst>
   <p:sldSz cx="12192000" cy="6858000"/>
   <p:notesSz cx="6858000" cy="9144000"/>
@@ -149,6 +151,8 @@
           <p14:sldIdLst>
             <p14:sldId id="1094"/>
             <p14:sldId id="1113"/>
+            <p14:sldId id="1125"/>
+            <p14:sldId id="1124"/>
             <p14:sldId id="1114"/>
             <p14:sldId id="1116"/>
             <p14:sldId id="1117"/>
@@ -872,6 +876,242 @@
         <p:cNvPr id="1" name="">
           <a:extLst>
             <a:ext uri="{FF2B5EF4-FFF2-40B4-BE49-F238E27FC236}">
+              <a16:creationId xmlns:a16="http://schemas.microsoft.com/office/drawing/2014/main" id="{4304E0ED-DA8F-B163-37A6-7DBF270F2A30}"/>
+            </a:ext>
+          </a:extLst>
+        </p:cNvPr>
+        <p:cNvGrpSpPr/>
+        <p:nvPr/>
+      </p:nvGrpSpPr>
+      <p:grpSpPr>
+        <a:xfrm>
+          <a:off x="0" y="0"/>
+          <a:ext cx="0" cy="0"/>
+          <a:chOff x="0" y="0"/>
+          <a:chExt cx="0" cy="0"/>
+        </a:xfrm>
+      </p:grpSpPr>
+      <p:sp>
+        <p:nvSpPr>
+          <p:cNvPr id="2" name="슬라이드 이미지 개체 틀 1">
+            <a:extLst>
+              <a:ext uri="{FF2B5EF4-FFF2-40B4-BE49-F238E27FC236}">
+                <a16:creationId xmlns:a16="http://schemas.microsoft.com/office/drawing/2014/main" id="{BBD413A3-37DD-2EE0-769B-62A5AA245E01}"/>
+              </a:ext>
+            </a:extLst>
+          </p:cNvPr>
+          <p:cNvSpPr>
+            <a:spLocks noGrp="1" noRot="1" noChangeAspect="1"/>
+          </p:cNvSpPr>
+          <p:nvPr>
+            <p:ph type="sldImg"/>
+          </p:nvPr>
+        </p:nvSpPr>
+        <p:spPr/>
+      </p:sp>
+      <p:sp>
+        <p:nvSpPr>
+          <p:cNvPr id="3" name="슬라이드 노트 개체 틀 2">
+            <a:extLst>
+              <a:ext uri="{FF2B5EF4-FFF2-40B4-BE49-F238E27FC236}">
+                <a16:creationId xmlns:a16="http://schemas.microsoft.com/office/drawing/2014/main" id="{E6871A5E-32A9-1D25-5E36-47F13F3348D6}"/>
+              </a:ext>
+            </a:extLst>
+          </p:cNvPr>
+          <p:cNvSpPr>
+            <a:spLocks noGrp="1"/>
+          </p:cNvSpPr>
+          <p:nvPr>
+            <p:ph type="body" idx="1"/>
+          </p:nvPr>
+        </p:nvSpPr>
+        <p:spPr/>
+        <p:txBody>
+          <a:bodyPr/>
+          <a:lstStyle/>
+          <a:p>
+            <a:endParaRPr lang="ko-KR" altLang="en-US">
+              <a:latin typeface="맑은 고딕" panose="020B0503020000020004" pitchFamily="50" charset="-127"/>
+              <a:ea typeface="맑은 고딕" panose="020B0503020000020004" pitchFamily="50" charset="-127"/>
+            </a:endParaRPr>
+          </a:p>
+        </p:txBody>
+      </p:sp>
+      <p:sp>
+        <p:nvSpPr>
+          <p:cNvPr id="4" name="슬라이드 번호 개체 틀 3">
+            <a:extLst>
+              <a:ext uri="{FF2B5EF4-FFF2-40B4-BE49-F238E27FC236}">
+                <a16:creationId xmlns:a16="http://schemas.microsoft.com/office/drawing/2014/main" id="{C4908B45-7F07-B905-3C46-865FD9931359}"/>
+              </a:ext>
+            </a:extLst>
+          </p:cNvPr>
+          <p:cNvSpPr>
+            <a:spLocks noGrp="1"/>
+          </p:cNvSpPr>
+          <p:nvPr>
+            <p:ph type="sldNum" sz="quarter" idx="5"/>
+          </p:nvPr>
+        </p:nvSpPr>
+        <p:spPr/>
+        <p:txBody>
+          <a:bodyPr/>
+          <a:lstStyle/>
+          <a:p>
+            <a:pPr rtl="0"/>
+            <a:fld id="{DF61EA0F-A667-4B49-8422-0062BC55E249}" type="slidenum">
+              <a:rPr lang="en-US" altLang="ko-KR" smtClean="0">
+                <a:latin typeface="맑은 고딕" panose="020B0503020000020004" pitchFamily="50" charset="-127"/>
+                <a:ea typeface="맑은 고딕" panose="020B0503020000020004" pitchFamily="50" charset="-127"/>
+              </a:rPr>
+              <a:t>10</a:t>
+            </a:fld>
+            <a:endParaRPr lang="ko-KR" altLang="en-US">
+              <a:latin typeface="맑은 고딕" panose="020B0503020000020004" pitchFamily="50" charset="-127"/>
+              <a:ea typeface="맑은 고딕" panose="020B0503020000020004" pitchFamily="50" charset="-127"/>
+            </a:endParaRPr>
+          </a:p>
+        </p:txBody>
+      </p:sp>
+    </p:spTree>
+    <p:extLst>
+      <p:ext uri="{BB962C8B-B14F-4D97-AF65-F5344CB8AC3E}">
+        <p14:creationId xmlns:p14="http://schemas.microsoft.com/office/powerpoint/2010/main" val="219161818"/>
+      </p:ext>
+    </p:extLst>
+  </p:cSld>
+  <p:clrMapOvr>
+    <a:masterClrMapping/>
+  </p:clrMapOvr>
+</p:notes>
+</file>
+
+<file path=ppt/notesSlides/notesSlide11.xml><?xml version="1.0" encoding="utf-8"?>
+<p:notes xmlns:a="http://schemas.openxmlformats.org/drawingml/2006/main" xmlns:r="http://schemas.openxmlformats.org/officeDocument/2006/relationships" xmlns:p="http://schemas.openxmlformats.org/presentationml/2006/main">
+  <p:cSld>
+    <p:spTree>
+      <p:nvGrpSpPr>
+        <p:cNvPr id="1" name="">
+          <a:extLst>
+            <a:ext uri="{FF2B5EF4-FFF2-40B4-BE49-F238E27FC236}">
+              <a16:creationId xmlns:a16="http://schemas.microsoft.com/office/drawing/2014/main" id="{C3577BAA-B1F8-BAA3-8907-DC73D99FACA4}"/>
+            </a:ext>
+          </a:extLst>
+        </p:cNvPr>
+        <p:cNvGrpSpPr/>
+        <p:nvPr/>
+      </p:nvGrpSpPr>
+      <p:grpSpPr>
+        <a:xfrm>
+          <a:off x="0" y="0"/>
+          <a:ext cx="0" cy="0"/>
+          <a:chOff x="0" y="0"/>
+          <a:chExt cx="0" cy="0"/>
+        </a:xfrm>
+      </p:grpSpPr>
+      <p:sp>
+        <p:nvSpPr>
+          <p:cNvPr id="2" name="슬라이드 이미지 개체 틀 1">
+            <a:extLst>
+              <a:ext uri="{FF2B5EF4-FFF2-40B4-BE49-F238E27FC236}">
+                <a16:creationId xmlns:a16="http://schemas.microsoft.com/office/drawing/2014/main" id="{05134869-1347-C420-E675-DB42F837C650}"/>
+              </a:ext>
+            </a:extLst>
+          </p:cNvPr>
+          <p:cNvSpPr>
+            <a:spLocks noGrp="1" noRot="1" noChangeAspect="1"/>
+          </p:cNvSpPr>
+          <p:nvPr>
+            <p:ph type="sldImg"/>
+          </p:nvPr>
+        </p:nvSpPr>
+        <p:spPr/>
+      </p:sp>
+      <p:sp>
+        <p:nvSpPr>
+          <p:cNvPr id="3" name="슬라이드 노트 개체 틀 2">
+            <a:extLst>
+              <a:ext uri="{FF2B5EF4-FFF2-40B4-BE49-F238E27FC236}">
+                <a16:creationId xmlns:a16="http://schemas.microsoft.com/office/drawing/2014/main" id="{58639132-0F93-3BFD-46F6-E0024D135D26}"/>
+              </a:ext>
+            </a:extLst>
+          </p:cNvPr>
+          <p:cNvSpPr>
+            <a:spLocks noGrp="1"/>
+          </p:cNvSpPr>
+          <p:nvPr>
+            <p:ph type="body" idx="1"/>
+          </p:nvPr>
+        </p:nvSpPr>
+        <p:spPr/>
+        <p:txBody>
+          <a:bodyPr/>
+          <a:lstStyle/>
+          <a:p>
+            <a:endParaRPr lang="ko-KR" altLang="en-US">
+              <a:latin typeface="맑은 고딕" panose="020B0503020000020004" pitchFamily="50" charset="-127"/>
+              <a:ea typeface="맑은 고딕" panose="020B0503020000020004" pitchFamily="50" charset="-127"/>
+            </a:endParaRPr>
+          </a:p>
+        </p:txBody>
+      </p:sp>
+      <p:sp>
+        <p:nvSpPr>
+          <p:cNvPr id="4" name="슬라이드 번호 개체 틀 3">
+            <a:extLst>
+              <a:ext uri="{FF2B5EF4-FFF2-40B4-BE49-F238E27FC236}">
+                <a16:creationId xmlns:a16="http://schemas.microsoft.com/office/drawing/2014/main" id="{39D97547-9225-314A-862E-BB2DCCF13581}"/>
+              </a:ext>
+            </a:extLst>
+          </p:cNvPr>
+          <p:cNvSpPr>
+            <a:spLocks noGrp="1"/>
+          </p:cNvSpPr>
+          <p:nvPr>
+            <p:ph type="sldNum" sz="quarter" idx="5"/>
+          </p:nvPr>
+        </p:nvSpPr>
+        <p:spPr/>
+        <p:txBody>
+          <a:bodyPr/>
+          <a:lstStyle/>
+          <a:p>
+            <a:pPr rtl="0"/>
+            <a:fld id="{DF61EA0F-A667-4B49-8422-0062BC55E249}" type="slidenum">
+              <a:rPr lang="en-US" altLang="ko-KR" smtClean="0">
+                <a:latin typeface="맑은 고딕" panose="020B0503020000020004" pitchFamily="50" charset="-127"/>
+                <a:ea typeface="맑은 고딕" panose="020B0503020000020004" pitchFamily="50" charset="-127"/>
+              </a:rPr>
+              <a:t>11</a:t>
+            </a:fld>
+            <a:endParaRPr lang="ko-KR" altLang="en-US">
+              <a:latin typeface="맑은 고딕" panose="020B0503020000020004" pitchFamily="50" charset="-127"/>
+              <a:ea typeface="맑은 고딕" panose="020B0503020000020004" pitchFamily="50" charset="-127"/>
+            </a:endParaRPr>
+          </a:p>
+        </p:txBody>
+      </p:sp>
+    </p:spTree>
+    <p:extLst>
+      <p:ext uri="{BB962C8B-B14F-4D97-AF65-F5344CB8AC3E}">
+        <p14:creationId xmlns:p14="http://schemas.microsoft.com/office/powerpoint/2010/main" val="523043509"/>
+      </p:ext>
+    </p:extLst>
+  </p:cSld>
+  <p:clrMapOvr>
+    <a:masterClrMapping/>
+  </p:clrMapOvr>
+</p:notes>
+</file>
+
+<file path=ppt/notesSlides/notesSlide12.xml><?xml version="1.0" encoding="utf-8"?>
+<p:notes xmlns:a="http://schemas.openxmlformats.org/drawingml/2006/main" xmlns:r="http://schemas.openxmlformats.org/officeDocument/2006/relationships" xmlns:p="http://schemas.openxmlformats.org/presentationml/2006/main">
+  <p:cSld>
+    <p:spTree>
+      <p:nvGrpSpPr>
+        <p:cNvPr id="1" name="">
+          <a:extLst>
+            <a:ext uri="{FF2B5EF4-FFF2-40B4-BE49-F238E27FC236}">
               <a16:creationId xmlns:a16="http://schemas.microsoft.com/office/drawing/2014/main" id="{E8350642-FEAD-FDCD-55AD-4A2F649AABAF}"/>
             </a:ext>
           </a:extLst>
@@ -960,7 +1200,7 @@
                 <a:latin typeface="맑은 고딕" panose="020B0503020000020004" pitchFamily="50" charset="-127"/>
                 <a:ea typeface="맑은 고딕" panose="020B0503020000020004" pitchFamily="50" charset="-127"/>
               </a:rPr>
-              <a:t>10</a:t>
+              <a:t>12</a:t>
             </a:fld>
             <a:endParaRPr lang="ko-KR" altLang="en-US">
               <a:latin typeface="맑은 고딕" panose="020B0503020000020004" pitchFamily="50" charset="-127"/>
@@ -982,7 +1222,7 @@
 </p:notes>
 </file>
 
-<file path=ppt/notesSlides/notesSlide11.xml><?xml version="1.0" encoding="utf-8"?>
+<file path=ppt/notesSlides/notesSlide13.xml><?xml version="1.0" encoding="utf-8"?>
 <p:notes xmlns:a="http://schemas.openxmlformats.org/drawingml/2006/main" xmlns:r="http://schemas.openxmlformats.org/officeDocument/2006/relationships" xmlns:p="http://schemas.openxmlformats.org/presentationml/2006/main">
   <p:cSld>
     <p:spTree>
@@ -1078,7 +1318,7 @@
                 <a:latin typeface="맑은 고딕" panose="020B0503020000020004" pitchFamily="50" charset="-127"/>
                 <a:ea typeface="맑은 고딕" panose="020B0503020000020004" pitchFamily="50" charset="-127"/>
               </a:rPr>
-              <a:t>11</a:t>
+              <a:t>13</a:t>
             </a:fld>
             <a:endParaRPr lang="ko-KR" altLang="en-US">
               <a:latin typeface="맑은 고딕" panose="020B0503020000020004" pitchFamily="50" charset="-127"/>
@@ -1100,7 +1340,7 @@
 </p:notes>
 </file>
 
-<file path=ppt/notesSlides/notesSlide12.xml><?xml version="1.0" encoding="utf-8"?>
+<file path=ppt/notesSlides/notesSlide14.xml><?xml version="1.0" encoding="utf-8"?>
 <p:notes xmlns:a="http://schemas.openxmlformats.org/drawingml/2006/main" xmlns:r="http://schemas.openxmlformats.org/officeDocument/2006/relationships" xmlns:p="http://schemas.openxmlformats.org/presentationml/2006/main">
   <p:cSld>
     <p:spTree>
@@ -1196,7 +1436,7 @@
                 <a:latin typeface="맑은 고딕" panose="020B0503020000020004" pitchFamily="50" charset="-127"/>
                 <a:ea typeface="맑은 고딕" panose="020B0503020000020004" pitchFamily="50" charset="-127"/>
               </a:rPr>
-              <a:t>12</a:t>
+              <a:t>14</a:t>
             </a:fld>
             <a:endParaRPr lang="ko-KR" altLang="en-US">
               <a:latin typeface="맑은 고딕" panose="020B0503020000020004" pitchFamily="50" charset="-127"/>
@@ -1218,7 +1458,7 @@
 </p:notes>
 </file>
 
-<file path=ppt/notesSlides/notesSlide13.xml><?xml version="1.0" encoding="utf-8"?>
+<file path=ppt/notesSlides/notesSlide15.xml><?xml version="1.0" encoding="utf-8"?>
 <p:notes xmlns:a="http://schemas.openxmlformats.org/drawingml/2006/main" xmlns:r="http://schemas.openxmlformats.org/officeDocument/2006/relationships" xmlns:p="http://schemas.openxmlformats.org/presentationml/2006/main">
   <p:cSld>
     <p:spTree>
@@ -1314,7 +1554,7 @@
                 <a:latin typeface="맑은 고딕" panose="020B0503020000020004" pitchFamily="50" charset="-127"/>
                 <a:ea typeface="맑은 고딕" panose="020B0503020000020004" pitchFamily="50" charset="-127"/>
               </a:rPr>
-              <a:t>13</a:t>
+              <a:t>15</a:t>
             </a:fld>
             <a:endParaRPr lang="ko-KR" altLang="en-US">
               <a:latin typeface="맑은 고딕" panose="020B0503020000020004" pitchFamily="50" charset="-127"/>
@@ -1336,7 +1576,7 @@
 </p:notes>
 </file>
 
-<file path=ppt/notesSlides/notesSlide14.xml><?xml version="1.0" encoding="utf-8"?>
+<file path=ppt/notesSlides/notesSlide16.xml><?xml version="1.0" encoding="utf-8"?>
 <p:notes xmlns:a="http://schemas.openxmlformats.org/drawingml/2006/main" xmlns:r="http://schemas.openxmlformats.org/officeDocument/2006/relationships" xmlns:p="http://schemas.openxmlformats.org/presentationml/2006/main">
   <p:cSld>
     <p:spTree>
@@ -1432,7 +1672,7 @@
                 <a:latin typeface="맑은 고딕" panose="020B0503020000020004" pitchFamily="50" charset="-127"/>
                 <a:ea typeface="맑은 고딕" panose="020B0503020000020004" pitchFamily="50" charset="-127"/>
               </a:rPr>
-              <a:t>14</a:t>
+              <a:t>16</a:t>
             </a:fld>
             <a:endParaRPr lang="ko-KR" altLang="en-US">
               <a:latin typeface="맑은 고딕" panose="020B0503020000020004" pitchFamily="50" charset="-127"/>
@@ -1454,7 +1694,7 @@
 </p:notes>
 </file>
 
-<file path=ppt/notesSlides/notesSlide15.xml><?xml version="1.0" encoding="utf-8"?>
+<file path=ppt/notesSlides/notesSlide17.xml><?xml version="1.0" encoding="utf-8"?>
 <p:notes xmlns:a="http://schemas.openxmlformats.org/drawingml/2006/main" xmlns:r="http://schemas.openxmlformats.org/officeDocument/2006/relationships" xmlns:p="http://schemas.openxmlformats.org/presentationml/2006/main">
   <p:cSld>
     <p:spTree>
@@ -1550,7 +1790,7 @@
                 <a:latin typeface="맑은 고딕" panose="020B0503020000020004" pitchFamily="50" charset="-127"/>
                 <a:ea typeface="맑은 고딕" panose="020B0503020000020004" pitchFamily="50" charset="-127"/>
               </a:rPr>
-              <a:t>15</a:t>
+              <a:t>17</a:t>
             </a:fld>
             <a:endParaRPr lang="ko-KR" altLang="en-US">
               <a:latin typeface="맑은 고딕" panose="020B0503020000020004" pitchFamily="50" charset="-127"/>
@@ -1572,7 +1812,7 @@
 </p:notes>
 </file>
 
-<file path=ppt/notesSlides/notesSlide16.xml><?xml version="1.0" encoding="utf-8"?>
+<file path=ppt/notesSlides/notesSlide18.xml><?xml version="1.0" encoding="utf-8"?>
 <p:notes xmlns:a="http://schemas.openxmlformats.org/drawingml/2006/main" xmlns:r="http://schemas.openxmlformats.org/officeDocument/2006/relationships" xmlns:p="http://schemas.openxmlformats.org/presentationml/2006/main">
   <p:cSld>
     <p:spTree>
@@ -1668,7 +1908,7 @@
                 <a:latin typeface="맑은 고딕" panose="020B0503020000020004" pitchFamily="50" charset="-127"/>
                 <a:ea typeface="맑은 고딕" panose="020B0503020000020004" pitchFamily="50" charset="-127"/>
               </a:rPr>
-              <a:t>16</a:t>
+              <a:t>18</a:t>
             </a:fld>
             <a:endParaRPr lang="ko-KR" altLang="en-US">
               <a:latin typeface="맑은 고딕" panose="020B0503020000020004" pitchFamily="50" charset="-127"/>
@@ -1690,7 +1930,7 @@
 </p:notes>
 </file>
 
-<file path=ppt/notesSlides/notesSlide17.xml><?xml version="1.0" encoding="utf-8"?>
+<file path=ppt/notesSlides/notesSlide19.xml><?xml version="1.0" encoding="utf-8"?>
 <p:notes xmlns:a="http://schemas.openxmlformats.org/drawingml/2006/main" xmlns:r="http://schemas.openxmlformats.org/officeDocument/2006/relationships" xmlns:p="http://schemas.openxmlformats.org/presentationml/2006/main">
   <p:cSld>
     <p:spTree>
@@ -1786,7 +2026,7 @@
                 <a:latin typeface="맑은 고딕" panose="020B0503020000020004" pitchFamily="50" charset="-127"/>
                 <a:ea typeface="맑은 고딕" panose="020B0503020000020004" pitchFamily="50" charset="-127"/>
               </a:rPr>
-              <a:t>17</a:t>
+              <a:t>19</a:t>
             </a:fld>
             <a:endParaRPr lang="ko-KR" altLang="en-US">
               <a:latin typeface="맑은 고딕" panose="020B0503020000020004" pitchFamily="50" charset="-127"/>
@@ -1799,242 +2039,6 @@
     <p:extLst>
       <p:ext uri="{BB962C8B-B14F-4D97-AF65-F5344CB8AC3E}">
         <p14:creationId xmlns:p14="http://schemas.microsoft.com/office/powerpoint/2010/main" val="32485330"/>
-      </p:ext>
-    </p:extLst>
-  </p:cSld>
-  <p:clrMapOvr>
-    <a:masterClrMapping/>
-  </p:clrMapOvr>
-</p:notes>
-</file>
-
-<file path=ppt/notesSlides/notesSlide18.xml><?xml version="1.0" encoding="utf-8"?>
-<p:notes xmlns:a="http://schemas.openxmlformats.org/drawingml/2006/main" xmlns:r="http://schemas.openxmlformats.org/officeDocument/2006/relationships" xmlns:p="http://schemas.openxmlformats.org/presentationml/2006/main">
-  <p:cSld>
-    <p:spTree>
-      <p:nvGrpSpPr>
-        <p:cNvPr id="1" name="">
-          <a:extLst>
-            <a:ext uri="{FF2B5EF4-FFF2-40B4-BE49-F238E27FC236}">
-              <a16:creationId xmlns:a16="http://schemas.microsoft.com/office/drawing/2014/main" id="{7FF65D33-DDE8-EACB-37E5-9C4DECB7F3A9}"/>
-            </a:ext>
-          </a:extLst>
-        </p:cNvPr>
-        <p:cNvGrpSpPr/>
-        <p:nvPr/>
-      </p:nvGrpSpPr>
-      <p:grpSpPr>
-        <a:xfrm>
-          <a:off x="0" y="0"/>
-          <a:ext cx="0" cy="0"/>
-          <a:chOff x="0" y="0"/>
-          <a:chExt cx="0" cy="0"/>
-        </a:xfrm>
-      </p:grpSpPr>
-      <p:sp>
-        <p:nvSpPr>
-          <p:cNvPr id="2" name="슬라이드 이미지 개체 틀 1">
-            <a:extLst>
-              <a:ext uri="{FF2B5EF4-FFF2-40B4-BE49-F238E27FC236}">
-                <a16:creationId xmlns:a16="http://schemas.microsoft.com/office/drawing/2014/main" id="{0DF7A66D-30C6-63CC-A81A-DF80F877B48B}"/>
-              </a:ext>
-            </a:extLst>
-          </p:cNvPr>
-          <p:cNvSpPr>
-            <a:spLocks noGrp="1" noRot="1" noChangeAspect="1"/>
-          </p:cNvSpPr>
-          <p:nvPr>
-            <p:ph type="sldImg"/>
-          </p:nvPr>
-        </p:nvSpPr>
-        <p:spPr/>
-      </p:sp>
-      <p:sp>
-        <p:nvSpPr>
-          <p:cNvPr id="3" name="슬라이드 노트 개체 틀 2">
-            <a:extLst>
-              <a:ext uri="{FF2B5EF4-FFF2-40B4-BE49-F238E27FC236}">
-                <a16:creationId xmlns:a16="http://schemas.microsoft.com/office/drawing/2014/main" id="{B4B1DAC1-FD13-F776-B02D-2100070F9096}"/>
-              </a:ext>
-            </a:extLst>
-          </p:cNvPr>
-          <p:cNvSpPr>
-            <a:spLocks noGrp="1"/>
-          </p:cNvSpPr>
-          <p:nvPr>
-            <p:ph type="body" idx="1"/>
-          </p:nvPr>
-        </p:nvSpPr>
-        <p:spPr/>
-        <p:txBody>
-          <a:bodyPr/>
-          <a:lstStyle/>
-          <a:p>
-            <a:endParaRPr lang="ko-KR" altLang="en-US">
-              <a:latin typeface="맑은 고딕" panose="020B0503020000020004" pitchFamily="50" charset="-127"/>
-              <a:ea typeface="맑은 고딕" panose="020B0503020000020004" pitchFamily="50" charset="-127"/>
-            </a:endParaRPr>
-          </a:p>
-        </p:txBody>
-      </p:sp>
-      <p:sp>
-        <p:nvSpPr>
-          <p:cNvPr id="4" name="슬라이드 번호 개체 틀 3">
-            <a:extLst>
-              <a:ext uri="{FF2B5EF4-FFF2-40B4-BE49-F238E27FC236}">
-                <a16:creationId xmlns:a16="http://schemas.microsoft.com/office/drawing/2014/main" id="{5BD2DD74-E650-75F1-4D5C-EC7ED18FFF7F}"/>
-              </a:ext>
-            </a:extLst>
-          </p:cNvPr>
-          <p:cNvSpPr>
-            <a:spLocks noGrp="1"/>
-          </p:cNvSpPr>
-          <p:nvPr>
-            <p:ph type="sldNum" sz="quarter" idx="5"/>
-          </p:nvPr>
-        </p:nvSpPr>
-        <p:spPr/>
-        <p:txBody>
-          <a:bodyPr/>
-          <a:lstStyle/>
-          <a:p>
-            <a:pPr rtl="0"/>
-            <a:fld id="{DF61EA0F-A667-4B49-8422-0062BC55E249}" type="slidenum">
-              <a:rPr lang="en-US" altLang="ko-KR" smtClean="0">
-                <a:latin typeface="맑은 고딕" panose="020B0503020000020004" pitchFamily="50" charset="-127"/>
-                <a:ea typeface="맑은 고딕" panose="020B0503020000020004" pitchFamily="50" charset="-127"/>
-              </a:rPr>
-              <a:t>18</a:t>
-            </a:fld>
-            <a:endParaRPr lang="ko-KR" altLang="en-US">
-              <a:latin typeface="맑은 고딕" panose="020B0503020000020004" pitchFamily="50" charset="-127"/>
-              <a:ea typeface="맑은 고딕" panose="020B0503020000020004" pitchFamily="50" charset="-127"/>
-            </a:endParaRPr>
-          </a:p>
-        </p:txBody>
-      </p:sp>
-    </p:spTree>
-    <p:extLst>
-      <p:ext uri="{BB962C8B-B14F-4D97-AF65-F5344CB8AC3E}">
-        <p14:creationId xmlns:p14="http://schemas.microsoft.com/office/powerpoint/2010/main" val="215575735"/>
-      </p:ext>
-    </p:extLst>
-  </p:cSld>
-  <p:clrMapOvr>
-    <a:masterClrMapping/>
-  </p:clrMapOvr>
-</p:notes>
-</file>
-
-<file path=ppt/notesSlides/notesSlide19.xml><?xml version="1.0" encoding="utf-8"?>
-<p:notes xmlns:a="http://schemas.openxmlformats.org/drawingml/2006/main" xmlns:r="http://schemas.openxmlformats.org/officeDocument/2006/relationships" xmlns:p="http://schemas.openxmlformats.org/presentationml/2006/main">
-  <p:cSld>
-    <p:spTree>
-      <p:nvGrpSpPr>
-        <p:cNvPr id="1" name="">
-          <a:extLst>
-            <a:ext uri="{FF2B5EF4-FFF2-40B4-BE49-F238E27FC236}">
-              <a16:creationId xmlns:a16="http://schemas.microsoft.com/office/drawing/2014/main" id="{B83D80B1-B43F-3FCA-4001-5FDBF6772D00}"/>
-            </a:ext>
-          </a:extLst>
-        </p:cNvPr>
-        <p:cNvGrpSpPr/>
-        <p:nvPr/>
-      </p:nvGrpSpPr>
-      <p:grpSpPr>
-        <a:xfrm>
-          <a:off x="0" y="0"/>
-          <a:ext cx="0" cy="0"/>
-          <a:chOff x="0" y="0"/>
-          <a:chExt cx="0" cy="0"/>
-        </a:xfrm>
-      </p:grpSpPr>
-      <p:sp>
-        <p:nvSpPr>
-          <p:cNvPr id="2" name="슬라이드 이미지 개체 틀 1">
-            <a:extLst>
-              <a:ext uri="{FF2B5EF4-FFF2-40B4-BE49-F238E27FC236}">
-                <a16:creationId xmlns:a16="http://schemas.microsoft.com/office/drawing/2014/main" id="{07D35C7F-BC5F-30EA-B345-0736436D15BA}"/>
-              </a:ext>
-            </a:extLst>
-          </p:cNvPr>
-          <p:cNvSpPr>
-            <a:spLocks noGrp="1" noRot="1" noChangeAspect="1"/>
-          </p:cNvSpPr>
-          <p:nvPr>
-            <p:ph type="sldImg"/>
-          </p:nvPr>
-        </p:nvSpPr>
-        <p:spPr/>
-      </p:sp>
-      <p:sp>
-        <p:nvSpPr>
-          <p:cNvPr id="3" name="슬라이드 노트 개체 틀 2">
-            <a:extLst>
-              <a:ext uri="{FF2B5EF4-FFF2-40B4-BE49-F238E27FC236}">
-                <a16:creationId xmlns:a16="http://schemas.microsoft.com/office/drawing/2014/main" id="{481EE87D-F4C4-1040-9EFE-D8FA11EAF0C5}"/>
-              </a:ext>
-            </a:extLst>
-          </p:cNvPr>
-          <p:cNvSpPr>
-            <a:spLocks noGrp="1"/>
-          </p:cNvSpPr>
-          <p:nvPr>
-            <p:ph type="body" idx="1"/>
-          </p:nvPr>
-        </p:nvSpPr>
-        <p:spPr/>
-        <p:txBody>
-          <a:bodyPr/>
-          <a:lstStyle/>
-          <a:p>
-            <a:endParaRPr lang="ko-KR" altLang="en-US">
-              <a:latin typeface="맑은 고딕" panose="020B0503020000020004" pitchFamily="50" charset="-127"/>
-              <a:ea typeface="맑은 고딕" panose="020B0503020000020004" pitchFamily="50" charset="-127"/>
-            </a:endParaRPr>
-          </a:p>
-        </p:txBody>
-      </p:sp>
-      <p:sp>
-        <p:nvSpPr>
-          <p:cNvPr id="4" name="슬라이드 번호 개체 틀 3">
-            <a:extLst>
-              <a:ext uri="{FF2B5EF4-FFF2-40B4-BE49-F238E27FC236}">
-                <a16:creationId xmlns:a16="http://schemas.microsoft.com/office/drawing/2014/main" id="{53B62F6C-E88A-6995-6270-EFEB46B6AC9F}"/>
-              </a:ext>
-            </a:extLst>
-          </p:cNvPr>
-          <p:cNvSpPr>
-            <a:spLocks noGrp="1"/>
-          </p:cNvSpPr>
-          <p:nvPr>
-            <p:ph type="sldNum" sz="quarter" idx="5"/>
-          </p:nvPr>
-        </p:nvSpPr>
-        <p:spPr/>
-        <p:txBody>
-          <a:bodyPr/>
-          <a:lstStyle/>
-          <a:p>
-            <a:pPr rtl="0"/>
-            <a:fld id="{DF61EA0F-A667-4B49-8422-0062BC55E249}" type="slidenum">
-              <a:rPr lang="en-US" altLang="ko-KR" smtClean="0">
-                <a:latin typeface="맑은 고딕" panose="020B0503020000020004" pitchFamily="50" charset="-127"/>
-                <a:ea typeface="맑은 고딕" panose="020B0503020000020004" pitchFamily="50" charset="-127"/>
-              </a:rPr>
-              <a:t>19</a:t>
-            </a:fld>
-            <a:endParaRPr lang="ko-KR" altLang="en-US">
-              <a:latin typeface="맑은 고딕" panose="020B0503020000020004" pitchFamily="50" charset="-127"/>
-              <a:ea typeface="맑은 고딕" panose="020B0503020000020004" pitchFamily="50" charset="-127"/>
-            </a:endParaRPr>
-          </a:p>
-        </p:txBody>
-      </p:sp>
-    </p:spTree>
-    <p:extLst>
-      <p:ext uri="{BB962C8B-B14F-4D97-AF65-F5344CB8AC3E}">
-        <p14:creationId xmlns:p14="http://schemas.microsoft.com/office/powerpoint/2010/main" val="999563067"/>
       </p:ext>
     </p:extLst>
   </p:cSld>
@@ -2170,6 +2174,242 @@
         <p:cNvPr id="1" name="">
           <a:extLst>
             <a:ext uri="{FF2B5EF4-FFF2-40B4-BE49-F238E27FC236}">
+              <a16:creationId xmlns:a16="http://schemas.microsoft.com/office/drawing/2014/main" id="{7FF65D33-DDE8-EACB-37E5-9C4DECB7F3A9}"/>
+            </a:ext>
+          </a:extLst>
+        </p:cNvPr>
+        <p:cNvGrpSpPr/>
+        <p:nvPr/>
+      </p:nvGrpSpPr>
+      <p:grpSpPr>
+        <a:xfrm>
+          <a:off x="0" y="0"/>
+          <a:ext cx="0" cy="0"/>
+          <a:chOff x="0" y="0"/>
+          <a:chExt cx="0" cy="0"/>
+        </a:xfrm>
+      </p:grpSpPr>
+      <p:sp>
+        <p:nvSpPr>
+          <p:cNvPr id="2" name="슬라이드 이미지 개체 틀 1">
+            <a:extLst>
+              <a:ext uri="{FF2B5EF4-FFF2-40B4-BE49-F238E27FC236}">
+                <a16:creationId xmlns:a16="http://schemas.microsoft.com/office/drawing/2014/main" id="{0DF7A66D-30C6-63CC-A81A-DF80F877B48B}"/>
+              </a:ext>
+            </a:extLst>
+          </p:cNvPr>
+          <p:cNvSpPr>
+            <a:spLocks noGrp="1" noRot="1" noChangeAspect="1"/>
+          </p:cNvSpPr>
+          <p:nvPr>
+            <p:ph type="sldImg"/>
+          </p:nvPr>
+        </p:nvSpPr>
+        <p:spPr/>
+      </p:sp>
+      <p:sp>
+        <p:nvSpPr>
+          <p:cNvPr id="3" name="슬라이드 노트 개체 틀 2">
+            <a:extLst>
+              <a:ext uri="{FF2B5EF4-FFF2-40B4-BE49-F238E27FC236}">
+                <a16:creationId xmlns:a16="http://schemas.microsoft.com/office/drawing/2014/main" id="{B4B1DAC1-FD13-F776-B02D-2100070F9096}"/>
+              </a:ext>
+            </a:extLst>
+          </p:cNvPr>
+          <p:cNvSpPr>
+            <a:spLocks noGrp="1"/>
+          </p:cNvSpPr>
+          <p:nvPr>
+            <p:ph type="body" idx="1"/>
+          </p:nvPr>
+        </p:nvSpPr>
+        <p:spPr/>
+        <p:txBody>
+          <a:bodyPr/>
+          <a:lstStyle/>
+          <a:p>
+            <a:endParaRPr lang="ko-KR" altLang="en-US">
+              <a:latin typeface="맑은 고딕" panose="020B0503020000020004" pitchFamily="50" charset="-127"/>
+              <a:ea typeface="맑은 고딕" panose="020B0503020000020004" pitchFamily="50" charset="-127"/>
+            </a:endParaRPr>
+          </a:p>
+        </p:txBody>
+      </p:sp>
+      <p:sp>
+        <p:nvSpPr>
+          <p:cNvPr id="4" name="슬라이드 번호 개체 틀 3">
+            <a:extLst>
+              <a:ext uri="{FF2B5EF4-FFF2-40B4-BE49-F238E27FC236}">
+                <a16:creationId xmlns:a16="http://schemas.microsoft.com/office/drawing/2014/main" id="{5BD2DD74-E650-75F1-4D5C-EC7ED18FFF7F}"/>
+              </a:ext>
+            </a:extLst>
+          </p:cNvPr>
+          <p:cNvSpPr>
+            <a:spLocks noGrp="1"/>
+          </p:cNvSpPr>
+          <p:nvPr>
+            <p:ph type="sldNum" sz="quarter" idx="5"/>
+          </p:nvPr>
+        </p:nvSpPr>
+        <p:spPr/>
+        <p:txBody>
+          <a:bodyPr/>
+          <a:lstStyle/>
+          <a:p>
+            <a:pPr rtl="0"/>
+            <a:fld id="{DF61EA0F-A667-4B49-8422-0062BC55E249}" type="slidenum">
+              <a:rPr lang="en-US" altLang="ko-KR" smtClean="0">
+                <a:latin typeface="맑은 고딕" panose="020B0503020000020004" pitchFamily="50" charset="-127"/>
+                <a:ea typeface="맑은 고딕" panose="020B0503020000020004" pitchFamily="50" charset="-127"/>
+              </a:rPr>
+              <a:t>20</a:t>
+            </a:fld>
+            <a:endParaRPr lang="ko-KR" altLang="en-US">
+              <a:latin typeface="맑은 고딕" panose="020B0503020000020004" pitchFamily="50" charset="-127"/>
+              <a:ea typeface="맑은 고딕" panose="020B0503020000020004" pitchFamily="50" charset="-127"/>
+            </a:endParaRPr>
+          </a:p>
+        </p:txBody>
+      </p:sp>
+    </p:spTree>
+    <p:extLst>
+      <p:ext uri="{BB962C8B-B14F-4D97-AF65-F5344CB8AC3E}">
+        <p14:creationId xmlns:p14="http://schemas.microsoft.com/office/powerpoint/2010/main" val="215575735"/>
+      </p:ext>
+    </p:extLst>
+  </p:cSld>
+  <p:clrMapOvr>
+    <a:masterClrMapping/>
+  </p:clrMapOvr>
+</p:notes>
+</file>
+
+<file path=ppt/notesSlides/notesSlide21.xml><?xml version="1.0" encoding="utf-8"?>
+<p:notes xmlns:a="http://schemas.openxmlformats.org/drawingml/2006/main" xmlns:r="http://schemas.openxmlformats.org/officeDocument/2006/relationships" xmlns:p="http://schemas.openxmlformats.org/presentationml/2006/main">
+  <p:cSld>
+    <p:spTree>
+      <p:nvGrpSpPr>
+        <p:cNvPr id="1" name="">
+          <a:extLst>
+            <a:ext uri="{FF2B5EF4-FFF2-40B4-BE49-F238E27FC236}">
+              <a16:creationId xmlns:a16="http://schemas.microsoft.com/office/drawing/2014/main" id="{B83D80B1-B43F-3FCA-4001-5FDBF6772D00}"/>
+            </a:ext>
+          </a:extLst>
+        </p:cNvPr>
+        <p:cNvGrpSpPr/>
+        <p:nvPr/>
+      </p:nvGrpSpPr>
+      <p:grpSpPr>
+        <a:xfrm>
+          <a:off x="0" y="0"/>
+          <a:ext cx="0" cy="0"/>
+          <a:chOff x="0" y="0"/>
+          <a:chExt cx="0" cy="0"/>
+        </a:xfrm>
+      </p:grpSpPr>
+      <p:sp>
+        <p:nvSpPr>
+          <p:cNvPr id="2" name="슬라이드 이미지 개체 틀 1">
+            <a:extLst>
+              <a:ext uri="{FF2B5EF4-FFF2-40B4-BE49-F238E27FC236}">
+                <a16:creationId xmlns:a16="http://schemas.microsoft.com/office/drawing/2014/main" id="{07D35C7F-BC5F-30EA-B345-0736436D15BA}"/>
+              </a:ext>
+            </a:extLst>
+          </p:cNvPr>
+          <p:cNvSpPr>
+            <a:spLocks noGrp="1" noRot="1" noChangeAspect="1"/>
+          </p:cNvSpPr>
+          <p:nvPr>
+            <p:ph type="sldImg"/>
+          </p:nvPr>
+        </p:nvSpPr>
+        <p:spPr/>
+      </p:sp>
+      <p:sp>
+        <p:nvSpPr>
+          <p:cNvPr id="3" name="슬라이드 노트 개체 틀 2">
+            <a:extLst>
+              <a:ext uri="{FF2B5EF4-FFF2-40B4-BE49-F238E27FC236}">
+                <a16:creationId xmlns:a16="http://schemas.microsoft.com/office/drawing/2014/main" id="{481EE87D-F4C4-1040-9EFE-D8FA11EAF0C5}"/>
+              </a:ext>
+            </a:extLst>
+          </p:cNvPr>
+          <p:cNvSpPr>
+            <a:spLocks noGrp="1"/>
+          </p:cNvSpPr>
+          <p:nvPr>
+            <p:ph type="body" idx="1"/>
+          </p:nvPr>
+        </p:nvSpPr>
+        <p:spPr/>
+        <p:txBody>
+          <a:bodyPr/>
+          <a:lstStyle/>
+          <a:p>
+            <a:endParaRPr lang="ko-KR" altLang="en-US">
+              <a:latin typeface="맑은 고딕" panose="020B0503020000020004" pitchFamily="50" charset="-127"/>
+              <a:ea typeface="맑은 고딕" panose="020B0503020000020004" pitchFamily="50" charset="-127"/>
+            </a:endParaRPr>
+          </a:p>
+        </p:txBody>
+      </p:sp>
+      <p:sp>
+        <p:nvSpPr>
+          <p:cNvPr id="4" name="슬라이드 번호 개체 틀 3">
+            <a:extLst>
+              <a:ext uri="{FF2B5EF4-FFF2-40B4-BE49-F238E27FC236}">
+                <a16:creationId xmlns:a16="http://schemas.microsoft.com/office/drawing/2014/main" id="{53B62F6C-E88A-6995-6270-EFEB46B6AC9F}"/>
+              </a:ext>
+            </a:extLst>
+          </p:cNvPr>
+          <p:cNvSpPr>
+            <a:spLocks noGrp="1"/>
+          </p:cNvSpPr>
+          <p:nvPr>
+            <p:ph type="sldNum" sz="quarter" idx="5"/>
+          </p:nvPr>
+        </p:nvSpPr>
+        <p:spPr/>
+        <p:txBody>
+          <a:bodyPr/>
+          <a:lstStyle/>
+          <a:p>
+            <a:pPr rtl="0"/>
+            <a:fld id="{DF61EA0F-A667-4B49-8422-0062BC55E249}" type="slidenum">
+              <a:rPr lang="en-US" altLang="ko-KR" smtClean="0">
+                <a:latin typeface="맑은 고딕" panose="020B0503020000020004" pitchFamily="50" charset="-127"/>
+                <a:ea typeface="맑은 고딕" panose="020B0503020000020004" pitchFamily="50" charset="-127"/>
+              </a:rPr>
+              <a:t>21</a:t>
+            </a:fld>
+            <a:endParaRPr lang="ko-KR" altLang="en-US">
+              <a:latin typeface="맑은 고딕" panose="020B0503020000020004" pitchFamily="50" charset="-127"/>
+              <a:ea typeface="맑은 고딕" panose="020B0503020000020004" pitchFamily="50" charset="-127"/>
+            </a:endParaRPr>
+          </a:p>
+        </p:txBody>
+      </p:sp>
+    </p:spTree>
+    <p:extLst>
+      <p:ext uri="{BB962C8B-B14F-4D97-AF65-F5344CB8AC3E}">
+        <p14:creationId xmlns:p14="http://schemas.microsoft.com/office/powerpoint/2010/main" val="999563067"/>
+      </p:ext>
+    </p:extLst>
+  </p:cSld>
+  <p:clrMapOvr>
+    <a:masterClrMapping/>
+  </p:clrMapOvr>
+</p:notes>
+</file>
+
+<file path=ppt/notesSlides/notesSlide22.xml><?xml version="1.0" encoding="utf-8"?>
+<p:notes xmlns:a="http://schemas.openxmlformats.org/drawingml/2006/main" xmlns:r="http://schemas.openxmlformats.org/officeDocument/2006/relationships" xmlns:p="http://schemas.openxmlformats.org/presentationml/2006/main">
+  <p:cSld>
+    <p:spTree>
+      <p:nvGrpSpPr>
+        <p:cNvPr id="1" name="">
+          <a:extLst>
+            <a:ext uri="{FF2B5EF4-FFF2-40B4-BE49-F238E27FC236}">
               <a16:creationId xmlns:a16="http://schemas.microsoft.com/office/drawing/2014/main" id="{B97673F5-2EC9-097B-D15A-A9C43E00FC23}"/>
             </a:ext>
           </a:extLst>
@@ -2258,7 +2498,7 @@
                 <a:latin typeface="맑은 고딕" panose="020B0503020000020004" pitchFamily="50" charset="-127"/>
                 <a:ea typeface="맑은 고딕" panose="020B0503020000020004" pitchFamily="50" charset="-127"/>
               </a:rPr>
-              <a:t>20</a:t>
+              <a:t>22</a:t>
             </a:fld>
             <a:endParaRPr lang="ko-KR" altLang="en-US">
               <a:latin typeface="맑은 고딕" panose="020B0503020000020004" pitchFamily="50" charset="-127"/>
@@ -2280,7 +2520,7 @@
 </p:notes>
 </file>
 
-<file path=ppt/notesSlides/notesSlide21.xml><?xml version="1.0" encoding="utf-8"?>
+<file path=ppt/notesSlides/notesSlide23.xml><?xml version="1.0" encoding="utf-8"?>
 <p:notes xmlns:a="http://schemas.openxmlformats.org/drawingml/2006/main" xmlns:r="http://schemas.openxmlformats.org/officeDocument/2006/relationships" xmlns:p="http://schemas.openxmlformats.org/presentationml/2006/main">
   <p:cSld>
     <p:spTree>
@@ -2376,7 +2616,7 @@
                 <a:latin typeface="맑은 고딕" panose="020B0503020000020004" pitchFamily="50" charset="-127"/>
                 <a:ea typeface="맑은 고딕" panose="020B0503020000020004" pitchFamily="50" charset="-127"/>
               </a:rPr>
-              <a:t>21</a:t>
+              <a:t>23</a:t>
             </a:fld>
             <a:endParaRPr lang="ko-KR" altLang="en-US">
               <a:latin typeface="맑은 고딕" panose="020B0503020000020004" pitchFamily="50" charset="-127"/>
@@ -2398,7 +2638,7 @@
 </p:notes>
 </file>
 
-<file path=ppt/notesSlides/notesSlide22.xml><?xml version="1.0" encoding="utf-8"?>
+<file path=ppt/notesSlides/notesSlide24.xml><?xml version="1.0" encoding="utf-8"?>
 <p:notes xmlns:a="http://schemas.openxmlformats.org/drawingml/2006/main" xmlns:r="http://schemas.openxmlformats.org/officeDocument/2006/relationships" xmlns:p="http://schemas.openxmlformats.org/presentationml/2006/main">
   <p:cSld>
     <p:spTree>
@@ -2494,7 +2734,7 @@
                 <a:latin typeface="맑은 고딕" panose="020B0503020000020004" pitchFamily="50" charset="-127"/>
                 <a:ea typeface="맑은 고딕" panose="020B0503020000020004" pitchFamily="50" charset="-127"/>
               </a:rPr>
-              <a:t>22</a:t>
+              <a:t>24</a:t>
             </a:fld>
             <a:endParaRPr lang="ko-KR" altLang="en-US">
               <a:latin typeface="맑은 고딕" panose="020B0503020000020004" pitchFamily="50" charset="-127"/>
@@ -2516,7 +2756,7 @@
 </p:notes>
 </file>
 
-<file path=ppt/notesSlides/notesSlide23.xml><?xml version="1.0" encoding="utf-8"?>
+<file path=ppt/notesSlides/notesSlide25.xml><?xml version="1.0" encoding="utf-8"?>
 <p:notes xmlns:a="http://schemas.openxmlformats.org/drawingml/2006/main" xmlns:r="http://schemas.openxmlformats.org/officeDocument/2006/relationships" xmlns:p="http://schemas.openxmlformats.org/presentationml/2006/main">
   <p:cSld>
     <p:spTree>
@@ -2612,7 +2852,7 @@
                 <a:latin typeface="맑은 고딕" panose="020B0503020000020004" pitchFamily="50" charset="-127"/>
                 <a:ea typeface="맑은 고딕" panose="020B0503020000020004" pitchFamily="50" charset="-127"/>
               </a:rPr>
-              <a:t>23</a:t>
+              <a:t>25</a:t>
             </a:fld>
             <a:endParaRPr lang="ko-KR" altLang="en-US">
               <a:latin typeface="맑은 고딕" panose="020B0503020000020004" pitchFamily="50" charset="-127"/>
@@ -2634,7 +2874,7 @@
 </p:notes>
 </file>
 
-<file path=ppt/notesSlides/notesSlide24.xml><?xml version="1.0" encoding="utf-8"?>
+<file path=ppt/notesSlides/notesSlide26.xml><?xml version="1.0" encoding="utf-8"?>
 <p:notes xmlns:a="http://schemas.openxmlformats.org/drawingml/2006/main" xmlns:r="http://schemas.openxmlformats.org/officeDocument/2006/relationships" xmlns:p="http://schemas.openxmlformats.org/presentationml/2006/main">
   <p:cSld>
     <p:spTree>
@@ -2730,7 +2970,7 @@
                 <a:latin typeface="맑은 고딕" panose="020B0503020000020004" pitchFamily="50" charset="-127"/>
                 <a:ea typeface="맑은 고딕" panose="020B0503020000020004" pitchFamily="50" charset="-127"/>
               </a:rPr>
-              <a:t>24</a:t>
+              <a:t>26</a:t>
             </a:fld>
             <a:endParaRPr lang="ko-KR" altLang="en-US">
               <a:latin typeface="맑은 고딕" panose="020B0503020000020004" pitchFamily="50" charset="-127"/>
@@ -2752,7 +2992,7 @@
 </p:notes>
 </file>
 
-<file path=ppt/notesSlides/notesSlide25.xml><?xml version="1.0" encoding="utf-8"?>
+<file path=ppt/notesSlides/notesSlide27.xml><?xml version="1.0" encoding="utf-8"?>
 <p:notes xmlns:a="http://schemas.openxmlformats.org/drawingml/2006/main" xmlns:r="http://schemas.openxmlformats.org/officeDocument/2006/relationships" xmlns:p="http://schemas.openxmlformats.org/presentationml/2006/main">
   <p:cSld>
     <p:spTree>
@@ -2848,7 +3088,7 @@
                 <a:latin typeface="맑은 고딕" panose="020B0503020000020004" pitchFamily="50" charset="-127"/>
                 <a:ea typeface="맑은 고딕" panose="020B0503020000020004" pitchFamily="50" charset="-127"/>
               </a:rPr>
-              <a:t>25</a:t>
+              <a:t>27</a:t>
             </a:fld>
             <a:endParaRPr lang="ko-KR" altLang="en-US">
               <a:latin typeface="맑은 고딕" panose="020B0503020000020004" pitchFamily="50" charset="-127"/>
@@ -2870,7 +3110,7 @@
 </p:notes>
 </file>
 
-<file path=ppt/notesSlides/notesSlide26.xml><?xml version="1.0" encoding="utf-8"?>
+<file path=ppt/notesSlides/notesSlide28.xml><?xml version="1.0" encoding="utf-8"?>
 <p:notes xmlns:a="http://schemas.openxmlformats.org/drawingml/2006/main" xmlns:r="http://schemas.openxmlformats.org/officeDocument/2006/relationships" xmlns:p="http://schemas.openxmlformats.org/presentationml/2006/main">
   <p:cSld>
     <p:spTree>
@@ -2966,7 +3206,7 @@
                 <a:latin typeface="맑은 고딕" panose="020B0503020000020004" pitchFamily="50" charset="-127"/>
                 <a:ea typeface="맑은 고딕" panose="020B0503020000020004" pitchFamily="50" charset="-127"/>
               </a:rPr>
-              <a:t>26</a:t>
+              <a:t>28</a:t>
             </a:fld>
             <a:endParaRPr lang="ko-KR" altLang="en-US">
               <a:latin typeface="맑은 고딕" panose="020B0503020000020004" pitchFamily="50" charset="-127"/>
@@ -2988,7 +3228,7 @@
 </p:notes>
 </file>
 
-<file path=ppt/notesSlides/notesSlide27.xml><?xml version="1.0" encoding="utf-8"?>
+<file path=ppt/notesSlides/notesSlide29.xml><?xml version="1.0" encoding="utf-8"?>
 <p:notes xmlns:a="http://schemas.openxmlformats.org/drawingml/2006/main" xmlns:r="http://schemas.openxmlformats.org/officeDocument/2006/relationships" xmlns:p="http://schemas.openxmlformats.org/presentationml/2006/main">
   <p:cSld>
     <p:spTree>
@@ -3084,7 +3324,7 @@
                 <a:latin typeface="맑은 고딕" panose="020B0503020000020004" pitchFamily="50" charset="-127"/>
                 <a:ea typeface="맑은 고딕" panose="020B0503020000020004" pitchFamily="50" charset="-127"/>
               </a:rPr>
-              <a:t>27</a:t>
+              <a:t>29</a:t>
             </a:fld>
             <a:endParaRPr lang="ko-KR" altLang="en-US">
               <a:latin typeface="맑은 고딕" panose="020B0503020000020004" pitchFamily="50" charset="-127"/>
@@ -3097,124 +3337,6 @@
     <p:extLst>
       <p:ext uri="{BB962C8B-B14F-4D97-AF65-F5344CB8AC3E}">
         <p14:creationId xmlns:p14="http://schemas.microsoft.com/office/powerpoint/2010/main" val="3951859855"/>
-      </p:ext>
-    </p:extLst>
-  </p:cSld>
-  <p:clrMapOvr>
-    <a:masterClrMapping/>
-  </p:clrMapOvr>
-</p:notes>
-</file>
-
-<file path=ppt/notesSlides/notesSlide28.xml><?xml version="1.0" encoding="utf-8"?>
-<p:notes xmlns:a="http://schemas.openxmlformats.org/drawingml/2006/main" xmlns:r="http://schemas.openxmlformats.org/officeDocument/2006/relationships" xmlns:p="http://schemas.openxmlformats.org/presentationml/2006/main">
-  <p:cSld>
-    <p:spTree>
-      <p:nvGrpSpPr>
-        <p:cNvPr id="1" name="">
-          <a:extLst>
-            <a:ext uri="{FF2B5EF4-FFF2-40B4-BE49-F238E27FC236}">
-              <a16:creationId xmlns:a16="http://schemas.microsoft.com/office/drawing/2014/main" id="{E2CA2AA6-A259-DD38-A488-EBAB0A61A899}"/>
-            </a:ext>
-          </a:extLst>
-        </p:cNvPr>
-        <p:cNvGrpSpPr/>
-        <p:nvPr/>
-      </p:nvGrpSpPr>
-      <p:grpSpPr>
-        <a:xfrm>
-          <a:off x="0" y="0"/>
-          <a:ext cx="0" cy="0"/>
-          <a:chOff x="0" y="0"/>
-          <a:chExt cx="0" cy="0"/>
-        </a:xfrm>
-      </p:grpSpPr>
-      <p:sp>
-        <p:nvSpPr>
-          <p:cNvPr id="2" name="슬라이드 이미지 개체 틀 1">
-            <a:extLst>
-              <a:ext uri="{FF2B5EF4-FFF2-40B4-BE49-F238E27FC236}">
-                <a16:creationId xmlns:a16="http://schemas.microsoft.com/office/drawing/2014/main" id="{05F76AB9-41E6-7B10-8842-DE39BA46B56E}"/>
-              </a:ext>
-            </a:extLst>
-          </p:cNvPr>
-          <p:cNvSpPr>
-            <a:spLocks noGrp="1" noRot="1" noChangeAspect="1"/>
-          </p:cNvSpPr>
-          <p:nvPr>
-            <p:ph type="sldImg"/>
-          </p:nvPr>
-        </p:nvSpPr>
-        <p:spPr/>
-      </p:sp>
-      <p:sp>
-        <p:nvSpPr>
-          <p:cNvPr id="3" name="슬라이드 노트 개체 틀 2">
-            <a:extLst>
-              <a:ext uri="{FF2B5EF4-FFF2-40B4-BE49-F238E27FC236}">
-                <a16:creationId xmlns:a16="http://schemas.microsoft.com/office/drawing/2014/main" id="{3007FEA3-D444-EB0D-6A27-0465CBCA15F8}"/>
-              </a:ext>
-            </a:extLst>
-          </p:cNvPr>
-          <p:cNvSpPr>
-            <a:spLocks noGrp="1"/>
-          </p:cNvSpPr>
-          <p:nvPr>
-            <p:ph type="body" idx="1"/>
-          </p:nvPr>
-        </p:nvSpPr>
-        <p:spPr/>
-        <p:txBody>
-          <a:bodyPr/>
-          <a:lstStyle/>
-          <a:p>
-            <a:endParaRPr lang="ko-KR" altLang="en-US">
-              <a:latin typeface="맑은 고딕" panose="020B0503020000020004" pitchFamily="50" charset="-127"/>
-              <a:ea typeface="맑은 고딕" panose="020B0503020000020004" pitchFamily="50" charset="-127"/>
-            </a:endParaRPr>
-          </a:p>
-        </p:txBody>
-      </p:sp>
-      <p:sp>
-        <p:nvSpPr>
-          <p:cNvPr id="4" name="슬라이드 번호 개체 틀 3">
-            <a:extLst>
-              <a:ext uri="{FF2B5EF4-FFF2-40B4-BE49-F238E27FC236}">
-                <a16:creationId xmlns:a16="http://schemas.microsoft.com/office/drawing/2014/main" id="{93C6D1A2-AD66-0DF6-461E-EEE48BDD2A41}"/>
-              </a:ext>
-            </a:extLst>
-          </p:cNvPr>
-          <p:cNvSpPr>
-            <a:spLocks noGrp="1"/>
-          </p:cNvSpPr>
-          <p:nvPr>
-            <p:ph type="sldNum" sz="quarter" idx="5"/>
-          </p:nvPr>
-        </p:nvSpPr>
-        <p:spPr/>
-        <p:txBody>
-          <a:bodyPr/>
-          <a:lstStyle/>
-          <a:p>
-            <a:pPr rtl="0"/>
-            <a:fld id="{DF61EA0F-A667-4B49-8422-0062BC55E249}" type="slidenum">
-              <a:rPr lang="en-US" altLang="ko-KR" smtClean="0">
-                <a:latin typeface="맑은 고딕" panose="020B0503020000020004" pitchFamily="50" charset="-127"/>
-                <a:ea typeface="맑은 고딕" panose="020B0503020000020004" pitchFamily="50" charset="-127"/>
-              </a:rPr>
-              <a:t>28</a:t>
-            </a:fld>
-            <a:endParaRPr lang="ko-KR" altLang="en-US">
-              <a:latin typeface="맑은 고딕" panose="020B0503020000020004" pitchFamily="50" charset="-127"/>
-              <a:ea typeface="맑은 고딕" panose="020B0503020000020004" pitchFamily="50" charset="-127"/>
-            </a:endParaRPr>
-          </a:p>
-        </p:txBody>
-      </p:sp>
-    </p:spTree>
-    <p:extLst>
-      <p:ext uri="{BB962C8B-B14F-4D97-AF65-F5344CB8AC3E}">
-        <p14:creationId xmlns:p14="http://schemas.microsoft.com/office/powerpoint/2010/main" val="2194864028"/>
       </p:ext>
     </p:extLst>
   </p:cSld>
@@ -3342,7 +3464,361 @@
 </p:notes>
 </file>
 
+<file path=ppt/notesSlides/notesSlide30.xml><?xml version="1.0" encoding="utf-8"?>
+<p:notes xmlns:a="http://schemas.openxmlformats.org/drawingml/2006/main" xmlns:r="http://schemas.openxmlformats.org/officeDocument/2006/relationships" xmlns:p="http://schemas.openxmlformats.org/presentationml/2006/main">
+  <p:cSld>
+    <p:spTree>
+      <p:nvGrpSpPr>
+        <p:cNvPr id="1" name="">
+          <a:extLst>
+            <a:ext uri="{FF2B5EF4-FFF2-40B4-BE49-F238E27FC236}">
+              <a16:creationId xmlns:a16="http://schemas.microsoft.com/office/drawing/2014/main" id="{E2CA2AA6-A259-DD38-A488-EBAB0A61A899}"/>
+            </a:ext>
+          </a:extLst>
+        </p:cNvPr>
+        <p:cNvGrpSpPr/>
+        <p:nvPr/>
+      </p:nvGrpSpPr>
+      <p:grpSpPr>
+        <a:xfrm>
+          <a:off x="0" y="0"/>
+          <a:ext cx="0" cy="0"/>
+          <a:chOff x="0" y="0"/>
+          <a:chExt cx="0" cy="0"/>
+        </a:xfrm>
+      </p:grpSpPr>
+      <p:sp>
+        <p:nvSpPr>
+          <p:cNvPr id="2" name="슬라이드 이미지 개체 틀 1">
+            <a:extLst>
+              <a:ext uri="{FF2B5EF4-FFF2-40B4-BE49-F238E27FC236}">
+                <a16:creationId xmlns:a16="http://schemas.microsoft.com/office/drawing/2014/main" id="{05F76AB9-41E6-7B10-8842-DE39BA46B56E}"/>
+              </a:ext>
+            </a:extLst>
+          </p:cNvPr>
+          <p:cNvSpPr>
+            <a:spLocks noGrp="1" noRot="1" noChangeAspect="1"/>
+          </p:cNvSpPr>
+          <p:nvPr>
+            <p:ph type="sldImg"/>
+          </p:nvPr>
+        </p:nvSpPr>
+        <p:spPr/>
+      </p:sp>
+      <p:sp>
+        <p:nvSpPr>
+          <p:cNvPr id="3" name="슬라이드 노트 개체 틀 2">
+            <a:extLst>
+              <a:ext uri="{FF2B5EF4-FFF2-40B4-BE49-F238E27FC236}">
+                <a16:creationId xmlns:a16="http://schemas.microsoft.com/office/drawing/2014/main" id="{3007FEA3-D444-EB0D-6A27-0465CBCA15F8}"/>
+              </a:ext>
+            </a:extLst>
+          </p:cNvPr>
+          <p:cNvSpPr>
+            <a:spLocks noGrp="1"/>
+          </p:cNvSpPr>
+          <p:nvPr>
+            <p:ph type="body" idx="1"/>
+          </p:nvPr>
+        </p:nvSpPr>
+        <p:spPr/>
+        <p:txBody>
+          <a:bodyPr/>
+          <a:lstStyle/>
+          <a:p>
+            <a:endParaRPr lang="ko-KR" altLang="en-US">
+              <a:latin typeface="맑은 고딕" panose="020B0503020000020004" pitchFamily="50" charset="-127"/>
+              <a:ea typeface="맑은 고딕" panose="020B0503020000020004" pitchFamily="50" charset="-127"/>
+            </a:endParaRPr>
+          </a:p>
+        </p:txBody>
+      </p:sp>
+      <p:sp>
+        <p:nvSpPr>
+          <p:cNvPr id="4" name="슬라이드 번호 개체 틀 3">
+            <a:extLst>
+              <a:ext uri="{FF2B5EF4-FFF2-40B4-BE49-F238E27FC236}">
+                <a16:creationId xmlns:a16="http://schemas.microsoft.com/office/drawing/2014/main" id="{93C6D1A2-AD66-0DF6-461E-EEE48BDD2A41}"/>
+              </a:ext>
+            </a:extLst>
+          </p:cNvPr>
+          <p:cNvSpPr>
+            <a:spLocks noGrp="1"/>
+          </p:cNvSpPr>
+          <p:nvPr>
+            <p:ph type="sldNum" sz="quarter" idx="5"/>
+          </p:nvPr>
+        </p:nvSpPr>
+        <p:spPr/>
+        <p:txBody>
+          <a:bodyPr/>
+          <a:lstStyle/>
+          <a:p>
+            <a:pPr rtl="0"/>
+            <a:fld id="{DF61EA0F-A667-4B49-8422-0062BC55E249}" type="slidenum">
+              <a:rPr lang="en-US" altLang="ko-KR" smtClean="0">
+                <a:latin typeface="맑은 고딕" panose="020B0503020000020004" pitchFamily="50" charset="-127"/>
+                <a:ea typeface="맑은 고딕" panose="020B0503020000020004" pitchFamily="50" charset="-127"/>
+              </a:rPr>
+              <a:t>30</a:t>
+            </a:fld>
+            <a:endParaRPr lang="ko-KR" altLang="en-US">
+              <a:latin typeface="맑은 고딕" panose="020B0503020000020004" pitchFamily="50" charset="-127"/>
+              <a:ea typeface="맑은 고딕" panose="020B0503020000020004" pitchFamily="50" charset="-127"/>
+            </a:endParaRPr>
+          </a:p>
+        </p:txBody>
+      </p:sp>
+    </p:spTree>
+    <p:extLst>
+      <p:ext uri="{BB962C8B-B14F-4D97-AF65-F5344CB8AC3E}">
+        <p14:creationId xmlns:p14="http://schemas.microsoft.com/office/powerpoint/2010/main" val="2194864028"/>
+      </p:ext>
+    </p:extLst>
+  </p:cSld>
+  <p:clrMapOvr>
+    <a:masterClrMapping/>
+  </p:clrMapOvr>
+</p:notes>
+</file>
+
 <file path=ppt/notesSlides/notesSlide4.xml><?xml version="1.0" encoding="utf-8"?>
+<p:notes xmlns:a="http://schemas.openxmlformats.org/drawingml/2006/main" xmlns:r="http://schemas.openxmlformats.org/officeDocument/2006/relationships" xmlns:p="http://schemas.openxmlformats.org/presentationml/2006/main">
+  <p:cSld>
+    <p:spTree>
+      <p:nvGrpSpPr>
+        <p:cNvPr id="1" name="">
+          <a:extLst>
+            <a:ext uri="{FF2B5EF4-FFF2-40B4-BE49-F238E27FC236}">
+              <a16:creationId xmlns:a16="http://schemas.microsoft.com/office/drawing/2014/main" id="{97D110D7-5F3D-BB8F-6B00-701C8C732A65}"/>
+            </a:ext>
+          </a:extLst>
+        </p:cNvPr>
+        <p:cNvGrpSpPr/>
+        <p:nvPr/>
+      </p:nvGrpSpPr>
+      <p:grpSpPr>
+        <a:xfrm>
+          <a:off x="0" y="0"/>
+          <a:ext cx="0" cy="0"/>
+          <a:chOff x="0" y="0"/>
+          <a:chExt cx="0" cy="0"/>
+        </a:xfrm>
+      </p:grpSpPr>
+      <p:sp>
+        <p:nvSpPr>
+          <p:cNvPr id="2" name="슬라이드 이미지 개체 틀 1">
+            <a:extLst>
+              <a:ext uri="{FF2B5EF4-FFF2-40B4-BE49-F238E27FC236}">
+                <a16:creationId xmlns:a16="http://schemas.microsoft.com/office/drawing/2014/main" id="{9C05BC29-69D4-16BB-033D-9ED42312700D}"/>
+              </a:ext>
+            </a:extLst>
+          </p:cNvPr>
+          <p:cNvSpPr>
+            <a:spLocks noGrp="1" noRot="1" noChangeAspect="1"/>
+          </p:cNvSpPr>
+          <p:nvPr>
+            <p:ph type="sldImg"/>
+          </p:nvPr>
+        </p:nvSpPr>
+        <p:spPr/>
+      </p:sp>
+      <p:sp>
+        <p:nvSpPr>
+          <p:cNvPr id="3" name="슬라이드 노트 개체 틀 2">
+            <a:extLst>
+              <a:ext uri="{FF2B5EF4-FFF2-40B4-BE49-F238E27FC236}">
+                <a16:creationId xmlns:a16="http://schemas.microsoft.com/office/drawing/2014/main" id="{06C7D3D2-C5DC-BA33-D2BA-D3EF10F52D88}"/>
+              </a:ext>
+            </a:extLst>
+          </p:cNvPr>
+          <p:cNvSpPr>
+            <a:spLocks noGrp="1"/>
+          </p:cNvSpPr>
+          <p:nvPr>
+            <p:ph type="body" idx="1"/>
+          </p:nvPr>
+        </p:nvSpPr>
+        <p:spPr/>
+        <p:txBody>
+          <a:bodyPr/>
+          <a:lstStyle/>
+          <a:p>
+            <a:endParaRPr lang="ko-KR" altLang="en-US">
+              <a:latin typeface="맑은 고딕" panose="020B0503020000020004" pitchFamily="50" charset="-127"/>
+              <a:ea typeface="맑은 고딕" panose="020B0503020000020004" pitchFamily="50" charset="-127"/>
+            </a:endParaRPr>
+          </a:p>
+        </p:txBody>
+      </p:sp>
+      <p:sp>
+        <p:nvSpPr>
+          <p:cNvPr id="4" name="슬라이드 번호 개체 틀 3">
+            <a:extLst>
+              <a:ext uri="{FF2B5EF4-FFF2-40B4-BE49-F238E27FC236}">
+                <a16:creationId xmlns:a16="http://schemas.microsoft.com/office/drawing/2014/main" id="{33ECE2CC-01E2-8F45-DDED-A5E0D080338E}"/>
+              </a:ext>
+            </a:extLst>
+          </p:cNvPr>
+          <p:cNvSpPr>
+            <a:spLocks noGrp="1"/>
+          </p:cNvSpPr>
+          <p:nvPr>
+            <p:ph type="sldNum" sz="quarter" idx="5"/>
+          </p:nvPr>
+        </p:nvSpPr>
+        <p:spPr/>
+        <p:txBody>
+          <a:bodyPr/>
+          <a:lstStyle/>
+          <a:p>
+            <a:pPr rtl="0"/>
+            <a:fld id="{DF61EA0F-A667-4B49-8422-0062BC55E249}" type="slidenum">
+              <a:rPr lang="en-US" altLang="ko-KR" smtClean="0">
+                <a:latin typeface="맑은 고딕" panose="020B0503020000020004" pitchFamily="50" charset="-127"/>
+                <a:ea typeface="맑은 고딕" panose="020B0503020000020004" pitchFamily="50" charset="-127"/>
+              </a:rPr>
+              <a:t>4</a:t>
+            </a:fld>
+            <a:endParaRPr lang="ko-KR" altLang="en-US">
+              <a:latin typeface="맑은 고딕" panose="020B0503020000020004" pitchFamily="50" charset="-127"/>
+              <a:ea typeface="맑은 고딕" panose="020B0503020000020004" pitchFamily="50" charset="-127"/>
+            </a:endParaRPr>
+          </a:p>
+        </p:txBody>
+      </p:sp>
+    </p:spTree>
+    <p:extLst>
+      <p:ext uri="{BB962C8B-B14F-4D97-AF65-F5344CB8AC3E}">
+        <p14:creationId xmlns:p14="http://schemas.microsoft.com/office/powerpoint/2010/main" val="16407500"/>
+      </p:ext>
+    </p:extLst>
+  </p:cSld>
+  <p:clrMapOvr>
+    <a:masterClrMapping/>
+  </p:clrMapOvr>
+</p:notes>
+</file>
+
+<file path=ppt/notesSlides/notesSlide5.xml><?xml version="1.0" encoding="utf-8"?>
+<p:notes xmlns:a="http://schemas.openxmlformats.org/drawingml/2006/main" xmlns:r="http://schemas.openxmlformats.org/officeDocument/2006/relationships" xmlns:p="http://schemas.openxmlformats.org/presentationml/2006/main">
+  <p:cSld>
+    <p:spTree>
+      <p:nvGrpSpPr>
+        <p:cNvPr id="1" name="">
+          <a:extLst>
+            <a:ext uri="{FF2B5EF4-FFF2-40B4-BE49-F238E27FC236}">
+              <a16:creationId xmlns:a16="http://schemas.microsoft.com/office/drawing/2014/main" id="{39E9B39E-C3C0-F5D2-30CD-603DC5AA626C}"/>
+            </a:ext>
+          </a:extLst>
+        </p:cNvPr>
+        <p:cNvGrpSpPr/>
+        <p:nvPr/>
+      </p:nvGrpSpPr>
+      <p:grpSpPr>
+        <a:xfrm>
+          <a:off x="0" y="0"/>
+          <a:ext cx="0" cy="0"/>
+          <a:chOff x="0" y="0"/>
+          <a:chExt cx="0" cy="0"/>
+        </a:xfrm>
+      </p:grpSpPr>
+      <p:sp>
+        <p:nvSpPr>
+          <p:cNvPr id="2" name="슬라이드 이미지 개체 틀 1">
+            <a:extLst>
+              <a:ext uri="{FF2B5EF4-FFF2-40B4-BE49-F238E27FC236}">
+                <a16:creationId xmlns:a16="http://schemas.microsoft.com/office/drawing/2014/main" id="{0AF8AC5F-56A4-9A36-1DEC-F217A41C18F2}"/>
+              </a:ext>
+            </a:extLst>
+          </p:cNvPr>
+          <p:cNvSpPr>
+            <a:spLocks noGrp="1" noRot="1" noChangeAspect="1"/>
+          </p:cNvSpPr>
+          <p:nvPr>
+            <p:ph type="sldImg"/>
+          </p:nvPr>
+        </p:nvSpPr>
+        <p:spPr/>
+      </p:sp>
+      <p:sp>
+        <p:nvSpPr>
+          <p:cNvPr id="3" name="슬라이드 노트 개체 틀 2">
+            <a:extLst>
+              <a:ext uri="{FF2B5EF4-FFF2-40B4-BE49-F238E27FC236}">
+                <a16:creationId xmlns:a16="http://schemas.microsoft.com/office/drawing/2014/main" id="{554E2549-F464-9D4D-EE3B-FCBD2B7FDF11}"/>
+              </a:ext>
+            </a:extLst>
+          </p:cNvPr>
+          <p:cNvSpPr>
+            <a:spLocks noGrp="1"/>
+          </p:cNvSpPr>
+          <p:nvPr>
+            <p:ph type="body" idx="1"/>
+          </p:nvPr>
+        </p:nvSpPr>
+        <p:spPr/>
+        <p:txBody>
+          <a:bodyPr/>
+          <a:lstStyle/>
+          <a:p>
+            <a:endParaRPr lang="ko-KR" altLang="en-US">
+              <a:latin typeface="맑은 고딕" panose="020B0503020000020004" pitchFamily="50" charset="-127"/>
+              <a:ea typeface="맑은 고딕" panose="020B0503020000020004" pitchFamily="50" charset="-127"/>
+            </a:endParaRPr>
+          </a:p>
+        </p:txBody>
+      </p:sp>
+      <p:sp>
+        <p:nvSpPr>
+          <p:cNvPr id="4" name="슬라이드 번호 개체 틀 3">
+            <a:extLst>
+              <a:ext uri="{FF2B5EF4-FFF2-40B4-BE49-F238E27FC236}">
+                <a16:creationId xmlns:a16="http://schemas.microsoft.com/office/drawing/2014/main" id="{6D5DC78A-B6F4-896F-A019-23D21C1F47DA}"/>
+              </a:ext>
+            </a:extLst>
+          </p:cNvPr>
+          <p:cNvSpPr>
+            <a:spLocks noGrp="1"/>
+          </p:cNvSpPr>
+          <p:nvPr>
+            <p:ph type="sldNum" sz="quarter" idx="5"/>
+          </p:nvPr>
+        </p:nvSpPr>
+        <p:spPr/>
+        <p:txBody>
+          <a:bodyPr/>
+          <a:lstStyle/>
+          <a:p>
+            <a:pPr rtl="0"/>
+            <a:fld id="{DF61EA0F-A667-4B49-8422-0062BC55E249}" type="slidenum">
+              <a:rPr lang="en-US" altLang="ko-KR" smtClean="0">
+                <a:latin typeface="맑은 고딕" panose="020B0503020000020004" pitchFamily="50" charset="-127"/>
+                <a:ea typeface="맑은 고딕" panose="020B0503020000020004" pitchFamily="50" charset="-127"/>
+              </a:rPr>
+              <a:t>5</a:t>
+            </a:fld>
+            <a:endParaRPr lang="ko-KR" altLang="en-US">
+              <a:latin typeface="맑은 고딕" panose="020B0503020000020004" pitchFamily="50" charset="-127"/>
+              <a:ea typeface="맑은 고딕" panose="020B0503020000020004" pitchFamily="50" charset="-127"/>
+            </a:endParaRPr>
+          </a:p>
+        </p:txBody>
+      </p:sp>
+    </p:spTree>
+    <p:extLst>
+      <p:ext uri="{BB962C8B-B14F-4D97-AF65-F5344CB8AC3E}">
+        <p14:creationId xmlns:p14="http://schemas.microsoft.com/office/powerpoint/2010/main" val="4250625584"/>
+      </p:ext>
+    </p:extLst>
+  </p:cSld>
+  <p:clrMapOvr>
+    <a:masterClrMapping/>
+  </p:clrMapOvr>
+</p:notes>
+</file>
+
+<file path=ppt/notesSlides/notesSlide6.xml><?xml version="1.0" encoding="utf-8"?>
 <p:notes xmlns:a="http://schemas.openxmlformats.org/drawingml/2006/main" xmlns:r="http://schemas.openxmlformats.org/officeDocument/2006/relationships" xmlns:p="http://schemas.openxmlformats.org/presentationml/2006/main">
   <p:cSld>
     <p:spTree>
@@ -3438,7 +3914,7 @@
                 <a:latin typeface="맑은 고딕" panose="020B0503020000020004" pitchFamily="50" charset="-127"/>
                 <a:ea typeface="맑은 고딕" panose="020B0503020000020004" pitchFamily="50" charset="-127"/>
               </a:rPr>
-              <a:t>4</a:t>
+              <a:t>6</a:t>
             </a:fld>
             <a:endParaRPr lang="ko-KR" altLang="en-US">
               <a:latin typeface="맑은 고딕" panose="020B0503020000020004" pitchFamily="50" charset="-127"/>
@@ -3460,7 +3936,7 @@
 </p:notes>
 </file>
 
-<file path=ppt/notesSlides/notesSlide5.xml><?xml version="1.0" encoding="utf-8"?>
+<file path=ppt/notesSlides/notesSlide7.xml><?xml version="1.0" encoding="utf-8"?>
 <p:notes xmlns:a="http://schemas.openxmlformats.org/drawingml/2006/main" xmlns:r="http://schemas.openxmlformats.org/officeDocument/2006/relationships" xmlns:p="http://schemas.openxmlformats.org/presentationml/2006/main">
   <p:cSld>
     <p:spTree>
@@ -3556,7 +4032,7 @@
                 <a:latin typeface="맑은 고딕" panose="020B0503020000020004" pitchFamily="50" charset="-127"/>
                 <a:ea typeface="맑은 고딕" panose="020B0503020000020004" pitchFamily="50" charset="-127"/>
               </a:rPr>
-              <a:t>5</a:t>
+              <a:t>7</a:t>
             </a:fld>
             <a:endParaRPr lang="ko-KR" altLang="en-US">
               <a:latin typeface="맑은 고딕" panose="020B0503020000020004" pitchFamily="50" charset="-127"/>
@@ -3578,7 +4054,7 @@
 </p:notes>
 </file>
 
-<file path=ppt/notesSlides/notesSlide6.xml><?xml version="1.0" encoding="utf-8"?>
+<file path=ppt/notesSlides/notesSlide8.xml><?xml version="1.0" encoding="utf-8"?>
 <p:notes xmlns:a="http://schemas.openxmlformats.org/drawingml/2006/main" xmlns:r="http://schemas.openxmlformats.org/officeDocument/2006/relationships" xmlns:p="http://schemas.openxmlformats.org/presentationml/2006/main">
   <p:cSld>
     <p:spTree>
@@ -3674,7 +4150,7 @@
                 <a:latin typeface="맑은 고딕" panose="020B0503020000020004" pitchFamily="50" charset="-127"/>
                 <a:ea typeface="맑은 고딕" panose="020B0503020000020004" pitchFamily="50" charset="-127"/>
               </a:rPr>
-              <a:t>6</a:t>
+              <a:t>8</a:t>
             </a:fld>
             <a:endParaRPr lang="ko-KR" altLang="en-US">
               <a:latin typeface="맑은 고딕" panose="020B0503020000020004" pitchFamily="50" charset="-127"/>
@@ -3696,7 +4172,7 @@
 </p:notes>
 </file>
 
-<file path=ppt/notesSlides/notesSlide7.xml><?xml version="1.0" encoding="utf-8"?>
+<file path=ppt/notesSlides/notesSlide9.xml><?xml version="1.0" encoding="utf-8"?>
 <p:notes xmlns:a="http://schemas.openxmlformats.org/drawingml/2006/main" xmlns:r="http://schemas.openxmlformats.org/officeDocument/2006/relationships" xmlns:p="http://schemas.openxmlformats.org/presentationml/2006/main">
   <p:cSld>
     <p:spTree>
@@ -3792,7 +4268,7 @@
                 <a:latin typeface="맑은 고딕" panose="020B0503020000020004" pitchFamily="50" charset="-127"/>
                 <a:ea typeface="맑은 고딕" panose="020B0503020000020004" pitchFamily="50" charset="-127"/>
               </a:rPr>
-              <a:t>7</a:t>
+              <a:t>9</a:t>
             </a:fld>
             <a:endParaRPr lang="ko-KR" altLang="en-US">
               <a:latin typeface="맑은 고딕" panose="020B0503020000020004" pitchFamily="50" charset="-127"/>
@@ -3805,242 +4281,6 @@
     <p:extLst>
       <p:ext uri="{BB962C8B-B14F-4D97-AF65-F5344CB8AC3E}">
         <p14:creationId xmlns:p14="http://schemas.microsoft.com/office/powerpoint/2010/main" val="3908420293"/>
-      </p:ext>
-    </p:extLst>
-  </p:cSld>
-  <p:clrMapOvr>
-    <a:masterClrMapping/>
-  </p:clrMapOvr>
-</p:notes>
-</file>
-
-<file path=ppt/notesSlides/notesSlide8.xml><?xml version="1.0" encoding="utf-8"?>
-<p:notes xmlns:a="http://schemas.openxmlformats.org/drawingml/2006/main" xmlns:r="http://schemas.openxmlformats.org/officeDocument/2006/relationships" xmlns:p="http://schemas.openxmlformats.org/presentationml/2006/main">
-  <p:cSld>
-    <p:spTree>
-      <p:nvGrpSpPr>
-        <p:cNvPr id="1" name="">
-          <a:extLst>
-            <a:ext uri="{FF2B5EF4-FFF2-40B4-BE49-F238E27FC236}">
-              <a16:creationId xmlns:a16="http://schemas.microsoft.com/office/drawing/2014/main" id="{4304E0ED-DA8F-B163-37A6-7DBF270F2A30}"/>
-            </a:ext>
-          </a:extLst>
-        </p:cNvPr>
-        <p:cNvGrpSpPr/>
-        <p:nvPr/>
-      </p:nvGrpSpPr>
-      <p:grpSpPr>
-        <a:xfrm>
-          <a:off x="0" y="0"/>
-          <a:ext cx="0" cy="0"/>
-          <a:chOff x="0" y="0"/>
-          <a:chExt cx="0" cy="0"/>
-        </a:xfrm>
-      </p:grpSpPr>
-      <p:sp>
-        <p:nvSpPr>
-          <p:cNvPr id="2" name="슬라이드 이미지 개체 틀 1">
-            <a:extLst>
-              <a:ext uri="{FF2B5EF4-FFF2-40B4-BE49-F238E27FC236}">
-                <a16:creationId xmlns:a16="http://schemas.microsoft.com/office/drawing/2014/main" id="{BBD413A3-37DD-2EE0-769B-62A5AA245E01}"/>
-              </a:ext>
-            </a:extLst>
-          </p:cNvPr>
-          <p:cNvSpPr>
-            <a:spLocks noGrp="1" noRot="1" noChangeAspect="1"/>
-          </p:cNvSpPr>
-          <p:nvPr>
-            <p:ph type="sldImg"/>
-          </p:nvPr>
-        </p:nvSpPr>
-        <p:spPr/>
-      </p:sp>
-      <p:sp>
-        <p:nvSpPr>
-          <p:cNvPr id="3" name="슬라이드 노트 개체 틀 2">
-            <a:extLst>
-              <a:ext uri="{FF2B5EF4-FFF2-40B4-BE49-F238E27FC236}">
-                <a16:creationId xmlns:a16="http://schemas.microsoft.com/office/drawing/2014/main" id="{E6871A5E-32A9-1D25-5E36-47F13F3348D6}"/>
-              </a:ext>
-            </a:extLst>
-          </p:cNvPr>
-          <p:cNvSpPr>
-            <a:spLocks noGrp="1"/>
-          </p:cNvSpPr>
-          <p:nvPr>
-            <p:ph type="body" idx="1"/>
-          </p:nvPr>
-        </p:nvSpPr>
-        <p:spPr/>
-        <p:txBody>
-          <a:bodyPr/>
-          <a:lstStyle/>
-          <a:p>
-            <a:endParaRPr lang="ko-KR" altLang="en-US">
-              <a:latin typeface="맑은 고딕" panose="020B0503020000020004" pitchFamily="50" charset="-127"/>
-              <a:ea typeface="맑은 고딕" panose="020B0503020000020004" pitchFamily="50" charset="-127"/>
-            </a:endParaRPr>
-          </a:p>
-        </p:txBody>
-      </p:sp>
-      <p:sp>
-        <p:nvSpPr>
-          <p:cNvPr id="4" name="슬라이드 번호 개체 틀 3">
-            <a:extLst>
-              <a:ext uri="{FF2B5EF4-FFF2-40B4-BE49-F238E27FC236}">
-                <a16:creationId xmlns:a16="http://schemas.microsoft.com/office/drawing/2014/main" id="{C4908B45-7F07-B905-3C46-865FD9931359}"/>
-              </a:ext>
-            </a:extLst>
-          </p:cNvPr>
-          <p:cNvSpPr>
-            <a:spLocks noGrp="1"/>
-          </p:cNvSpPr>
-          <p:nvPr>
-            <p:ph type="sldNum" sz="quarter" idx="5"/>
-          </p:nvPr>
-        </p:nvSpPr>
-        <p:spPr/>
-        <p:txBody>
-          <a:bodyPr/>
-          <a:lstStyle/>
-          <a:p>
-            <a:pPr rtl="0"/>
-            <a:fld id="{DF61EA0F-A667-4B49-8422-0062BC55E249}" type="slidenum">
-              <a:rPr lang="en-US" altLang="ko-KR" smtClean="0">
-                <a:latin typeface="맑은 고딕" panose="020B0503020000020004" pitchFamily="50" charset="-127"/>
-                <a:ea typeface="맑은 고딕" panose="020B0503020000020004" pitchFamily="50" charset="-127"/>
-              </a:rPr>
-              <a:t>8</a:t>
-            </a:fld>
-            <a:endParaRPr lang="ko-KR" altLang="en-US">
-              <a:latin typeface="맑은 고딕" panose="020B0503020000020004" pitchFamily="50" charset="-127"/>
-              <a:ea typeface="맑은 고딕" panose="020B0503020000020004" pitchFamily="50" charset="-127"/>
-            </a:endParaRPr>
-          </a:p>
-        </p:txBody>
-      </p:sp>
-    </p:spTree>
-    <p:extLst>
-      <p:ext uri="{BB962C8B-B14F-4D97-AF65-F5344CB8AC3E}">
-        <p14:creationId xmlns:p14="http://schemas.microsoft.com/office/powerpoint/2010/main" val="219161818"/>
-      </p:ext>
-    </p:extLst>
-  </p:cSld>
-  <p:clrMapOvr>
-    <a:masterClrMapping/>
-  </p:clrMapOvr>
-</p:notes>
-</file>
-
-<file path=ppt/notesSlides/notesSlide9.xml><?xml version="1.0" encoding="utf-8"?>
-<p:notes xmlns:a="http://schemas.openxmlformats.org/drawingml/2006/main" xmlns:r="http://schemas.openxmlformats.org/officeDocument/2006/relationships" xmlns:p="http://schemas.openxmlformats.org/presentationml/2006/main">
-  <p:cSld>
-    <p:spTree>
-      <p:nvGrpSpPr>
-        <p:cNvPr id="1" name="">
-          <a:extLst>
-            <a:ext uri="{FF2B5EF4-FFF2-40B4-BE49-F238E27FC236}">
-              <a16:creationId xmlns:a16="http://schemas.microsoft.com/office/drawing/2014/main" id="{C3577BAA-B1F8-BAA3-8907-DC73D99FACA4}"/>
-            </a:ext>
-          </a:extLst>
-        </p:cNvPr>
-        <p:cNvGrpSpPr/>
-        <p:nvPr/>
-      </p:nvGrpSpPr>
-      <p:grpSpPr>
-        <a:xfrm>
-          <a:off x="0" y="0"/>
-          <a:ext cx="0" cy="0"/>
-          <a:chOff x="0" y="0"/>
-          <a:chExt cx="0" cy="0"/>
-        </a:xfrm>
-      </p:grpSpPr>
-      <p:sp>
-        <p:nvSpPr>
-          <p:cNvPr id="2" name="슬라이드 이미지 개체 틀 1">
-            <a:extLst>
-              <a:ext uri="{FF2B5EF4-FFF2-40B4-BE49-F238E27FC236}">
-                <a16:creationId xmlns:a16="http://schemas.microsoft.com/office/drawing/2014/main" id="{05134869-1347-C420-E675-DB42F837C650}"/>
-              </a:ext>
-            </a:extLst>
-          </p:cNvPr>
-          <p:cNvSpPr>
-            <a:spLocks noGrp="1" noRot="1" noChangeAspect="1"/>
-          </p:cNvSpPr>
-          <p:nvPr>
-            <p:ph type="sldImg"/>
-          </p:nvPr>
-        </p:nvSpPr>
-        <p:spPr/>
-      </p:sp>
-      <p:sp>
-        <p:nvSpPr>
-          <p:cNvPr id="3" name="슬라이드 노트 개체 틀 2">
-            <a:extLst>
-              <a:ext uri="{FF2B5EF4-FFF2-40B4-BE49-F238E27FC236}">
-                <a16:creationId xmlns:a16="http://schemas.microsoft.com/office/drawing/2014/main" id="{58639132-0F93-3BFD-46F6-E0024D135D26}"/>
-              </a:ext>
-            </a:extLst>
-          </p:cNvPr>
-          <p:cNvSpPr>
-            <a:spLocks noGrp="1"/>
-          </p:cNvSpPr>
-          <p:nvPr>
-            <p:ph type="body" idx="1"/>
-          </p:nvPr>
-        </p:nvSpPr>
-        <p:spPr/>
-        <p:txBody>
-          <a:bodyPr/>
-          <a:lstStyle/>
-          <a:p>
-            <a:endParaRPr lang="ko-KR" altLang="en-US">
-              <a:latin typeface="맑은 고딕" panose="020B0503020000020004" pitchFamily="50" charset="-127"/>
-              <a:ea typeface="맑은 고딕" panose="020B0503020000020004" pitchFamily="50" charset="-127"/>
-            </a:endParaRPr>
-          </a:p>
-        </p:txBody>
-      </p:sp>
-      <p:sp>
-        <p:nvSpPr>
-          <p:cNvPr id="4" name="슬라이드 번호 개체 틀 3">
-            <a:extLst>
-              <a:ext uri="{FF2B5EF4-FFF2-40B4-BE49-F238E27FC236}">
-                <a16:creationId xmlns:a16="http://schemas.microsoft.com/office/drawing/2014/main" id="{39D97547-9225-314A-862E-BB2DCCF13581}"/>
-              </a:ext>
-            </a:extLst>
-          </p:cNvPr>
-          <p:cNvSpPr>
-            <a:spLocks noGrp="1"/>
-          </p:cNvSpPr>
-          <p:nvPr>
-            <p:ph type="sldNum" sz="quarter" idx="5"/>
-          </p:nvPr>
-        </p:nvSpPr>
-        <p:spPr/>
-        <p:txBody>
-          <a:bodyPr/>
-          <a:lstStyle/>
-          <a:p>
-            <a:pPr rtl="0"/>
-            <a:fld id="{DF61EA0F-A667-4B49-8422-0062BC55E249}" type="slidenum">
-              <a:rPr lang="en-US" altLang="ko-KR" smtClean="0">
-                <a:latin typeface="맑은 고딕" panose="020B0503020000020004" pitchFamily="50" charset="-127"/>
-                <a:ea typeface="맑은 고딕" panose="020B0503020000020004" pitchFamily="50" charset="-127"/>
-              </a:rPr>
-              <a:t>9</a:t>
-            </a:fld>
-            <a:endParaRPr lang="ko-KR" altLang="en-US">
-              <a:latin typeface="맑은 고딕" panose="020B0503020000020004" pitchFamily="50" charset="-127"/>
-              <a:ea typeface="맑은 고딕" panose="020B0503020000020004" pitchFamily="50" charset="-127"/>
-            </a:endParaRPr>
-          </a:p>
-        </p:txBody>
-      </p:sp>
-    </p:spTree>
-    <p:extLst>
-      <p:ext uri="{BB962C8B-B14F-4D97-AF65-F5344CB8AC3E}">
-        <p14:creationId xmlns:p14="http://schemas.microsoft.com/office/powerpoint/2010/main" val="523043509"/>
       </p:ext>
     </p:extLst>
   </p:cSld>
@@ -6001,6 +6241,1706 @@
         <p:cNvPr id="1" name="">
           <a:extLst>
             <a:ext uri="{FF2B5EF4-FFF2-40B4-BE49-F238E27FC236}">
+              <a16:creationId xmlns:a16="http://schemas.microsoft.com/office/drawing/2014/main" id="{7AF80D44-85EA-84E3-E211-6180F78C51BB}"/>
+            </a:ext>
+          </a:extLst>
+        </p:cNvPr>
+        <p:cNvGrpSpPr/>
+        <p:nvPr/>
+      </p:nvGrpSpPr>
+      <p:grpSpPr>
+        <a:xfrm>
+          <a:off x="0" y="0"/>
+          <a:ext cx="0" cy="0"/>
+          <a:chOff x="0" y="0"/>
+          <a:chExt cx="0" cy="0"/>
+        </a:xfrm>
+      </p:grpSpPr>
+      <p:sp>
+        <p:nvSpPr>
+          <p:cNvPr id="2" name="직사각형 1">
+            <a:extLst>
+              <a:ext uri="{FF2B5EF4-FFF2-40B4-BE49-F238E27FC236}">
+                <a16:creationId xmlns:a16="http://schemas.microsoft.com/office/drawing/2014/main" id="{9E517CBB-26E1-57F2-B9B5-80B1CC78BB62}"/>
+              </a:ext>
+            </a:extLst>
+          </p:cNvPr>
+          <p:cNvSpPr/>
+          <p:nvPr/>
+        </p:nvSpPr>
+        <p:spPr>
+          <a:xfrm>
+            <a:off x="1457324" y="2219961"/>
+            <a:ext cx="10191202" cy="640080"/>
+          </a:xfrm>
+          <a:prstGeom prst="rect">
+            <a:avLst/>
+          </a:prstGeom>
+          <a:solidFill>
+            <a:schemeClr val="bg1">
+              <a:lumMod val="75000"/>
+            </a:schemeClr>
+          </a:solidFill>
+          <a:ln>
+            <a:noFill/>
+          </a:ln>
+        </p:spPr>
+        <p:style>
+          <a:lnRef idx="2">
+            <a:schemeClr val="accent1">
+              <a:shade val="15000"/>
+            </a:schemeClr>
+          </a:lnRef>
+          <a:fillRef idx="1">
+            <a:schemeClr val="accent1"/>
+          </a:fillRef>
+          <a:effectRef idx="0">
+            <a:schemeClr val="accent1"/>
+          </a:effectRef>
+          <a:fontRef idx="minor">
+            <a:schemeClr val="lt1"/>
+          </a:fontRef>
+        </p:style>
+        <p:txBody>
+          <a:bodyPr rtlCol="0" anchor="ctr"/>
+          <a:lstStyle/>
+          <a:p>
+            <a:pPr algn="ctr"/>
+            <a:endParaRPr lang="ko-KR" altLang="en-US" dirty="0"/>
+          </a:p>
+        </p:txBody>
+      </p:sp>
+      <p:sp>
+        <p:nvSpPr>
+          <p:cNvPr id="8" name="제목 7">
+            <a:extLst>
+              <a:ext uri="{FF2B5EF4-FFF2-40B4-BE49-F238E27FC236}">
+                <a16:creationId xmlns:a16="http://schemas.microsoft.com/office/drawing/2014/main" id="{10F68A52-4A32-5151-FD0E-4046CA01AC3B}"/>
+              </a:ext>
+            </a:extLst>
+          </p:cNvPr>
+          <p:cNvSpPr>
+            <a:spLocks noGrp="1"/>
+          </p:cNvSpPr>
+          <p:nvPr>
+            <p:ph type="title"/>
+          </p:nvPr>
+        </p:nvSpPr>
+        <p:spPr>
+          <a:xfrm>
+            <a:off x="521207" y="448056"/>
+            <a:ext cx="8135613" cy="640080"/>
+          </a:xfrm>
+        </p:spPr>
+        <p:txBody>
+          <a:bodyPr rtlCol="0">
+            <a:noAutofit/>
+          </a:bodyPr>
+          <a:lstStyle/>
+          <a:p>
+            <a:pPr rtl="0"/>
+            <a:r>
+              <a:rPr lang="en-US" altLang="ko-KR" dirty="0">
+                <a:solidFill>
+                  <a:schemeClr val="tx1"/>
+                </a:solidFill>
+                <a:cs typeface="Segoe UI Light" panose="020B0502040204020203" pitchFamily="34" charset="0"/>
+              </a:rPr>
+              <a:t>Contents</a:t>
+            </a:r>
+            <a:endParaRPr lang="ko-KR" altLang="en-US" dirty="0">
+              <a:solidFill>
+                <a:schemeClr val="tx1"/>
+              </a:solidFill>
+              <a:cs typeface="Segoe UI Light" panose="020B0502040204020203" pitchFamily="34" charset="0"/>
+            </a:endParaRPr>
+          </a:p>
+        </p:txBody>
+      </p:sp>
+      <p:sp>
+        <p:nvSpPr>
+          <p:cNvPr id="12" name="슬라이드 번호 개체 틀 11">
+            <a:extLst>
+              <a:ext uri="{FF2B5EF4-FFF2-40B4-BE49-F238E27FC236}">
+                <a16:creationId xmlns:a16="http://schemas.microsoft.com/office/drawing/2014/main" id="{413B4017-910C-2F30-940D-3B8C5B6A6F34}"/>
+              </a:ext>
+            </a:extLst>
+          </p:cNvPr>
+          <p:cNvSpPr>
+            <a:spLocks noGrp="1"/>
+          </p:cNvSpPr>
+          <p:nvPr>
+            <p:ph type="sldNum" sz="quarter" idx="4"/>
+          </p:nvPr>
+        </p:nvSpPr>
+        <p:spPr/>
+        <p:txBody>
+          <a:bodyPr/>
+          <a:lstStyle/>
+          <a:p>
+            <a:fld id="{9860EDB8-5305-433F-BE41-D7A86D811DB3}" type="slidenum">
+              <a:rPr lang="en-US" altLang="ko-KR" noProof="0" smtClean="0"/>
+              <a:pPr/>
+              <a:t>10</a:t>
+            </a:fld>
+            <a:endParaRPr lang="ko-KR" altLang="en-US" noProof="0" dirty="0"/>
+          </a:p>
+        </p:txBody>
+      </p:sp>
+      <p:sp>
+        <p:nvSpPr>
+          <p:cNvPr id="16" name="TextBox 15">
+            <a:extLst>
+              <a:ext uri="{FF2B5EF4-FFF2-40B4-BE49-F238E27FC236}">
+                <a16:creationId xmlns:a16="http://schemas.microsoft.com/office/drawing/2014/main" id="{67A82BDD-3C92-60EE-514C-663426A94DF8}"/>
+              </a:ext>
+            </a:extLst>
+          </p:cNvPr>
+          <p:cNvSpPr txBox="1"/>
+          <p:nvPr/>
+        </p:nvSpPr>
+        <p:spPr>
+          <a:xfrm>
+            <a:off x="1957661" y="1537527"/>
+            <a:ext cx="9840639" cy="3904210"/>
+          </a:xfrm>
+          <a:prstGeom prst="rect">
+            <a:avLst/>
+          </a:prstGeom>
+          <a:noFill/>
+        </p:spPr>
+        <p:txBody>
+          <a:bodyPr wrap="square" rtlCol="0">
+            <a:spAutoFit/>
+          </a:bodyPr>
+          <a:lstStyle/>
+          <a:p>
+            <a:pPr marL="342900" indent="-342900">
+              <a:lnSpc>
+                <a:spcPct val="150000"/>
+              </a:lnSpc>
+              <a:buFont typeface="+mj-lt"/>
+              <a:buAutoNum type="arabicPeriod"/>
+            </a:pPr>
+            <a:r>
+              <a:rPr lang="en-US" altLang="ko-KR" sz="2800" dirty="0">
+                <a:latin typeface="D2Coding" panose="020B0609020101020101" pitchFamily="49" charset="-127"/>
+                <a:ea typeface="D2Coding" panose="020B0609020101020101" pitchFamily="49" charset="-127"/>
+                <a:cs typeface="맑은 고딕 Semilight" panose="020B0502040204020203" pitchFamily="50" charset="-127"/>
+              </a:rPr>
+              <a:t> </a:t>
+            </a:r>
+            <a:r>
+              <a:rPr lang="ko-KR" altLang="en-US" sz="2800" dirty="0">
+                <a:latin typeface="D2Coding" panose="020B0609020101020101" pitchFamily="49" charset="-127"/>
+                <a:ea typeface="D2Coding" panose="020B0609020101020101" pitchFamily="49" charset="-127"/>
+                <a:cs typeface="맑은 고딕 Semilight" panose="020B0502040204020203" pitchFamily="50" charset="-127"/>
+              </a:rPr>
+              <a:t>스펙트럼 분해</a:t>
+            </a:r>
+            <a:r>
+              <a:rPr lang="en-US" altLang="ko-KR" sz="2800" dirty="0">
+                <a:latin typeface="D2Coding" panose="020B0609020101020101" pitchFamily="49" charset="-127"/>
+                <a:ea typeface="D2Coding" panose="020B0609020101020101" pitchFamily="49" charset="-127"/>
+                <a:cs typeface="맑은 고딕 Semilight" panose="020B0502040204020203" pitchFamily="50" charset="-127"/>
+              </a:rPr>
+              <a:t>(Spectral Decomposition)</a:t>
+            </a:r>
+          </a:p>
+          <a:p>
+            <a:pPr marL="342900" indent="-342900">
+              <a:lnSpc>
+                <a:spcPct val="150000"/>
+              </a:lnSpc>
+              <a:buFont typeface="+mj-lt"/>
+              <a:buAutoNum type="arabicPeriod"/>
+            </a:pPr>
+            <a:r>
+              <a:rPr lang="ko-KR" altLang="en-US" sz="2800" dirty="0">
+                <a:latin typeface="D2Coding" panose="020B0609020101020101" pitchFamily="49" charset="-127"/>
+                <a:ea typeface="D2Coding" panose="020B0609020101020101" pitchFamily="49" charset="-127"/>
+                <a:cs typeface="맑은 고딕 Semilight" panose="020B0502040204020203" pitchFamily="50" charset="-127"/>
+              </a:rPr>
+              <a:t> </a:t>
+            </a:r>
+            <a:r>
+              <a:rPr lang="ko-KR" altLang="en-US" sz="2800" dirty="0" err="1">
+                <a:latin typeface="D2Coding" panose="020B0609020101020101" pitchFamily="49" charset="-127"/>
+                <a:ea typeface="D2Coding" panose="020B0609020101020101" pitchFamily="49" charset="-127"/>
+                <a:cs typeface="맑은 고딕 Semilight" panose="020B0502040204020203" pitchFamily="50" charset="-127"/>
+              </a:rPr>
+              <a:t>특이값</a:t>
+            </a:r>
+            <a:r>
+              <a:rPr lang="ko-KR" altLang="en-US" sz="2800" dirty="0">
+                <a:latin typeface="D2Coding" panose="020B0609020101020101" pitchFamily="49" charset="-127"/>
+                <a:ea typeface="D2Coding" panose="020B0609020101020101" pitchFamily="49" charset="-127"/>
+                <a:cs typeface="맑은 고딕 Semilight" panose="020B0502040204020203" pitchFamily="50" charset="-127"/>
+              </a:rPr>
+              <a:t> 분해</a:t>
+            </a:r>
+            <a:r>
+              <a:rPr lang="en-US" altLang="ko-KR" sz="2800" dirty="0">
+                <a:latin typeface="D2Coding" panose="020B0609020101020101" pitchFamily="49" charset="-127"/>
+                <a:ea typeface="D2Coding" panose="020B0609020101020101" pitchFamily="49" charset="-127"/>
+                <a:cs typeface="맑은 고딕 Semilight" panose="020B0502040204020203" pitchFamily="50" charset="-127"/>
+              </a:rPr>
+              <a:t>(Singular Value Decomposition, SVD)</a:t>
+            </a:r>
+          </a:p>
+          <a:p>
+            <a:pPr marL="342900" indent="-342900">
+              <a:lnSpc>
+                <a:spcPct val="150000"/>
+              </a:lnSpc>
+              <a:buFont typeface="+mj-lt"/>
+              <a:buAutoNum type="arabicPeriod"/>
+            </a:pPr>
+            <a:r>
+              <a:rPr lang="en-US" altLang="ko-KR" sz="2800" dirty="0">
+                <a:latin typeface="D2Coding" panose="020B0609020101020101" pitchFamily="49" charset="-127"/>
+                <a:ea typeface="D2Coding" panose="020B0609020101020101" pitchFamily="49" charset="-127"/>
+                <a:cs typeface="맑은 고딕 Semilight" panose="020B0502040204020203" pitchFamily="50" charset="-127"/>
+              </a:rPr>
+              <a:t> SVD vs. PCA</a:t>
+            </a:r>
+          </a:p>
+          <a:p>
+            <a:pPr marL="342900" indent="-342900">
+              <a:lnSpc>
+                <a:spcPct val="150000"/>
+              </a:lnSpc>
+              <a:buFont typeface="+mj-lt"/>
+              <a:buAutoNum type="arabicPeriod"/>
+            </a:pPr>
+            <a:r>
+              <a:rPr lang="en-US" altLang="ko-KR" sz="2800" dirty="0">
+                <a:latin typeface="D2Coding" panose="020B0609020101020101" pitchFamily="49" charset="-127"/>
+                <a:ea typeface="D2Coding" panose="020B0609020101020101" pitchFamily="49" charset="-127"/>
+                <a:cs typeface="맑은 고딕 Semilight" panose="020B0502040204020203" pitchFamily="50" charset="-127"/>
+              </a:rPr>
+              <a:t> LDA(</a:t>
+            </a:r>
+            <a:r>
+              <a:rPr lang="ko-KR" altLang="en-US" sz="2800" dirty="0">
+                <a:latin typeface="D2Coding" panose="020B0609020101020101" pitchFamily="49" charset="-127"/>
+                <a:ea typeface="D2Coding" panose="020B0609020101020101" pitchFamily="49" charset="-127"/>
+                <a:cs typeface="맑은 고딕 Semilight" panose="020B0502040204020203" pitchFamily="50" charset="-127"/>
+              </a:rPr>
+              <a:t>잠재 </a:t>
+            </a:r>
+            <a:r>
+              <a:rPr lang="ko-KR" altLang="en-US" sz="2800" dirty="0" err="1">
+                <a:latin typeface="D2Coding" panose="020B0609020101020101" pitchFamily="49" charset="-127"/>
+                <a:ea typeface="D2Coding" panose="020B0609020101020101" pitchFamily="49" charset="-127"/>
+                <a:cs typeface="맑은 고딕 Semilight" panose="020B0502040204020203" pitchFamily="50" charset="-127"/>
+              </a:rPr>
+              <a:t>디리클레르</a:t>
+            </a:r>
+            <a:r>
+              <a:rPr lang="ko-KR" altLang="en-US" sz="2800" dirty="0">
+                <a:latin typeface="D2Coding" panose="020B0609020101020101" pitchFamily="49" charset="-127"/>
+                <a:ea typeface="D2Coding" panose="020B0609020101020101" pitchFamily="49" charset="-127"/>
+                <a:cs typeface="맑은 고딕 Semilight" panose="020B0502040204020203" pitchFamily="50" charset="-127"/>
+              </a:rPr>
+              <a:t> 할당</a:t>
+            </a:r>
+            <a:r>
+              <a:rPr lang="en-US" altLang="ko-KR" sz="2800" dirty="0">
+                <a:latin typeface="D2Coding" panose="020B0609020101020101" pitchFamily="49" charset="-127"/>
+                <a:ea typeface="D2Coding" panose="020B0609020101020101" pitchFamily="49" charset="-127"/>
+                <a:cs typeface="맑은 고딕 Semilight" panose="020B0502040204020203" pitchFamily="50" charset="-127"/>
+              </a:rPr>
+              <a:t>)</a:t>
+            </a:r>
+          </a:p>
+          <a:p>
+            <a:pPr marL="342900" indent="-342900">
+              <a:lnSpc>
+                <a:spcPct val="150000"/>
+              </a:lnSpc>
+              <a:buFont typeface="+mj-lt"/>
+              <a:buAutoNum type="arabicPeriod"/>
+            </a:pPr>
+            <a:endParaRPr lang="en-US" altLang="ko-KR" sz="2800" dirty="0">
+              <a:latin typeface="D2Coding" panose="020B0609020101020101" pitchFamily="49" charset="-127"/>
+              <a:ea typeface="D2Coding" panose="020B0609020101020101" pitchFamily="49" charset="-127"/>
+              <a:cs typeface="맑은 고딕 Semilight" panose="020B0502040204020203" pitchFamily="50" charset="-127"/>
+            </a:endParaRPr>
+          </a:p>
+          <a:p>
+            <a:pPr marL="342900" indent="-342900">
+              <a:lnSpc>
+                <a:spcPct val="150000"/>
+              </a:lnSpc>
+              <a:buFont typeface="+mj-lt"/>
+              <a:buAutoNum type="arabicPeriod"/>
+            </a:pPr>
+            <a:endParaRPr lang="en-US" altLang="ko-KR" sz="2800" dirty="0">
+              <a:latin typeface="D2Coding" panose="020B0609020101020101" pitchFamily="49" charset="-127"/>
+              <a:ea typeface="D2Coding" panose="020B0609020101020101" pitchFamily="49" charset="-127"/>
+              <a:cs typeface="맑은 고딕 Semilight" panose="020B0502040204020203" pitchFamily="50" charset="-127"/>
+            </a:endParaRPr>
+          </a:p>
+        </p:txBody>
+      </p:sp>
+    </p:spTree>
+    <p:extLst>
+      <p:ext uri="{BB962C8B-B14F-4D97-AF65-F5344CB8AC3E}">
+        <p14:creationId xmlns:p14="http://schemas.microsoft.com/office/powerpoint/2010/main" val="1970703209"/>
+      </p:ext>
+    </p:extLst>
+  </p:cSld>
+  <p:clrMapOvr>
+    <a:masterClrMapping/>
+  </p:clrMapOvr>
+  <mc:AlternateContent xmlns:mc="http://schemas.openxmlformats.org/markup-compatibility/2006" xmlns:p14="http://schemas.microsoft.com/office/powerpoint/2010/main">
+    <mc:Choice Requires="p14">
+      <p:transition p14:dur="10"/>
+    </mc:Choice>
+    <mc:Fallback xmlns="">
+      <p:transition/>
+    </mc:Fallback>
+  </mc:AlternateContent>
+</p:sld>
+</file>
+
+<file path=ppt/slides/slide11.xml><?xml version="1.0" encoding="utf-8"?>
+<p:sld xmlns:a="http://schemas.openxmlformats.org/drawingml/2006/main" xmlns:r="http://schemas.openxmlformats.org/officeDocument/2006/relationships" xmlns:p="http://schemas.openxmlformats.org/presentationml/2006/main">
+  <p:cSld>
+    <p:spTree>
+      <p:nvGrpSpPr>
+        <p:cNvPr id="1" name="">
+          <a:extLst>
+            <a:ext uri="{FF2B5EF4-FFF2-40B4-BE49-F238E27FC236}">
+              <a16:creationId xmlns:a16="http://schemas.microsoft.com/office/drawing/2014/main" id="{A682FFB1-E1E2-8E62-3792-451CCC9C7A74}"/>
+            </a:ext>
+          </a:extLst>
+        </p:cNvPr>
+        <p:cNvGrpSpPr/>
+        <p:nvPr/>
+      </p:nvGrpSpPr>
+      <p:grpSpPr>
+        <a:xfrm>
+          <a:off x="0" y="0"/>
+          <a:ext cx="0" cy="0"/>
+          <a:chOff x="0" y="0"/>
+          <a:chExt cx="0" cy="0"/>
+        </a:xfrm>
+      </p:grpSpPr>
+      <p:sp>
+        <p:nvSpPr>
+          <p:cNvPr id="8" name="제목 7">
+            <a:extLst>
+              <a:ext uri="{FF2B5EF4-FFF2-40B4-BE49-F238E27FC236}">
+                <a16:creationId xmlns:a16="http://schemas.microsoft.com/office/drawing/2014/main" id="{09AFAD1A-77BE-E3E5-1484-C0ADD05F23DC}"/>
+              </a:ext>
+            </a:extLst>
+          </p:cNvPr>
+          <p:cNvSpPr>
+            <a:spLocks noGrp="1"/>
+          </p:cNvSpPr>
+          <p:nvPr>
+            <p:ph type="title"/>
+          </p:nvPr>
+        </p:nvSpPr>
+        <p:spPr>
+          <a:xfrm>
+            <a:off x="521207" y="448056"/>
+            <a:ext cx="8135613" cy="640080"/>
+          </a:xfrm>
+        </p:spPr>
+        <p:txBody>
+          <a:bodyPr rtlCol="0">
+            <a:noAutofit/>
+          </a:bodyPr>
+          <a:lstStyle/>
+          <a:p>
+            <a:r>
+              <a:rPr lang="en-US" altLang="ko-KR" dirty="0">
+                <a:cs typeface="Segoe UI Light" panose="020B0502040204020203" pitchFamily="34" charset="0"/>
+              </a:rPr>
+              <a:t>Matrix</a:t>
+            </a:r>
+            <a:r>
+              <a:rPr lang="ko-KR" altLang="en-US" dirty="0">
+                <a:cs typeface="Segoe UI Light" panose="020B0502040204020203" pitchFamily="34" charset="0"/>
+              </a:rPr>
+              <a:t> </a:t>
+            </a:r>
+            <a:r>
+              <a:rPr lang="en-US" altLang="ko-KR" dirty="0">
+                <a:cs typeface="Segoe UI Light" panose="020B0502040204020203" pitchFamily="34" charset="0"/>
+              </a:rPr>
+              <a:t>Decomposition</a:t>
+            </a:r>
+            <a:endParaRPr lang="ko-KR" altLang="en-US" dirty="0">
+              <a:cs typeface="Segoe UI Light" panose="020B0502040204020203" pitchFamily="34" charset="0"/>
+            </a:endParaRPr>
+          </a:p>
+        </p:txBody>
+      </p:sp>
+      <p:sp>
+        <p:nvSpPr>
+          <p:cNvPr id="12" name="슬라이드 번호 개체 틀 11">
+            <a:extLst>
+              <a:ext uri="{FF2B5EF4-FFF2-40B4-BE49-F238E27FC236}">
+                <a16:creationId xmlns:a16="http://schemas.microsoft.com/office/drawing/2014/main" id="{405552FD-DD84-8A7B-2402-095393843CC8}"/>
+              </a:ext>
+            </a:extLst>
+          </p:cNvPr>
+          <p:cNvSpPr>
+            <a:spLocks noGrp="1"/>
+          </p:cNvSpPr>
+          <p:nvPr>
+            <p:ph type="sldNum" sz="quarter" idx="4"/>
+          </p:nvPr>
+        </p:nvSpPr>
+        <p:spPr/>
+        <p:txBody>
+          <a:bodyPr/>
+          <a:lstStyle/>
+          <a:p>
+            <a:fld id="{9860EDB8-5305-433F-BE41-D7A86D811DB3}" type="slidenum">
+              <a:rPr lang="en-US" altLang="ko-KR" noProof="0" smtClean="0"/>
+              <a:pPr/>
+              <a:t>11</a:t>
+            </a:fld>
+            <a:endParaRPr lang="ko-KR" altLang="en-US" noProof="0"/>
+          </a:p>
+        </p:txBody>
+      </p:sp>
+      <p:sp>
+        <p:nvSpPr>
+          <p:cNvPr id="10" name="TextBox 9">
+            <a:extLst>
+              <a:ext uri="{FF2B5EF4-FFF2-40B4-BE49-F238E27FC236}">
+                <a16:creationId xmlns:a16="http://schemas.microsoft.com/office/drawing/2014/main" id="{75F76213-AECF-41A5-8F1B-E3555F9E58D4}"/>
+              </a:ext>
+            </a:extLst>
+          </p:cNvPr>
+          <p:cNvSpPr txBox="1"/>
+          <p:nvPr/>
+        </p:nvSpPr>
+        <p:spPr>
+          <a:xfrm>
+            <a:off x="634904" y="1358808"/>
+            <a:ext cx="11214196" cy="880819"/>
+          </a:xfrm>
+          <a:prstGeom prst="rect">
+            <a:avLst/>
+          </a:prstGeom>
+          <a:noFill/>
+        </p:spPr>
+        <p:txBody>
+          <a:bodyPr wrap="square">
+            <a:spAutoFit/>
+          </a:bodyPr>
+          <a:lstStyle/>
+          <a:p>
+            <a:pPr>
+              <a:lnSpc>
+                <a:spcPct val="150000"/>
+              </a:lnSpc>
+              <a:buNone/>
+            </a:pPr>
+            <a:r>
+              <a:rPr lang="en-US" altLang="ko-KR" dirty="0">
+                <a:effectLst/>
+                <a:latin typeface="D2Coding" panose="020B0609020101020101" pitchFamily="49" charset="-127"/>
+                <a:ea typeface="D2Coding" panose="020B0609020101020101" pitchFamily="49" charset="-127"/>
+                <a:cs typeface="맑은 고딕 Semilight" panose="020B0502040204020203" pitchFamily="50" charset="-127"/>
+              </a:rPr>
+              <a:t>100,000</a:t>
+            </a:r>
+            <a:r>
+              <a:rPr lang="ko-KR" altLang="en-US" dirty="0">
+                <a:effectLst/>
+                <a:latin typeface="D2Coding" panose="020B0609020101020101" pitchFamily="49" charset="-127"/>
+                <a:ea typeface="D2Coding" panose="020B0609020101020101" pitchFamily="49" charset="-127"/>
+                <a:cs typeface="맑은 고딕 Semilight" panose="020B0502040204020203" pitchFamily="50" charset="-127"/>
+              </a:rPr>
+              <a:t>개의 문서</a:t>
+            </a:r>
+            <a:r>
+              <a:rPr lang="en-US" altLang="ko-KR" dirty="0">
+                <a:effectLst/>
+                <a:latin typeface="D2Coding" panose="020B0609020101020101" pitchFamily="49" charset="-127"/>
+                <a:ea typeface="D2Coding" panose="020B0609020101020101" pitchFamily="49" charset="-127"/>
+                <a:cs typeface="맑은 고딕 Semilight" panose="020B0502040204020203" pitchFamily="50" charset="-127"/>
+              </a:rPr>
+              <a:t>(</a:t>
+            </a:r>
+            <a:r>
+              <a:rPr lang="ko-KR" altLang="en-US" dirty="0">
+                <a:effectLst/>
+                <a:latin typeface="D2Coding" panose="020B0609020101020101" pitchFamily="49" charset="-127"/>
+                <a:ea typeface="D2Coding" panose="020B0609020101020101" pitchFamily="49" charset="-127"/>
+                <a:cs typeface="맑은 고딕 Semilight" panose="020B0502040204020203" pitchFamily="50" charset="-127"/>
+              </a:rPr>
+              <a:t>기사</a:t>
+            </a:r>
+            <a:r>
+              <a:rPr lang="en-US" altLang="ko-KR" dirty="0">
+                <a:effectLst/>
+                <a:latin typeface="D2Coding" panose="020B0609020101020101" pitchFamily="49" charset="-127"/>
+                <a:ea typeface="D2Coding" panose="020B0609020101020101" pitchFamily="49" charset="-127"/>
+                <a:cs typeface="맑은 고딕 Semilight" panose="020B0502040204020203" pitchFamily="50" charset="-127"/>
+              </a:rPr>
+              <a:t>)</a:t>
+            </a:r>
+            <a:r>
+              <a:rPr lang="ko-KR" altLang="en-US" dirty="0">
+                <a:latin typeface="D2Coding" panose="020B0609020101020101" pitchFamily="49" charset="-127"/>
+                <a:ea typeface="D2Coding" panose="020B0609020101020101" pitchFamily="49" charset="-127"/>
+                <a:cs typeface="맑은 고딕 Semilight" panose="020B0502040204020203" pitchFamily="50" charset="-127"/>
+              </a:rPr>
+              <a:t>가 </a:t>
+            </a:r>
+            <a:r>
+              <a:rPr lang="en-US" altLang="ko-KR" dirty="0">
+                <a:effectLst/>
+                <a:latin typeface="D2Coding" panose="020B0609020101020101" pitchFamily="49" charset="-127"/>
+                <a:ea typeface="D2Coding" panose="020B0609020101020101" pitchFamily="49" charset="-127"/>
+                <a:cs typeface="맑은 고딕 Semilight" panose="020B0502040204020203" pitchFamily="50" charset="-127"/>
+              </a:rPr>
+              <a:t>1,000</a:t>
+            </a:r>
+            <a:r>
+              <a:rPr lang="ko-KR" altLang="en-US" dirty="0">
+                <a:effectLst/>
+                <a:latin typeface="D2Coding" panose="020B0609020101020101" pitchFamily="49" charset="-127"/>
+                <a:ea typeface="D2Coding" panose="020B0609020101020101" pitchFamily="49" charset="-127"/>
+                <a:cs typeface="맑은 고딕 Semilight" panose="020B0502040204020203" pitchFamily="50" charset="-127"/>
+              </a:rPr>
+              <a:t>개의 단어로 표현된 원본 행렬에서 가장 중요한 </a:t>
+            </a:r>
+            <a:r>
+              <a:rPr lang="en-US" altLang="ko-KR" dirty="0">
+                <a:effectLst/>
+                <a:latin typeface="D2Coding" panose="020B0609020101020101" pitchFamily="49" charset="-127"/>
+                <a:ea typeface="D2Coding" panose="020B0609020101020101" pitchFamily="49" charset="-127"/>
+                <a:cs typeface="맑은 고딕 Semilight" panose="020B0502040204020203" pitchFamily="50" charset="-127"/>
+              </a:rPr>
+              <a:t>5</a:t>
+            </a:r>
+            <a:r>
+              <a:rPr lang="ko-KR" altLang="en-US" dirty="0">
+                <a:effectLst/>
+                <a:latin typeface="D2Coding" panose="020B0609020101020101" pitchFamily="49" charset="-127"/>
+                <a:ea typeface="D2Coding" panose="020B0609020101020101" pitchFamily="49" charset="-127"/>
+                <a:cs typeface="맑은 고딕 Semilight" panose="020B0502040204020203" pitchFamily="50" charset="-127"/>
+              </a:rPr>
+              <a:t>개의 성분</a:t>
+            </a:r>
+            <a:r>
+              <a:rPr lang="en-US" altLang="ko-KR" dirty="0">
+                <a:effectLst/>
+                <a:latin typeface="D2Coding" panose="020B0609020101020101" pitchFamily="49" charset="-127"/>
+                <a:ea typeface="D2Coding" panose="020B0609020101020101" pitchFamily="49" charset="-127"/>
+                <a:cs typeface="맑은 고딕 Semilight" panose="020B0502040204020203" pitchFamily="50" charset="-127"/>
+              </a:rPr>
+              <a:t>(Topic)</a:t>
+            </a:r>
+            <a:r>
+              <a:rPr lang="ko-KR" altLang="en-US" dirty="0">
+                <a:effectLst/>
+                <a:latin typeface="D2Coding" panose="020B0609020101020101" pitchFamily="49" charset="-127"/>
+                <a:ea typeface="D2Coding" panose="020B0609020101020101" pitchFamily="49" charset="-127"/>
+                <a:cs typeface="맑은 고딕 Semilight" panose="020B0502040204020203" pitchFamily="50" charset="-127"/>
+              </a:rPr>
+              <a:t>만 남겨 </a:t>
+            </a:r>
+            <a:r>
+              <a:rPr lang="ko-KR" altLang="en-US" dirty="0" err="1">
+                <a:effectLst/>
+                <a:latin typeface="D2Coding" panose="020B0609020101020101" pitchFamily="49" charset="-127"/>
+                <a:ea typeface="D2Coding" panose="020B0609020101020101" pitchFamily="49" charset="-127"/>
+                <a:cs typeface="맑은 고딕 Semilight" panose="020B0502040204020203" pitchFamily="50" charset="-127"/>
+              </a:rPr>
+              <a:t>저차원</a:t>
+            </a:r>
+            <a:r>
+              <a:rPr lang="ko-KR" altLang="en-US" dirty="0">
+                <a:effectLst/>
+                <a:latin typeface="D2Coding" panose="020B0609020101020101" pitchFamily="49" charset="-127"/>
+                <a:ea typeface="D2Coding" panose="020B0609020101020101" pitchFamily="49" charset="-127"/>
+                <a:cs typeface="맑은 고딕 Semilight" panose="020B0502040204020203" pitchFamily="50" charset="-127"/>
+              </a:rPr>
+              <a:t> 행렬로 압축하는 과정을 </a:t>
+            </a:r>
+            <a:r>
+              <a:rPr lang="en-US" altLang="ko-KR" dirty="0">
+                <a:effectLst/>
+                <a:latin typeface="D2Coding" panose="020B0609020101020101" pitchFamily="49" charset="-127"/>
+                <a:ea typeface="D2Coding" panose="020B0609020101020101" pitchFamily="49" charset="-127"/>
+                <a:cs typeface="맑은 고딕 Semilight" panose="020B0502040204020203" pitchFamily="50" charset="-127"/>
+              </a:rPr>
+              <a:t>(</a:t>
+            </a:r>
+            <a:r>
+              <a:rPr lang="ko-KR" altLang="en-US" dirty="0">
+                <a:effectLst/>
+                <a:latin typeface="D2Coding" panose="020B0609020101020101" pitchFamily="49" charset="-127"/>
+                <a:ea typeface="D2Coding" panose="020B0609020101020101" pitchFamily="49" charset="-127"/>
+                <a:cs typeface="맑은 고딕 Semilight" panose="020B0502040204020203" pitchFamily="50" charset="-127"/>
+              </a:rPr>
+              <a:t>절단된</a:t>
+            </a:r>
+            <a:r>
+              <a:rPr lang="en-US" altLang="ko-KR" dirty="0">
+                <a:effectLst/>
+                <a:latin typeface="D2Coding" panose="020B0609020101020101" pitchFamily="49" charset="-127"/>
+                <a:ea typeface="D2Coding" panose="020B0609020101020101" pitchFamily="49" charset="-127"/>
+                <a:cs typeface="맑은 고딕 Semilight" panose="020B0502040204020203" pitchFamily="50" charset="-127"/>
+              </a:rPr>
+              <a:t>)</a:t>
+            </a:r>
+            <a:r>
+              <a:rPr lang="ko-KR" altLang="en-US" dirty="0">
+                <a:effectLst/>
+                <a:latin typeface="D2Coding" panose="020B0609020101020101" pitchFamily="49" charset="-127"/>
+                <a:ea typeface="D2Coding" panose="020B0609020101020101" pitchFamily="49" charset="-127"/>
+                <a:cs typeface="맑은 고딕 Semilight" panose="020B0502040204020203" pitchFamily="50" charset="-127"/>
+              </a:rPr>
+              <a:t> </a:t>
+            </a:r>
+            <a:r>
+              <a:rPr lang="ko-KR" altLang="en-US" dirty="0" err="1">
+                <a:effectLst/>
+                <a:latin typeface="D2Coding" panose="020B0609020101020101" pitchFamily="49" charset="-127"/>
+                <a:ea typeface="D2Coding" panose="020B0609020101020101" pitchFamily="49" charset="-127"/>
+                <a:cs typeface="맑은 고딕 Semilight" panose="020B0502040204020203" pitchFamily="50" charset="-127"/>
+              </a:rPr>
+              <a:t>특이값</a:t>
+            </a:r>
+            <a:r>
+              <a:rPr lang="ko-KR" altLang="en-US" dirty="0">
+                <a:effectLst/>
+                <a:latin typeface="D2Coding" panose="020B0609020101020101" pitchFamily="49" charset="-127"/>
+                <a:ea typeface="D2Coding" panose="020B0609020101020101" pitchFamily="49" charset="-127"/>
+                <a:cs typeface="맑은 고딕 Semilight" panose="020B0502040204020203" pitchFamily="50" charset="-127"/>
+              </a:rPr>
+              <a:t> 분해</a:t>
+            </a:r>
+            <a:r>
+              <a:rPr lang="en-US" altLang="ko-KR" dirty="0">
+                <a:effectLst/>
+                <a:latin typeface="D2Coding" panose="020B0609020101020101" pitchFamily="49" charset="-127"/>
+                <a:ea typeface="D2Coding" panose="020B0609020101020101" pitchFamily="49" charset="-127"/>
+                <a:cs typeface="맑은 고딕 Semilight" panose="020B0502040204020203" pitchFamily="50" charset="-127"/>
+              </a:rPr>
+              <a:t>(Truncated SVD)</a:t>
+            </a:r>
+            <a:r>
+              <a:rPr lang="ko-KR" altLang="en-US" dirty="0">
+                <a:effectLst/>
+                <a:latin typeface="D2Coding" panose="020B0609020101020101" pitchFamily="49" charset="-127"/>
+                <a:ea typeface="D2Coding" panose="020B0609020101020101" pitchFamily="49" charset="-127"/>
+                <a:cs typeface="맑은 고딕 Semilight" panose="020B0502040204020203" pitchFamily="50" charset="-127"/>
+              </a:rPr>
+              <a:t>라고 함</a:t>
+            </a:r>
+            <a:endParaRPr lang="en-US" altLang="ko-KR" dirty="0">
+              <a:effectLst/>
+              <a:latin typeface="D2Coding" panose="020B0609020101020101" pitchFamily="49" charset="-127"/>
+              <a:ea typeface="D2Coding" panose="020B0609020101020101" pitchFamily="49" charset="-127"/>
+              <a:cs typeface="맑은 고딕 Semilight" panose="020B0502040204020203" pitchFamily="50" charset="-127"/>
+            </a:endParaRPr>
+          </a:p>
+        </p:txBody>
+      </p:sp>
+      <p:sp>
+        <p:nvSpPr>
+          <p:cNvPr id="13" name="TextBox 12">
+            <a:extLst>
+              <a:ext uri="{FF2B5EF4-FFF2-40B4-BE49-F238E27FC236}">
+                <a16:creationId xmlns:a16="http://schemas.microsoft.com/office/drawing/2014/main" id="{9062B312-8F08-6092-4FE5-3AB1B5CE41A8}"/>
+              </a:ext>
+            </a:extLst>
+          </p:cNvPr>
+          <p:cNvSpPr txBox="1"/>
+          <p:nvPr/>
+        </p:nvSpPr>
+        <p:spPr>
+          <a:xfrm>
+            <a:off x="1651000" y="6083300"/>
+            <a:ext cx="1511300" cy="307777"/>
+          </a:xfrm>
+          <a:prstGeom prst="rect">
+            <a:avLst/>
+          </a:prstGeom>
+          <a:noFill/>
+        </p:spPr>
+        <p:txBody>
+          <a:bodyPr wrap="square">
+            <a:spAutoFit/>
+          </a:bodyPr>
+          <a:lstStyle/>
+          <a:p>
+            <a:r>
+              <a:rPr lang="ko-KR" altLang="en-US" sz="1400" b="1" dirty="0">
+                <a:latin typeface="맑은 고딕 Semilight" panose="020B0502040204020203" pitchFamily="50" charset="-127"/>
+                <a:ea typeface="맑은 고딕 Semilight" panose="020B0502040204020203" pitchFamily="50" charset="-127"/>
+                <a:cs typeface="맑은 고딕 Semilight" panose="020B0502040204020203" pitchFamily="50" charset="-127"/>
+              </a:rPr>
+              <a:t>문서</a:t>
+            </a:r>
+            <a:r>
+              <a:rPr lang="en-US" altLang="ko-KR" sz="1400" b="1" dirty="0">
+                <a:latin typeface="맑은 고딕 Semilight" panose="020B0502040204020203" pitchFamily="50" charset="-127"/>
+                <a:ea typeface="맑은 고딕 Semilight" panose="020B0502040204020203" pitchFamily="50" charset="-127"/>
+                <a:cs typeface="맑은 고딕 Semilight" panose="020B0502040204020203" pitchFamily="50" charset="-127"/>
+              </a:rPr>
+              <a:t>-</a:t>
+            </a:r>
+            <a:r>
+              <a:rPr lang="ko-KR" altLang="en-US" sz="1400" b="1" dirty="0">
+                <a:latin typeface="맑은 고딕 Semilight" panose="020B0502040204020203" pitchFamily="50" charset="-127"/>
+                <a:ea typeface="맑은 고딕 Semilight" panose="020B0502040204020203" pitchFamily="50" charset="-127"/>
+                <a:cs typeface="맑은 고딕 Semilight" panose="020B0502040204020203" pitchFamily="50" charset="-127"/>
+              </a:rPr>
+              <a:t>단어 행렬</a:t>
+            </a:r>
+          </a:p>
+        </p:txBody>
+      </p:sp>
+      <p:pic>
+        <p:nvPicPr>
+          <p:cNvPr id="15" name="그림 14">
+            <a:extLst>
+              <a:ext uri="{FF2B5EF4-FFF2-40B4-BE49-F238E27FC236}">
+                <a16:creationId xmlns:a16="http://schemas.microsoft.com/office/drawing/2014/main" id="{E86B72B6-C096-D9E8-8385-47E1B43B656F}"/>
+              </a:ext>
+            </a:extLst>
+          </p:cNvPr>
+          <p:cNvPicPr>
+            <a:picLocks noChangeAspect="1"/>
+          </p:cNvPicPr>
+          <p:nvPr/>
+        </p:nvPicPr>
+        <p:blipFill>
+          <a:blip r:embed="rId3"/>
+          <a:stretch>
+            <a:fillRect/>
+          </a:stretch>
+        </p:blipFill>
+        <p:spPr>
+          <a:xfrm>
+            <a:off x="8888843" y="4419957"/>
+            <a:ext cx="3040892" cy="1295043"/>
+          </a:xfrm>
+          <a:prstGeom prst="rect">
+            <a:avLst/>
+          </a:prstGeom>
+        </p:spPr>
+      </p:pic>
+      <p:sp>
+        <p:nvSpPr>
+          <p:cNvPr id="16" name="TextBox 15">
+            <a:extLst>
+              <a:ext uri="{FF2B5EF4-FFF2-40B4-BE49-F238E27FC236}">
+                <a16:creationId xmlns:a16="http://schemas.microsoft.com/office/drawing/2014/main" id="{A7612283-2D84-DC25-D572-AC3E7C4D5AFA}"/>
+              </a:ext>
+            </a:extLst>
+          </p:cNvPr>
+          <p:cNvSpPr txBox="1"/>
+          <p:nvPr/>
+        </p:nvSpPr>
+        <p:spPr>
+          <a:xfrm>
+            <a:off x="7190826" y="6083300"/>
+            <a:ext cx="1511300" cy="307777"/>
+          </a:xfrm>
+          <a:prstGeom prst="rect">
+            <a:avLst/>
+          </a:prstGeom>
+          <a:noFill/>
+        </p:spPr>
+        <p:txBody>
+          <a:bodyPr wrap="square">
+            <a:spAutoFit/>
+          </a:bodyPr>
+          <a:lstStyle/>
+          <a:p>
+            <a:r>
+              <a:rPr lang="ko-KR" altLang="en-US" sz="1400" b="1" dirty="0">
+                <a:latin typeface="맑은 고딕 Semilight" panose="020B0502040204020203" pitchFamily="50" charset="-127"/>
+                <a:ea typeface="맑은 고딕 Semilight" panose="020B0502040204020203" pitchFamily="50" charset="-127"/>
+                <a:cs typeface="맑은 고딕 Semilight" panose="020B0502040204020203" pitchFamily="50" charset="-127"/>
+              </a:rPr>
+              <a:t>주제</a:t>
+            </a:r>
+            <a:r>
+              <a:rPr lang="en-US" altLang="ko-KR" sz="1400" b="1" dirty="0">
+                <a:latin typeface="맑은 고딕 Semilight" panose="020B0502040204020203" pitchFamily="50" charset="-127"/>
+                <a:ea typeface="맑은 고딕 Semilight" panose="020B0502040204020203" pitchFamily="50" charset="-127"/>
+                <a:cs typeface="맑은 고딕 Semilight" panose="020B0502040204020203" pitchFamily="50" charset="-127"/>
+              </a:rPr>
+              <a:t> - </a:t>
+            </a:r>
+            <a:r>
+              <a:rPr lang="ko-KR" altLang="en-US" sz="1400" b="1" dirty="0">
+                <a:latin typeface="맑은 고딕 Semilight" panose="020B0502040204020203" pitchFamily="50" charset="-127"/>
+                <a:ea typeface="맑은 고딕 Semilight" panose="020B0502040204020203" pitchFamily="50" charset="-127"/>
+                <a:cs typeface="맑은 고딕 Semilight" panose="020B0502040204020203" pitchFamily="50" charset="-127"/>
+              </a:rPr>
+              <a:t>문서 행렬</a:t>
+            </a:r>
+          </a:p>
+        </p:txBody>
+      </p:sp>
+      <p:sp>
+        <p:nvSpPr>
+          <p:cNvPr id="17" name="직사각형 16">
+            <a:extLst>
+              <a:ext uri="{FF2B5EF4-FFF2-40B4-BE49-F238E27FC236}">
+                <a16:creationId xmlns:a16="http://schemas.microsoft.com/office/drawing/2014/main" id="{B800A197-6437-3AF3-C382-F18525D160F6}"/>
+              </a:ext>
+            </a:extLst>
+          </p:cNvPr>
+          <p:cNvSpPr/>
+          <p:nvPr/>
+        </p:nvSpPr>
+        <p:spPr>
+          <a:xfrm>
+            <a:off x="1663699" y="3175000"/>
+            <a:ext cx="1738619" cy="2816258"/>
+          </a:xfrm>
+          <a:prstGeom prst="rect">
+            <a:avLst/>
+          </a:prstGeom>
+        </p:spPr>
+        <p:style>
+          <a:lnRef idx="2">
+            <a:schemeClr val="accent1">
+              <a:shade val="15000"/>
+            </a:schemeClr>
+          </a:lnRef>
+          <a:fillRef idx="1">
+            <a:schemeClr val="accent1"/>
+          </a:fillRef>
+          <a:effectRef idx="0">
+            <a:schemeClr val="accent1"/>
+          </a:effectRef>
+          <a:fontRef idx="minor">
+            <a:schemeClr val="lt1"/>
+          </a:fontRef>
+        </p:style>
+        <p:txBody>
+          <a:bodyPr rtlCol="0" anchor="ctr"/>
+          <a:lstStyle/>
+          <a:p>
+            <a:pPr algn="ctr"/>
+            <a:endParaRPr lang="ko-KR" altLang="en-US"/>
+          </a:p>
+        </p:txBody>
+      </p:sp>
+      <p:sp>
+        <p:nvSpPr>
+          <p:cNvPr id="18" name="직사각형 17">
+            <a:extLst>
+              <a:ext uri="{FF2B5EF4-FFF2-40B4-BE49-F238E27FC236}">
+                <a16:creationId xmlns:a16="http://schemas.microsoft.com/office/drawing/2014/main" id="{78E7773F-40E0-77FE-31E1-E882F12EBF62}"/>
+              </a:ext>
+            </a:extLst>
+          </p:cNvPr>
+          <p:cNvSpPr/>
+          <p:nvPr/>
+        </p:nvSpPr>
+        <p:spPr>
+          <a:xfrm>
+            <a:off x="4128828" y="3175000"/>
+            <a:ext cx="600656" cy="2816258"/>
+          </a:xfrm>
+          <a:prstGeom prst="rect">
+            <a:avLst/>
+          </a:prstGeom>
+        </p:spPr>
+        <p:style>
+          <a:lnRef idx="2">
+            <a:schemeClr val="accent1">
+              <a:shade val="15000"/>
+            </a:schemeClr>
+          </a:lnRef>
+          <a:fillRef idx="1">
+            <a:schemeClr val="accent1"/>
+          </a:fillRef>
+          <a:effectRef idx="0">
+            <a:schemeClr val="accent1"/>
+          </a:effectRef>
+          <a:fontRef idx="minor">
+            <a:schemeClr val="lt1"/>
+          </a:fontRef>
+        </p:style>
+        <p:txBody>
+          <a:bodyPr rtlCol="0" anchor="ctr"/>
+          <a:lstStyle/>
+          <a:p>
+            <a:pPr algn="ctr"/>
+            <a:endParaRPr lang="ko-KR" altLang="en-US"/>
+          </a:p>
+        </p:txBody>
+      </p:sp>
+      <p:sp>
+        <p:nvSpPr>
+          <p:cNvPr id="20" name="직사각형 19">
+            <a:extLst>
+              <a:ext uri="{FF2B5EF4-FFF2-40B4-BE49-F238E27FC236}">
+                <a16:creationId xmlns:a16="http://schemas.microsoft.com/office/drawing/2014/main" id="{FC1EFB07-4F18-5C31-8EA8-A2D88879C1E9}"/>
+              </a:ext>
+            </a:extLst>
+          </p:cNvPr>
+          <p:cNvSpPr/>
+          <p:nvPr/>
+        </p:nvSpPr>
+        <p:spPr>
+          <a:xfrm rot="5400000">
+            <a:off x="7214745" y="1834339"/>
+            <a:ext cx="479311" cy="3155849"/>
+          </a:xfrm>
+          <a:prstGeom prst="rect">
+            <a:avLst/>
+          </a:prstGeom>
+        </p:spPr>
+        <p:style>
+          <a:lnRef idx="2">
+            <a:schemeClr val="accent1">
+              <a:shade val="15000"/>
+            </a:schemeClr>
+          </a:lnRef>
+          <a:fillRef idx="1">
+            <a:schemeClr val="accent1"/>
+          </a:fillRef>
+          <a:effectRef idx="0">
+            <a:schemeClr val="accent1"/>
+          </a:effectRef>
+          <a:fontRef idx="minor">
+            <a:schemeClr val="lt1"/>
+          </a:fontRef>
+        </p:style>
+        <p:txBody>
+          <a:bodyPr rtlCol="0" anchor="ctr"/>
+          <a:lstStyle/>
+          <a:p>
+            <a:pPr algn="ctr"/>
+            <a:endParaRPr lang="ko-KR" altLang="en-US"/>
+          </a:p>
+        </p:txBody>
+      </p:sp>
+      <p:sp>
+        <p:nvSpPr>
+          <p:cNvPr id="21" name="직사각형 20">
+            <a:extLst>
+              <a:ext uri="{FF2B5EF4-FFF2-40B4-BE49-F238E27FC236}">
+                <a16:creationId xmlns:a16="http://schemas.microsoft.com/office/drawing/2014/main" id="{E6C6EDF1-1CBD-D410-4BE0-731C5CF32E43}"/>
+              </a:ext>
+            </a:extLst>
+          </p:cNvPr>
+          <p:cNvSpPr/>
+          <p:nvPr/>
+        </p:nvSpPr>
+        <p:spPr>
+          <a:xfrm>
+            <a:off x="5023497" y="3172605"/>
+            <a:ext cx="600656" cy="479313"/>
+          </a:xfrm>
+          <a:prstGeom prst="rect">
+            <a:avLst/>
+          </a:prstGeom>
+        </p:spPr>
+        <p:style>
+          <a:lnRef idx="2">
+            <a:schemeClr val="accent1">
+              <a:shade val="15000"/>
+            </a:schemeClr>
+          </a:lnRef>
+          <a:fillRef idx="1">
+            <a:schemeClr val="accent1"/>
+          </a:fillRef>
+          <a:effectRef idx="0">
+            <a:schemeClr val="accent1"/>
+          </a:effectRef>
+          <a:fontRef idx="minor">
+            <a:schemeClr val="lt1"/>
+          </a:fontRef>
+        </p:style>
+        <p:txBody>
+          <a:bodyPr rtlCol="0" anchor="ctr"/>
+          <a:lstStyle/>
+          <a:p>
+            <a:pPr algn="ctr"/>
+            <a:endParaRPr lang="ko-KR" altLang="en-US"/>
+          </a:p>
+        </p:txBody>
+      </p:sp>
+      <mc:AlternateContent xmlns:mc="http://schemas.openxmlformats.org/markup-compatibility/2006" xmlns:a14="http://schemas.microsoft.com/office/drawing/2010/main">
+        <mc:Choice Requires="a14">
+          <p:sp>
+            <p:nvSpPr>
+              <p:cNvPr id="22" name="TextBox 21">
+                <a:extLst>
+                  <a:ext uri="{FF2B5EF4-FFF2-40B4-BE49-F238E27FC236}">
+                    <a16:creationId xmlns:a16="http://schemas.microsoft.com/office/drawing/2014/main" id="{6F1EDEB7-0970-EF3C-8D42-1973797519BE}"/>
+                  </a:ext>
+                </a:extLst>
+              </p:cNvPr>
+              <p:cNvSpPr txBox="1"/>
+              <p:nvPr/>
+            </p:nvSpPr>
+            <p:spPr>
+              <a:xfrm>
+                <a:off x="2386531" y="4239392"/>
+                <a:ext cx="422873" cy="553998"/>
+              </a:xfrm>
+              <a:prstGeom prst="rect">
+                <a:avLst/>
+              </a:prstGeom>
+              <a:noFill/>
+            </p:spPr>
+            <p:txBody>
+              <a:bodyPr wrap="none" lIns="0" tIns="0" rIns="0" bIns="0" rtlCol="0">
+                <a:spAutoFit/>
+              </a:bodyPr>
+              <a:lstStyle/>
+              <a:p>
+                <a:pPr/>
+                <a14:m>
+                  <m:oMathPara xmlns:m="http://schemas.openxmlformats.org/officeDocument/2006/math">
+                    <m:oMathParaPr>
+                      <m:jc m:val="centerGroup"/>
+                    </m:oMathParaPr>
+                    <m:oMath xmlns:m="http://schemas.openxmlformats.org/officeDocument/2006/math">
+                      <m:r>
+                        <a:rPr lang="ko-KR" altLang="en-US" sz="3600" i="1" smtClean="0">
+                          <a:latin typeface="Cambria Math" panose="02040503050406030204" pitchFamily="18" charset="0"/>
+                        </a:rPr>
+                        <m:t>𝐴</m:t>
+                      </m:r>
+                    </m:oMath>
+                  </m:oMathPara>
+                </a14:m>
+                <a:endParaRPr lang="ko-KR" altLang="en-US" sz="3600" dirty="0"/>
+              </a:p>
+            </p:txBody>
+          </p:sp>
+        </mc:Choice>
+        <mc:Fallback xmlns="">
+          <p:sp>
+            <p:nvSpPr>
+              <p:cNvPr id="22" name="TextBox 21">
+                <a:extLst>
+                  <a:ext uri="{FF2B5EF4-FFF2-40B4-BE49-F238E27FC236}">
+                    <a16:creationId xmlns:a16="http://schemas.microsoft.com/office/drawing/2014/main" id="{6F1EDEB7-0970-EF3C-8D42-1973797519BE}"/>
+                  </a:ext>
+                </a:extLst>
+              </p:cNvPr>
+              <p:cNvSpPr txBox="1">
+                <a:spLocks noRot="1" noChangeAspect="1" noMove="1" noResize="1" noEditPoints="1" noAdjustHandles="1" noChangeArrowheads="1" noChangeShapeType="1" noTextEdit="1"/>
+              </p:cNvSpPr>
+              <p:nvPr/>
+            </p:nvSpPr>
+            <p:spPr>
+              <a:xfrm>
+                <a:off x="2386531" y="4239392"/>
+                <a:ext cx="422873" cy="553998"/>
+              </a:xfrm>
+              <a:prstGeom prst="rect">
+                <a:avLst/>
+              </a:prstGeom>
+              <a:blipFill>
+                <a:blip r:embed="rId4"/>
+                <a:stretch>
+                  <a:fillRect/>
+                </a:stretch>
+              </a:blipFill>
+            </p:spPr>
+            <p:txBody>
+              <a:bodyPr/>
+              <a:lstStyle/>
+              <a:p>
+                <a:r>
+                  <a:rPr lang="ko-KR" altLang="en-US">
+                    <a:noFill/>
+                  </a:rPr>
+                  <a:t> </a:t>
+                </a:r>
+              </a:p>
+            </p:txBody>
+          </p:sp>
+        </mc:Fallback>
+      </mc:AlternateContent>
+      <mc:AlternateContent xmlns:mc="http://schemas.openxmlformats.org/markup-compatibility/2006" xmlns:a14="http://schemas.microsoft.com/office/drawing/2010/main">
+        <mc:Choice Requires="a14">
+          <p:sp>
+            <p:nvSpPr>
+              <p:cNvPr id="23" name="TextBox 22">
+                <a:extLst>
+                  <a:ext uri="{FF2B5EF4-FFF2-40B4-BE49-F238E27FC236}">
+                    <a16:creationId xmlns:a16="http://schemas.microsoft.com/office/drawing/2014/main" id="{5F78C3F4-02E7-75A6-7256-FFCBC257E89D}"/>
+                  </a:ext>
+                </a:extLst>
+              </p:cNvPr>
+              <p:cNvSpPr txBox="1"/>
+              <p:nvPr/>
+            </p:nvSpPr>
+            <p:spPr>
+              <a:xfrm>
+                <a:off x="4205596" y="4239392"/>
+                <a:ext cx="453073" cy="553998"/>
+              </a:xfrm>
+              <a:prstGeom prst="rect">
+                <a:avLst/>
+              </a:prstGeom>
+              <a:noFill/>
+            </p:spPr>
+            <p:txBody>
+              <a:bodyPr wrap="none" lIns="0" tIns="0" rIns="0" bIns="0" rtlCol="0">
+                <a:spAutoFit/>
+              </a:bodyPr>
+              <a:lstStyle/>
+              <a:p>
+                <a:pPr/>
+                <a14:m>
+                  <m:oMathPara xmlns:m="http://schemas.openxmlformats.org/officeDocument/2006/math">
+                    <m:oMathParaPr>
+                      <m:jc m:val="centerGroup"/>
+                    </m:oMathParaPr>
+                    <m:oMath xmlns:m="http://schemas.openxmlformats.org/officeDocument/2006/math">
+                      <m:r>
+                        <a:rPr lang="en-US" altLang="ko-KR" sz="3600" b="0" i="1" smtClean="0">
+                          <a:latin typeface="Cambria Math" panose="02040503050406030204" pitchFamily="18" charset="0"/>
+                        </a:rPr>
+                        <m:t>𝑈</m:t>
+                      </m:r>
+                    </m:oMath>
+                  </m:oMathPara>
+                </a14:m>
+                <a:endParaRPr lang="ko-KR" altLang="en-US" sz="3600" dirty="0"/>
+              </a:p>
+            </p:txBody>
+          </p:sp>
+        </mc:Choice>
+        <mc:Fallback xmlns="">
+          <p:sp>
+            <p:nvSpPr>
+              <p:cNvPr id="23" name="TextBox 22">
+                <a:extLst>
+                  <a:ext uri="{FF2B5EF4-FFF2-40B4-BE49-F238E27FC236}">
+                    <a16:creationId xmlns:a16="http://schemas.microsoft.com/office/drawing/2014/main" id="{5F78C3F4-02E7-75A6-7256-FFCBC257E89D}"/>
+                  </a:ext>
+                </a:extLst>
+              </p:cNvPr>
+              <p:cNvSpPr txBox="1">
+                <a:spLocks noRot="1" noChangeAspect="1" noMove="1" noResize="1" noEditPoints="1" noAdjustHandles="1" noChangeArrowheads="1" noChangeShapeType="1" noTextEdit="1"/>
+              </p:cNvSpPr>
+              <p:nvPr/>
+            </p:nvSpPr>
+            <p:spPr>
+              <a:xfrm>
+                <a:off x="4205596" y="4239392"/>
+                <a:ext cx="453073" cy="553998"/>
+              </a:xfrm>
+              <a:prstGeom prst="rect">
+                <a:avLst/>
+              </a:prstGeom>
+              <a:blipFill>
+                <a:blip r:embed="rId5"/>
+                <a:stretch>
+                  <a:fillRect/>
+                </a:stretch>
+              </a:blipFill>
+            </p:spPr>
+            <p:txBody>
+              <a:bodyPr/>
+              <a:lstStyle/>
+              <a:p>
+                <a:r>
+                  <a:rPr lang="ko-KR" altLang="en-US">
+                    <a:noFill/>
+                  </a:rPr>
+                  <a:t> </a:t>
+                </a:r>
+              </a:p>
+            </p:txBody>
+          </p:sp>
+        </mc:Fallback>
+      </mc:AlternateContent>
+      <mc:AlternateContent xmlns:mc="http://schemas.openxmlformats.org/markup-compatibility/2006" xmlns:a14="http://schemas.microsoft.com/office/drawing/2010/main">
+        <mc:Choice Requires="a14">
+          <p:sp>
+            <p:nvSpPr>
+              <p:cNvPr id="24" name="TextBox 23">
+                <a:extLst>
+                  <a:ext uri="{FF2B5EF4-FFF2-40B4-BE49-F238E27FC236}">
+                    <a16:creationId xmlns:a16="http://schemas.microsoft.com/office/drawing/2014/main" id="{E8399F27-3811-FF52-6B17-962A63CFEA2F}"/>
+                  </a:ext>
+                </a:extLst>
+              </p:cNvPr>
+              <p:cNvSpPr txBox="1"/>
+              <p:nvPr/>
+            </p:nvSpPr>
+            <p:spPr>
+              <a:xfrm>
+                <a:off x="5048897" y="4239392"/>
+                <a:ext cx="421141" cy="553998"/>
+              </a:xfrm>
+              <a:prstGeom prst="rect">
+                <a:avLst/>
+              </a:prstGeom>
+              <a:noFill/>
+            </p:spPr>
+            <p:txBody>
+              <a:bodyPr wrap="none" lIns="0" tIns="0" rIns="0" bIns="0" rtlCol="0">
+                <a:spAutoFit/>
+              </a:bodyPr>
+              <a:lstStyle/>
+              <a:p>
+                <a:pPr/>
+                <a14:m>
+                  <m:oMathPara xmlns:m="http://schemas.openxmlformats.org/officeDocument/2006/math">
+                    <m:oMathParaPr>
+                      <m:jc m:val="centerGroup"/>
+                    </m:oMathParaPr>
+                    <m:oMath xmlns:m="http://schemas.openxmlformats.org/officeDocument/2006/math">
+                      <m:r>
+                        <a:rPr lang="ko-KR" altLang="en-US" sz="3600" i="1">
+                          <a:latin typeface="Cambria Math" panose="02040503050406030204" pitchFamily="18" charset="0"/>
+                        </a:rPr>
+                        <m:t>𝛴</m:t>
+                      </m:r>
+                    </m:oMath>
+                  </m:oMathPara>
+                </a14:m>
+                <a:endParaRPr lang="ko-KR" altLang="en-US" sz="3600" dirty="0"/>
+              </a:p>
+            </p:txBody>
+          </p:sp>
+        </mc:Choice>
+        <mc:Fallback xmlns="">
+          <p:sp>
+            <p:nvSpPr>
+              <p:cNvPr id="24" name="TextBox 23">
+                <a:extLst>
+                  <a:ext uri="{FF2B5EF4-FFF2-40B4-BE49-F238E27FC236}">
+                    <a16:creationId xmlns:a16="http://schemas.microsoft.com/office/drawing/2014/main" id="{E8399F27-3811-FF52-6B17-962A63CFEA2F}"/>
+                  </a:ext>
+                </a:extLst>
+              </p:cNvPr>
+              <p:cNvSpPr txBox="1">
+                <a:spLocks noRot="1" noChangeAspect="1" noMove="1" noResize="1" noEditPoints="1" noAdjustHandles="1" noChangeArrowheads="1" noChangeShapeType="1" noTextEdit="1"/>
+              </p:cNvSpPr>
+              <p:nvPr/>
+            </p:nvSpPr>
+            <p:spPr>
+              <a:xfrm>
+                <a:off x="5048897" y="4239392"/>
+                <a:ext cx="421141" cy="553998"/>
+              </a:xfrm>
+              <a:prstGeom prst="rect">
+                <a:avLst/>
+              </a:prstGeom>
+              <a:blipFill>
+                <a:blip r:embed="rId6"/>
+                <a:stretch>
+                  <a:fillRect/>
+                </a:stretch>
+              </a:blipFill>
+            </p:spPr>
+            <p:txBody>
+              <a:bodyPr/>
+              <a:lstStyle/>
+              <a:p>
+                <a:r>
+                  <a:rPr lang="ko-KR" altLang="en-US">
+                    <a:noFill/>
+                  </a:rPr>
+                  <a:t> </a:t>
+                </a:r>
+              </a:p>
+            </p:txBody>
+          </p:sp>
+        </mc:Fallback>
+      </mc:AlternateContent>
+      <mc:AlternateContent xmlns:mc="http://schemas.openxmlformats.org/markup-compatibility/2006" xmlns:a14="http://schemas.microsoft.com/office/drawing/2010/main">
+        <mc:Choice Requires="a14">
+          <p:sp>
+            <p:nvSpPr>
+              <p:cNvPr id="25" name="TextBox 24">
+                <a:extLst>
+                  <a:ext uri="{FF2B5EF4-FFF2-40B4-BE49-F238E27FC236}">
+                    <a16:creationId xmlns:a16="http://schemas.microsoft.com/office/drawing/2014/main" id="{B27E1F5A-9F8E-1127-8440-6A3D8831BF4C}"/>
+                  </a:ext>
+                </a:extLst>
+              </p:cNvPr>
+              <p:cNvSpPr txBox="1"/>
+              <p:nvPr/>
+            </p:nvSpPr>
+            <p:spPr>
+              <a:xfrm>
+                <a:off x="7190826" y="4239392"/>
+                <a:ext cx="676852" cy="553998"/>
+              </a:xfrm>
+              <a:prstGeom prst="rect">
+                <a:avLst/>
+              </a:prstGeom>
+              <a:noFill/>
+            </p:spPr>
+            <p:txBody>
+              <a:bodyPr wrap="none" lIns="0" tIns="0" rIns="0" bIns="0" rtlCol="0">
+                <a:spAutoFit/>
+              </a:bodyPr>
+              <a:lstStyle/>
+              <a:p>
+                <a:pPr/>
+                <a14:m>
+                  <m:oMathPara xmlns:m="http://schemas.openxmlformats.org/officeDocument/2006/math">
+                    <m:oMathParaPr>
+                      <m:jc m:val="centerGroup"/>
+                    </m:oMathParaPr>
+                    <m:oMath xmlns:m="http://schemas.openxmlformats.org/officeDocument/2006/math">
+                      <m:sSup>
+                        <m:sSupPr>
+                          <m:ctrlPr>
+                            <a:rPr lang="ko-KR" altLang="en-US" sz="3600" i="1" smtClean="0">
+                              <a:latin typeface="Cambria Math" panose="02040503050406030204" pitchFamily="18" charset="0"/>
+                            </a:rPr>
+                          </m:ctrlPr>
+                        </m:sSupPr>
+                        <m:e>
+                          <m:r>
+                            <a:rPr lang="en-US" altLang="ko-KR" sz="3600" b="0" i="1" smtClean="0">
+                              <a:latin typeface="Cambria Math" panose="02040503050406030204" pitchFamily="18" charset="0"/>
+                            </a:rPr>
+                            <m:t>𝑉</m:t>
+                          </m:r>
+                        </m:e>
+                        <m:sup>
+                          <m:r>
+                            <a:rPr lang="ko-KR" altLang="en-US" sz="3600" i="1">
+                              <a:latin typeface="Cambria Math" panose="02040503050406030204" pitchFamily="18" charset="0"/>
+                            </a:rPr>
+                            <m:t>𝑇</m:t>
+                          </m:r>
+                        </m:sup>
+                      </m:sSup>
+                    </m:oMath>
+                  </m:oMathPara>
+                </a14:m>
+                <a:endParaRPr lang="ko-KR" altLang="en-US" sz="3600" dirty="0"/>
+              </a:p>
+            </p:txBody>
+          </p:sp>
+        </mc:Choice>
+        <mc:Fallback xmlns="">
+          <p:sp>
+            <p:nvSpPr>
+              <p:cNvPr id="25" name="TextBox 24">
+                <a:extLst>
+                  <a:ext uri="{FF2B5EF4-FFF2-40B4-BE49-F238E27FC236}">
+                    <a16:creationId xmlns:a16="http://schemas.microsoft.com/office/drawing/2014/main" id="{B27E1F5A-9F8E-1127-8440-6A3D8831BF4C}"/>
+                  </a:ext>
+                </a:extLst>
+              </p:cNvPr>
+              <p:cNvSpPr txBox="1">
+                <a:spLocks noRot="1" noChangeAspect="1" noMove="1" noResize="1" noEditPoints="1" noAdjustHandles="1" noChangeArrowheads="1" noChangeShapeType="1" noTextEdit="1"/>
+              </p:cNvSpPr>
+              <p:nvPr/>
+            </p:nvSpPr>
+            <p:spPr>
+              <a:xfrm>
+                <a:off x="7190826" y="4239392"/>
+                <a:ext cx="676852" cy="553998"/>
+              </a:xfrm>
+              <a:prstGeom prst="rect">
+                <a:avLst/>
+              </a:prstGeom>
+              <a:blipFill>
+                <a:blip r:embed="rId7"/>
+                <a:stretch>
+                  <a:fillRect/>
+                </a:stretch>
+              </a:blipFill>
+            </p:spPr>
+            <p:txBody>
+              <a:bodyPr/>
+              <a:lstStyle/>
+              <a:p>
+                <a:r>
+                  <a:rPr lang="ko-KR" altLang="en-US">
+                    <a:noFill/>
+                  </a:rPr>
+                  <a:t> </a:t>
+                </a:r>
+              </a:p>
+            </p:txBody>
+          </p:sp>
+        </mc:Fallback>
+      </mc:AlternateContent>
+      <mc:AlternateContent xmlns:mc="http://schemas.openxmlformats.org/markup-compatibility/2006" xmlns:a14="http://schemas.microsoft.com/office/drawing/2010/main">
+        <mc:Choice Requires="a14">
+          <p:sp>
+            <p:nvSpPr>
+              <p:cNvPr id="26" name="TextBox 25">
+                <a:extLst>
+                  <a:ext uri="{FF2B5EF4-FFF2-40B4-BE49-F238E27FC236}">
+                    <a16:creationId xmlns:a16="http://schemas.microsoft.com/office/drawing/2014/main" id="{E6402FAC-789E-2B2E-2E16-0EEEFA961423}"/>
+                  </a:ext>
+                </a:extLst>
+              </p:cNvPr>
+              <p:cNvSpPr txBox="1"/>
+              <p:nvPr/>
+            </p:nvSpPr>
+            <p:spPr>
+              <a:xfrm>
+                <a:off x="1734196" y="2549080"/>
+                <a:ext cx="1942711" cy="492443"/>
+              </a:xfrm>
+              <a:prstGeom prst="rect">
+                <a:avLst/>
+              </a:prstGeom>
+              <a:noFill/>
+            </p:spPr>
+            <p:txBody>
+              <a:bodyPr wrap="none" lIns="0" tIns="0" rIns="0" bIns="0" rtlCol="0">
+                <a:spAutoFit/>
+              </a:bodyPr>
+              <a:lstStyle/>
+              <a:p>
+                <a:pPr/>
+                <a14:m>
+                  <m:oMathPara xmlns:m="http://schemas.openxmlformats.org/officeDocument/2006/math">
+                    <m:oMathParaPr>
+                      <m:jc m:val="centerGroup"/>
+                    </m:oMathParaPr>
+                    <m:oMath xmlns:m="http://schemas.openxmlformats.org/officeDocument/2006/math">
+                      <m:r>
+                        <a:rPr lang="ko-KR" altLang="en-US" sz="3200" i="1" smtClean="0">
+                          <a:latin typeface="Cambria Math" panose="02040503050406030204" pitchFamily="18" charset="0"/>
+                        </a:rPr>
+                        <m:t>𝐴</m:t>
+                      </m:r>
+                      <m:r>
+                        <a:rPr lang="ko-KR" altLang="en-US" sz="3200" i="0">
+                          <a:latin typeface="Cambria Math" panose="02040503050406030204" pitchFamily="18" charset="0"/>
+                        </a:rPr>
+                        <m:t>=</m:t>
+                      </m:r>
+                      <m:r>
+                        <a:rPr lang="en-US" altLang="ko-KR" sz="3200" b="0" i="1" smtClean="0">
+                          <a:latin typeface="Cambria Math" panose="02040503050406030204" pitchFamily="18" charset="0"/>
+                        </a:rPr>
+                        <m:t>𝑈</m:t>
+                      </m:r>
+                      <m:r>
+                        <a:rPr lang="ko-KR" altLang="en-US" sz="3200" i="1">
+                          <a:latin typeface="Cambria Math" panose="02040503050406030204" pitchFamily="18" charset="0"/>
+                        </a:rPr>
+                        <m:t>𝛴</m:t>
+                      </m:r>
+                      <m:sSup>
+                        <m:sSupPr>
+                          <m:ctrlPr>
+                            <a:rPr lang="ko-KR" altLang="en-US" sz="3200" i="1">
+                              <a:latin typeface="Cambria Math" panose="02040503050406030204" pitchFamily="18" charset="0"/>
+                            </a:rPr>
+                          </m:ctrlPr>
+                        </m:sSupPr>
+                        <m:e>
+                          <m:r>
+                            <a:rPr lang="en-US" altLang="ko-KR" sz="3200" b="0" i="1" smtClean="0">
+                              <a:latin typeface="Cambria Math" panose="02040503050406030204" pitchFamily="18" charset="0"/>
+                            </a:rPr>
+                            <m:t>𝑉</m:t>
+                          </m:r>
+                        </m:e>
+                        <m:sup>
+                          <m:r>
+                            <a:rPr lang="ko-KR" altLang="en-US" sz="3200" i="1">
+                              <a:latin typeface="Cambria Math" panose="02040503050406030204" pitchFamily="18" charset="0"/>
+                            </a:rPr>
+                            <m:t>𝑇</m:t>
+                          </m:r>
+                        </m:sup>
+                      </m:sSup>
+                    </m:oMath>
+                  </m:oMathPara>
+                </a14:m>
+                <a:endParaRPr lang="ko-KR" altLang="en-US" sz="3200" dirty="0"/>
+              </a:p>
+            </p:txBody>
+          </p:sp>
+        </mc:Choice>
+        <mc:Fallback xmlns="">
+          <p:sp>
+            <p:nvSpPr>
+              <p:cNvPr id="26" name="TextBox 25">
+                <a:extLst>
+                  <a:ext uri="{FF2B5EF4-FFF2-40B4-BE49-F238E27FC236}">
+                    <a16:creationId xmlns:a16="http://schemas.microsoft.com/office/drawing/2014/main" id="{E6402FAC-789E-2B2E-2E16-0EEEFA961423}"/>
+                  </a:ext>
+                </a:extLst>
+              </p:cNvPr>
+              <p:cNvSpPr txBox="1">
+                <a:spLocks noRot="1" noChangeAspect="1" noMove="1" noResize="1" noEditPoints="1" noAdjustHandles="1" noChangeArrowheads="1" noChangeShapeType="1" noTextEdit="1"/>
+              </p:cNvSpPr>
+              <p:nvPr/>
+            </p:nvSpPr>
+            <p:spPr>
+              <a:xfrm>
+                <a:off x="1734196" y="2549080"/>
+                <a:ext cx="1942711" cy="492443"/>
+              </a:xfrm>
+              <a:prstGeom prst="rect">
+                <a:avLst/>
+              </a:prstGeom>
+              <a:blipFill>
+                <a:blip r:embed="rId8"/>
+                <a:stretch>
+                  <a:fillRect/>
+                </a:stretch>
+              </a:blipFill>
+            </p:spPr>
+            <p:txBody>
+              <a:bodyPr/>
+              <a:lstStyle/>
+              <a:p>
+                <a:r>
+                  <a:rPr lang="ko-KR" altLang="en-US">
+                    <a:noFill/>
+                  </a:rPr>
+                  <a:t> </a:t>
+                </a:r>
+              </a:p>
+            </p:txBody>
+          </p:sp>
+        </mc:Fallback>
+      </mc:AlternateContent>
+      <mc:AlternateContent xmlns:mc="http://schemas.openxmlformats.org/markup-compatibility/2006" xmlns:a14="http://schemas.microsoft.com/office/drawing/2010/main">
+        <mc:Choice Requires="a14">
+          <p:sp>
+            <p:nvSpPr>
+              <p:cNvPr id="28" name="TextBox 27">
+                <a:extLst>
+                  <a:ext uri="{FF2B5EF4-FFF2-40B4-BE49-F238E27FC236}">
+                    <a16:creationId xmlns:a16="http://schemas.microsoft.com/office/drawing/2014/main" id="{88A96915-1018-BAB2-5738-206CAAF6A060}"/>
+                  </a:ext>
+                </a:extLst>
+              </p:cNvPr>
+              <p:cNvSpPr txBox="1"/>
+              <p:nvPr/>
+            </p:nvSpPr>
+            <p:spPr>
+              <a:xfrm>
+                <a:off x="3212078" y="4193225"/>
+                <a:ext cx="1080828" cy="646331"/>
+              </a:xfrm>
+              <a:prstGeom prst="rect">
+                <a:avLst/>
+              </a:prstGeom>
+              <a:noFill/>
+            </p:spPr>
+            <p:txBody>
+              <a:bodyPr wrap="square">
+                <a:spAutoFit/>
+              </a:bodyPr>
+              <a:lstStyle/>
+              <a:p>
+                <a:pPr/>
+                <a14:m>
+                  <m:oMathPara xmlns:m="http://schemas.openxmlformats.org/officeDocument/2006/math">
+                    <m:oMathParaPr>
+                      <m:jc m:val="centerGroup"/>
+                    </m:oMathParaPr>
+                    <m:oMath xmlns:m="http://schemas.openxmlformats.org/officeDocument/2006/math">
+                      <m:r>
+                        <a:rPr lang="ko-KR" altLang="en-US" sz="3600" i="0" smtClean="0">
+                          <a:latin typeface="Cambria Math" panose="02040503050406030204" pitchFamily="18" charset="0"/>
+                        </a:rPr>
+                        <m:t>=</m:t>
+                      </m:r>
+                    </m:oMath>
+                  </m:oMathPara>
+                </a14:m>
+                <a:endParaRPr lang="ko-KR" altLang="en-US" sz="3600" dirty="0"/>
+              </a:p>
+            </p:txBody>
+          </p:sp>
+        </mc:Choice>
+        <mc:Fallback xmlns="">
+          <p:sp>
+            <p:nvSpPr>
+              <p:cNvPr id="28" name="TextBox 27">
+                <a:extLst>
+                  <a:ext uri="{FF2B5EF4-FFF2-40B4-BE49-F238E27FC236}">
+                    <a16:creationId xmlns:a16="http://schemas.microsoft.com/office/drawing/2014/main" id="{88A96915-1018-BAB2-5738-206CAAF6A060}"/>
+                  </a:ext>
+                </a:extLst>
+              </p:cNvPr>
+              <p:cNvSpPr txBox="1">
+                <a:spLocks noRot="1" noChangeAspect="1" noMove="1" noResize="1" noEditPoints="1" noAdjustHandles="1" noChangeArrowheads="1" noChangeShapeType="1" noTextEdit="1"/>
+              </p:cNvSpPr>
+              <p:nvPr/>
+            </p:nvSpPr>
+            <p:spPr>
+              <a:xfrm>
+                <a:off x="3212078" y="4193225"/>
+                <a:ext cx="1080828" cy="646331"/>
+              </a:xfrm>
+              <a:prstGeom prst="rect">
+                <a:avLst/>
+              </a:prstGeom>
+              <a:blipFill>
+                <a:blip r:embed="rId9"/>
+                <a:stretch>
+                  <a:fillRect/>
+                </a:stretch>
+              </a:blipFill>
+            </p:spPr>
+            <p:txBody>
+              <a:bodyPr/>
+              <a:lstStyle/>
+              <a:p>
+                <a:r>
+                  <a:rPr lang="ko-KR" altLang="en-US">
+                    <a:noFill/>
+                  </a:rPr>
+                  <a:t> </a:t>
+                </a:r>
+              </a:p>
+            </p:txBody>
+          </p:sp>
+        </mc:Fallback>
+      </mc:AlternateContent>
+    </p:spTree>
+    <p:extLst>
+      <p:ext uri="{BB962C8B-B14F-4D97-AF65-F5344CB8AC3E}">
+        <p14:creationId xmlns:p14="http://schemas.microsoft.com/office/powerpoint/2010/main" val="1902446754"/>
+      </p:ext>
+    </p:extLst>
+  </p:cSld>
+  <p:clrMapOvr>
+    <a:masterClrMapping/>
+  </p:clrMapOvr>
+  <mc:AlternateContent xmlns:mc="http://schemas.openxmlformats.org/markup-compatibility/2006" xmlns:p14="http://schemas.microsoft.com/office/powerpoint/2010/main">
+    <mc:Choice Requires="p14">
+      <p:transition p14:dur="10"/>
+    </mc:Choice>
+    <mc:Fallback xmlns="">
+      <p:transition/>
+    </mc:Fallback>
+  </mc:AlternateContent>
+</p:sld>
+</file>
+
+<file path=ppt/slides/slide12.xml><?xml version="1.0" encoding="utf-8"?>
+<p:sld xmlns:a="http://schemas.openxmlformats.org/drawingml/2006/main" xmlns:r="http://schemas.openxmlformats.org/officeDocument/2006/relationships" xmlns:p="http://schemas.openxmlformats.org/presentationml/2006/main">
+  <p:cSld>
+    <p:spTree>
+      <p:nvGrpSpPr>
+        <p:cNvPr id="1" name="">
+          <a:extLst>
+            <a:ext uri="{FF2B5EF4-FFF2-40B4-BE49-F238E27FC236}">
               <a16:creationId xmlns:a16="http://schemas.microsoft.com/office/drawing/2014/main" id="{A58B1673-ECE2-DA5A-B78A-0BE85AAB2783}"/>
             </a:ext>
           </a:extLst>
@@ -6092,7 +8032,7 @@
             <a:fld id="{9860EDB8-5305-433F-BE41-D7A86D811DB3}" type="slidenum">
               <a:rPr lang="en-US" altLang="ko-KR" noProof="0" smtClean="0"/>
               <a:pPr/>
-              <a:t>10</a:t>
+              <a:t>12</a:t>
             </a:fld>
             <a:endParaRPr lang="ko-KR" altLang="en-US" noProof="0"/>
           </a:p>
@@ -6876,7 +8816,7 @@
 </p:sld>
 </file>
 
-<file path=ppt/slides/slide11.xml><?xml version="1.0" encoding="utf-8"?>
+<file path=ppt/slides/slide13.xml><?xml version="1.0" encoding="utf-8"?>
 <p:sld xmlns:a="http://schemas.openxmlformats.org/drawingml/2006/main" xmlns:r="http://schemas.openxmlformats.org/officeDocument/2006/relationships" xmlns:p="http://schemas.openxmlformats.org/presentationml/2006/main">
   <p:cSld>
     <p:spTree>
@@ -6975,7 +8915,7 @@
             <a:fld id="{9860EDB8-5305-433F-BE41-D7A86D811DB3}" type="slidenum">
               <a:rPr lang="en-US" altLang="ko-KR" noProof="0" smtClean="0"/>
               <a:pPr/>
-              <a:t>11</a:t>
+              <a:t>13</a:t>
             </a:fld>
             <a:endParaRPr lang="ko-KR" altLang="en-US" noProof="0"/>
           </a:p>
@@ -7759,7 +9699,7 @@
 </p:sld>
 </file>
 
-<file path=ppt/slides/slide12.xml><?xml version="1.0" encoding="utf-8"?>
+<file path=ppt/slides/slide14.xml><?xml version="1.0" encoding="utf-8"?>
 <p:sld xmlns:a="http://schemas.openxmlformats.org/drawingml/2006/main" xmlns:r="http://schemas.openxmlformats.org/officeDocument/2006/relationships" xmlns:p="http://schemas.openxmlformats.org/presentationml/2006/main">
   <p:cSld>
     <p:spTree>
@@ -7873,7 +9813,7 @@
             <a:fld id="{9860EDB8-5305-433F-BE41-D7A86D811DB3}" type="slidenum">
               <a:rPr lang="en-US" altLang="ko-KR" noProof="0" smtClean="0"/>
               <a:pPr/>
-              <a:t>12</a:t>
+              <a:t>14</a:t>
             </a:fld>
             <a:endParaRPr lang="ko-KR" altLang="en-US" noProof="0"/>
           </a:p>
@@ -8569,7 +10509,7 @@
 </p:sld>
 </file>
 
-<file path=ppt/slides/slide13.xml><?xml version="1.0" encoding="utf-8"?>
+<file path=ppt/slides/slide15.xml><?xml version="1.0" encoding="utf-8"?>
 <p:sld xmlns:a="http://schemas.openxmlformats.org/drawingml/2006/main" xmlns:r="http://schemas.openxmlformats.org/officeDocument/2006/relationships" xmlns:p="http://schemas.openxmlformats.org/presentationml/2006/main">
   <p:cSld>
     <p:spTree>
@@ -8671,7 +10611,7 @@
             <a:fld id="{9860EDB8-5305-433F-BE41-D7A86D811DB3}" type="slidenum">
               <a:rPr lang="en-US" altLang="ko-KR" noProof="0" smtClean="0"/>
               <a:pPr/>
-              <a:t>13</a:t>
+              <a:t>15</a:t>
             </a:fld>
             <a:endParaRPr lang="ko-KR" altLang="en-US" noProof="0"/>
           </a:p>
@@ -9159,7 +11099,7 @@
 </p:sld>
 </file>
 
-<file path=ppt/slides/slide14.xml><?xml version="1.0" encoding="utf-8"?>
+<file path=ppt/slides/slide16.xml><?xml version="1.0" encoding="utf-8"?>
 <p:sld xmlns:a="http://schemas.openxmlformats.org/drawingml/2006/main" xmlns:r="http://schemas.openxmlformats.org/officeDocument/2006/relationships" xmlns:p="http://schemas.openxmlformats.org/presentationml/2006/main">
   <p:cSld>
     <p:spTree>
@@ -9307,7 +11247,7 @@
             <a:fld id="{9860EDB8-5305-433F-BE41-D7A86D811DB3}" type="slidenum">
               <a:rPr lang="en-US" altLang="ko-KR" noProof="0" smtClean="0"/>
               <a:pPr/>
-              <a:t>14</a:t>
+              <a:t>16</a:t>
             </a:fld>
             <a:endParaRPr lang="ko-KR" altLang="en-US" noProof="0" dirty="0"/>
           </a:p>
@@ -9531,7 +11471,7 @@
 </p:sld>
 </file>
 
-<file path=ppt/slides/slide15.xml><?xml version="1.0" encoding="utf-8"?>
+<file path=ppt/slides/slide17.xml><?xml version="1.0" encoding="utf-8"?>
 <p:sld xmlns:a="http://schemas.openxmlformats.org/drawingml/2006/main" xmlns:r="http://schemas.openxmlformats.org/officeDocument/2006/relationships" xmlns:p="http://schemas.openxmlformats.org/presentationml/2006/main">
   <p:cSld>
     <p:spTree>
@@ -9645,7 +11585,7 @@
             <a:fld id="{9860EDB8-5305-433F-BE41-D7A86D811DB3}" type="slidenum">
               <a:rPr lang="en-US" altLang="ko-KR" noProof="0" smtClean="0"/>
               <a:pPr/>
-              <a:t>15</a:t>
+              <a:t>17</a:t>
             </a:fld>
             <a:endParaRPr lang="ko-KR" altLang="en-US" noProof="0"/>
           </a:p>
@@ -9932,7 +11872,7 @@
 </p:sld>
 </file>
 
-<file path=ppt/slides/slide16.xml><?xml version="1.0" encoding="utf-8"?>
+<file path=ppt/slides/slide18.xml><?xml version="1.0" encoding="utf-8"?>
 <p:sld xmlns:a="http://schemas.openxmlformats.org/drawingml/2006/main" xmlns:r="http://schemas.openxmlformats.org/officeDocument/2006/relationships" xmlns:p="http://schemas.openxmlformats.org/presentationml/2006/main">
   <p:cSld>
     <p:spTree>
@@ -10022,7 +11962,7 @@
             <a:fld id="{9860EDB8-5305-433F-BE41-D7A86D811DB3}" type="slidenum">
               <a:rPr lang="en-US" altLang="ko-KR" noProof="0" smtClean="0"/>
               <a:pPr/>
-              <a:t>16</a:t>
+              <a:t>18</a:t>
             </a:fld>
             <a:endParaRPr lang="ko-KR" altLang="en-US" noProof="0"/>
           </a:p>
@@ -10526,7 +12466,7 @@
 </p:sld>
 </file>
 
-<file path=ppt/slides/slide17.xml><?xml version="1.0" encoding="utf-8"?>
+<file path=ppt/slides/slide19.xml><?xml version="1.0" encoding="utf-8"?>
 <p:sld xmlns:a="http://schemas.openxmlformats.org/drawingml/2006/main" xmlns:r="http://schemas.openxmlformats.org/officeDocument/2006/relationships" xmlns:p="http://schemas.openxmlformats.org/presentationml/2006/main">
   <p:cSld>
     <p:spTree>
@@ -10616,7 +12556,7 @@
             <a:fld id="{9860EDB8-5305-433F-BE41-D7A86D811DB3}" type="slidenum">
               <a:rPr lang="en-US" altLang="ko-KR" noProof="0" smtClean="0"/>
               <a:pPr/>
-              <a:t>17</a:t>
+              <a:t>19</a:t>
             </a:fld>
             <a:endParaRPr lang="ko-KR" altLang="en-US" noProof="0"/>
           </a:p>
@@ -11036,7 +12976,379 @@
 </p:sld>
 </file>
 
-<file path=ppt/slides/slide18.xml><?xml version="1.0" encoding="utf-8"?>
+<file path=ppt/slides/slide2.xml><?xml version="1.0" encoding="utf-8"?>
+<p:sld xmlns:a="http://schemas.openxmlformats.org/drawingml/2006/main" xmlns:r="http://schemas.openxmlformats.org/officeDocument/2006/relationships" xmlns:p="http://schemas.openxmlformats.org/presentationml/2006/main">
+  <p:cSld>
+    <p:spTree>
+      <p:nvGrpSpPr>
+        <p:cNvPr id="1" name="">
+          <a:extLst>
+            <a:ext uri="{FF2B5EF4-FFF2-40B4-BE49-F238E27FC236}">
+              <a16:creationId xmlns:a16="http://schemas.microsoft.com/office/drawing/2014/main" id="{15B125F6-F24E-9FB4-6ECA-D22604C4ACF8}"/>
+            </a:ext>
+          </a:extLst>
+        </p:cNvPr>
+        <p:cNvGrpSpPr/>
+        <p:nvPr/>
+      </p:nvGrpSpPr>
+      <p:grpSpPr>
+        <a:xfrm>
+          <a:off x="0" y="0"/>
+          <a:ext cx="0" cy="0"/>
+          <a:chOff x="0" y="0"/>
+          <a:chExt cx="0" cy="0"/>
+        </a:xfrm>
+      </p:grpSpPr>
+      <p:sp>
+        <p:nvSpPr>
+          <p:cNvPr id="2" name="직사각형 1">
+            <a:extLst>
+              <a:ext uri="{FF2B5EF4-FFF2-40B4-BE49-F238E27FC236}">
+                <a16:creationId xmlns:a16="http://schemas.microsoft.com/office/drawing/2014/main" id="{AB0C61D8-1616-C6B8-9FEC-D11B28CD4BF2}"/>
+              </a:ext>
+            </a:extLst>
+          </p:cNvPr>
+          <p:cNvSpPr/>
+          <p:nvPr/>
+        </p:nvSpPr>
+        <p:spPr>
+          <a:xfrm>
+            <a:off x="1457324" y="1600201"/>
+            <a:ext cx="10191202" cy="640080"/>
+          </a:xfrm>
+          <a:prstGeom prst="rect">
+            <a:avLst/>
+          </a:prstGeom>
+          <a:solidFill>
+            <a:schemeClr val="bg1">
+              <a:lumMod val="75000"/>
+            </a:schemeClr>
+          </a:solidFill>
+          <a:ln>
+            <a:noFill/>
+          </a:ln>
+        </p:spPr>
+        <p:style>
+          <a:lnRef idx="2">
+            <a:schemeClr val="accent1">
+              <a:shade val="15000"/>
+            </a:schemeClr>
+          </a:lnRef>
+          <a:fillRef idx="1">
+            <a:schemeClr val="accent1"/>
+          </a:fillRef>
+          <a:effectRef idx="0">
+            <a:schemeClr val="accent1"/>
+          </a:effectRef>
+          <a:fontRef idx="minor">
+            <a:schemeClr val="lt1"/>
+          </a:fontRef>
+        </p:style>
+        <p:txBody>
+          <a:bodyPr rtlCol="0" anchor="ctr"/>
+          <a:lstStyle/>
+          <a:p>
+            <a:pPr algn="ctr"/>
+            <a:endParaRPr lang="ko-KR" altLang="en-US" dirty="0"/>
+          </a:p>
+        </p:txBody>
+      </p:sp>
+      <p:sp>
+        <p:nvSpPr>
+          <p:cNvPr id="8" name="제목 7">
+            <a:extLst>
+              <a:ext uri="{FF2B5EF4-FFF2-40B4-BE49-F238E27FC236}">
+                <a16:creationId xmlns:a16="http://schemas.microsoft.com/office/drawing/2014/main" id="{A47D1732-55A1-BAC2-7A11-146984E7CE30}"/>
+              </a:ext>
+            </a:extLst>
+          </p:cNvPr>
+          <p:cNvSpPr>
+            <a:spLocks noGrp="1"/>
+          </p:cNvSpPr>
+          <p:nvPr>
+            <p:ph type="title"/>
+          </p:nvPr>
+        </p:nvSpPr>
+        <p:spPr>
+          <a:xfrm>
+            <a:off x="521207" y="448056"/>
+            <a:ext cx="8135613" cy="640080"/>
+          </a:xfrm>
+        </p:spPr>
+        <p:txBody>
+          <a:bodyPr rtlCol="0">
+            <a:noAutofit/>
+          </a:bodyPr>
+          <a:lstStyle/>
+          <a:p>
+            <a:pPr rtl="0"/>
+            <a:r>
+              <a:rPr lang="en-US" altLang="ko-KR" dirty="0">
+                <a:solidFill>
+                  <a:schemeClr val="tx1"/>
+                </a:solidFill>
+                <a:cs typeface="Segoe UI Light" panose="020B0502040204020203" pitchFamily="34" charset="0"/>
+              </a:rPr>
+              <a:t>Contents</a:t>
+            </a:r>
+            <a:endParaRPr lang="ko-KR" altLang="en-US" dirty="0">
+              <a:solidFill>
+                <a:schemeClr val="tx1"/>
+              </a:solidFill>
+              <a:cs typeface="Segoe UI Light" panose="020B0502040204020203" pitchFamily="34" charset="0"/>
+            </a:endParaRPr>
+          </a:p>
+        </p:txBody>
+      </p:sp>
+      <p:sp>
+        <p:nvSpPr>
+          <p:cNvPr id="12" name="슬라이드 번호 개체 틀 11">
+            <a:extLst>
+              <a:ext uri="{FF2B5EF4-FFF2-40B4-BE49-F238E27FC236}">
+                <a16:creationId xmlns:a16="http://schemas.microsoft.com/office/drawing/2014/main" id="{8BD6D622-6C11-B524-84D3-DE18F25D8601}"/>
+              </a:ext>
+            </a:extLst>
+          </p:cNvPr>
+          <p:cNvSpPr>
+            <a:spLocks noGrp="1"/>
+          </p:cNvSpPr>
+          <p:nvPr>
+            <p:ph type="sldNum" sz="quarter" idx="4"/>
+          </p:nvPr>
+        </p:nvSpPr>
+        <p:spPr/>
+        <p:txBody>
+          <a:bodyPr/>
+          <a:lstStyle/>
+          <a:p>
+            <a:fld id="{9860EDB8-5305-433F-BE41-D7A86D811DB3}" type="slidenum">
+              <a:rPr lang="en-US" altLang="ko-KR" noProof="0" smtClean="0"/>
+              <a:pPr/>
+              <a:t>2</a:t>
+            </a:fld>
+            <a:endParaRPr lang="ko-KR" altLang="en-US" noProof="0" dirty="0"/>
+          </a:p>
+        </p:txBody>
+      </p:sp>
+      <p:sp>
+        <p:nvSpPr>
+          <p:cNvPr id="16" name="TextBox 15">
+            <a:extLst>
+              <a:ext uri="{FF2B5EF4-FFF2-40B4-BE49-F238E27FC236}">
+                <a16:creationId xmlns:a16="http://schemas.microsoft.com/office/drawing/2014/main" id="{4CC1D6EC-EA81-70BB-F0CB-C30EA60FDF8D}"/>
+              </a:ext>
+            </a:extLst>
+          </p:cNvPr>
+          <p:cNvSpPr txBox="1"/>
+          <p:nvPr/>
+        </p:nvSpPr>
+        <p:spPr>
+          <a:xfrm>
+            <a:off x="1957661" y="1537527"/>
+            <a:ext cx="9840639" cy="3904210"/>
+          </a:xfrm>
+          <a:prstGeom prst="rect">
+            <a:avLst/>
+          </a:prstGeom>
+          <a:noFill/>
+        </p:spPr>
+        <p:txBody>
+          <a:bodyPr wrap="square" rtlCol="0">
+            <a:spAutoFit/>
+          </a:bodyPr>
+          <a:lstStyle/>
+          <a:p>
+            <a:pPr marL="342900" indent="-342900">
+              <a:lnSpc>
+                <a:spcPct val="150000"/>
+              </a:lnSpc>
+              <a:buFont typeface="+mj-lt"/>
+              <a:buAutoNum type="arabicPeriod"/>
+            </a:pPr>
+            <a:r>
+              <a:rPr lang="en-US" altLang="ko-KR" sz="2800" dirty="0">
+                <a:latin typeface="D2Coding" panose="020B0609020101020101" pitchFamily="49" charset="-127"/>
+                <a:ea typeface="D2Coding" panose="020B0609020101020101" pitchFamily="49" charset="-127"/>
+                <a:cs typeface="맑은 고딕 Semilight" panose="020B0502040204020203" pitchFamily="50" charset="-127"/>
+              </a:rPr>
+              <a:t> </a:t>
+            </a:r>
+            <a:r>
+              <a:rPr lang="ko-KR" altLang="en-US" sz="2800" dirty="0">
+                <a:latin typeface="D2Coding" panose="020B0609020101020101" pitchFamily="49" charset="-127"/>
+                <a:ea typeface="D2Coding" panose="020B0609020101020101" pitchFamily="49" charset="-127"/>
+                <a:cs typeface="맑은 고딕 Semilight" panose="020B0502040204020203" pitchFamily="50" charset="-127"/>
+              </a:rPr>
+              <a:t>스펙트럼 분해</a:t>
+            </a:r>
+            <a:r>
+              <a:rPr lang="en-US" altLang="ko-KR" sz="2800" dirty="0">
+                <a:latin typeface="D2Coding" panose="020B0609020101020101" pitchFamily="49" charset="-127"/>
+                <a:ea typeface="D2Coding" panose="020B0609020101020101" pitchFamily="49" charset="-127"/>
+                <a:cs typeface="맑은 고딕 Semilight" panose="020B0502040204020203" pitchFamily="50" charset="-127"/>
+              </a:rPr>
+              <a:t>(Spectral Decomposition)</a:t>
+            </a:r>
+          </a:p>
+          <a:p>
+            <a:pPr marL="342900" indent="-342900">
+              <a:lnSpc>
+                <a:spcPct val="150000"/>
+              </a:lnSpc>
+              <a:buFont typeface="+mj-lt"/>
+              <a:buAutoNum type="arabicPeriod"/>
+            </a:pPr>
+            <a:r>
+              <a:rPr lang="ko-KR" altLang="en-US" sz="2800" dirty="0">
+                <a:latin typeface="D2Coding" panose="020B0609020101020101" pitchFamily="49" charset="-127"/>
+                <a:ea typeface="D2Coding" panose="020B0609020101020101" pitchFamily="49" charset="-127"/>
+                <a:cs typeface="맑은 고딕 Semilight" panose="020B0502040204020203" pitchFamily="50" charset="-127"/>
+              </a:rPr>
+              <a:t> </a:t>
+            </a:r>
+            <a:r>
+              <a:rPr lang="ko-KR" altLang="en-US" sz="2800" dirty="0" err="1">
+                <a:latin typeface="D2Coding" panose="020B0609020101020101" pitchFamily="49" charset="-127"/>
+                <a:ea typeface="D2Coding" panose="020B0609020101020101" pitchFamily="49" charset="-127"/>
+                <a:cs typeface="맑은 고딕 Semilight" panose="020B0502040204020203" pitchFamily="50" charset="-127"/>
+              </a:rPr>
+              <a:t>특이값</a:t>
+            </a:r>
+            <a:r>
+              <a:rPr lang="ko-KR" altLang="en-US" sz="2800" dirty="0">
+                <a:latin typeface="D2Coding" panose="020B0609020101020101" pitchFamily="49" charset="-127"/>
+                <a:ea typeface="D2Coding" panose="020B0609020101020101" pitchFamily="49" charset="-127"/>
+                <a:cs typeface="맑은 고딕 Semilight" panose="020B0502040204020203" pitchFamily="50" charset="-127"/>
+              </a:rPr>
+              <a:t> 분해</a:t>
+            </a:r>
+            <a:r>
+              <a:rPr lang="en-US" altLang="ko-KR" sz="2800" dirty="0">
+                <a:latin typeface="D2Coding" panose="020B0609020101020101" pitchFamily="49" charset="-127"/>
+                <a:ea typeface="D2Coding" panose="020B0609020101020101" pitchFamily="49" charset="-127"/>
+                <a:cs typeface="맑은 고딕 Semilight" panose="020B0502040204020203" pitchFamily="50" charset="-127"/>
+              </a:rPr>
+              <a:t>(Singular Value Decomposition, SVD)</a:t>
+            </a:r>
+          </a:p>
+          <a:p>
+            <a:pPr marL="342900" indent="-342900">
+              <a:lnSpc>
+                <a:spcPct val="150000"/>
+              </a:lnSpc>
+              <a:buFont typeface="+mj-lt"/>
+              <a:buAutoNum type="arabicPeriod"/>
+            </a:pPr>
+            <a:r>
+              <a:rPr lang="en-US" altLang="ko-KR" sz="2800" dirty="0">
+                <a:latin typeface="D2Coding" panose="020B0609020101020101" pitchFamily="49" charset="-127"/>
+                <a:ea typeface="D2Coding" panose="020B0609020101020101" pitchFamily="49" charset="-127"/>
+                <a:cs typeface="맑은 고딕 Semilight" panose="020B0502040204020203" pitchFamily="50" charset="-127"/>
+              </a:rPr>
+              <a:t> SVD vs. PCA</a:t>
+            </a:r>
+          </a:p>
+          <a:p>
+            <a:pPr marL="342900" indent="-342900">
+              <a:lnSpc>
+                <a:spcPct val="150000"/>
+              </a:lnSpc>
+              <a:buFont typeface="+mj-lt"/>
+              <a:buAutoNum type="arabicPeriod"/>
+            </a:pPr>
+            <a:r>
+              <a:rPr lang="en-US" altLang="ko-KR" sz="2800" dirty="0">
+                <a:latin typeface="D2Coding" panose="020B0609020101020101" pitchFamily="49" charset="-127"/>
+                <a:ea typeface="D2Coding" panose="020B0609020101020101" pitchFamily="49" charset="-127"/>
+                <a:cs typeface="맑은 고딕 Semilight" panose="020B0502040204020203" pitchFamily="50" charset="-127"/>
+              </a:rPr>
+              <a:t> LDA(</a:t>
+            </a:r>
+            <a:r>
+              <a:rPr lang="ko-KR" altLang="en-US" sz="2800" dirty="0">
+                <a:latin typeface="D2Coding" panose="020B0609020101020101" pitchFamily="49" charset="-127"/>
+                <a:ea typeface="D2Coding" panose="020B0609020101020101" pitchFamily="49" charset="-127"/>
+                <a:cs typeface="맑은 고딕 Semilight" panose="020B0502040204020203" pitchFamily="50" charset="-127"/>
+              </a:rPr>
+              <a:t>잠재 </a:t>
+            </a:r>
+            <a:r>
+              <a:rPr lang="ko-KR" altLang="en-US" sz="2800" dirty="0" err="1">
+                <a:latin typeface="D2Coding" panose="020B0609020101020101" pitchFamily="49" charset="-127"/>
+                <a:ea typeface="D2Coding" panose="020B0609020101020101" pitchFamily="49" charset="-127"/>
+                <a:cs typeface="맑은 고딕 Semilight" panose="020B0502040204020203" pitchFamily="50" charset="-127"/>
+              </a:rPr>
+              <a:t>디리클레르</a:t>
+            </a:r>
+            <a:r>
+              <a:rPr lang="ko-KR" altLang="en-US" sz="2800" dirty="0">
+                <a:latin typeface="D2Coding" panose="020B0609020101020101" pitchFamily="49" charset="-127"/>
+                <a:ea typeface="D2Coding" panose="020B0609020101020101" pitchFamily="49" charset="-127"/>
+                <a:cs typeface="맑은 고딕 Semilight" panose="020B0502040204020203" pitchFamily="50" charset="-127"/>
+              </a:rPr>
+              <a:t> 할당</a:t>
+            </a:r>
+            <a:r>
+              <a:rPr lang="en-US" altLang="ko-KR" sz="2800" dirty="0">
+                <a:latin typeface="D2Coding" panose="020B0609020101020101" pitchFamily="49" charset="-127"/>
+                <a:ea typeface="D2Coding" panose="020B0609020101020101" pitchFamily="49" charset="-127"/>
+                <a:cs typeface="맑은 고딕 Semilight" panose="020B0502040204020203" pitchFamily="50" charset="-127"/>
+              </a:rPr>
+              <a:t>)</a:t>
+            </a:r>
+          </a:p>
+          <a:p>
+            <a:pPr marL="342900" indent="-342900">
+              <a:lnSpc>
+                <a:spcPct val="150000"/>
+              </a:lnSpc>
+              <a:buFont typeface="+mj-lt"/>
+              <a:buAutoNum type="arabicPeriod"/>
+            </a:pPr>
+            <a:endParaRPr lang="en-US" altLang="ko-KR" sz="2800" dirty="0">
+              <a:latin typeface="D2Coding" panose="020B0609020101020101" pitchFamily="49" charset="-127"/>
+              <a:ea typeface="D2Coding" panose="020B0609020101020101" pitchFamily="49" charset="-127"/>
+              <a:cs typeface="맑은 고딕 Semilight" panose="020B0502040204020203" pitchFamily="50" charset="-127"/>
+            </a:endParaRPr>
+          </a:p>
+          <a:p>
+            <a:pPr marL="342900" indent="-342900">
+              <a:lnSpc>
+                <a:spcPct val="150000"/>
+              </a:lnSpc>
+              <a:buFont typeface="+mj-lt"/>
+              <a:buAutoNum type="arabicPeriod"/>
+            </a:pPr>
+            <a:endParaRPr lang="en-US" altLang="ko-KR" sz="2800" dirty="0">
+              <a:latin typeface="D2Coding" panose="020B0609020101020101" pitchFamily="49" charset="-127"/>
+              <a:ea typeface="D2Coding" panose="020B0609020101020101" pitchFamily="49" charset="-127"/>
+              <a:cs typeface="맑은 고딕 Semilight" panose="020B0502040204020203" pitchFamily="50" charset="-127"/>
+            </a:endParaRPr>
+          </a:p>
+        </p:txBody>
+      </p:sp>
+    </p:spTree>
+    <p:extLst>
+      <p:ext uri="{BB962C8B-B14F-4D97-AF65-F5344CB8AC3E}">
+        <p14:creationId xmlns:p14="http://schemas.microsoft.com/office/powerpoint/2010/main" val="722090702"/>
+      </p:ext>
+    </p:extLst>
+  </p:cSld>
+  <p:clrMapOvr>
+    <a:masterClrMapping/>
+  </p:clrMapOvr>
+  <mc:AlternateContent xmlns:mc="http://schemas.openxmlformats.org/markup-compatibility/2006" xmlns:p14="http://schemas.microsoft.com/office/powerpoint/2010/main">
+    <mc:Choice Requires="p14">
+      <p:transition p14:dur="10"/>
+    </mc:Choice>
+    <mc:Fallback xmlns="">
+      <p:transition/>
+    </mc:Fallback>
+  </mc:AlternateContent>
+</p:sld>
+</file>
+
+<file path=ppt/slides/slide20.xml><?xml version="1.0" encoding="utf-8"?>
 <p:sld xmlns:a="http://schemas.openxmlformats.org/drawingml/2006/main" xmlns:r="http://schemas.openxmlformats.org/officeDocument/2006/relationships" xmlns:p="http://schemas.openxmlformats.org/presentationml/2006/main">
   <p:cSld>
     <p:spTree>
@@ -11126,7 +13438,7 @@
             <a:fld id="{9860EDB8-5305-433F-BE41-D7A86D811DB3}" type="slidenum">
               <a:rPr lang="en-US" altLang="ko-KR" noProof="0" smtClean="0"/>
               <a:pPr/>
-              <a:t>18</a:t>
+              <a:t>20</a:t>
             </a:fld>
             <a:endParaRPr lang="ko-KR" altLang="en-US" noProof="0"/>
           </a:p>
@@ -11267,7 +13579,7 @@
 </p:sld>
 </file>
 
-<file path=ppt/slides/slide19.xml><?xml version="1.0" encoding="utf-8"?>
+<file path=ppt/slides/slide21.xml><?xml version="1.0" encoding="utf-8"?>
 <p:sld xmlns:a="http://schemas.openxmlformats.org/drawingml/2006/main" xmlns:r="http://schemas.openxmlformats.org/officeDocument/2006/relationships" xmlns:p="http://schemas.openxmlformats.org/presentationml/2006/main">
   <p:cSld>
     <p:spTree>
@@ -11357,7 +13669,7 @@
             <a:fld id="{9860EDB8-5305-433F-BE41-D7A86D811DB3}" type="slidenum">
               <a:rPr lang="en-US" altLang="ko-KR" noProof="0" smtClean="0"/>
               <a:pPr/>
-              <a:t>19</a:t>
+              <a:t>21</a:t>
             </a:fld>
             <a:endParaRPr lang="ko-KR" altLang="en-US" noProof="0"/>
           </a:p>
@@ -12158,379 +14470,7 @@
 </p:sld>
 </file>
 
-<file path=ppt/slides/slide2.xml><?xml version="1.0" encoding="utf-8"?>
-<p:sld xmlns:a="http://schemas.openxmlformats.org/drawingml/2006/main" xmlns:r="http://schemas.openxmlformats.org/officeDocument/2006/relationships" xmlns:p="http://schemas.openxmlformats.org/presentationml/2006/main">
-  <p:cSld>
-    <p:spTree>
-      <p:nvGrpSpPr>
-        <p:cNvPr id="1" name="">
-          <a:extLst>
-            <a:ext uri="{FF2B5EF4-FFF2-40B4-BE49-F238E27FC236}">
-              <a16:creationId xmlns:a16="http://schemas.microsoft.com/office/drawing/2014/main" id="{15B125F6-F24E-9FB4-6ECA-D22604C4ACF8}"/>
-            </a:ext>
-          </a:extLst>
-        </p:cNvPr>
-        <p:cNvGrpSpPr/>
-        <p:nvPr/>
-      </p:nvGrpSpPr>
-      <p:grpSpPr>
-        <a:xfrm>
-          <a:off x="0" y="0"/>
-          <a:ext cx="0" cy="0"/>
-          <a:chOff x="0" y="0"/>
-          <a:chExt cx="0" cy="0"/>
-        </a:xfrm>
-      </p:grpSpPr>
-      <p:sp>
-        <p:nvSpPr>
-          <p:cNvPr id="2" name="직사각형 1">
-            <a:extLst>
-              <a:ext uri="{FF2B5EF4-FFF2-40B4-BE49-F238E27FC236}">
-                <a16:creationId xmlns:a16="http://schemas.microsoft.com/office/drawing/2014/main" id="{AB0C61D8-1616-C6B8-9FEC-D11B28CD4BF2}"/>
-              </a:ext>
-            </a:extLst>
-          </p:cNvPr>
-          <p:cNvSpPr/>
-          <p:nvPr/>
-        </p:nvSpPr>
-        <p:spPr>
-          <a:xfrm>
-            <a:off x="1457324" y="1600201"/>
-            <a:ext cx="10191202" cy="640080"/>
-          </a:xfrm>
-          <a:prstGeom prst="rect">
-            <a:avLst/>
-          </a:prstGeom>
-          <a:solidFill>
-            <a:schemeClr val="bg1">
-              <a:lumMod val="75000"/>
-            </a:schemeClr>
-          </a:solidFill>
-          <a:ln>
-            <a:noFill/>
-          </a:ln>
-        </p:spPr>
-        <p:style>
-          <a:lnRef idx="2">
-            <a:schemeClr val="accent1">
-              <a:shade val="15000"/>
-            </a:schemeClr>
-          </a:lnRef>
-          <a:fillRef idx="1">
-            <a:schemeClr val="accent1"/>
-          </a:fillRef>
-          <a:effectRef idx="0">
-            <a:schemeClr val="accent1"/>
-          </a:effectRef>
-          <a:fontRef idx="minor">
-            <a:schemeClr val="lt1"/>
-          </a:fontRef>
-        </p:style>
-        <p:txBody>
-          <a:bodyPr rtlCol="0" anchor="ctr"/>
-          <a:lstStyle/>
-          <a:p>
-            <a:pPr algn="ctr"/>
-            <a:endParaRPr lang="ko-KR" altLang="en-US" dirty="0"/>
-          </a:p>
-        </p:txBody>
-      </p:sp>
-      <p:sp>
-        <p:nvSpPr>
-          <p:cNvPr id="8" name="제목 7">
-            <a:extLst>
-              <a:ext uri="{FF2B5EF4-FFF2-40B4-BE49-F238E27FC236}">
-                <a16:creationId xmlns:a16="http://schemas.microsoft.com/office/drawing/2014/main" id="{A47D1732-55A1-BAC2-7A11-146984E7CE30}"/>
-              </a:ext>
-            </a:extLst>
-          </p:cNvPr>
-          <p:cNvSpPr>
-            <a:spLocks noGrp="1"/>
-          </p:cNvSpPr>
-          <p:nvPr>
-            <p:ph type="title"/>
-          </p:nvPr>
-        </p:nvSpPr>
-        <p:spPr>
-          <a:xfrm>
-            <a:off x="521207" y="448056"/>
-            <a:ext cx="8135613" cy="640080"/>
-          </a:xfrm>
-        </p:spPr>
-        <p:txBody>
-          <a:bodyPr rtlCol="0">
-            <a:noAutofit/>
-          </a:bodyPr>
-          <a:lstStyle/>
-          <a:p>
-            <a:pPr rtl="0"/>
-            <a:r>
-              <a:rPr lang="en-US" altLang="ko-KR" dirty="0">
-                <a:solidFill>
-                  <a:schemeClr val="tx1"/>
-                </a:solidFill>
-                <a:cs typeface="Segoe UI Light" panose="020B0502040204020203" pitchFamily="34" charset="0"/>
-              </a:rPr>
-              <a:t>Contents</a:t>
-            </a:r>
-            <a:endParaRPr lang="ko-KR" altLang="en-US" dirty="0">
-              <a:solidFill>
-                <a:schemeClr val="tx1"/>
-              </a:solidFill>
-              <a:cs typeface="Segoe UI Light" panose="020B0502040204020203" pitchFamily="34" charset="0"/>
-            </a:endParaRPr>
-          </a:p>
-        </p:txBody>
-      </p:sp>
-      <p:sp>
-        <p:nvSpPr>
-          <p:cNvPr id="12" name="슬라이드 번호 개체 틀 11">
-            <a:extLst>
-              <a:ext uri="{FF2B5EF4-FFF2-40B4-BE49-F238E27FC236}">
-                <a16:creationId xmlns:a16="http://schemas.microsoft.com/office/drawing/2014/main" id="{8BD6D622-6C11-B524-84D3-DE18F25D8601}"/>
-              </a:ext>
-            </a:extLst>
-          </p:cNvPr>
-          <p:cNvSpPr>
-            <a:spLocks noGrp="1"/>
-          </p:cNvSpPr>
-          <p:nvPr>
-            <p:ph type="sldNum" sz="quarter" idx="4"/>
-          </p:nvPr>
-        </p:nvSpPr>
-        <p:spPr/>
-        <p:txBody>
-          <a:bodyPr/>
-          <a:lstStyle/>
-          <a:p>
-            <a:fld id="{9860EDB8-5305-433F-BE41-D7A86D811DB3}" type="slidenum">
-              <a:rPr lang="en-US" altLang="ko-KR" noProof="0" smtClean="0"/>
-              <a:pPr/>
-              <a:t>2</a:t>
-            </a:fld>
-            <a:endParaRPr lang="ko-KR" altLang="en-US" noProof="0" dirty="0"/>
-          </a:p>
-        </p:txBody>
-      </p:sp>
-      <p:sp>
-        <p:nvSpPr>
-          <p:cNvPr id="16" name="TextBox 15">
-            <a:extLst>
-              <a:ext uri="{FF2B5EF4-FFF2-40B4-BE49-F238E27FC236}">
-                <a16:creationId xmlns:a16="http://schemas.microsoft.com/office/drawing/2014/main" id="{4CC1D6EC-EA81-70BB-F0CB-C30EA60FDF8D}"/>
-              </a:ext>
-            </a:extLst>
-          </p:cNvPr>
-          <p:cNvSpPr txBox="1"/>
-          <p:nvPr/>
-        </p:nvSpPr>
-        <p:spPr>
-          <a:xfrm>
-            <a:off x="1957661" y="1537527"/>
-            <a:ext cx="9840639" cy="3904210"/>
-          </a:xfrm>
-          <a:prstGeom prst="rect">
-            <a:avLst/>
-          </a:prstGeom>
-          <a:noFill/>
-        </p:spPr>
-        <p:txBody>
-          <a:bodyPr wrap="square" rtlCol="0">
-            <a:spAutoFit/>
-          </a:bodyPr>
-          <a:lstStyle/>
-          <a:p>
-            <a:pPr marL="342900" indent="-342900">
-              <a:lnSpc>
-                <a:spcPct val="150000"/>
-              </a:lnSpc>
-              <a:buFont typeface="+mj-lt"/>
-              <a:buAutoNum type="arabicPeriod"/>
-            </a:pPr>
-            <a:r>
-              <a:rPr lang="en-US" altLang="ko-KR" sz="2800" dirty="0">
-                <a:latin typeface="D2Coding" panose="020B0609020101020101" pitchFamily="49" charset="-127"/>
-                <a:ea typeface="D2Coding" panose="020B0609020101020101" pitchFamily="49" charset="-127"/>
-                <a:cs typeface="맑은 고딕 Semilight" panose="020B0502040204020203" pitchFamily="50" charset="-127"/>
-              </a:rPr>
-              <a:t> </a:t>
-            </a:r>
-            <a:r>
-              <a:rPr lang="ko-KR" altLang="en-US" sz="2800" dirty="0">
-                <a:latin typeface="D2Coding" panose="020B0609020101020101" pitchFamily="49" charset="-127"/>
-                <a:ea typeface="D2Coding" panose="020B0609020101020101" pitchFamily="49" charset="-127"/>
-                <a:cs typeface="맑은 고딕 Semilight" panose="020B0502040204020203" pitchFamily="50" charset="-127"/>
-              </a:rPr>
-              <a:t>스펙트럼 분해</a:t>
-            </a:r>
-            <a:r>
-              <a:rPr lang="en-US" altLang="ko-KR" sz="2800" dirty="0">
-                <a:latin typeface="D2Coding" panose="020B0609020101020101" pitchFamily="49" charset="-127"/>
-                <a:ea typeface="D2Coding" panose="020B0609020101020101" pitchFamily="49" charset="-127"/>
-                <a:cs typeface="맑은 고딕 Semilight" panose="020B0502040204020203" pitchFamily="50" charset="-127"/>
-              </a:rPr>
-              <a:t>(Spectral Decomposition)</a:t>
-            </a:r>
-          </a:p>
-          <a:p>
-            <a:pPr marL="342900" indent="-342900">
-              <a:lnSpc>
-                <a:spcPct val="150000"/>
-              </a:lnSpc>
-              <a:buFont typeface="+mj-lt"/>
-              <a:buAutoNum type="arabicPeriod"/>
-            </a:pPr>
-            <a:r>
-              <a:rPr lang="ko-KR" altLang="en-US" sz="2800" dirty="0">
-                <a:latin typeface="D2Coding" panose="020B0609020101020101" pitchFamily="49" charset="-127"/>
-                <a:ea typeface="D2Coding" panose="020B0609020101020101" pitchFamily="49" charset="-127"/>
-                <a:cs typeface="맑은 고딕 Semilight" panose="020B0502040204020203" pitchFamily="50" charset="-127"/>
-              </a:rPr>
-              <a:t> </a:t>
-            </a:r>
-            <a:r>
-              <a:rPr lang="ko-KR" altLang="en-US" sz="2800" dirty="0" err="1">
-                <a:latin typeface="D2Coding" panose="020B0609020101020101" pitchFamily="49" charset="-127"/>
-                <a:ea typeface="D2Coding" panose="020B0609020101020101" pitchFamily="49" charset="-127"/>
-                <a:cs typeface="맑은 고딕 Semilight" panose="020B0502040204020203" pitchFamily="50" charset="-127"/>
-              </a:rPr>
-              <a:t>특이값</a:t>
-            </a:r>
-            <a:r>
-              <a:rPr lang="ko-KR" altLang="en-US" sz="2800" dirty="0">
-                <a:latin typeface="D2Coding" panose="020B0609020101020101" pitchFamily="49" charset="-127"/>
-                <a:ea typeface="D2Coding" panose="020B0609020101020101" pitchFamily="49" charset="-127"/>
-                <a:cs typeface="맑은 고딕 Semilight" panose="020B0502040204020203" pitchFamily="50" charset="-127"/>
-              </a:rPr>
-              <a:t> 분해</a:t>
-            </a:r>
-            <a:r>
-              <a:rPr lang="en-US" altLang="ko-KR" sz="2800" dirty="0">
-                <a:latin typeface="D2Coding" panose="020B0609020101020101" pitchFamily="49" charset="-127"/>
-                <a:ea typeface="D2Coding" panose="020B0609020101020101" pitchFamily="49" charset="-127"/>
-                <a:cs typeface="맑은 고딕 Semilight" panose="020B0502040204020203" pitchFamily="50" charset="-127"/>
-              </a:rPr>
-              <a:t>(Singular Value Decomposition, SVD)</a:t>
-            </a:r>
-          </a:p>
-          <a:p>
-            <a:pPr marL="342900" indent="-342900">
-              <a:lnSpc>
-                <a:spcPct val="150000"/>
-              </a:lnSpc>
-              <a:buFont typeface="+mj-lt"/>
-              <a:buAutoNum type="arabicPeriod"/>
-            </a:pPr>
-            <a:r>
-              <a:rPr lang="en-US" altLang="ko-KR" sz="2800" dirty="0">
-                <a:latin typeface="D2Coding" panose="020B0609020101020101" pitchFamily="49" charset="-127"/>
-                <a:ea typeface="D2Coding" panose="020B0609020101020101" pitchFamily="49" charset="-127"/>
-                <a:cs typeface="맑은 고딕 Semilight" panose="020B0502040204020203" pitchFamily="50" charset="-127"/>
-              </a:rPr>
-              <a:t> SVD vs. PCA</a:t>
-            </a:r>
-          </a:p>
-          <a:p>
-            <a:pPr marL="342900" indent="-342900">
-              <a:lnSpc>
-                <a:spcPct val="150000"/>
-              </a:lnSpc>
-              <a:buFont typeface="+mj-lt"/>
-              <a:buAutoNum type="arabicPeriod"/>
-            </a:pPr>
-            <a:r>
-              <a:rPr lang="en-US" altLang="ko-KR" sz="2800" dirty="0">
-                <a:latin typeface="D2Coding" panose="020B0609020101020101" pitchFamily="49" charset="-127"/>
-                <a:ea typeface="D2Coding" panose="020B0609020101020101" pitchFamily="49" charset="-127"/>
-                <a:cs typeface="맑은 고딕 Semilight" panose="020B0502040204020203" pitchFamily="50" charset="-127"/>
-              </a:rPr>
-              <a:t> LDA(</a:t>
-            </a:r>
-            <a:r>
-              <a:rPr lang="ko-KR" altLang="en-US" sz="2800" dirty="0">
-                <a:latin typeface="D2Coding" panose="020B0609020101020101" pitchFamily="49" charset="-127"/>
-                <a:ea typeface="D2Coding" panose="020B0609020101020101" pitchFamily="49" charset="-127"/>
-                <a:cs typeface="맑은 고딕 Semilight" panose="020B0502040204020203" pitchFamily="50" charset="-127"/>
-              </a:rPr>
-              <a:t>잠재 </a:t>
-            </a:r>
-            <a:r>
-              <a:rPr lang="ko-KR" altLang="en-US" sz="2800" dirty="0" err="1">
-                <a:latin typeface="D2Coding" panose="020B0609020101020101" pitchFamily="49" charset="-127"/>
-                <a:ea typeface="D2Coding" panose="020B0609020101020101" pitchFamily="49" charset="-127"/>
-                <a:cs typeface="맑은 고딕 Semilight" panose="020B0502040204020203" pitchFamily="50" charset="-127"/>
-              </a:rPr>
-              <a:t>디리클레르</a:t>
-            </a:r>
-            <a:r>
-              <a:rPr lang="ko-KR" altLang="en-US" sz="2800" dirty="0">
-                <a:latin typeface="D2Coding" panose="020B0609020101020101" pitchFamily="49" charset="-127"/>
-                <a:ea typeface="D2Coding" panose="020B0609020101020101" pitchFamily="49" charset="-127"/>
-                <a:cs typeface="맑은 고딕 Semilight" panose="020B0502040204020203" pitchFamily="50" charset="-127"/>
-              </a:rPr>
-              <a:t> 할당</a:t>
-            </a:r>
-            <a:r>
-              <a:rPr lang="en-US" altLang="ko-KR" sz="2800" dirty="0">
-                <a:latin typeface="D2Coding" panose="020B0609020101020101" pitchFamily="49" charset="-127"/>
-                <a:ea typeface="D2Coding" panose="020B0609020101020101" pitchFamily="49" charset="-127"/>
-                <a:cs typeface="맑은 고딕 Semilight" panose="020B0502040204020203" pitchFamily="50" charset="-127"/>
-              </a:rPr>
-              <a:t>)</a:t>
-            </a:r>
-          </a:p>
-          <a:p>
-            <a:pPr marL="342900" indent="-342900">
-              <a:lnSpc>
-                <a:spcPct val="150000"/>
-              </a:lnSpc>
-              <a:buFont typeface="+mj-lt"/>
-              <a:buAutoNum type="arabicPeriod"/>
-            </a:pPr>
-            <a:endParaRPr lang="en-US" altLang="ko-KR" sz="2800" dirty="0">
-              <a:latin typeface="D2Coding" panose="020B0609020101020101" pitchFamily="49" charset="-127"/>
-              <a:ea typeface="D2Coding" panose="020B0609020101020101" pitchFamily="49" charset="-127"/>
-              <a:cs typeface="맑은 고딕 Semilight" panose="020B0502040204020203" pitchFamily="50" charset="-127"/>
-            </a:endParaRPr>
-          </a:p>
-          <a:p>
-            <a:pPr marL="342900" indent="-342900">
-              <a:lnSpc>
-                <a:spcPct val="150000"/>
-              </a:lnSpc>
-              <a:buFont typeface="+mj-lt"/>
-              <a:buAutoNum type="arabicPeriod"/>
-            </a:pPr>
-            <a:endParaRPr lang="en-US" altLang="ko-KR" sz="2800" dirty="0">
-              <a:latin typeface="D2Coding" panose="020B0609020101020101" pitchFamily="49" charset="-127"/>
-              <a:ea typeface="D2Coding" panose="020B0609020101020101" pitchFamily="49" charset="-127"/>
-              <a:cs typeface="맑은 고딕 Semilight" panose="020B0502040204020203" pitchFamily="50" charset="-127"/>
-            </a:endParaRPr>
-          </a:p>
-        </p:txBody>
-      </p:sp>
-    </p:spTree>
-    <p:extLst>
-      <p:ext uri="{BB962C8B-B14F-4D97-AF65-F5344CB8AC3E}">
-        <p14:creationId xmlns:p14="http://schemas.microsoft.com/office/powerpoint/2010/main" val="722090702"/>
-      </p:ext>
-    </p:extLst>
-  </p:cSld>
-  <p:clrMapOvr>
-    <a:masterClrMapping/>
-  </p:clrMapOvr>
-  <mc:AlternateContent xmlns:mc="http://schemas.openxmlformats.org/markup-compatibility/2006" xmlns:p14="http://schemas.microsoft.com/office/powerpoint/2010/main">
-    <mc:Choice Requires="p14">
-      <p:transition p14:dur="10"/>
-    </mc:Choice>
-    <mc:Fallback xmlns="">
-      <p:transition/>
-    </mc:Fallback>
-  </mc:AlternateContent>
-</p:sld>
-</file>
-
-<file path=ppt/slides/slide20.xml><?xml version="1.0" encoding="utf-8"?>
+<file path=ppt/slides/slide22.xml><?xml version="1.0" encoding="utf-8"?>
 <p:sld xmlns:a="http://schemas.openxmlformats.org/drawingml/2006/main" xmlns:r="http://schemas.openxmlformats.org/officeDocument/2006/relationships" xmlns:p="http://schemas.openxmlformats.org/presentationml/2006/main">
   <p:cSld>
     <p:spTree>
@@ -12678,7 +14618,7 @@
             <a:fld id="{9860EDB8-5305-433F-BE41-D7A86D811DB3}" type="slidenum">
               <a:rPr lang="en-US" altLang="ko-KR" noProof="0" smtClean="0"/>
               <a:pPr/>
-              <a:t>20</a:t>
+              <a:t>22</a:t>
             </a:fld>
             <a:endParaRPr lang="ko-KR" altLang="en-US" noProof="0" dirty="0"/>
           </a:p>
@@ -12902,7 +14842,7 @@
 </p:sld>
 </file>
 
-<file path=ppt/slides/slide21.xml><?xml version="1.0" encoding="utf-8"?>
+<file path=ppt/slides/slide23.xml><?xml version="1.0" encoding="utf-8"?>
 <p:sld xmlns:a="http://schemas.openxmlformats.org/drawingml/2006/main" xmlns:r="http://schemas.openxmlformats.org/officeDocument/2006/relationships" xmlns:p="http://schemas.openxmlformats.org/presentationml/2006/main">
   <p:cSld>
     <p:spTree>
@@ -12995,7 +14935,7 @@
             <a:fld id="{9860EDB8-5305-433F-BE41-D7A86D811DB3}" type="slidenum">
               <a:rPr lang="en-US" altLang="ko-KR" noProof="0" smtClean="0"/>
               <a:pPr/>
-              <a:t>21</a:t>
+              <a:t>23</a:t>
             </a:fld>
             <a:endParaRPr lang="ko-KR" altLang="en-US" noProof="0"/>
           </a:p>
@@ -13132,7 +15072,7 @@
 </p:sld>
 </file>
 
-<file path=ppt/slides/slide22.xml><?xml version="1.0" encoding="utf-8"?>
+<file path=ppt/slides/slide24.xml><?xml version="1.0" encoding="utf-8"?>
 <p:sld xmlns:a="http://schemas.openxmlformats.org/drawingml/2006/main" xmlns:r="http://schemas.openxmlformats.org/officeDocument/2006/relationships" xmlns:p="http://schemas.openxmlformats.org/presentationml/2006/main">
   <p:cSld>
     <p:spTree>
@@ -13228,7 +15168,7 @@
             <a:fld id="{9860EDB8-5305-433F-BE41-D7A86D811DB3}" type="slidenum">
               <a:rPr lang="en-US" altLang="ko-KR" noProof="0" smtClean="0"/>
               <a:pPr/>
-              <a:t>22</a:t>
+              <a:t>24</a:t>
             </a:fld>
             <a:endParaRPr lang="ko-KR" altLang="en-US" noProof="0"/>
           </a:p>
@@ -14016,7 +15956,7 @@
 </p:sld>
 </file>
 
-<file path=ppt/slides/slide23.xml><?xml version="1.0" encoding="utf-8"?>
+<file path=ppt/slides/slide25.xml><?xml version="1.0" encoding="utf-8"?>
 <p:sld xmlns:a="http://schemas.openxmlformats.org/drawingml/2006/main" xmlns:r="http://schemas.openxmlformats.org/officeDocument/2006/relationships" xmlns:p="http://schemas.openxmlformats.org/presentationml/2006/main">
   <p:cSld>
     <p:spTree>
@@ -14112,7 +16052,7 @@
             <a:fld id="{9860EDB8-5305-433F-BE41-D7A86D811DB3}" type="slidenum">
               <a:rPr lang="en-US" altLang="ko-KR" noProof="0" smtClean="0"/>
               <a:pPr/>
-              <a:t>23</a:t>
+              <a:t>25</a:t>
             </a:fld>
             <a:endParaRPr lang="ko-KR" altLang="en-US" noProof="0"/>
           </a:p>
@@ -14827,7 +16767,7 @@
 </p:sld>
 </file>
 
-<file path=ppt/slides/slide24.xml><?xml version="1.0" encoding="utf-8"?>
+<file path=ppt/slides/slide26.xml><?xml version="1.0" encoding="utf-8"?>
 <p:sld xmlns:a="http://schemas.openxmlformats.org/drawingml/2006/main" xmlns:r="http://schemas.openxmlformats.org/officeDocument/2006/relationships" xmlns:p="http://schemas.openxmlformats.org/presentationml/2006/main">
   <p:cSld>
     <p:spTree>
@@ -14923,7 +16863,7 @@
             <a:fld id="{9860EDB8-5305-433F-BE41-D7A86D811DB3}" type="slidenum">
               <a:rPr lang="en-US" altLang="ko-KR" noProof="0" smtClean="0"/>
               <a:pPr/>
-              <a:t>24</a:t>
+              <a:t>26</a:t>
             </a:fld>
             <a:endParaRPr lang="ko-KR" altLang="en-US" noProof="0"/>
           </a:p>
@@ -15631,7 +17571,7 @@
 </p:sld>
 </file>
 
-<file path=ppt/slides/slide25.xml><?xml version="1.0" encoding="utf-8"?>
+<file path=ppt/slides/slide27.xml><?xml version="1.0" encoding="utf-8"?>
 <p:sld xmlns:a="http://schemas.openxmlformats.org/drawingml/2006/main" xmlns:r="http://schemas.openxmlformats.org/officeDocument/2006/relationships" xmlns:p="http://schemas.openxmlformats.org/presentationml/2006/main">
   <p:cSld>
     <p:spTree>
@@ -15727,7 +17667,7 @@
             <a:fld id="{9860EDB8-5305-433F-BE41-D7A86D811DB3}" type="slidenum">
               <a:rPr lang="en-US" altLang="ko-KR" noProof="0" smtClean="0"/>
               <a:pPr/>
-              <a:t>25</a:t>
+              <a:t>27</a:t>
             </a:fld>
             <a:endParaRPr lang="ko-KR" altLang="en-US" noProof="0"/>
           </a:p>
@@ -16428,7 +18368,7 @@
 </p:sld>
 </file>
 
-<file path=ppt/slides/slide26.xml><?xml version="1.0" encoding="utf-8"?>
+<file path=ppt/slides/slide28.xml><?xml version="1.0" encoding="utf-8"?>
 <p:sld xmlns:a="http://schemas.openxmlformats.org/drawingml/2006/main" xmlns:r="http://schemas.openxmlformats.org/officeDocument/2006/relationships" xmlns:p="http://schemas.openxmlformats.org/presentationml/2006/main">
   <p:cSld>
     <p:spTree>
@@ -16524,7 +18464,7 @@
             <a:fld id="{9860EDB8-5305-433F-BE41-D7A86D811DB3}" type="slidenum">
               <a:rPr lang="en-US" altLang="ko-KR" noProof="0" smtClean="0"/>
               <a:pPr/>
-              <a:t>26</a:t>
+              <a:t>28</a:t>
             </a:fld>
             <a:endParaRPr lang="ko-KR" altLang="en-US" noProof="0"/>
           </a:p>
@@ -16611,7 +18551,7 @@
 </p:sld>
 </file>
 
-<file path=ppt/slides/slide27.xml><?xml version="1.0" encoding="utf-8"?>
+<file path=ppt/slides/slide29.xml><?xml version="1.0" encoding="utf-8"?>
 <p:sld xmlns:a="http://schemas.openxmlformats.org/drawingml/2006/main" xmlns:r="http://schemas.openxmlformats.org/officeDocument/2006/relationships" xmlns:p="http://schemas.openxmlformats.org/presentationml/2006/main">
   <p:cSld>
     <p:spTree>
@@ -16716,7 +18656,7 @@
             <a:fld id="{9860EDB8-5305-433F-BE41-D7A86D811DB3}" type="slidenum">
               <a:rPr lang="en-US" altLang="ko-KR" noProof="0" smtClean="0"/>
               <a:pPr/>
-              <a:t>27</a:t>
+              <a:t>29</a:t>
             </a:fld>
             <a:endParaRPr lang="ko-KR" altLang="en-US" noProof="0"/>
           </a:p>
@@ -18001,7 +19941,239 @@
 </p:sld>
 </file>
 
-<file path=ppt/slides/slide28.xml><?xml version="1.0" encoding="utf-8"?>
+<file path=ppt/slides/slide3.xml><?xml version="1.0" encoding="utf-8"?>
+<p:sld xmlns:a="http://schemas.openxmlformats.org/drawingml/2006/main" xmlns:r="http://schemas.openxmlformats.org/officeDocument/2006/relationships" xmlns:p="http://schemas.openxmlformats.org/presentationml/2006/main">
+  <p:cSld>
+    <p:spTree>
+      <p:nvGrpSpPr>
+        <p:cNvPr id="1" name="">
+          <a:extLst>
+            <a:ext uri="{FF2B5EF4-FFF2-40B4-BE49-F238E27FC236}">
+              <a16:creationId xmlns:a16="http://schemas.microsoft.com/office/drawing/2014/main" id="{A8112F8F-967B-B9A1-F09B-92AA79F63834}"/>
+            </a:ext>
+          </a:extLst>
+        </p:cNvPr>
+        <p:cNvGrpSpPr/>
+        <p:nvPr/>
+      </p:nvGrpSpPr>
+      <p:grpSpPr>
+        <a:xfrm>
+          <a:off x="0" y="0"/>
+          <a:ext cx="0" cy="0"/>
+          <a:chOff x="0" y="0"/>
+          <a:chExt cx="0" cy="0"/>
+        </a:xfrm>
+      </p:grpSpPr>
+      <p:sp>
+        <p:nvSpPr>
+          <p:cNvPr id="8" name="제목 7">
+            <a:extLst>
+              <a:ext uri="{FF2B5EF4-FFF2-40B4-BE49-F238E27FC236}">
+                <a16:creationId xmlns:a16="http://schemas.microsoft.com/office/drawing/2014/main" id="{940C32D2-6865-99AF-59DC-9D0143334131}"/>
+              </a:ext>
+            </a:extLst>
+          </p:cNvPr>
+          <p:cNvSpPr>
+            <a:spLocks noGrp="1"/>
+          </p:cNvSpPr>
+          <p:nvPr>
+            <p:ph type="title"/>
+          </p:nvPr>
+        </p:nvSpPr>
+        <p:spPr>
+          <a:xfrm>
+            <a:off x="521207" y="448056"/>
+            <a:ext cx="8135613" cy="640080"/>
+          </a:xfrm>
+        </p:spPr>
+        <p:txBody>
+          <a:bodyPr rtlCol="0">
+            <a:noAutofit/>
+          </a:bodyPr>
+          <a:lstStyle/>
+          <a:p>
+            <a:r>
+              <a:rPr lang="en-US" altLang="ko-KR" dirty="0"/>
+              <a:t>Matrices as linear transformations</a:t>
+            </a:r>
+            <a:endParaRPr lang="ko-KR" altLang="en-US" dirty="0">
+              <a:cs typeface="Segoe UI Light" panose="020B0502040204020203" pitchFamily="34" charset="0"/>
+            </a:endParaRPr>
+          </a:p>
+        </p:txBody>
+      </p:sp>
+      <p:sp>
+        <p:nvSpPr>
+          <p:cNvPr id="12" name="슬라이드 번호 개체 틀 11">
+            <a:extLst>
+              <a:ext uri="{FF2B5EF4-FFF2-40B4-BE49-F238E27FC236}">
+                <a16:creationId xmlns:a16="http://schemas.microsoft.com/office/drawing/2014/main" id="{D6E71884-D971-2680-B15F-64A76FC8DF9A}"/>
+              </a:ext>
+            </a:extLst>
+          </p:cNvPr>
+          <p:cNvSpPr>
+            <a:spLocks noGrp="1"/>
+          </p:cNvSpPr>
+          <p:nvPr>
+            <p:ph type="sldNum" sz="quarter" idx="4"/>
+          </p:nvPr>
+        </p:nvSpPr>
+        <p:spPr/>
+        <p:txBody>
+          <a:bodyPr/>
+          <a:lstStyle/>
+          <a:p>
+            <a:fld id="{9860EDB8-5305-433F-BE41-D7A86D811DB3}" type="slidenum">
+              <a:rPr lang="en-US" altLang="ko-KR" noProof="0" smtClean="0"/>
+              <a:pPr/>
+              <a:t>3</a:t>
+            </a:fld>
+            <a:endParaRPr lang="ko-KR" altLang="en-US" noProof="0"/>
+          </a:p>
+        </p:txBody>
+      </p:sp>
+      <p:pic>
+        <p:nvPicPr>
+          <p:cNvPr id="2" name="그림 1">
+            <a:extLst>
+              <a:ext uri="{FF2B5EF4-FFF2-40B4-BE49-F238E27FC236}">
+                <a16:creationId xmlns:a16="http://schemas.microsoft.com/office/drawing/2014/main" id="{FCB00A8C-AB9B-C72E-1D36-63DE8B937FC7}"/>
+              </a:ext>
+            </a:extLst>
+          </p:cNvPr>
+          <p:cNvPicPr>
+            <a:picLocks noChangeAspect="1"/>
+          </p:cNvPicPr>
+          <p:nvPr/>
+        </p:nvPicPr>
+        <p:blipFill>
+          <a:blip r:embed="rId3"/>
+          <a:stretch>
+            <a:fillRect/>
+          </a:stretch>
+        </p:blipFill>
+        <p:spPr>
+          <a:xfrm>
+            <a:off x="2099169" y="1314529"/>
+            <a:ext cx="7993661" cy="3371734"/>
+          </a:xfrm>
+          <a:prstGeom prst="rect">
+            <a:avLst/>
+          </a:prstGeom>
+        </p:spPr>
+      </p:pic>
+      <p:pic>
+        <p:nvPicPr>
+          <p:cNvPr id="6" name="그림 5">
+            <a:extLst>
+              <a:ext uri="{FF2B5EF4-FFF2-40B4-BE49-F238E27FC236}">
+                <a16:creationId xmlns:a16="http://schemas.microsoft.com/office/drawing/2014/main" id="{7C97FEDC-4E7D-8FD9-BE05-E0F6DB13CD37}"/>
+              </a:ext>
+            </a:extLst>
+          </p:cNvPr>
+          <p:cNvPicPr>
+            <a:picLocks noChangeAspect="1"/>
+          </p:cNvPicPr>
+          <p:nvPr/>
+        </p:nvPicPr>
+        <p:blipFill>
+          <a:blip r:embed="rId4"/>
+          <a:stretch>
+            <a:fillRect/>
+          </a:stretch>
+        </p:blipFill>
+        <p:spPr>
+          <a:xfrm>
+            <a:off x="4183404" y="4887622"/>
+            <a:ext cx="1723395" cy="1498892"/>
+          </a:xfrm>
+          <a:prstGeom prst="rect">
+            <a:avLst/>
+          </a:prstGeom>
+        </p:spPr>
+      </p:pic>
+      <p:pic>
+        <p:nvPicPr>
+          <p:cNvPr id="9" name="그림 8">
+            <a:extLst>
+              <a:ext uri="{FF2B5EF4-FFF2-40B4-BE49-F238E27FC236}">
+                <a16:creationId xmlns:a16="http://schemas.microsoft.com/office/drawing/2014/main" id="{BAA43656-BEDA-0248-E548-73781670284C}"/>
+              </a:ext>
+            </a:extLst>
+          </p:cNvPr>
+          <p:cNvPicPr>
+            <a:picLocks noChangeAspect="1"/>
+          </p:cNvPicPr>
+          <p:nvPr/>
+        </p:nvPicPr>
+        <p:blipFill>
+          <a:blip r:embed="rId5"/>
+          <a:stretch>
+            <a:fillRect/>
+          </a:stretch>
+        </p:blipFill>
+        <p:spPr>
+          <a:xfrm>
+            <a:off x="6728508" y="4872036"/>
+            <a:ext cx="3364322" cy="1498891"/>
+          </a:xfrm>
+          <a:prstGeom prst="rect">
+            <a:avLst/>
+          </a:prstGeom>
+        </p:spPr>
+      </p:pic>
+      <p:pic>
+        <p:nvPicPr>
+          <p:cNvPr id="13" name="그림 12">
+            <a:extLst>
+              <a:ext uri="{FF2B5EF4-FFF2-40B4-BE49-F238E27FC236}">
+                <a16:creationId xmlns:a16="http://schemas.microsoft.com/office/drawing/2014/main" id="{B907A95E-4A0F-CD4C-ED7F-6B7DDC1EA932}"/>
+              </a:ext>
+            </a:extLst>
+          </p:cNvPr>
+          <p:cNvPicPr>
+            <a:picLocks noChangeAspect="1"/>
+          </p:cNvPicPr>
+          <p:nvPr/>
+        </p:nvPicPr>
+        <p:blipFill>
+          <a:blip r:embed="rId6"/>
+          <a:stretch>
+            <a:fillRect/>
+          </a:stretch>
+        </p:blipFill>
+        <p:spPr>
+          <a:xfrm>
+            <a:off x="832870" y="4855827"/>
+            <a:ext cx="1924147" cy="623870"/>
+          </a:xfrm>
+          <a:prstGeom prst="rect">
+            <a:avLst/>
+          </a:prstGeom>
+        </p:spPr>
+      </p:pic>
+    </p:spTree>
+    <p:extLst>
+      <p:ext uri="{BB962C8B-B14F-4D97-AF65-F5344CB8AC3E}">
+        <p14:creationId xmlns:p14="http://schemas.microsoft.com/office/powerpoint/2010/main" val="3044141798"/>
+      </p:ext>
+    </p:extLst>
+  </p:cSld>
+  <p:clrMapOvr>
+    <a:masterClrMapping/>
+  </p:clrMapOvr>
+  <mc:AlternateContent xmlns:mc="http://schemas.openxmlformats.org/markup-compatibility/2006" xmlns:p14="http://schemas.microsoft.com/office/powerpoint/2010/main">
+    <mc:Choice Requires="p14">
+      <p:transition p14:dur="10"/>
+    </mc:Choice>
+    <mc:Fallback xmlns="">
+      <p:transition/>
+    </mc:Fallback>
+  </mc:AlternateContent>
+</p:sld>
+</file>
+
+<file path=ppt/slides/slide30.xml><?xml version="1.0" encoding="utf-8"?>
 <p:sld xmlns:a="http://schemas.openxmlformats.org/drawingml/2006/main" xmlns:r="http://schemas.openxmlformats.org/officeDocument/2006/relationships" xmlns:p="http://schemas.openxmlformats.org/presentationml/2006/main">
   <p:cSld>
     <p:spTree>
@@ -18106,7 +20278,7 @@
             <a:fld id="{9860EDB8-5305-433F-BE41-D7A86D811DB3}" type="slidenum">
               <a:rPr lang="en-US" altLang="ko-KR" noProof="0" smtClean="0"/>
               <a:pPr/>
-              <a:t>28</a:t>
+              <a:t>30</a:t>
             </a:fld>
             <a:endParaRPr lang="ko-KR" altLang="en-US" noProof="0"/>
           </a:p>
@@ -18456,7 +20628,7 @@
 </p:sld>
 </file>
 
-<file path=ppt/slides/slide3.xml><?xml version="1.0" encoding="utf-8"?>
+<file path=ppt/slides/slide4.xml><?xml version="1.0" encoding="utf-8"?>
 <p:sld xmlns:a="http://schemas.openxmlformats.org/drawingml/2006/main" xmlns:r="http://schemas.openxmlformats.org/officeDocument/2006/relationships" xmlns:p="http://schemas.openxmlformats.org/presentationml/2006/main">
   <p:cSld>
     <p:spTree>
@@ -18464,7 +20636,7 @@
         <p:cNvPr id="1" name="">
           <a:extLst>
             <a:ext uri="{FF2B5EF4-FFF2-40B4-BE49-F238E27FC236}">
-              <a16:creationId xmlns:a16="http://schemas.microsoft.com/office/drawing/2014/main" id="{A8112F8F-967B-B9A1-F09B-92AA79F63834}"/>
+              <a16:creationId xmlns:a16="http://schemas.microsoft.com/office/drawing/2014/main" id="{4D0197D2-31BD-49AD-0A30-6E42D18D2A22}"/>
             </a:ext>
           </a:extLst>
         </p:cNvPr>
@@ -18479,12 +20651,55 @@
           <a:chExt cx="0" cy="0"/>
         </a:xfrm>
       </p:grpSpPr>
+      <p:cxnSp>
+        <p:nvCxnSpPr>
+          <p:cNvPr id="29" name="직선 화살표 연결선 28">
+            <a:extLst>
+              <a:ext uri="{FF2B5EF4-FFF2-40B4-BE49-F238E27FC236}">
+                <a16:creationId xmlns:a16="http://schemas.microsoft.com/office/drawing/2014/main" id="{F5F7D8A4-A058-F3EC-FB2F-B3218A54BC15}"/>
+              </a:ext>
+            </a:extLst>
+          </p:cNvPr>
+          <p:cNvCxnSpPr>
+            <a:cxnSpLocks/>
+            <a:stCxn id="17" idx="3"/>
+            <a:endCxn id="15" idx="1"/>
+          </p:cNvCxnSpPr>
+          <p:nvPr/>
+        </p:nvCxnSpPr>
+        <p:spPr>
+          <a:xfrm>
+            <a:off x="1871903" y="1940490"/>
+            <a:ext cx="6274207" cy="20682"/>
+          </a:xfrm>
+          <a:prstGeom prst="straightConnector1">
+            <a:avLst/>
+          </a:prstGeom>
+          <a:ln>
+            <a:tailEnd type="triangle"/>
+          </a:ln>
+        </p:spPr>
+        <p:style>
+          <a:lnRef idx="1">
+            <a:schemeClr val="dk1"/>
+          </a:lnRef>
+          <a:fillRef idx="0">
+            <a:schemeClr val="dk1"/>
+          </a:fillRef>
+          <a:effectRef idx="0">
+            <a:schemeClr val="dk1"/>
+          </a:effectRef>
+          <a:fontRef idx="minor">
+            <a:schemeClr val="tx1"/>
+          </a:fontRef>
+        </p:style>
+      </p:cxnSp>
       <p:sp>
         <p:nvSpPr>
           <p:cNvPr id="8" name="제목 7">
             <a:extLst>
               <a:ext uri="{FF2B5EF4-FFF2-40B4-BE49-F238E27FC236}">
-                <a16:creationId xmlns:a16="http://schemas.microsoft.com/office/drawing/2014/main" id="{940C32D2-6865-99AF-59DC-9D0143334131}"/>
+                <a16:creationId xmlns:a16="http://schemas.microsoft.com/office/drawing/2014/main" id="{C6FCD0F7-FD58-6E60-66C4-D66E06239088}"/>
               </a:ext>
             </a:extLst>
           </p:cNvPr>
@@ -18511,7 +20726,7 @@
               <a:rPr lang="en-US" altLang="ko-KR" dirty="0">
                 <a:cs typeface="Segoe UI Light" panose="020B0502040204020203" pitchFamily="34" charset="0"/>
               </a:rPr>
-              <a:t>Spectral Decomposition</a:t>
+              <a:t>Matrix Decomposition</a:t>
             </a:r>
             <a:endParaRPr lang="ko-KR" altLang="en-US" dirty="0">
               <a:cs typeface="Segoe UI Light" panose="020B0502040204020203" pitchFamily="34" charset="0"/>
@@ -18524,7 +20739,7 @@
           <p:cNvPr id="12" name="슬라이드 번호 개체 틀 11">
             <a:extLst>
               <a:ext uri="{FF2B5EF4-FFF2-40B4-BE49-F238E27FC236}">
-                <a16:creationId xmlns:a16="http://schemas.microsoft.com/office/drawing/2014/main" id="{D6E71884-D971-2680-B15F-64A76FC8DF9A}"/>
+                <a16:creationId xmlns:a16="http://schemas.microsoft.com/office/drawing/2014/main" id="{70B85DA2-48B8-B6A8-4FCB-37102A7C693D}"/>
               </a:ext>
             </a:extLst>
           </p:cNvPr>
@@ -18543,7 +20758,591 @@
             <a:fld id="{9860EDB8-5305-433F-BE41-D7A86D811DB3}" type="slidenum">
               <a:rPr lang="en-US" altLang="ko-KR" noProof="0" smtClean="0"/>
               <a:pPr/>
-              <a:t>3</a:t>
+              <a:t>4</a:t>
+            </a:fld>
+            <a:endParaRPr lang="ko-KR" altLang="en-US" noProof="0"/>
+          </a:p>
+        </p:txBody>
+      </p:sp>
+      <p:pic>
+        <p:nvPicPr>
+          <p:cNvPr id="10" name="그림 9">
+            <a:extLst>
+              <a:ext uri="{FF2B5EF4-FFF2-40B4-BE49-F238E27FC236}">
+                <a16:creationId xmlns:a16="http://schemas.microsoft.com/office/drawing/2014/main" id="{4819018C-AEE1-14D2-C5AD-5CA7A3437405}"/>
+              </a:ext>
+            </a:extLst>
+          </p:cNvPr>
+          <p:cNvPicPr>
+            <a:picLocks noChangeAspect="1"/>
+          </p:cNvPicPr>
+          <p:nvPr/>
+        </p:nvPicPr>
+        <p:blipFill>
+          <a:blip r:embed="rId3">
+            <a:duotone>
+              <a:prstClr val="black"/>
+              <a:schemeClr val="accent6">
+                <a:tint val="45000"/>
+                <a:satMod val="400000"/>
+              </a:schemeClr>
+            </a:duotone>
+          </a:blip>
+          <a:stretch>
+            <a:fillRect/>
+          </a:stretch>
+        </p:blipFill>
+        <p:spPr>
+          <a:xfrm>
+            <a:off x="2543175" y="1616595"/>
+            <a:ext cx="1567007" cy="689155"/>
+          </a:xfrm>
+          <a:prstGeom prst="rect">
+            <a:avLst/>
+          </a:prstGeom>
+        </p:spPr>
+      </p:pic>
+      <p:pic>
+        <p:nvPicPr>
+          <p:cNvPr id="13" name="그림 12">
+            <a:extLst>
+              <a:ext uri="{FF2B5EF4-FFF2-40B4-BE49-F238E27FC236}">
+                <a16:creationId xmlns:a16="http://schemas.microsoft.com/office/drawing/2014/main" id="{D2D65023-9138-4996-FF39-B1F67A95AC65}"/>
+              </a:ext>
+            </a:extLst>
+          </p:cNvPr>
+          <p:cNvPicPr>
+            <a:picLocks noChangeAspect="1"/>
+          </p:cNvPicPr>
+          <p:nvPr/>
+        </p:nvPicPr>
+        <p:blipFill>
+          <a:blip r:embed="rId4">
+            <a:duotone>
+              <a:prstClr val="black"/>
+              <a:schemeClr val="accent6">
+                <a:tint val="45000"/>
+                <a:satMod val="400000"/>
+              </a:schemeClr>
+            </a:duotone>
+          </a:blip>
+          <a:stretch>
+            <a:fillRect/>
+          </a:stretch>
+        </p:blipFill>
+        <p:spPr>
+          <a:xfrm>
+            <a:off x="2626301" y="3468672"/>
+            <a:ext cx="1419225" cy="732260"/>
+          </a:xfrm>
+          <a:prstGeom prst="rect">
+            <a:avLst/>
+          </a:prstGeom>
+        </p:spPr>
+      </p:pic>
+      <p:pic>
+        <p:nvPicPr>
+          <p:cNvPr id="15" name="그림 14">
+            <a:extLst>
+              <a:ext uri="{FF2B5EF4-FFF2-40B4-BE49-F238E27FC236}">
+                <a16:creationId xmlns:a16="http://schemas.microsoft.com/office/drawing/2014/main" id="{C7AC871C-35E1-2081-C3B2-E03A9723473A}"/>
+              </a:ext>
+            </a:extLst>
+          </p:cNvPr>
+          <p:cNvPicPr>
+            <a:picLocks noChangeAspect="1"/>
+          </p:cNvPicPr>
+          <p:nvPr/>
+        </p:nvPicPr>
+        <p:blipFill>
+          <a:blip r:embed="rId5">
+            <a:duotone>
+              <a:prstClr val="black"/>
+              <a:schemeClr val="accent6">
+                <a:tint val="45000"/>
+                <a:satMod val="400000"/>
+              </a:schemeClr>
+            </a:duotone>
+          </a:blip>
+          <a:stretch>
+            <a:fillRect/>
+          </a:stretch>
+        </p:blipFill>
+        <p:spPr>
+          <a:xfrm>
+            <a:off x="8146110" y="1542945"/>
+            <a:ext cx="2919054" cy="836454"/>
+          </a:xfrm>
+          <a:prstGeom prst="rect">
+            <a:avLst/>
+          </a:prstGeom>
+        </p:spPr>
+      </p:pic>
+      <p:pic>
+        <p:nvPicPr>
+          <p:cNvPr id="17" name="그림 16">
+            <a:extLst>
+              <a:ext uri="{FF2B5EF4-FFF2-40B4-BE49-F238E27FC236}">
+                <a16:creationId xmlns:a16="http://schemas.microsoft.com/office/drawing/2014/main" id="{D2E57255-5C1E-1194-9E3F-C4D61E3D4A4C}"/>
+              </a:ext>
+            </a:extLst>
+          </p:cNvPr>
+          <p:cNvPicPr>
+            <a:picLocks noChangeAspect="1"/>
+          </p:cNvPicPr>
+          <p:nvPr/>
+        </p:nvPicPr>
+        <p:blipFill>
+          <a:blip r:embed="rId6">
+            <a:duotone>
+              <a:prstClr val="black"/>
+              <a:schemeClr val="accent6">
+                <a:tint val="45000"/>
+                <a:satMod val="400000"/>
+              </a:schemeClr>
+            </a:duotone>
+          </a:blip>
+          <a:stretch>
+            <a:fillRect/>
+          </a:stretch>
+        </p:blipFill>
+        <p:spPr>
+          <a:xfrm>
+            <a:off x="643007" y="1616595"/>
+            <a:ext cx="1228896" cy="647790"/>
+          </a:xfrm>
+          <a:prstGeom prst="rect">
+            <a:avLst/>
+          </a:prstGeom>
+        </p:spPr>
+      </p:pic>
+      <p:pic>
+        <p:nvPicPr>
+          <p:cNvPr id="19" name="그림 18">
+            <a:extLst>
+              <a:ext uri="{FF2B5EF4-FFF2-40B4-BE49-F238E27FC236}">
+                <a16:creationId xmlns:a16="http://schemas.microsoft.com/office/drawing/2014/main" id="{A26F2A79-04E4-262D-5E88-294E295AC617}"/>
+              </a:ext>
+            </a:extLst>
+          </p:cNvPr>
+          <p:cNvPicPr>
+            <a:picLocks noChangeAspect="1"/>
+          </p:cNvPicPr>
+          <p:nvPr/>
+        </p:nvPicPr>
+        <p:blipFill>
+          <a:blip r:embed="rId7">
+            <a:duotone>
+              <a:prstClr val="black"/>
+              <a:schemeClr val="accent4">
+                <a:tint val="45000"/>
+                <a:satMod val="400000"/>
+              </a:schemeClr>
+            </a:duotone>
+          </a:blip>
+          <a:stretch>
+            <a:fillRect/>
+          </a:stretch>
+        </p:blipFill>
+        <p:spPr>
+          <a:xfrm>
+            <a:off x="5289733" y="1501212"/>
+            <a:ext cx="974958" cy="334909"/>
+          </a:xfrm>
+          <a:prstGeom prst="rect">
+            <a:avLst/>
+          </a:prstGeom>
+        </p:spPr>
+      </p:pic>
+      <p:pic>
+        <p:nvPicPr>
+          <p:cNvPr id="21" name="그림 20">
+            <a:extLst>
+              <a:ext uri="{FF2B5EF4-FFF2-40B4-BE49-F238E27FC236}">
+                <a16:creationId xmlns:a16="http://schemas.microsoft.com/office/drawing/2014/main" id="{EF8D1440-9794-46A0-522A-0554C8E8534D}"/>
+              </a:ext>
+            </a:extLst>
+          </p:cNvPr>
+          <p:cNvPicPr>
+            <a:picLocks noChangeAspect="1"/>
+          </p:cNvPicPr>
+          <p:nvPr/>
+        </p:nvPicPr>
+        <p:blipFill>
+          <a:blip r:embed="rId8">
+            <a:duotone>
+              <a:prstClr val="black"/>
+              <a:schemeClr val="accent6">
+                <a:tint val="45000"/>
+                <a:satMod val="400000"/>
+              </a:schemeClr>
+            </a:duotone>
+          </a:blip>
+          <a:stretch>
+            <a:fillRect/>
+          </a:stretch>
+        </p:blipFill>
+        <p:spPr>
+          <a:xfrm>
+            <a:off x="8146110" y="3468672"/>
+            <a:ext cx="2919054" cy="797601"/>
+          </a:xfrm>
+          <a:prstGeom prst="rect">
+            <a:avLst/>
+          </a:prstGeom>
+        </p:spPr>
+      </p:pic>
+      <p:pic>
+        <p:nvPicPr>
+          <p:cNvPr id="23" name="그림 22">
+            <a:extLst>
+              <a:ext uri="{FF2B5EF4-FFF2-40B4-BE49-F238E27FC236}">
+                <a16:creationId xmlns:a16="http://schemas.microsoft.com/office/drawing/2014/main" id="{BAF7113E-916F-029A-59D1-9F7B58BB75B4}"/>
+              </a:ext>
+            </a:extLst>
+          </p:cNvPr>
+          <p:cNvPicPr>
+            <a:picLocks noChangeAspect="1"/>
+          </p:cNvPicPr>
+          <p:nvPr/>
+        </p:nvPicPr>
+        <p:blipFill>
+          <a:blip r:embed="rId9">
+            <a:duotone>
+              <a:prstClr val="black"/>
+              <a:schemeClr val="accent4">
+                <a:tint val="45000"/>
+                <a:satMod val="400000"/>
+              </a:schemeClr>
+            </a:duotone>
+          </a:blip>
+          <a:stretch>
+            <a:fillRect/>
+          </a:stretch>
+        </p:blipFill>
+        <p:spPr>
+          <a:xfrm>
+            <a:off x="5268987" y="3334644"/>
+            <a:ext cx="1857333" cy="415352"/>
+          </a:xfrm>
+          <a:prstGeom prst="rect">
+            <a:avLst/>
+          </a:prstGeom>
+        </p:spPr>
+      </p:pic>
+      <p:pic>
+        <p:nvPicPr>
+          <p:cNvPr id="25" name="그림 24">
+            <a:extLst>
+              <a:ext uri="{FF2B5EF4-FFF2-40B4-BE49-F238E27FC236}">
+                <a16:creationId xmlns:a16="http://schemas.microsoft.com/office/drawing/2014/main" id="{5FB13FBD-5AAF-CD6C-31E5-8583098393AC}"/>
+              </a:ext>
+            </a:extLst>
+          </p:cNvPr>
+          <p:cNvPicPr>
+            <a:picLocks noChangeAspect="1"/>
+          </p:cNvPicPr>
+          <p:nvPr/>
+        </p:nvPicPr>
+        <p:blipFill>
+          <a:blip r:embed="rId10">
+            <a:duotone>
+              <a:prstClr val="black"/>
+              <a:schemeClr val="accent4">
+                <a:tint val="45000"/>
+                <a:satMod val="400000"/>
+              </a:schemeClr>
+            </a:duotone>
+          </a:blip>
+          <a:stretch>
+            <a:fillRect/>
+          </a:stretch>
+        </p:blipFill>
+        <p:spPr>
+          <a:xfrm>
+            <a:off x="5268987" y="5203938"/>
+            <a:ext cx="1442826" cy="437711"/>
+          </a:xfrm>
+          <a:prstGeom prst="rect">
+            <a:avLst/>
+          </a:prstGeom>
+        </p:spPr>
+      </p:pic>
+      <p:pic>
+        <p:nvPicPr>
+          <p:cNvPr id="27" name="그림 26">
+            <a:extLst>
+              <a:ext uri="{FF2B5EF4-FFF2-40B4-BE49-F238E27FC236}">
+                <a16:creationId xmlns:a16="http://schemas.microsoft.com/office/drawing/2014/main" id="{69B4065B-D413-F243-FACD-98E1E9A8B6CD}"/>
+              </a:ext>
+            </a:extLst>
+          </p:cNvPr>
+          <p:cNvPicPr>
+            <a:picLocks noChangeAspect="1"/>
+          </p:cNvPicPr>
+          <p:nvPr/>
+        </p:nvPicPr>
+        <p:blipFill>
+          <a:blip r:embed="rId11">
+            <a:duotone>
+              <a:prstClr val="black"/>
+              <a:schemeClr val="accent6">
+                <a:tint val="45000"/>
+                <a:satMod val="400000"/>
+              </a:schemeClr>
+            </a:duotone>
+          </a:blip>
+          <a:stretch>
+            <a:fillRect/>
+          </a:stretch>
+        </p:blipFill>
+        <p:spPr>
+          <a:xfrm>
+            <a:off x="7388752" y="5422794"/>
+            <a:ext cx="3676412" cy="688278"/>
+          </a:xfrm>
+          <a:prstGeom prst="rect">
+            <a:avLst/>
+          </a:prstGeom>
+        </p:spPr>
+      </p:pic>
+      <p:cxnSp>
+        <p:nvCxnSpPr>
+          <p:cNvPr id="31" name="연결선: 꺾임 30">
+            <a:extLst>
+              <a:ext uri="{FF2B5EF4-FFF2-40B4-BE49-F238E27FC236}">
+                <a16:creationId xmlns:a16="http://schemas.microsoft.com/office/drawing/2014/main" id="{6DFBB05C-B675-AE8E-C376-97DD5DB0EFD7}"/>
+              </a:ext>
+            </a:extLst>
+          </p:cNvPr>
+          <p:cNvCxnSpPr>
+            <a:stCxn id="15" idx="2"/>
+            <a:endCxn id="13" idx="0"/>
+          </p:cNvCxnSpPr>
+          <p:nvPr/>
+        </p:nvCxnSpPr>
+        <p:spPr>
+          <a:xfrm rot="5400000">
+            <a:off x="5926140" y="-210826"/>
+            <a:ext cx="1089273" cy="6269723"/>
+          </a:xfrm>
+          <a:prstGeom prst="bentConnector3">
+            <a:avLst/>
+          </a:prstGeom>
+          <a:ln>
+            <a:tailEnd type="triangle"/>
+          </a:ln>
+        </p:spPr>
+        <p:style>
+          <a:lnRef idx="1">
+            <a:schemeClr val="dk1"/>
+          </a:lnRef>
+          <a:fillRef idx="0">
+            <a:schemeClr val="dk1"/>
+          </a:fillRef>
+          <a:effectRef idx="0">
+            <a:schemeClr val="dk1"/>
+          </a:effectRef>
+          <a:fontRef idx="minor">
+            <a:schemeClr val="tx1"/>
+          </a:fontRef>
+        </p:style>
+      </p:cxnSp>
+      <p:cxnSp>
+        <p:nvCxnSpPr>
+          <p:cNvPr id="38" name="직선 화살표 연결선 37">
+            <a:extLst>
+              <a:ext uri="{FF2B5EF4-FFF2-40B4-BE49-F238E27FC236}">
+                <a16:creationId xmlns:a16="http://schemas.microsoft.com/office/drawing/2014/main" id="{08DA7E98-2B6C-DADD-6197-5AD3B1B8F831}"/>
+              </a:ext>
+            </a:extLst>
+          </p:cNvPr>
+          <p:cNvCxnSpPr>
+            <a:cxnSpLocks/>
+            <a:stCxn id="13" idx="3"/>
+            <a:endCxn id="21" idx="1"/>
+          </p:cNvCxnSpPr>
+          <p:nvPr/>
+        </p:nvCxnSpPr>
+        <p:spPr>
+          <a:xfrm>
+            <a:off x="4045526" y="3834802"/>
+            <a:ext cx="4100584" cy="32671"/>
+          </a:xfrm>
+          <a:prstGeom prst="straightConnector1">
+            <a:avLst/>
+          </a:prstGeom>
+          <a:ln>
+            <a:tailEnd type="triangle"/>
+          </a:ln>
+        </p:spPr>
+        <p:style>
+          <a:lnRef idx="1">
+            <a:schemeClr val="dk1"/>
+          </a:lnRef>
+          <a:fillRef idx="0">
+            <a:schemeClr val="dk1"/>
+          </a:fillRef>
+          <a:effectRef idx="0">
+            <a:schemeClr val="dk1"/>
+          </a:effectRef>
+          <a:fontRef idx="minor">
+            <a:schemeClr val="tx1"/>
+          </a:fontRef>
+        </p:style>
+      </p:cxnSp>
+      <p:cxnSp>
+        <p:nvCxnSpPr>
+          <p:cNvPr id="41" name="연결선: 꺾임 40">
+            <a:extLst>
+              <a:ext uri="{FF2B5EF4-FFF2-40B4-BE49-F238E27FC236}">
+                <a16:creationId xmlns:a16="http://schemas.microsoft.com/office/drawing/2014/main" id="{16EA62D2-D98D-E6D9-DC38-89F77A80B4D3}"/>
+              </a:ext>
+            </a:extLst>
+          </p:cNvPr>
+          <p:cNvCxnSpPr>
+            <a:cxnSpLocks/>
+            <a:stCxn id="17" idx="2"/>
+            <a:endCxn id="27" idx="1"/>
+          </p:cNvCxnSpPr>
+          <p:nvPr/>
+        </p:nvCxnSpPr>
+        <p:spPr>
+          <a:xfrm rot="16200000" flipH="1">
+            <a:off x="2571829" y="950010"/>
+            <a:ext cx="3502548" cy="6131297"/>
+          </a:xfrm>
+          <a:prstGeom prst="bentConnector2">
+            <a:avLst/>
+          </a:prstGeom>
+          <a:ln>
+            <a:tailEnd type="triangle"/>
+          </a:ln>
+        </p:spPr>
+        <p:style>
+          <a:lnRef idx="1">
+            <a:schemeClr val="dk1"/>
+          </a:lnRef>
+          <a:fillRef idx="0">
+            <a:schemeClr val="dk1"/>
+          </a:fillRef>
+          <a:effectRef idx="0">
+            <a:schemeClr val="dk1"/>
+          </a:effectRef>
+          <a:fontRef idx="minor">
+            <a:schemeClr val="tx1"/>
+          </a:fontRef>
+        </p:style>
+      </p:cxnSp>
+    </p:spTree>
+    <p:extLst>
+      <p:ext uri="{BB962C8B-B14F-4D97-AF65-F5344CB8AC3E}">
+        <p14:creationId xmlns:p14="http://schemas.microsoft.com/office/powerpoint/2010/main" val="3564559864"/>
+      </p:ext>
+    </p:extLst>
+  </p:cSld>
+  <p:clrMapOvr>
+    <a:masterClrMapping/>
+  </p:clrMapOvr>
+  <mc:AlternateContent xmlns:mc="http://schemas.openxmlformats.org/markup-compatibility/2006" xmlns:p14="http://schemas.microsoft.com/office/powerpoint/2010/main">
+    <mc:Choice Requires="p14">
+      <p:transition p14:dur="10"/>
+    </mc:Choice>
+    <mc:Fallback xmlns="">
+      <p:transition/>
+    </mc:Fallback>
+  </mc:AlternateContent>
+</p:sld>
+</file>
+
+<file path=ppt/slides/slide5.xml><?xml version="1.0" encoding="utf-8"?>
+<p:sld xmlns:a="http://schemas.openxmlformats.org/drawingml/2006/main" xmlns:r="http://schemas.openxmlformats.org/officeDocument/2006/relationships" xmlns:p="http://schemas.openxmlformats.org/presentationml/2006/main">
+  <p:cSld>
+    <p:spTree>
+      <p:nvGrpSpPr>
+        <p:cNvPr id="1" name="">
+          <a:extLst>
+            <a:ext uri="{FF2B5EF4-FFF2-40B4-BE49-F238E27FC236}">
+              <a16:creationId xmlns:a16="http://schemas.microsoft.com/office/drawing/2014/main" id="{C4F7075A-D491-53BC-F59E-8AB113870526}"/>
+            </a:ext>
+          </a:extLst>
+        </p:cNvPr>
+        <p:cNvGrpSpPr/>
+        <p:nvPr/>
+      </p:nvGrpSpPr>
+      <p:grpSpPr>
+        <a:xfrm>
+          <a:off x="0" y="0"/>
+          <a:ext cx="0" cy="0"/>
+          <a:chOff x="0" y="0"/>
+          <a:chExt cx="0" cy="0"/>
+        </a:xfrm>
+      </p:grpSpPr>
+      <p:sp>
+        <p:nvSpPr>
+          <p:cNvPr id="8" name="제목 7">
+            <a:extLst>
+              <a:ext uri="{FF2B5EF4-FFF2-40B4-BE49-F238E27FC236}">
+                <a16:creationId xmlns:a16="http://schemas.microsoft.com/office/drawing/2014/main" id="{E6E3DC37-3831-F3E8-DEAF-E06C0140035F}"/>
+              </a:ext>
+            </a:extLst>
+          </p:cNvPr>
+          <p:cNvSpPr>
+            <a:spLocks noGrp="1"/>
+          </p:cNvSpPr>
+          <p:nvPr>
+            <p:ph type="title"/>
+          </p:nvPr>
+        </p:nvSpPr>
+        <p:spPr>
+          <a:xfrm>
+            <a:off x="521207" y="448056"/>
+            <a:ext cx="8135613" cy="640080"/>
+          </a:xfrm>
+        </p:spPr>
+        <p:txBody>
+          <a:bodyPr rtlCol="0">
+            <a:noAutofit/>
+          </a:bodyPr>
+          <a:lstStyle/>
+          <a:p>
+            <a:r>
+              <a:rPr lang="en-US" altLang="ko-KR" dirty="0">
+                <a:cs typeface="Segoe UI Light" panose="020B0502040204020203" pitchFamily="34" charset="0"/>
+              </a:rPr>
+              <a:t>Spectral Decomposition</a:t>
+            </a:r>
+            <a:endParaRPr lang="ko-KR" altLang="en-US" dirty="0">
+              <a:cs typeface="Segoe UI Light" panose="020B0502040204020203" pitchFamily="34" charset="0"/>
+            </a:endParaRPr>
+          </a:p>
+        </p:txBody>
+      </p:sp>
+      <p:sp>
+        <p:nvSpPr>
+          <p:cNvPr id="12" name="슬라이드 번호 개체 틀 11">
+            <a:extLst>
+              <a:ext uri="{FF2B5EF4-FFF2-40B4-BE49-F238E27FC236}">
+                <a16:creationId xmlns:a16="http://schemas.microsoft.com/office/drawing/2014/main" id="{FC889B1B-415C-C6CC-95DE-E0D20880F6A7}"/>
+              </a:ext>
+            </a:extLst>
+          </p:cNvPr>
+          <p:cNvSpPr>
+            <a:spLocks noGrp="1"/>
+          </p:cNvSpPr>
+          <p:nvPr>
+            <p:ph type="sldNum" sz="quarter" idx="4"/>
+          </p:nvPr>
+        </p:nvSpPr>
+        <p:spPr/>
+        <p:txBody>
+          <a:bodyPr/>
+          <a:lstStyle/>
+          <a:p>
+            <a:fld id="{9860EDB8-5305-433F-BE41-D7A86D811DB3}" type="slidenum">
+              <a:rPr lang="en-US" altLang="ko-KR" noProof="0" smtClean="0"/>
+              <a:pPr/>
+              <a:t>5</a:t>
             </a:fld>
             <a:endParaRPr lang="ko-KR" altLang="en-US" noProof="0"/>
           </a:p>
@@ -18556,7 +21355,7 @@
               <p:cNvPr id="11" name="TextBox 10">
                 <a:extLst>
                   <a:ext uri="{FF2B5EF4-FFF2-40B4-BE49-F238E27FC236}">
-                    <a16:creationId xmlns:a16="http://schemas.microsoft.com/office/drawing/2014/main" id="{73FCE6DE-6E9A-1077-1B12-5EC7694B8E9F}"/>
+                    <a16:creationId xmlns:a16="http://schemas.microsoft.com/office/drawing/2014/main" id="{45641726-37B9-FCCE-EC37-EEDC92EE2B96}"/>
                   </a:ext>
                 </a:extLst>
               </p:cNvPr>
@@ -18947,7 +21746,7 @@
           <p:cNvPr id="30" name="그림 29">
             <a:extLst>
               <a:ext uri="{FF2B5EF4-FFF2-40B4-BE49-F238E27FC236}">
-                <a16:creationId xmlns:a16="http://schemas.microsoft.com/office/drawing/2014/main" id="{21CC6D92-9564-BAF6-0574-83AB13CDF93A}"/>
+                <a16:creationId xmlns:a16="http://schemas.microsoft.com/office/drawing/2014/main" id="{F64D20BB-849F-C248-9D4A-717A68913A69}"/>
               </a:ext>
             </a:extLst>
           </p:cNvPr>
@@ -18985,7 +21784,7 @@
           <p:cNvPr id="1027" name="Picture 3" descr="무지개 빛이 나오는 다채로운 물체">
             <a:extLst>
               <a:ext uri="{FF2B5EF4-FFF2-40B4-BE49-F238E27FC236}">
-                <a16:creationId xmlns:a16="http://schemas.microsoft.com/office/drawing/2014/main" id="{C4951E4B-DC06-A8AA-F8CC-3AC58B1BDAD6}"/>
+                <a16:creationId xmlns:a16="http://schemas.microsoft.com/office/drawing/2014/main" id="{DC73B1A7-D611-530C-8AAA-89C93BDC8986}"/>
               </a:ext>
             </a:extLst>
           </p:cNvPr>
@@ -19030,7 +21829,7 @@
     </p:spTree>
     <p:extLst>
       <p:ext uri="{BB962C8B-B14F-4D97-AF65-F5344CB8AC3E}">
-        <p14:creationId xmlns:p14="http://schemas.microsoft.com/office/powerpoint/2010/main" val="3044141798"/>
+        <p14:creationId xmlns:p14="http://schemas.microsoft.com/office/powerpoint/2010/main" val="2071777305"/>
       </p:ext>
     </p:extLst>
   </p:cSld>
@@ -19048,7 +21847,7 @@
 </p:sld>
 </file>
 
-<file path=ppt/slides/slide4.xml><?xml version="1.0" encoding="utf-8"?>
+<file path=ppt/slides/slide6.xml><?xml version="1.0" encoding="utf-8"?>
 <p:sld xmlns:a="http://schemas.openxmlformats.org/drawingml/2006/main" xmlns:r="http://schemas.openxmlformats.org/officeDocument/2006/relationships" xmlns:p="http://schemas.openxmlformats.org/presentationml/2006/main">
   <p:cSld>
     <p:spTree>
@@ -19135,7 +21934,7 @@
             <a:fld id="{9860EDB8-5305-433F-BE41-D7A86D811DB3}" type="slidenum">
               <a:rPr lang="en-US" altLang="ko-KR" noProof="0" smtClean="0"/>
               <a:pPr/>
-              <a:t>4</a:t>
+              <a:t>6</a:t>
             </a:fld>
             <a:endParaRPr lang="ko-KR" altLang="en-US" noProof="0"/>
           </a:p>
@@ -19949,7 +22748,7 @@
 </p:sld>
 </file>
 
-<file path=ppt/slides/slide5.xml><?xml version="1.0" encoding="utf-8"?>
+<file path=ppt/slides/slide7.xml><?xml version="1.0" encoding="utf-8"?>
 <p:sld xmlns:a="http://schemas.openxmlformats.org/drawingml/2006/main" xmlns:r="http://schemas.openxmlformats.org/officeDocument/2006/relationships" xmlns:p="http://schemas.openxmlformats.org/presentationml/2006/main">
   <p:cSld>
     <p:spTree>
@@ -20036,7 +22835,7 @@
             <a:fld id="{9860EDB8-5305-433F-BE41-D7A86D811DB3}" type="slidenum">
               <a:rPr lang="en-US" altLang="ko-KR" noProof="0" smtClean="0"/>
               <a:pPr/>
-              <a:t>5</a:t>
+              <a:t>7</a:t>
             </a:fld>
             <a:endParaRPr lang="ko-KR" altLang="en-US" noProof="0"/>
           </a:p>
@@ -20776,7 +23575,7 @@
 </p:sld>
 </file>
 
-<file path=ppt/slides/slide6.xml><?xml version="1.0" encoding="utf-8"?>
+<file path=ppt/slides/slide8.xml><?xml version="1.0" encoding="utf-8"?>
 <p:sld xmlns:a="http://schemas.openxmlformats.org/drawingml/2006/main" xmlns:r="http://schemas.openxmlformats.org/officeDocument/2006/relationships" xmlns:p="http://schemas.openxmlformats.org/presentationml/2006/main">
   <p:cSld>
     <p:spTree>
@@ -20864,7 +23663,7 @@
             <a:fld id="{9860EDB8-5305-433F-BE41-D7A86D811DB3}" type="slidenum">
               <a:rPr lang="en-US" altLang="ko-KR" noProof="0" smtClean="0"/>
               <a:pPr/>
-              <a:t>6</a:t>
+              <a:t>8</a:t>
             </a:fld>
             <a:endParaRPr lang="ko-KR" altLang="en-US" noProof="0"/>
           </a:p>
@@ -21303,7 +24102,7 @@
 </p:sld>
 </file>
 
-<file path=ppt/slides/slide7.xml><?xml version="1.0" encoding="utf-8"?>
+<file path=ppt/slides/slide9.xml><?xml version="1.0" encoding="utf-8"?>
 <p:sld xmlns:a="http://schemas.openxmlformats.org/drawingml/2006/main" xmlns:r="http://schemas.openxmlformats.org/officeDocument/2006/relationships" xmlns:p="http://schemas.openxmlformats.org/presentationml/2006/main">
   <p:cSld>
     <p:spTree>
@@ -21391,7 +24190,7 @@
             <a:fld id="{9860EDB8-5305-433F-BE41-D7A86D811DB3}" type="slidenum">
               <a:rPr lang="en-US" altLang="ko-KR" noProof="0" smtClean="0"/>
               <a:pPr/>
-              <a:t>7</a:t>
+              <a:t>9</a:t>
             </a:fld>
             <a:endParaRPr lang="ko-KR" altLang="en-US" noProof="0"/>
           </a:p>
@@ -21872,1706 +24671,6 @@
     <p:extLst>
       <p:ext uri="{BB962C8B-B14F-4D97-AF65-F5344CB8AC3E}">
         <p14:creationId xmlns:p14="http://schemas.microsoft.com/office/powerpoint/2010/main" val="2435502260"/>
-      </p:ext>
-    </p:extLst>
-  </p:cSld>
-  <p:clrMapOvr>
-    <a:masterClrMapping/>
-  </p:clrMapOvr>
-  <mc:AlternateContent xmlns:mc="http://schemas.openxmlformats.org/markup-compatibility/2006" xmlns:p14="http://schemas.microsoft.com/office/powerpoint/2010/main">
-    <mc:Choice Requires="p14">
-      <p:transition p14:dur="10"/>
-    </mc:Choice>
-    <mc:Fallback xmlns="">
-      <p:transition/>
-    </mc:Fallback>
-  </mc:AlternateContent>
-</p:sld>
-</file>
-
-<file path=ppt/slides/slide8.xml><?xml version="1.0" encoding="utf-8"?>
-<p:sld xmlns:a="http://schemas.openxmlformats.org/drawingml/2006/main" xmlns:r="http://schemas.openxmlformats.org/officeDocument/2006/relationships" xmlns:p="http://schemas.openxmlformats.org/presentationml/2006/main">
-  <p:cSld>
-    <p:spTree>
-      <p:nvGrpSpPr>
-        <p:cNvPr id="1" name="">
-          <a:extLst>
-            <a:ext uri="{FF2B5EF4-FFF2-40B4-BE49-F238E27FC236}">
-              <a16:creationId xmlns:a16="http://schemas.microsoft.com/office/drawing/2014/main" id="{7AF80D44-85EA-84E3-E211-6180F78C51BB}"/>
-            </a:ext>
-          </a:extLst>
-        </p:cNvPr>
-        <p:cNvGrpSpPr/>
-        <p:nvPr/>
-      </p:nvGrpSpPr>
-      <p:grpSpPr>
-        <a:xfrm>
-          <a:off x="0" y="0"/>
-          <a:ext cx="0" cy="0"/>
-          <a:chOff x="0" y="0"/>
-          <a:chExt cx="0" cy="0"/>
-        </a:xfrm>
-      </p:grpSpPr>
-      <p:sp>
-        <p:nvSpPr>
-          <p:cNvPr id="2" name="직사각형 1">
-            <a:extLst>
-              <a:ext uri="{FF2B5EF4-FFF2-40B4-BE49-F238E27FC236}">
-                <a16:creationId xmlns:a16="http://schemas.microsoft.com/office/drawing/2014/main" id="{9E517CBB-26E1-57F2-B9B5-80B1CC78BB62}"/>
-              </a:ext>
-            </a:extLst>
-          </p:cNvPr>
-          <p:cNvSpPr/>
-          <p:nvPr/>
-        </p:nvSpPr>
-        <p:spPr>
-          <a:xfrm>
-            <a:off x="1457324" y="2219961"/>
-            <a:ext cx="10191202" cy="640080"/>
-          </a:xfrm>
-          <a:prstGeom prst="rect">
-            <a:avLst/>
-          </a:prstGeom>
-          <a:solidFill>
-            <a:schemeClr val="bg1">
-              <a:lumMod val="75000"/>
-            </a:schemeClr>
-          </a:solidFill>
-          <a:ln>
-            <a:noFill/>
-          </a:ln>
-        </p:spPr>
-        <p:style>
-          <a:lnRef idx="2">
-            <a:schemeClr val="accent1">
-              <a:shade val="15000"/>
-            </a:schemeClr>
-          </a:lnRef>
-          <a:fillRef idx="1">
-            <a:schemeClr val="accent1"/>
-          </a:fillRef>
-          <a:effectRef idx="0">
-            <a:schemeClr val="accent1"/>
-          </a:effectRef>
-          <a:fontRef idx="minor">
-            <a:schemeClr val="lt1"/>
-          </a:fontRef>
-        </p:style>
-        <p:txBody>
-          <a:bodyPr rtlCol="0" anchor="ctr"/>
-          <a:lstStyle/>
-          <a:p>
-            <a:pPr algn="ctr"/>
-            <a:endParaRPr lang="ko-KR" altLang="en-US" dirty="0"/>
-          </a:p>
-        </p:txBody>
-      </p:sp>
-      <p:sp>
-        <p:nvSpPr>
-          <p:cNvPr id="8" name="제목 7">
-            <a:extLst>
-              <a:ext uri="{FF2B5EF4-FFF2-40B4-BE49-F238E27FC236}">
-                <a16:creationId xmlns:a16="http://schemas.microsoft.com/office/drawing/2014/main" id="{10F68A52-4A32-5151-FD0E-4046CA01AC3B}"/>
-              </a:ext>
-            </a:extLst>
-          </p:cNvPr>
-          <p:cNvSpPr>
-            <a:spLocks noGrp="1"/>
-          </p:cNvSpPr>
-          <p:nvPr>
-            <p:ph type="title"/>
-          </p:nvPr>
-        </p:nvSpPr>
-        <p:spPr>
-          <a:xfrm>
-            <a:off x="521207" y="448056"/>
-            <a:ext cx="8135613" cy="640080"/>
-          </a:xfrm>
-        </p:spPr>
-        <p:txBody>
-          <a:bodyPr rtlCol="0">
-            <a:noAutofit/>
-          </a:bodyPr>
-          <a:lstStyle/>
-          <a:p>
-            <a:pPr rtl="0"/>
-            <a:r>
-              <a:rPr lang="en-US" altLang="ko-KR" dirty="0">
-                <a:solidFill>
-                  <a:schemeClr val="tx1"/>
-                </a:solidFill>
-                <a:cs typeface="Segoe UI Light" panose="020B0502040204020203" pitchFamily="34" charset="0"/>
-              </a:rPr>
-              <a:t>Contents</a:t>
-            </a:r>
-            <a:endParaRPr lang="ko-KR" altLang="en-US" dirty="0">
-              <a:solidFill>
-                <a:schemeClr val="tx1"/>
-              </a:solidFill>
-              <a:cs typeface="Segoe UI Light" panose="020B0502040204020203" pitchFamily="34" charset="0"/>
-            </a:endParaRPr>
-          </a:p>
-        </p:txBody>
-      </p:sp>
-      <p:sp>
-        <p:nvSpPr>
-          <p:cNvPr id="12" name="슬라이드 번호 개체 틀 11">
-            <a:extLst>
-              <a:ext uri="{FF2B5EF4-FFF2-40B4-BE49-F238E27FC236}">
-                <a16:creationId xmlns:a16="http://schemas.microsoft.com/office/drawing/2014/main" id="{413B4017-910C-2F30-940D-3B8C5B6A6F34}"/>
-              </a:ext>
-            </a:extLst>
-          </p:cNvPr>
-          <p:cNvSpPr>
-            <a:spLocks noGrp="1"/>
-          </p:cNvSpPr>
-          <p:nvPr>
-            <p:ph type="sldNum" sz="quarter" idx="4"/>
-          </p:nvPr>
-        </p:nvSpPr>
-        <p:spPr/>
-        <p:txBody>
-          <a:bodyPr/>
-          <a:lstStyle/>
-          <a:p>
-            <a:fld id="{9860EDB8-5305-433F-BE41-D7A86D811DB3}" type="slidenum">
-              <a:rPr lang="en-US" altLang="ko-KR" noProof="0" smtClean="0"/>
-              <a:pPr/>
-              <a:t>8</a:t>
-            </a:fld>
-            <a:endParaRPr lang="ko-KR" altLang="en-US" noProof="0" dirty="0"/>
-          </a:p>
-        </p:txBody>
-      </p:sp>
-      <p:sp>
-        <p:nvSpPr>
-          <p:cNvPr id="16" name="TextBox 15">
-            <a:extLst>
-              <a:ext uri="{FF2B5EF4-FFF2-40B4-BE49-F238E27FC236}">
-                <a16:creationId xmlns:a16="http://schemas.microsoft.com/office/drawing/2014/main" id="{67A82BDD-3C92-60EE-514C-663426A94DF8}"/>
-              </a:ext>
-            </a:extLst>
-          </p:cNvPr>
-          <p:cNvSpPr txBox="1"/>
-          <p:nvPr/>
-        </p:nvSpPr>
-        <p:spPr>
-          <a:xfrm>
-            <a:off x="1957661" y="1537527"/>
-            <a:ext cx="9840639" cy="3904210"/>
-          </a:xfrm>
-          <a:prstGeom prst="rect">
-            <a:avLst/>
-          </a:prstGeom>
-          <a:noFill/>
-        </p:spPr>
-        <p:txBody>
-          <a:bodyPr wrap="square" rtlCol="0">
-            <a:spAutoFit/>
-          </a:bodyPr>
-          <a:lstStyle/>
-          <a:p>
-            <a:pPr marL="342900" indent="-342900">
-              <a:lnSpc>
-                <a:spcPct val="150000"/>
-              </a:lnSpc>
-              <a:buFont typeface="+mj-lt"/>
-              <a:buAutoNum type="arabicPeriod"/>
-            </a:pPr>
-            <a:r>
-              <a:rPr lang="en-US" altLang="ko-KR" sz="2800" dirty="0">
-                <a:latin typeface="D2Coding" panose="020B0609020101020101" pitchFamily="49" charset="-127"/>
-                <a:ea typeface="D2Coding" panose="020B0609020101020101" pitchFamily="49" charset="-127"/>
-                <a:cs typeface="맑은 고딕 Semilight" panose="020B0502040204020203" pitchFamily="50" charset="-127"/>
-              </a:rPr>
-              <a:t> </a:t>
-            </a:r>
-            <a:r>
-              <a:rPr lang="ko-KR" altLang="en-US" sz="2800" dirty="0">
-                <a:latin typeface="D2Coding" panose="020B0609020101020101" pitchFamily="49" charset="-127"/>
-                <a:ea typeface="D2Coding" panose="020B0609020101020101" pitchFamily="49" charset="-127"/>
-                <a:cs typeface="맑은 고딕 Semilight" panose="020B0502040204020203" pitchFamily="50" charset="-127"/>
-              </a:rPr>
-              <a:t>스펙트럼 분해</a:t>
-            </a:r>
-            <a:r>
-              <a:rPr lang="en-US" altLang="ko-KR" sz="2800" dirty="0">
-                <a:latin typeface="D2Coding" panose="020B0609020101020101" pitchFamily="49" charset="-127"/>
-                <a:ea typeface="D2Coding" panose="020B0609020101020101" pitchFamily="49" charset="-127"/>
-                <a:cs typeface="맑은 고딕 Semilight" panose="020B0502040204020203" pitchFamily="50" charset="-127"/>
-              </a:rPr>
-              <a:t>(Spectral Decomposition)</a:t>
-            </a:r>
-          </a:p>
-          <a:p>
-            <a:pPr marL="342900" indent="-342900">
-              <a:lnSpc>
-                <a:spcPct val="150000"/>
-              </a:lnSpc>
-              <a:buFont typeface="+mj-lt"/>
-              <a:buAutoNum type="arabicPeriod"/>
-            </a:pPr>
-            <a:r>
-              <a:rPr lang="ko-KR" altLang="en-US" sz="2800" dirty="0">
-                <a:latin typeface="D2Coding" panose="020B0609020101020101" pitchFamily="49" charset="-127"/>
-                <a:ea typeface="D2Coding" panose="020B0609020101020101" pitchFamily="49" charset="-127"/>
-                <a:cs typeface="맑은 고딕 Semilight" panose="020B0502040204020203" pitchFamily="50" charset="-127"/>
-              </a:rPr>
-              <a:t> </a:t>
-            </a:r>
-            <a:r>
-              <a:rPr lang="ko-KR" altLang="en-US" sz="2800" dirty="0" err="1">
-                <a:latin typeface="D2Coding" panose="020B0609020101020101" pitchFamily="49" charset="-127"/>
-                <a:ea typeface="D2Coding" panose="020B0609020101020101" pitchFamily="49" charset="-127"/>
-                <a:cs typeface="맑은 고딕 Semilight" panose="020B0502040204020203" pitchFamily="50" charset="-127"/>
-              </a:rPr>
-              <a:t>특이값</a:t>
-            </a:r>
-            <a:r>
-              <a:rPr lang="ko-KR" altLang="en-US" sz="2800" dirty="0">
-                <a:latin typeface="D2Coding" panose="020B0609020101020101" pitchFamily="49" charset="-127"/>
-                <a:ea typeface="D2Coding" panose="020B0609020101020101" pitchFamily="49" charset="-127"/>
-                <a:cs typeface="맑은 고딕 Semilight" panose="020B0502040204020203" pitchFamily="50" charset="-127"/>
-              </a:rPr>
-              <a:t> 분해</a:t>
-            </a:r>
-            <a:r>
-              <a:rPr lang="en-US" altLang="ko-KR" sz="2800" dirty="0">
-                <a:latin typeface="D2Coding" panose="020B0609020101020101" pitchFamily="49" charset="-127"/>
-                <a:ea typeface="D2Coding" panose="020B0609020101020101" pitchFamily="49" charset="-127"/>
-                <a:cs typeface="맑은 고딕 Semilight" panose="020B0502040204020203" pitchFamily="50" charset="-127"/>
-              </a:rPr>
-              <a:t>(Singular Value Decomposition, SVD)</a:t>
-            </a:r>
-          </a:p>
-          <a:p>
-            <a:pPr marL="342900" indent="-342900">
-              <a:lnSpc>
-                <a:spcPct val="150000"/>
-              </a:lnSpc>
-              <a:buFont typeface="+mj-lt"/>
-              <a:buAutoNum type="arabicPeriod"/>
-            </a:pPr>
-            <a:r>
-              <a:rPr lang="en-US" altLang="ko-KR" sz="2800" dirty="0">
-                <a:latin typeface="D2Coding" panose="020B0609020101020101" pitchFamily="49" charset="-127"/>
-                <a:ea typeface="D2Coding" panose="020B0609020101020101" pitchFamily="49" charset="-127"/>
-                <a:cs typeface="맑은 고딕 Semilight" panose="020B0502040204020203" pitchFamily="50" charset="-127"/>
-              </a:rPr>
-              <a:t> SVD vs. PCA</a:t>
-            </a:r>
-          </a:p>
-          <a:p>
-            <a:pPr marL="342900" indent="-342900">
-              <a:lnSpc>
-                <a:spcPct val="150000"/>
-              </a:lnSpc>
-              <a:buFont typeface="+mj-lt"/>
-              <a:buAutoNum type="arabicPeriod"/>
-            </a:pPr>
-            <a:r>
-              <a:rPr lang="en-US" altLang="ko-KR" sz="2800" dirty="0">
-                <a:latin typeface="D2Coding" panose="020B0609020101020101" pitchFamily="49" charset="-127"/>
-                <a:ea typeface="D2Coding" panose="020B0609020101020101" pitchFamily="49" charset="-127"/>
-                <a:cs typeface="맑은 고딕 Semilight" panose="020B0502040204020203" pitchFamily="50" charset="-127"/>
-              </a:rPr>
-              <a:t> LDA(</a:t>
-            </a:r>
-            <a:r>
-              <a:rPr lang="ko-KR" altLang="en-US" sz="2800" dirty="0">
-                <a:latin typeface="D2Coding" panose="020B0609020101020101" pitchFamily="49" charset="-127"/>
-                <a:ea typeface="D2Coding" panose="020B0609020101020101" pitchFamily="49" charset="-127"/>
-                <a:cs typeface="맑은 고딕 Semilight" panose="020B0502040204020203" pitchFamily="50" charset="-127"/>
-              </a:rPr>
-              <a:t>잠재 </a:t>
-            </a:r>
-            <a:r>
-              <a:rPr lang="ko-KR" altLang="en-US" sz="2800" dirty="0" err="1">
-                <a:latin typeface="D2Coding" panose="020B0609020101020101" pitchFamily="49" charset="-127"/>
-                <a:ea typeface="D2Coding" panose="020B0609020101020101" pitchFamily="49" charset="-127"/>
-                <a:cs typeface="맑은 고딕 Semilight" panose="020B0502040204020203" pitchFamily="50" charset="-127"/>
-              </a:rPr>
-              <a:t>디리클레르</a:t>
-            </a:r>
-            <a:r>
-              <a:rPr lang="ko-KR" altLang="en-US" sz="2800" dirty="0">
-                <a:latin typeface="D2Coding" panose="020B0609020101020101" pitchFamily="49" charset="-127"/>
-                <a:ea typeface="D2Coding" panose="020B0609020101020101" pitchFamily="49" charset="-127"/>
-                <a:cs typeface="맑은 고딕 Semilight" panose="020B0502040204020203" pitchFamily="50" charset="-127"/>
-              </a:rPr>
-              <a:t> 할당</a:t>
-            </a:r>
-            <a:r>
-              <a:rPr lang="en-US" altLang="ko-KR" sz="2800" dirty="0">
-                <a:latin typeface="D2Coding" panose="020B0609020101020101" pitchFamily="49" charset="-127"/>
-                <a:ea typeface="D2Coding" panose="020B0609020101020101" pitchFamily="49" charset="-127"/>
-                <a:cs typeface="맑은 고딕 Semilight" panose="020B0502040204020203" pitchFamily="50" charset="-127"/>
-              </a:rPr>
-              <a:t>)</a:t>
-            </a:r>
-          </a:p>
-          <a:p>
-            <a:pPr marL="342900" indent="-342900">
-              <a:lnSpc>
-                <a:spcPct val="150000"/>
-              </a:lnSpc>
-              <a:buFont typeface="+mj-lt"/>
-              <a:buAutoNum type="arabicPeriod"/>
-            </a:pPr>
-            <a:endParaRPr lang="en-US" altLang="ko-KR" sz="2800" dirty="0">
-              <a:latin typeface="D2Coding" panose="020B0609020101020101" pitchFamily="49" charset="-127"/>
-              <a:ea typeface="D2Coding" panose="020B0609020101020101" pitchFamily="49" charset="-127"/>
-              <a:cs typeface="맑은 고딕 Semilight" panose="020B0502040204020203" pitchFamily="50" charset="-127"/>
-            </a:endParaRPr>
-          </a:p>
-          <a:p>
-            <a:pPr marL="342900" indent="-342900">
-              <a:lnSpc>
-                <a:spcPct val="150000"/>
-              </a:lnSpc>
-              <a:buFont typeface="+mj-lt"/>
-              <a:buAutoNum type="arabicPeriod"/>
-            </a:pPr>
-            <a:endParaRPr lang="en-US" altLang="ko-KR" sz="2800" dirty="0">
-              <a:latin typeface="D2Coding" panose="020B0609020101020101" pitchFamily="49" charset="-127"/>
-              <a:ea typeface="D2Coding" panose="020B0609020101020101" pitchFamily="49" charset="-127"/>
-              <a:cs typeface="맑은 고딕 Semilight" panose="020B0502040204020203" pitchFamily="50" charset="-127"/>
-            </a:endParaRPr>
-          </a:p>
-        </p:txBody>
-      </p:sp>
-    </p:spTree>
-    <p:extLst>
-      <p:ext uri="{BB962C8B-B14F-4D97-AF65-F5344CB8AC3E}">
-        <p14:creationId xmlns:p14="http://schemas.microsoft.com/office/powerpoint/2010/main" val="1970703209"/>
-      </p:ext>
-    </p:extLst>
-  </p:cSld>
-  <p:clrMapOvr>
-    <a:masterClrMapping/>
-  </p:clrMapOvr>
-  <mc:AlternateContent xmlns:mc="http://schemas.openxmlformats.org/markup-compatibility/2006" xmlns:p14="http://schemas.microsoft.com/office/powerpoint/2010/main">
-    <mc:Choice Requires="p14">
-      <p:transition p14:dur="10"/>
-    </mc:Choice>
-    <mc:Fallback xmlns="">
-      <p:transition/>
-    </mc:Fallback>
-  </mc:AlternateContent>
-</p:sld>
-</file>
-
-<file path=ppt/slides/slide9.xml><?xml version="1.0" encoding="utf-8"?>
-<p:sld xmlns:a="http://schemas.openxmlformats.org/drawingml/2006/main" xmlns:r="http://schemas.openxmlformats.org/officeDocument/2006/relationships" xmlns:p="http://schemas.openxmlformats.org/presentationml/2006/main">
-  <p:cSld>
-    <p:spTree>
-      <p:nvGrpSpPr>
-        <p:cNvPr id="1" name="">
-          <a:extLst>
-            <a:ext uri="{FF2B5EF4-FFF2-40B4-BE49-F238E27FC236}">
-              <a16:creationId xmlns:a16="http://schemas.microsoft.com/office/drawing/2014/main" id="{A682FFB1-E1E2-8E62-3792-451CCC9C7A74}"/>
-            </a:ext>
-          </a:extLst>
-        </p:cNvPr>
-        <p:cNvGrpSpPr/>
-        <p:nvPr/>
-      </p:nvGrpSpPr>
-      <p:grpSpPr>
-        <a:xfrm>
-          <a:off x="0" y="0"/>
-          <a:ext cx="0" cy="0"/>
-          <a:chOff x="0" y="0"/>
-          <a:chExt cx="0" cy="0"/>
-        </a:xfrm>
-      </p:grpSpPr>
-      <p:sp>
-        <p:nvSpPr>
-          <p:cNvPr id="8" name="제목 7">
-            <a:extLst>
-              <a:ext uri="{FF2B5EF4-FFF2-40B4-BE49-F238E27FC236}">
-                <a16:creationId xmlns:a16="http://schemas.microsoft.com/office/drawing/2014/main" id="{09AFAD1A-77BE-E3E5-1484-C0ADD05F23DC}"/>
-              </a:ext>
-            </a:extLst>
-          </p:cNvPr>
-          <p:cNvSpPr>
-            <a:spLocks noGrp="1"/>
-          </p:cNvSpPr>
-          <p:nvPr>
-            <p:ph type="title"/>
-          </p:nvPr>
-        </p:nvSpPr>
-        <p:spPr>
-          <a:xfrm>
-            <a:off x="521207" y="448056"/>
-            <a:ext cx="8135613" cy="640080"/>
-          </a:xfrm>
-        </p:spPr>
-        <p:txBody>
-          <a:bodyPr rtlCol="0">
-            <a:noAutofit/>
-          </a:bodyPr>
-          <a:lstStyle/>
-          <a:p>
-            <a:r>
-              <a:rPr lang="en-US" altLang="ko-KR" dirty="0">
-                <a:cs typeface="Segoe UI Light" panose="020B0502040204020203" pitchFamily="34" charset="0"/>
-              </a:rPr>
-              <a:t>Matrix</a:t>
-            </a:r>
-            <a:r>
-              <a:rPr lang="ko-KR" altLang="en-US" dirty="0">
-                <a:cs typeface="Segoe UI Light" panose="020B0502040204020203" pitchFamily="34" charset="0"/>
-              </a:rPr>
-              <a:t> </a:t>
-            </a:r>
-            <a:r>
-              <a:rPr lang="en-US" altLang="ko-KR" dirty="0">
-                <a:cs typeface="Segoe UI Light" panose="020B0502040204020203" pitchFamily="34" charset="0"/>
-              </a:rPr>
-              <a:t>Decomposition</a:t>
-            </a:r>
-            <a:endParaRPr lang="ko-KR" altLang="en-US" dirty="0">
-              <a:cs typeface="Segoe UI Light" panose="020B0502040204020203" pitchFamily="34" charset="0"/>
-            </a:endParaRPr>
-          </a:p>
-        </p:txBody>
-      </p:sp>
-      <p:sp>
-        <p:nvSpPr>
-          <p:cNvPr id="12" name="슬라이드 번호 개체 틀 11">
-            <a:extLst>
-              <a:ext uri="{FF2B5EF4-FFF2-40B4-BE49-F238E27FC236}">
-                <a16:creationId xmlns:a16="http://schemas.microsoft.com/office/drawing/2014/main" id="{405552FD-DD84-8A7B-2402-095393843CC8}"/>
-              </a:ext>
-            </a:extLst>
-          </p:cNvPr>
-          <p:cNvSpPr>
-            <a:spLocks noGrp="1"/>
-          </p:cNvSpPr>
-          <p:nvPr>
-            <p:ph type="sldNum" sz="quarter" idx="4"/>
-          </p:nvPr>
-        </p:nvSpPr>
-        <p:spPr/>
-        <p:txBody>
-          <a:bodyPr/>
-          <a:lstStyle/>
-          <a:p>
-            <a:fld id="{9860EDB8-5305-433F-BE41-D7A86D811DB3}" type="slidenum">
-              <a:rPr lang="en-US" altLang="ko-KR" noProof="0" smtClean="0"/>
-              <a:pPr/>
-              <a:t>9</a:t>
-            </a:fld>
-            <a:endParaRPr lang="ko-KR" altLang="en-US" noProof="0"/>
-          </a:p>
-        </p:txBody>
-      </p:sp>
-      <p:sp>
-        <p:nvSpPr>
-          <p:cNvPr id="10" name="TextBox 9">
-            <a:extLst>
-              <a:ext uri="{FF2B5EF4-FFF2-40B4-BE49-F238E27FC236}">
-                <a16:creationId xmlns:a16="http://schemas.microsoft.com/office/drawing/2014/main" id="{75F76213-AECF-41A5-8F1B-E3555F9E58D4}"/>
-              </a:ext>
-            </a:extLst>
-          </p:cNvPr>
-          <p:cNvSpPr txBox="1"/>
-          <p:nvPr/>
-        </p:nvSpPr>
-        <p:spPr>
-          <a:xfrm>
-            <a:off x="634904" y="1358808"/>
-            <a:ext cx="11214196" cy="880819"/>
-          </a:xfrm>
-          <a:prstGeom prst="rect">
-            <a:avLst/>
-          </a:prstGeom>
-          <a:noFill/>
-        </p:spPr>
-        <p:txBody>
-          <a:bodyPr wrap="square">
-            <a:spAutoFit/>
-          </a:bodyPr>
-          <a:lstStyle/>
-          <a:p>
-            <a:pPr>
-              <a:lnSpc>
-                <a:spcPct val="150000"/>
-              </a:lnSpc>
-              <a:buNone/>
-            </a:pPr>
-            <a:r>
-              <a:rPr lang="en-US" altLang="ko-KR" dirty="0">
-                <a:effectLst/>
-                <a:latin typeface="D2Coding" panose="020B0609020101020101" pitchFamily="49" charset="-127"/>
-                <a:ea typeface="D2Coding" panose="020B0609020101020101" pitchFamily="49" charset="-127"/>
-                <a:cs typeface="맑은 고딕 Semilight" panose="020B0502040204020203" pitchFamily="50" charset="-127"/>
-              </a:rPr>
-              <a:t>100,000</a:t>
-            </a:r>
-            <a:r>
-              <a:rPr lang="ko-KR" altLang="en-US" dirty="0">
-                <a:effectLst/>
-                <a:latin typeface="D2Coding" panose="020B0609020101020101" pitchFamily="49" charset="-127"/>
-                <a:ea typeface="D2Coding" panose="020B0609020101020101" pitchFamily="49" charset="-127"/>
-                <a:cs typeface="맑은 고딕 Semilight" panose="020B0502040204020203" pitchFamily="50" charset="-127"/>
-              </a:rPr>
-              <a:t>개의 문서</a:t>
-            </a:r>
-            <a:r>
-              <a:rPr lang="en-US" altLang="ko-KR" dirty="0">
-                <a:effectLst/>
-                <a:latin typeface="D2Coding" panose="020B0609020101020101" pitchFamily="49" charset="-127"/>
-                <a:ea typeface="D2Coding" panose="020B0609020101020101" pitchFamily="49" charset="-127"/>
-                <a:cs typeface="맑은 고딕 Semilight" panose="020B0502040204020203" pitchFamily="50" charset="-127"/>
-              </a:rPr>
-              <a:t>(</a:t>
-            </a:r>
-            <a:r>
-              <a:rPr lang="ko-KR" altLang="en-US" dirty="0">
-                <a:effectLst/>
-                <a:latin typeface="D2Coding" panose="020B0609020101020101" pitchFamily="49" charset="-127"/>
-                <a:ea typeface="D2Coding" panose="020B0609020101020101" pitchFamily="49" charset="-127"/>
-                <a:cs typeface="맑은 고딕 Semilight" panose="020B0502040204020203" pitchFamily="50" charset="-127"/>
-              </a:rPr>
-              <a:t>기사</a:t>
-            </a:r>
-            <a:r>
-              <a:rPr lang="en-US" altLang="ko-KR" dirty="0">
-                <a:effectLst/>
-                <a:latin typeface="D2Coding" panose="020B0609020101020101" pitchFamily="49" charset="-127"/>
-                <a:ea typeface="D2Coding" panose="020B0609020101020101" pitchFamily="49" charset="-127"/>
-                <a:cs typeface="맑은 고딕 Semilight" panose="020B0502040204020203" pitchFamily="50" charset="-127"/>
-              </a:rPr>
-              <a:t>)</a:t>
-            </a:r>
-            <a:r>
-              <a:rPr lang="ko-KR" altLang="en-US" dirty="0">
-                <a:latin typeface="D2Coding" panose="020B0609020101020101" pitchFamily="49" charset="-127"/>
-                <a:ea typeface="D2Coding" panose="020B0609020101020101" pitchFamily="49" charset="-127"/>
-                <a:cs typeface="맑은 고딕 Semilight" panose="020B0502040204020203" pitchFamily="50" charset="-127"/>
-              </a:rPr>
-              <a:t>가 </a:t>
-            </a:r>
-            <a:r>
-              <a:rPr lang="en-US" altLang="ko-KR" dirty="0">
-                <a:effectLst/>
-                <a:latin typeface="D2Coding" panose="020B0609020101020101" pitchFamily="49" charset="-127"/>
-                <a:ea typeface="D2Coding" panose="020B0609020101020101" pitchFamily="49" charset="-127"/>
-                <a:cs typeface="맑은 고딕 Semilight" panose="020B0502040204020203" pitchFamily="50" charset="-127"/>
-              </a:rPr>
-              <a:t>1,000</a:t>
-            </a:r>
-            <a:r>
-              <a:rPr lang="ko-KR" altLang="en-US" dirty="0">
-                <a:effectLst/>
-                <a:latin typeface="D2Coding" panose="020B0609020101020101" pitchFamily="49" charset="-127"/>
-                <a:ea typeface="D2Coding" panose="020B0609020101020101" pitchFamily="49" charset="-127"/>
-                <a:cs typeface="맑은 고딕 Semilight" panose="020B0502040204020203" pitchFamily="50" charset="-127"/>
-              </a:rPr>
-              <a:t>개의 단어로 표현된 원본 행렬에서 가장 중요한 </a:t>
-            </a:r>
-            <a:r>
-              <a:rPr lang="en-US" altLang="ko-KR" dirty="0">
-                <a:effectLst/>
-                <a:latin typeface="D2Coding" panose="020B0609020101020101" pitchFamily="49" charset="-127"/>
-                <a:ea typeface="D2Coding" panose="020B0609020101020101" pitchFamily="49" charset="-127"/>
-                <a:cs typeface="맑은 고딕 Semilight" panose="020B0502040204020203" pitchFamily="50" charset="-127"/>
-              </a:rPr>
-              <a:t>5</a:t>
-            </a:r>
-            <a:r>
-              <a:rPr lang="ko-KR" altLang="en-US" dirty="0">
-                <a:effectLst/>
-                <a:latin typeface="D2Coding" panose="020B0609020101020101" pitchFamily="49" charset="-127"/>
-                <a:ea typeface="D2Coding" panose="020B0609020101020101" pitchFamily="49" charset="-127"/>
-                <a:cs typeface="맑은 고딕 Semilight" panose="020B0502040204020203" pitchFamily="50" charset="-127"/>
-              </a:rPr>
-              <a:t>개의 성분</a:t>
-            </a:r>
-            <a:r>
-              <a:rPr lang="en-US" altLang="ko-KR" dirty="0">
-                <a:effectLst/>
-                <a:latin typeface="D2Coding" panose="020B0609020101020101" pitchFamily="49" charset="-127"/>
-                <a:ea typeface="D2Coding" panose="020B0609020101020101" pitchFamily="49" charset="-127"/>
-                <a:cs typeface="맑은 고딕 Semilight" panose="020B0502040204020203" pitchFamily="50" charset="-127"/>
-              </a:rPr>
-              <a:t>(Topic)</a:t>
-            </a:r>
-            <a:r>
-              <a:rPr lang="ko-KR" altLang="en-US" dirty="0">
-                <a:effectLst/>
-                <a:latin typeface="D2Coding" panose="020B0609020101020101" pitchFamily="49" charset="-127"/>
-                <a:ea typeface="D2Coding" panose="020B0609020101020101" pitchFamily="49" charset="-127"/>
-                <a:cs typeface="맑은 고딕 Semilight" panose="020B0502040204020203" pitchFamily="50" charset="-127"/>
-              </a:rPr>
-              <a:t>만 남겨 </a:t>
-            </a:r>
-            <a:r>
-              <a:rPr lang="ko-KR" altLang="en-US" dirty="0" err="1">
-                <a:effectLst/>
-                <a:latin typeface="D2Coding" panose="020B0609020101020101" pitchFamily="49" charset="-127"/>
-                <a:ea typeface="D2Coding" panose="020B0609020101020101" pitchFamily="49" charset="-127"/>
-                <a:cs typeface="맑은 고딕 Semilight" panose="020B0502040204020203" pitchFamily="50" charset="-127"/>
-              </a:rPr>
-              <a:t>저차원</a:t>
-            </a:r>
-            <a:r>
-              <a:rPr lang="ko-KR" altLang="en-US" dirty="0">
-                <a:effectLst/>
-                <a:latin typeface="D2Coding" panose="020B0609020101020101" pitchFamily="49" charset="-127"/>
-                <a:ea typeface="D2Coding" panose="020B0609020101020101" pitchFamily="49" charset="-127"/>
-                <a:cs typeface="맑은 고딕 Semilight" panose="020B0502040204020203" pitchFamily="50" charset="-127"/>
-              </a:rPr>
-              <a:t> 행렬로 압축하는 과정을 </a:t>
-            </a:r>
-            <a:r>
-              <a:rPr lang="en-US" altLang="ko-KR" dirty="0">
-                <a:effectLst/>
-                <a:latin typeface="D2Coding" panose="020B0609020101020101" pitchFamily="49" charset="-127"/>
-                <a:ea typeface="D2Coding" panose="020B0609020101020101" pitchFamily="49" charset="-127"/>
-                <a:cs typeface="맑은 고딕 Semilight" panose="020B0502040204020203" pitchFamily="50" charset="-127"/>
-              </a:rPr>
-              <a:t>(</a:t>
-            </a:r>
-            <a:r>
-              <a:rPr lang="ko-KR" altLang="en-US" dirty="0">
-                <a:effectLst/>
-                <a:latin typeface="D2Coding" panose="020B0609020101020101" pitchFamily="49" charset="-127"/>
-                <a:ea typeface="D2Coding" panose="020B0609020101020101" pitchFamily="49" charset="-127"/>
-                <a:cs typeface="맑은 고딕 Semilight" panose="020B0502040204020203" pitchFamily="50" charset="-127"/>
-              </a:rPr>
-              <a:t>절단된</a:t>
-            </a:r>
-            <a:r>
-              <a:rPr lang="en-US" altLang="ko-KR" dirty="0">
-                <a:effectLst/>
-                <a:latin typeface="D2Coding" panose="020B0609020101020101" pitchFamily="49" charset="-127"/>
-                <a:ea typeface="D2Coding" panose="020B0609020101020101" pitchFamily="49" charset="-127"/>
-                <a:cs typeface="맑은 고딕 Semilight" panose="020B0502040204020203" pitchFamily="50" charset="-127"/>
-              </a:rPr>
-              <a:t>)</a:t>
-            </a:r>
-            <a:r>
-              <a:rPr lang="ko-KR" altLang="en-US" dirty="0">
-                <a:effectLst/>
-                <a:latin typeface="D2Coding" panose="020B0609020101020101" pitchFamily="49" charset="-127"/>
-                <a:ea typeface="D2Coding" panose="020B0609020101020101" pitchFamily="49" charset="-127"/>
-                <a:cs typeface="맑은 고딕 Semilight" panose="020B0502040204020203" pitchFamily="50" charset="-127"/>
-              </a:rPr>
-              <a:t> </a:t>
-            </a:r>
-            <a:r>
-              <a:rPr lang="ko-KR" altLang="en-US" dirty="0" err="1">
-                <a:effectLst/>
-                <a:latin typeface="D2Coding" panose="020B0609020101020101" pitchFamily="49" charset="-127"/>
-                <a:ea typeface="D2Coding" panose="020B0609020101020101" pitchFamily="49" charset="-127"/>
-                <a:cs typeface="맑은 고딕 Semilight" panose="020B0502040204020203" pitchFamily="50" charset="-127"/>
-              </a:rPr>
-              <a:t>특이값</a:t>
-            </a:r>
-            <a:r>
-              <a:rPr lang="ko-KR" altLang="en-US" dirty="0">
-                <a:effectLst/>
-                <a:latin typeface="D2Coding" panose="020B0609020101020101" pitchFamily="49" charset="-127"/>
-                <a:ea typeface="D2Coding" panose="020B0609020101020101" pitchFamily="49" charset="-127"/>
-                <a:cs typeface="맑은 고딕 Semilight" panose="020B0502040204020203" pitchFamily="50" charset="-127"/>
-              </a:rPr>
-              <a:t> 분해</a:t>
-            </a:r>
-            <a:r>
-              <a:rPr lang="en-US" altLang="ko-KR" dirty="0">
-                <a:effectLst/>
-                <a:latin typeface="D2Coding" panose="020B0609020101020101" pitchFamily="49" charset="-127"/>
-                <a:ea typeface="D2Coding" panose="020B0609020101020101" pitchFamily="49" charset="-127"/>
-                <a:cs typeface="맑은 고딕 Semilight" panose="020B0502040204020203" pitchFamily="50" charset="-127"/>
-              </a:rPr>
-              <a:t>(Truncated SVD)</a:t>
-            </a:r>
-            <a:r>
-              <a:rPr lang="ko-KR" altLang="en-US" dirty="0">
-                <a:effectLst/>
-                <a:latin typeface="D2Coding" panose="020B0609020101020101" pitchFamily="49" charset="-127"/>
-                <a:ea typeface="D2Coding" panose="020B0609020101020101" pitchFamily="49" charset="-127"/>
-                <a:cs typeface="맑은 고딕 Semilight" panose="020B0502040204020203" pitchFamily="50" charset="-127"/>
-              </a:rPr>
-              <a:t>라고 함</a:t>
-            </a:r>
-            <a:endParaRPr lang="en-US" altLang="ko-KR" dirty="0">
-              <a:effectLst/>
-              <a:latin typeface="D2Coding" panose="020B0609020101020101" pitchFamily="49" charset="-127"/>
-              <a:ea typeface="D2Coding" panose="020B0609020101020101" pitchFamily="49" charset="-127"/>
-              <a:cs typeface="맑은 고딕 Semilight" panose="020B0502040204020203" pitchFamily="50" charset="-127"/>
-            </a:endParaRPr>
-          </a:p>
-        </p:txBody>
-      </p:sp>
-      <p:sp>
-        <p:nvSpPr>
-          <p:cNvPr id="13" name="TextBox 12">
-            <a:extLst>
-              <a:ext uri="{FF2B5EF4-FFF2-40B4-BE49-F238E27FC236}">
-                <a16:creationId xmlns:a16="http://schemas.microsoft.com/office/drawing/2014/main" id="{9062B312-8F08-6092-4FE5-3AB1B5CE41A8}"/>
-              </a:ext>
-            </a:extLst>
-          </p:cNvPr>
-          <p:cNvSpPr txBox="1"/>
-          <p:nvPr/>
-        </p:nvSpPr>
-        <p:spPr>
-          <a:xfrm>
-            <a:off x="1651000" y="6083300"/>
-            <a:ext cx="1511300" cy="307777"/>
-          </a:xfrm>
-          <a:prstGeom prst="rect">
-            <a:avLst/>
-          </a:prstGeom>
-          <a:noFill/>
-        </p:spPr>
-        <p:txBody>
-          <a:bodyPr wrap="square">
-            <a:spAutoFit/>
-          </a:bodyPr>
-          <a:lstStyle/>
-          <a:p>
-            <a:r>
-              <a:rPr lang="ko-KR" altLang="en-US" sz="1400" b="1" dirty="0">
-                <a:latin typeface="맑은 고딕 Semilight" panose="020B0502040204020203" pitchFamily="50" charset="-127"/>
-                <a:ea typeface="맑은 고딕 Semilight" panose="020B0502040204020203" pitchFamily="50" charset="-127"/>
-                <a:cs typeface="맑은 고딕 Semilight" panose="020B0502040204020203" pitchFamily="50" charset="-127"/>
-              </a:rPr>
-              <a:t>문서</a:t>
-            </a:r>
-            <a:r>
-              <a:rPr lang="en-US" altLang="ko-KR" sz="1400" b="1" dirty="0">
-                <a:latin typeface="맑은 고딕 Semilight" panose="020B0502040204020203" pitchFamily="50" charset="-127"/>
-                <a:ea typeface="맑은 고딕 Semilight" panose="020B0502040204020203" pitchFamily="50" charset="-127"/>
-                <a:cs typeface="맑은 고딕 Semilight" panose="020B0502040204020203" pitchFamily="50" charset="-127"/>
-              </a:rPr>
-              <a:t>-</a:t>
-            </a:r>
-            <a:r>
-              <a:rPr lang="ko-KR" altLang="en-US" sz="1400" b="1" dirty="0">
-                <a:latin typeface="맑은 고딕 Semilight" panose="020B0502040204020203" pitchFamily="50" charset="-127"/>
-                <a:ea typeface="맑은 고딕 Semilight" panose="020B0502040204020203" pitchFamily="50" charset="-127"/>
-                <a:cs typeface="맑은 고딕 Semilight" panose="020B0502040204020203" pitchFamily="50" charset="-127"/>
-              </a:rPr>
-              <a:t>단어 행렬</a:t>
-            </a:r>
-          </a:p>
-        </p:txBody>
-      </p:sp>
-      <p:pic>
-        <p:nvPicPr>
-          <p:cNvPr id="15" name="그림 14">
-            <a:extLst>
-              <a:ext uri="{FF2B5EF4-FFF2-40B4-BE49-F238E27FC236}">
-                <a16:creationId xmlns:a16="http://schemas.microsoft.com/office/drawing/2014/main" id="{E86B72B6-C096-D9E8-8385-47E1B43B656F}"/>
-              </a:ext>
-            </a:extLst>
-          </p:cNvPr>
-          <p:cNvPicPr>
-            <a:picLocks noChangeAspect="1"/>
-          </p:cNvPicPr>
-          <p:nvPr/>
-        </p:nvPicPr>
-        <p:blipFill>
-          <a:blip r:embed="rId3"/>
-          <a:stretch>
-            <a:fillRect/>
-          </a:stretch>
-        </p:blipFill>
-        <p:spPr>
-          <a:xfrm>
-            <a:off x="8888843" y="4419957"/>
-            <a:ext cx="3040892" cy="1295043"/>
-          </a:xfrm>
-          <a:prstGeom prst="rect">
-            <a:avLst/>
-          </a:prstGeom>
-        </p:spPr>
-      </p:pic>
-      <p:sp>
-        <p:nvSpPr>
-          <p:cNvPr id="16" name="TextBox 15">
-            <a:extLst>
-              <a:ext uri="{FF2B5EF4-FFF2-40B4-BE49-F238E27FC236}">
-                <a16:creationId xmlns:a16="http://schemas.microsoft.com/office/drawing/2014/main" id="{A7612283-2D84-DC25-D572-AC3E7C4D5AFA}"/>
-              </a:ext>
-            </a:extLst>
-          </p:cNvPr>
-          <p:cNvSpPr txBox="1"/>
-          <p:nvPr/>
-        </p:nvSpPr>
-        <p:spPr>
-          <a:xfrm>
-            <a:off x="7190826" y="6083300"/>
-            <a:ext cx="1511300" cy="307777"/>
-          </a:xfrm>
-          <a:prstGeom prst="rect">
-            <a:avLst/>
-          </a:prstGeom>
-          <a:noFill/>
-        </p:spPr>
-        <p:txBody>
-          <a:bodyPr wrap="square">
-            <a:spAutoFit/>
-          </a:bodyPr>
-          <a:lstStyle/>
-          <a:p>
-            <a:r>
-              <a:rPr lang="ko-KR" altLang="en-US" sz="1400" b="1" dirty="0">
-                <a:latin typeface="맑은 고딕 Semilight" panose="020B0502040204020203" pitchFamily="50" charset="-127"/>
-                <a:ea typeface="맑은 고딕 Semilight" panose="020B0502040204020203" pitchFamily="50" charset="-127"/>
-                <a:cs typeface="맑은 고딕 Semilight" panose="020B0502040204020203" pitchFamily="50" charset="-127"/>
-              </a:rPr>
-              <a:t>주제</a:t>
-            </a:r>
-            <a:r>
-              <a:rPr lang="en-US" altLang="ko-KR" sz="1400" b="1" dirty="0">
-                <a:latin typeface="맑은 고딕 Semilight" panose="020B0502040204020203" pitchFamily="50" charset="-127"/>
-                <a:ea typeface="맑은 고딕 Semilight" panose="020B0502040204020203" pitchFamily="50" charset="-127"/>
-                <a:cs typeface="맑은 고딕 Semilight" panose="020B0502040204020203" pitchFamily="50" charset="-127"/>
-              </a:rPr>
-              <a:t> - </a:t>
-            </a:r>
-            <a:r>
-              <a:rPr lang="ko-KR" altLang="en-US" sz="1400" b="1" dirty="0">
-                <a:latin typeface="맑은 고딕 Semilight" panose="020B0502040204020203" pitchFamily="50" charset="-127"/>
-                <a:ea typeface="맑은 고딕 Semilight" panose="020B0502040204020203" pitchFamily="50" charset="-127"/>
-                <a:cs typeface="맑은 고딕 Semilight" panose="020B0502040204020203" pitchFamily="50" charset="-127"/>
-              </a:rPr>
-              <a:t>문서 행렬</a:t>
-            </a:r>
-          </a:p>
-        </p:txBody>
-      </p:sp>
-      <p:sp>
-        <p:nvSpPr>
-          <p:cNvPr id="17" name="직사각형 16">
-            <a:extLst>
-              <a:ext uri="{FF2B5EF4-FFF2-40B4-BE49-F238E27FC236}">
-                <a16:creationId xmlns:a16="http://schemas.microsoft.com/office/drawing/2014/main" id="{B800A197-6437-3AF3-C382-F18525D160F6}"/>
-              </a:ext>
-            </a:extLst>
-          </p:cNvPr>
-          <p:cNvSpPr/>
-          <p:nvPr/>
-        </p:nvSpPr>
-        <p:spPr>
-          <a:xfrm>
-            <a:off x="1663699" y="3175000"/>
-            <a:ext cx="1738619" cy="2816258"/>
-          </a:xfrm>
-          <a:prstGeom prst="rect">
-            <a:avLst/>
-          </a:prstGeom>
-        </p:spPr>
-        <p:style>
-          <a:lnRef idx="2">
-            <a:schemeClr val="accent1">
-              <a:shade val="15000"/>
-            </a:schemeClr>
-          </a:lnRef>
-          <a:fillRef idx="1">
-            <a:schemeClr val="accent1"/>
-          </a:fillRef>
-          <a:effectRef idx="0">
-            <a:schemeClr val="accent1"/>
-          </a:effectRef>
-          <a:fontRef idx="minor">
-            <a:schemeClr val="lt1"/>
-          </a:fontRef>
-        </p:style>
-        <p:txBody>
-          <a:bodyPr rtlCol="0" anchor="ctr"/>
-          <a:lstStyle/>
-          <a:p>
-            <a:pPr algn="ctr"/>
-            <a:endParaRPr lang="ko-KR" altLang="en-US"/>
-          </a:p>
-        </p:txBody>
-      </p:sp>
-      <p:sp>
-        <p:nvSpPr>
-          <p:cNvPr id="18" name="직사각형 17">
-            <a:extLst>
-              <a:ext uri="{FF2B5EF4-FFF2-40B4-BE49-F238E27FC236}">
-                <a16:creationId xmlns:a16="http://schemas.microsoft.com/office/drawing/2014/main" id="{78E7773F-40E0-77FE-31E1-E882F12EBF62}"/>
-              </a:ext>
-            </a:extLst>
-          </p:cNvPr>
-          <p:cNvSpPr/>
-          <p:nvPr/>
-        </p:nvSpPr>
-        <p:spPr>
-          <a:xfrm>
-            <a:off x="4128828" y="3175000"/>
-            <a:ext cx="600656" cy="2816258"/>
-          </a:xfrm>
-          <a:prstGeom prst="rect">
-            <a:avLst/>
-          </a:prstGeom>
-        </p:spPr>
-        <p:style>
-          <a:lnRef idx="2">
-            <a:schemeClr val="accent1">
-              <a:shade val="15000"/>
-            </a:schemeClr>
-          </a:lnRef>
-          <a:fillRef idx="1">
-            <a:schemeClr val="accent1"/>
-          </a:fillRef>
-          <a:effectRef idx="0">
-            <a:schemeClr val="accent1"/>
-          </a:effectRef>
-          <a:fontRef idx="minor">
-            <a:schemeClr val="lt1"/>
-          </a:fontRef>
-        </p:style>
-        <p:txBody>
-          <a:bodyPr rtlCol="0" anchor="ctr"/>
-          <a:lstStyle/>
-          <a:p>
-            <a:pPr algn="ctr"/>
-            <a:endParaRPr lang="ko-KR" altLang="en-US"/>
-          </a:p>
-        </p:txBody>
-      </p:sp>
-      <p:sp>
-        <p:nvSpPr>
-          <p:cNvPr id="20" name="직사각형 19">
-            <a:extLst>
-              <a:ext uri="{FF2B5EF4-FFF2-40B4-BE49-F238E27FC236}">
-                <a16:creationId xmlns:a16="http://schemas.microsoft.com/office/drawing/2014/main" id="{FC1EFB07-4F18-5C31-8EA8-A2D88879C1E9}"/>
-              </a:ext>
-            </a:extLst>
-          </p:cNvPr>
-          <p:cNvSpPr/>
-          <p:nvPr/>
-        </p:nvSpPr>
-        <p:spPr>
-          <a:xfrm rot="5400000">
-            <a:off x="7214745" y="1834339"/>
-            <a:ext cx="479311" cy="3155849"/>
-          </a:xfrm>
-          <a:prstGeom prst="rect">
-            <a:avLst/>
-          </a:prstGeom>
-        </p:spPr>
-        <p:style>
-          <a:lnRef idx="2">
-            <a:schemeClr val="accent1">
-              <a:shade val="15000"/>
-            </a:schemeClr>
-          </a:lnRef>
-          <a:fillRef idx="1">
-            <a:schemeClr val="accent1"/>
-          </a:fillRef>
-          <a:effectRef idx="0">
-            <a:schemeClr val="accent1"/>
-          </a:effectRef>
-          <a:fontRef idx="minor">
-            <a:schemeClr val="lt1"/>
-          </a:fontRef>
-        </p:style>
-        <p:txBody>
-          <a:bodyPr rtlCol="0" anchor="ctr"/>
-          <a:lstStyle/>
-          <a:p>
-            <a:pPr algn="ctr"/>
-            <a:endParaRPr lang="ko-KR" altLang="en-US"/>
-          </a:p>
-        </p:txBody>
-      </p:sp>
-      <p:sp>
-        <p:nvSpPr>
-          <p:cNvPr id="21" name="직사각형 20">
-            <a:extLst>
-              <a:ext uri="{FF2B5EF4-FFF2-40B4-BE49-F238E27FC236}">
-                <a16:creationId xmlns:a16="http://schemas.microsoft.com/office/drawing/2014/main" id="{E6C6EDF1-1CBD-D410-4BE0-731C5CF32E43}"/>
-              </a:ext>
-            </a:extLst>
-          </p:cNvPr>
-          <p:cNvSpPr/>
-          <p:nvPr/>
-        </p:nvSpPr>
-        <p:spPr>
-          <a:xfrm>
-            <a:off x="5023497" y="3172605"/>
-            <a:ext cx="600656" cy="479313"/>
-          </a:xfrm>
-          <a:prstGeom prst="rect">
-            <a:avLst/>
-          </a:prstGeom>
-        </p:spPr>
-        <p:style>
-          <a:lnRef idx="2">
-            <a:schemeClr val="accent1">
-              <a:shade val="15000"/>
-            </a:schemeClr>
-          </a:lnRef>
-          <a:fillRef idx="1">
-            <a:schemeClr val="accent1"/>
-          </a:fillRef>
-          <a:effectRef idx="0">
-            <a:schemeClr val="accent1"/>
-          </a:effectRef>
-          <a:fontRef idx="minor">
-            <a:schemeClr val="lt1"/>
-          </a:fontRef>
-        </p:style>
-        <p:txBody>
-          <a:bodyPr rtlCol="0" anchor="ctr"/>
-          <a:lstStyle/>
-          <a:p>
-            <a:pPr algn="ctr"/>
-            <a:endParaRPr lang="ko-KR" altLang="en-US"/>
-          </a:p>
-        </p:txBody>
-      </p:sp>
-      <mc:AlternateContent xmlns:mc="http://schemas.openxmlformats.org/markup-compatibility/2006" xmlns:a14="http://schemas.microsoft.com/office/drawing/2010/main">
-        <mc:Choice Requires="a14">
-          <p:sp>
-            <p:nvSpPr>
-              <p:cNvPr id="22" name="TextBox 21">
-                <a:extLst>
-                  <a:ext uri="{FF2B5EF4-FFF2-40B4-BE49-F238E27FC236}">
-                    <a16:creationId xmlns:a16="http://schemas.microsoft.com/office/drawing/2014/main" id="{6F1EDEB7-0970-EF3C-8D42-1973797519BE}"/>
-                  </a:ext>
-                </a:extLst>
-              </p:cNvPr>
-              <p:cNvSpPr txBox="1"/>
-              <p:nvPr/>
-            </p:nvSpPr>
-            <p:spPr>
-              <a:xfrm>
-                <a:off x="2386531" y="4239392"/>
-                <a:ext cx="422873" cy="553998"/>
-              </a:xfrm>
-              <a:prstGeom prst="rect">
-                <a:avLst/>
-              </a:prstGeom>
-              <a:noFill/>
-            </p:spPr>
-            <p:txBody>
-              <a:bodyPr wrap="none" lIns="0" tIns="0" rIns="0" bIns="0" rtlCol="0">
-                <a:spAutoFit/>
-              </a:bodyPr>
-              <a:lstStyle/>
-              <a:p>
-                <a:pPr/>
-                <a14:m>
-                  <m:oMathPara xmlns:m="http://schemas.openxmlformats.org/officeDocument/2006/math">
-                    <m:oMathParaPr>
-                      <m:jc m:val="centerGroup"/>
-                    </m:oMathParaPr>
-                    <m:oMath xmlns:m="http://schemas.openxmlformats.org/officeDocument/2006/math">
-                      <m:r>
-                        <a:rPr lang="ko-KR" altLang="en-US" sz="3600" i="1" smtClean="0">
-                          <a:latin typeface="Cambria Math" panose="02040503050406030204" pitchFamily="18" charset="0"/>
-                        </a:rPr>
-                        <m:t>𝐴</m:t>
-                      </m:r>
-                    </m:oMath>
-                  </m:oMathPara>
-                </a14:m>
-                <a:endParaRPr lang="ko-KR" altLang="en-US" sz="3600" dirty="0"/>
-              </a:p>
-            </p:txBody>
-          </p:sp>
-        </mc:Choice>
-        <mc:Fallback xmlns="">
-          <p:sp>
-            <p:nvSpPr>
-              <p:cNvPr id="22" name="TextBox 21">
-                <a:extLst>
-                  <a:ext uri="{FF2B5EF4-FFF2-40B4-BE49-F238E27FC236}">
-                    <a16:creationId xmlns:a16="http://schemas.microsoft.com/office/drawing/2014/main" id="{6F1EDEB7-0970-EF3C-8D42-1973797519BE}"/>
-                  </a:ext>
-                </a:extLst>
-              </p:cNvPr>
-              <p:cNvSpPr txBox="1">
-                <a:spLocks noRot="1" noChangeAspect="1" noMove="1" noResize="1" noEditPoints="1" noAdjustHandles="1" noChangeArrowheads="1" noChangeShapeType="1" noTextEdit="1"/>
-              </p:cNvSpPr>
-              <p:nvPr/>
-            </p:nvSpPr>
-            <p:spPr>
-              <a:xfrm>
-                <a:off x="2386531" y="4239392"/>
-                <a:ext cx="422873" cy="553998"/>
-              </a:xfrm>
-              <a:prstGeom prst="rect">
-                <a:avLst/>
-              </a:prstGeom>
-              <a:blipFill>
-                <a:blip r:embed="rId4"/>
-                <a:stretch>
-                  <a:fillRect/>
-                </a:stretch>
-              </a:blipFill>
-            </p:spPr>
-            <p:txBody>
-              <a:bodyPr/>
-              <a:lstStyle/>
-              <a:p>
-                <a:r>
-                  <a:rPr lang="ko-KR" altLang="en-US">
-                    <a:noFill/>
-                  </a:rPr>
-                  <a:t> </a:t>
-                </a:r>
-              </a:p>
-            </p:txBody>
-          </p:sp>
-        </mc:Fallback>
-      </mc:AlternateContent>
-      <mc:AlternateContent xmlns:mc="http://schemas.openxmlformats.org/markup-compatibility/2006" xmlns:a14="http://schemas.microsoft.com/office/drawing/2010/main">
-        <mc:Choice Requires="a14">
-          <p:sp>
-            <p:nvSpPr>
-              <p:cNvPr id="23" name="TextBox 22">
-                <a:extLst>
-                  <a:ext uri="{FF2B5EF4-FFF2-40B4-BE49-F238E27FC236}">
-                    <a16:creationId xmlns:a16="http://schemas.microsoft.com/office/drawing/2014/main" id="{5F78C3F4-02E7-75A6-7256-FFCBC257E89D}"/>
-                  </a:ext>
-                </a:extLst>
-              </p:cNvPr>
-              <p:cNvSpPr txBox="1"/>
-              <p:nvPr/>
-            </p:nvSpPr>
-            <p:spPr>
-              <a:xfrm>
-                <a:off x="4205596" y="4239392"/>
-                <a:ext cx="453073" cy="553998"/>
-              </a:xfrm>
-              <a:prstGeom prst="rect">
-                <a:avLst/>
-              </a:prstGeom>
-              <a:noFill/>
-            </p:spPr>
-            <p:txBody>
-              <a:bodyPr wrap="none" lIns="0" tIns="0" rIns="0" bIns="0" rtlCol="0">
-                <a:spAutoFit/>
-              </a:bodyPr>
-              <a:lstStyle/>
-              <a:p>
-                <a:pPr/>
-                <a14:m>
-                  <m:oMathPara xmlns:m="http://schemas.openxmlformats.org/officeDocument/2006/math">
-                    <m:oMathParaPr>
-                      <m:jc m:val="centerGroup"/>
-                    </m:oMathParaPr>
-                    <m:oMath xmlns:m="http://schemas.openxmlformats.org/officeDocument/2006/math">
-                      <m:r>
-                        <a:rPr lang="en-US" altLang="ko-KR" sz="3600" b="0" i="1" smtClean="0">
-                          <a:latin typeface="Cambria Math" panose="02040503050406030204" pitchFamily="18" charset="0"/>
-                        </a:rPr>
-                        <m:t>𝑈</m:t>
-                      </m:r>
-                    </m:oMath>
-                  </m:oMathPara>
-                </a14:m>
-                <a:endParaRPr lang="ko-KR" altLang="en-US" sz="3600" dirty="0"/>
-              </a:p>
-            </p:txBody>
-          </p:sp>
-        </mc:Choice>
-        <mc:Fallback xmlns="">
-          <p:sp>
-            <p:nvSpPr>
-              <p:cNvPr id="23" name="TextBox 22">
-                <a:extLst>
-                  <a:ext uri="{FF2B5EF4-FFF2-40B4-BE49-F238E27FC236}">
-                    <a16:creationId xmlns:a16="http://schemas.microsoft.com/office/drawing/2014/main" id="{5F78C3F4-02E7-75A6-7256-FFCBC257E89D}"/>
-                  </a:ext>
-                </a:extLst>
-              </p:cNvPr>
-              <p:cNvSpPr txBox="1">
-                <a:spLocks noRot="1" noChangeAspect="1" noMove="1" noResize="1" noEditPoints="1" noAdjustHandles="1" noChangeArrowheads="1" noChangeShapeType="1" noTextEdit="1"/>
-              </p:cNvSpPr>
-              <p:nvPr/>
-            </p:nvSpPr>
-            <p:spPr>
-              <a:xfrm>
-                <a:off x="4205596" y="4239392"/>
-                <a:ext cx="453073" cy="553998"/>
-              </a:xfrm>
-              <a:prstGeom prst="rect">
-                <a:avLst/>
-              </a:prstGeom>
-              <a:blipFill>
-                <a:blip r:embed="rId5"/>
-                <a:stretch>
-                  <a:fillRect/>
-                </a:stretch>
-              </a:blipFill>
-            </p:spPr>
-            <p:txBody>
-              <a:bodyPr/>
-              <a:lstStyle/>
-              <a:p>
-                <a:r>
-                  <a:rPr lang="ko-KR" altLang="en-US">
-                    <a:noFill/>
-                  </a:rPr>
-                  <a:t> </a:t>
-                </a:r>
-              </a:p>
-            </p:txBody>
-          </p:sp>
-        </mc:Fallback>
-      </mc:AlternateContent>
-      <mc:AlternateContent xmlns:mc="http://schemas.openxmlformats.org/markup-compatibility/2006" xmlns:a14="http://schemas.microsoft.com/office/drawing/2010/main">
-        <mc:Choice Requires="a14">
-          <p:sp>
-            <p:nvSpPr>
-              <p:cNvPr id="24" name="TextBox 23">
-                <a:extLst>
-                  <a:ext uri="{FF2B5EF4-FFF2-40B4-BE49-F238E27FC236}">
-                    <a16:creationId xmlns:a16="http://schemas.microsoft.com/office/drawing/2014/main" id="{E8399F27-3811-FF52-6B17-962A63CFEA2F}"/>
-                  </a:ext>
-                </a:extLst>
-              </p:cNvPr>
-              <p:cNvSpPr txBox="1"/>
-              <p:nvPr/>
-            </p:nvSpPr>
-            <p:spPr>
-              <a:xfrm>
-                <a:off x="5048897" y="4239392"/>
-                <a:ext cx="421141" cy="553998"/>
-              </a:xfrm>
-              <a:prstGeom prst="rect">
-                <a:avLst/>
-              </a:prstGeom>
-              <a:noFill/>
-            </p:spPr>
-            <p:txBody>
-              <a:bodyPr wrap="none" lIns="0" tIns="0" rIns="0" bIns="0" rtlCol="0">
-                <a:spAutoFit/>
-              </a:bodyPr>
-              <a:lstStyle/>
-              <a:p>
-                <a:pPr/>
-                <a14:m>
-                  <m:oMathPara xmlns:m="http://schemas.openxmlformats.org/officeDocument/2006/math">
-                    <m:oMathParaPr>
-                      <m:jc m:val="centerGroup"/>
-                    </m:oMathParaPr>
-                    <m:oMath xmlns:m="http://schemas.openxmlformats.org/officeDocument/2006/math">
-                      <m:r>
-                        <a:rPr lang="ko-KR" altLang="en-US" sz="3600" i="1">
-                          <a:latin typeface="Cambria Math" panose="02040503050406030204" pitchFamily="18" charset="0"/>
-                        </a:rPr>
-                        <m:t>𝛴</m:t>
-                      </m:r>
-                    </m:oMath>
-                  </m:oMathPara>
-                </a14:m>
-                <a:endParaRPr lang="ko-KR" altLang="en-US" sz="3600" dirty="0"/>
-              </a:p>
-            </p:txBody>
-          </p:sp>
-        </mc:Choice>
-        <mc:Fallback xmlns="">
-          <p:sp>
-            <p:nvSpPr>
-              <p:cNvPr id="24" name="TextBox 23">
-                <a:extLst>
-                  <a:ext uri="{FF2B5EF4-FFF2-40B4-BE49-F238E27FC236}">
-                    <a16:creationId xmlns:a16="http://schemas.microsoft.com/office/drawing/2014/main" id="{E8399F27-3811-FF52-6B17-962A63CFEA2F}"/>
-                  </a:ext>
-                </a:extLst>
-              </p:cNvPr>
-              <p:cNvSpPr txBox="1">
-                <a:spLocks noRot="1" noChangeAspect="1" noMove="1" noResize="1" noEditPoints="1" noAdjustHandles="1" noChangeArrowheads="1" noChangeShapeType="1" noTextEdit="1"/>
-              </p:cNvSpPr>
-              <p:nvPr/>
-            </p:nvSpPr>
-            <p:spPr>
-              <a:xfrm>
-                <a:off x="5048897" y="4239392"/>
-                <a:ext cx="421141" cy="553998"/>
-              </a:xfrm>
-              <a:prstGeom prst="rect">
-                <a:avLst/>
-              </a:prstGeom>
-              <a:blipFill>
-                <a:blip r:embed="rId6"/>
-                <a:stretch>
-                  <a:fillRect/>
-                </a:stretch>
-              </a:blipFill>
-            </p:spPr>
-            <p:txBody>
-              <a:bodyPr/>
-              <a:lstStyle/>
-              <a:p>
-                <a:r>
-                  <a:rPr lang="ko-KR" altLang="en-US">
-                    <a:noFill/>
-                  </a:rPr>
-                  <a:t> </a:t>
-                </a:r>
-              </a:p>
-            </p:txBody>
-          </p:sp>
-        </mc:Fallback>
-      </mc:AlternateContent>
-      <mc:AlternateContent xmlns:mc="http://schemas.openxmlformats.org/markup-compatibility/2006" xmlns:a14="http://schemas.microsoft.com/office/drawing/2010/main">
-        <mc:Choice Requires="a14">
-          <p:sp>
-            <p:nvSpPr>
-              <p:cNvPr id="25" name="TextBox 24">
-                <a:extLst>
-                  <a:ext uri="{FF2B5EF4-FFF2-40B4-BE49-F238E27FC236}">
-                    <a16:creationId xmlns:a16="http://schemas.microsoft.com/office/drawing/2014/main" id="{B27E1F5A-9F8E-1127-8440-6A3D8831BF4C}"/>
-                  </a:ext>
-                </a:extLst>
-              </p:cNvPr>
-              <p:cNvSpPr txBox="1"/>
-              <p:nvPr/>
-            </p:nvSpPr>
-            <p:spPr>
-              <a:xfrm>
-                <a:off x="7190826" y="4239392"/>
-                <a:ext cx="676852" cy="553998"/>
-              </a:xfrm>
-              <a:prstGeom prst="rect">
-                <a:avLst/>
-              </a:prstGeom>
-              <a:noFill/>
-            </p:spPr>
-            <p:txBody>
-              <a:bodyPr wrap="none" lIns="0" tIns="0" rIns="0" bIns="0" rtlCol="0">
-                <a:spAutoFit/>
-              </a:bodyPr>
-              <a:lstStyle/>
-              <a:p>
-                <a:pPr/>
-                <a14:m>
-                  <m:oMathPara xmlns:m="http://schemas.openxmlformats.org/officeDocument/2006/math">
-                    <m:oMathParaPr>
-                      <m:jc m:val="centerGroup"/>
-                    </m:oMathParaPr>
-                    <m:oMath xmlns:m="http://schemas.openxmlformats.org/officeDocument/2006/math">
-                      <m:sSup>
-                        <m:sSupPr>
-                          <m:ctrlPr>
-                            <a:rPr lang="ko-KR" altLang="en-US" sz="3600" i="1" smtClean="0">
-                              <a:latin typeface="Cambria Math" panose="02040503050406030204" pitchFamily="18" charset="0"/>
-                            </a:rPr>
-                          </m:ctrlPr>
-                        </m:sSupPr>
-                        <m:e>
-                          <m:r>
-                            <a:rPr lang="en-US" altLang="ko-KR" sz="3600" b="0" i="1" smtClean="0">
-                              <a:latin typeface="Cambria Math" panose="02040503050406030204" pitchFamily="18" charset="0"/>
-                            </a:rPr>
-                            <m:t>𝑉</m:t>
-                          </m:r>
-                        </m:e>
-                        <m:sup>
-                          <m:r>
-                            <a:rPr lang="ko-KR" altLang="en-US" sz="3600" i="1">
-                              <a:latin typeface="Cambria Math" panose="02040503050406030204" pitchFamily="18" charset="0"/>
-                            </a:rPr>
-                            <m:t>𝑇</m:t>
-                          </m:r>
-                        </m:sup>
-                      </m:sSup>
-                    </m:oMath>
-                  </m:oMathPara>
-                </a14:m>
-                <a:endParaRPr lang="ko-KR" altLang="en-US" sz="3600" dirty="0"/>
-              </a:p>
-            </p:txBody>
-          </p:sp>
-        </mc:Choice>
-        <mc:Fallback xmlns="">
-          <p:sp>
-            <p:nvSpPr>
-              <p:cNvPr id="25" name="TextBox 24">
-                <a:extLst>
-                  <a:ext uri="{FF2B5EF4-FFF2-40B4-BE49-F238E27FC236}">
-                    <a16:creationId xmlns:a16="http://schemas.microsoft.com/office/drawing/2014/main" id="{B27E1F5A-9F8E-1127-8440-6A3D8831BF4C}"/>
-                  </a:ext>
-                </a:extLst>
-              </p:cNvPr>
-              <p:cNvSpPr txBox="1">
-                <a:spLocks noRot="1" noChangeAspect="1" noMove="1" noResize="1" noEditPoints="1" noAdjustHandles="1" noChangeArrowheads="1" noChangeShapeType="1" noTextEdit="1"/>
-              </p:cNvSpPr>
-              <p:nvPr/>
-            </p:nvSpPr>
-            <p:spPr>
-              <a:xfrm>
-                <a:off x="7190826" y="4239392"/>
-                <a:ext cx="676852" cy="553998"/>
-              </a:xfrm>
-              <a:prstGeom prst="rect">
-                <a:avLst/>
-              </a:prstGeom>
-              <a:blipFill>
-                <a:blip r:embed="rId7"/>
-                <a:stretch>
-                  <a:fillRect/>
-                </a:stretch>
-              </a:blipFill>
-            </p:spPr>
-            <p:txBody>
-              <a:bodyPr/>
-              <a:lstStyle/>
-              <a:p>
-                <a:r>
-                  <a:rPr lang="ko-KR" altLang="en-US">
-                    <a:noFill/>
-                  </a:rPr>
-                  <a:t> </a:t>
-                </a:r>
-              </a:p>
-            </p:txBody>
-          </p:sp>
-        </mc:Fallback>
-      </mc:AlternateContent>
-      <mc:AlternateContent xmlns:mc="http://schemas.openxmlformats.org/markup-compatibility/2006" xmlns:a14="http://schemas.microsoft.com/office/drawing/2010/main">
-        <mc:Choice Requires="a14">
-          <p:sp>
-            <p:nvSpPr>
-              <p:cNvPr id="26" name="TextBox 25">
-                <a:extLst>
-                  <a:ext uri="{FF2B5EF4-FFF2-40B4-BE49-F238E27FC236}">
-                    <a16:creationId xmlns:a16="http://schemas.microsoft.com/office/drawing/2014/main" id="{E6402FAC-789E-2B2E-2E16-0EEEFA961423}"/>
-                  </a:ext>
-                </a:extLst>
-              </p:cNvPr>
-              <p:cNvSpPr txBox="1"/>
-              <p:nvPr/>
-            </p:nvSpPr>
-            <p:spPr>
-              <a:xfrm>
-                <a:off x="1734196" y="2549080"/>
-                <a:ext cx="1942711" cy="492443"/>
-              </a:xfrm>
-              <a:prstGeom prst="rect">
-                <a:avLst/>
-              </a:prstGeom>
-              <a:noFill/>
-            </p:spPr>
-            <p:txBody>
-              <a:bodyPr wrap="none" lIns="0" tIns="0" rIns="0" bIns="0" rtlCol="0">
-                <a:spAutoFit/>
-              </a:bodyPr>
-              <a:lstStyle/>
-              <a:p>
-                <a:pPr/>
-                <a14:m>
-                  <m:oMathPara xmlns:m="http://schemas.openxmlformats.org/officeDocument/2006/math">
-                    <m:oMathParaPr>
-                      <m:jc m:val="centerGroup"/>
-                    </m:oMathParaPr>
-                    <m:oMath xmlns:m="http://schemas.openxmlformats.org/officeDocument/2006/math">
-                      <m:r>
-                        <a:rPr lang="ko-KR" altLang="en-US" sz="3200" i="1" smtClean="0">
-                          <a:latin typeface="Cambria Math" panose="02040503050406030204" pitchFamily="18" charset="0"/>
-                        </a:rPr>
-                        <m:t>𝐴</m:t>
-                      </m:r>
-                      <m:r>
-                        <a:rPr lang="ko-KR" altLang="en-US" sz="3200" i="0">
-                          <a:latin typeface="Cambria Math" panose="02040503050406030204" pitchFamily="18" charset="0"/>
-                        </a:rPr>
-                        <m:t>=</m:t>
-                      </m:r>
-                      <m:r>
-                        <a:rPr lang="en-US" altLang="ko-KR" sz="3200" b="0" i="1" smtClean="0">
-                          <a:latin typeface="Cambria Math" panose="02040503050406030204" pitchFamily="18" charset="0"/>
-                        </a:rPr>
-                        <m:t>𝑈</m:t>
-                      </m:r>
-                      <m:r>
-                        <a:rPr lang="ko-KR" altLang="en-US" sz="3200" i="1">
-                          <a:latin typeface="Cambria Math" panose="02040503050406030204" pitchFamily="18" charset="0"/>
-                        </a:rPr>
-                        <m:t>𝛴</m:t>
-                      </m:r>
-                      <m:sSup>
-                        <m:sSupPr>
-                          <m:ctrlPr>
-                            <a:rPr lang="ko-KR" altLang="en-US" sz="3200" i="1">
-                              <a:latin typeface="Cambria Math" panose="02040503050406030204" pitchFamily="18" charset="0"/>
-                            </a:rPr>
-                          </m:ctrlPr>
-                        </m:sSupPr>
-                        <m:e>
-                          <m:r>
-                            <a:rPr lang="en-US" altLang="ko-KR" sz="3200" b="0" i="1" smtClean="0">
-                              <a:latin typeface="Cambria Math" panose="02040503050406030204" pitchFamily="18" charset="0"/>
-                            </a:rPr>
-                            <m:t>𝑉</m:t>
-                          </m:r>
-                        </m:e>
-                        <m:sup>
-                          <m:r>
-                            <a:rPr lang="ko-KR" altLang="en-US" sz="3200" i="1">
-                              <a:latin typeface="Cambria Math" panose="02040503050406030204" pitchFamily="18" charset="0"/>
-                            </a:rPr>
-                            <m:t>𝑇</m:t>
-                          </m:r>
-                        </m:sup>
-                      </m:sSup>
-                    </m:oMath>
-                  </m:oMathPara>
-                </a14:m>
-                <a:endParaRPr lang="ko-KR" altLang="en-US" sz="3200" dirty="0"/>
-              </a:p>
-            </p:txBody>
-          </p:sp>
-        </mc:Choice>
-        <mc:Fallback xmlns="">
-          <p:sp>
-            <p:nvSpPr>
-              <p:cNvPr id="26" name="TextBox 25">
-                <a:extLst>
-                  <a:ext uri="{FF2B5EF4-FFF2-40B4-BE49-F238E27FC236}">
-                    <a16:creationId xmlns:a16="http://schemas.microsoft.com/office/drawing/2014/main" id="{E6402FAC-789E-2B2E-2E16-0EEEFA961423}"/>
-                  </a:ext>
-                </a:extLst>
-              </p:cNvPr>
-              <p:cNvSpPr txBox="1">
-                <a:spLocks noRot="1" noChangeAspect="1" noMove="1" noResize="1" noEditPoints="1" noAdjustHandles="1" noChangeArrowheads="1" noChangeShapeType="1" noTextEdit="1"/>
-              </p:cNvSpPr>
-              <p:nvPr/>
-            </p:nvSpPr>
-            <p:spPr>
-              <a:xfrm>
-                <a:off x="1734196" y="2549080"/>
-                <a:ext cx="1942711" cy="492443"/>
-              </a:xfrm>
-              <a:prstGeom prst="rect">
-                <a:avLst/>
-              </a:prstGeom>
-              <a:blipFill>
-                <a:blip r:embed="rId8"/>
-                <a:stretch>
-                  <a:fillRect/>
-                </a:stretch>
-              </a:blipFill>
-            </p:spPr>
-            <p:txBody>
-              <a:bodyPr/>
-              <a:lstStyle/>
-              <a:p>
-                <a:r>
-                  <a:rPr lang="ko-KR" altLang="en-US">
-                    <a:noFill/>
-                  </a:rPr>
-                  <a:t> </a:t>
-                </a:r>
-              </a:p>
-            </p:txBody>
-          </p:sp>
-        </mc:Fallback>
-      </mc:AlternateContent>
-      <mc:AlternateContent xmlns:mc="http://schemas.openxmlformats.org/markup-compatibility/2006" xmlns:a14="http://schemas.microsoft.com/office/drawing/2010/main">
-        <mc:Choice Requires="a14">
-          <p:sp>
-            <p:nvSpPr>
-              <p:cNvPr id="28" name="TextBox 27">
-                <a:extLst>
-                  <a:ext uri="{FF2B5EF4-FFF2-40B4-BE49-F238E27FC236}">
-                    <a16:creationId xmlns:a16="http://schemas.microsoft.com/office/drawing/2014/main" id="{88A96915-1018-BAB2-5738-206CAAF6A060}"/>
-                  </a:ext>
-                </a:extLst>
-              </p:cNvPr>
-              <p:cNvSpPr txBox="1"/>
-              <p:nvPr/>
-            </p:nvSpPr>
-            <p:spPr>
-              <a:xfrm>
-                <a:off x="3212078" y="4193225"/>
-                <a:ext cx="1080828" cy="646331"/>
-              </a:xfrm>
-              <a:prstGeom prst="rect">
-                <a:avLst/>
-              </a:prstGeom>
-              <a:noFill/>
-            </p:spPr>
-            <p:txBody>
-              <a:bodyPr wrap="square">
-                <a:spAutoFit/>
-              </a:bodyPr>
-              <a:lstStyle/>
-              <a:p>
-                <a:pPr/>
-                <a14:m>
-                  <m:oMathPara xmlns:m="http://schemas.openxmlformats.org/officeDocument/2006/math">
-                    <m:oMathParaPr>
-                      <m:jc m:val="centerGroup"/>
-                    </m:oMathParaPr>
-                    <m:oMath xmlns:m="http://schemas.openxmlformats.org/officeDocument/2006/math">
-                      <m:r>
-                        <a:rPr lang="ko-KR" altLang="en-US" sz="3600" i="0" smtClean="0">
-                          <a:latin typeface="Cambria Math" panose="02040503050406030204" pitchFamily="18" charset="0"/>
-                        </a:rPr>
-                        <m:t>=</m:t>
-                      </m:r>
-                    </m:oMath>
-                  </m:oMathPara>
-                </a14:m>
-                <a:endParaRPr lang="ko-KR" altLang="en-US" sz="3600" dirty="0"/>
-              </a:p>
-            </p:txBody>
-          </p:sp>
-        </mc:Choice>
-        <mc:Fallback xmlns="">
-          <p:sp>
-            <p:nvSpPr>
-              <p:cNvPr id="28" name="TextBox 27">
-                <a:extLst>
-                  <a:ext uri="{FF2B5EF4-FFF2-40B4-BE49-F238E27FC236}">
-                    <a16:creationId xmlns:a16="http://schemas.microsoft.com/office/drawing/2014/main" id="{88A96915-1018-BAB2-5738-206CAAF6A060}"/>
-                  </a:ext>
-                </a:extLst>
-              </p:cNvPr>
-              <p:cNvSpPr txBox="1">
-                <a:spLocks noRot="1" noChangeAspect="1" noMove="1" noResize="1" noEditPoints="1" noAdjustHandles="1" noChangeArrowheads="1" noChangeShapeType="1" noTextEdit="1"/>
-              </p:cNvSpPr>
-              <p:nvPr/>
-            </p:nvSpPr>
-            <p:spPr>
-              <a:xfrm>
-                <a:off x="3212078" y="4193225"/>
-                <a:ext cx="1080828" cy="646331"/>
-              </a:xfrm>
-              <a:prstGeom prst="rect">
-                <a:avLst/>
-              </a:prstGeom>
-              <a:blipFill>
-                <a:blip r:embed="rId9"/>
-                <a:stretch>
-                  <a:fillRect/>
-                </a:stretch>
-              </a:blipFill>
-            </p:spPr>
-            <p:txBody>
-              <a:bodyPr/>
-              <a:lstStyle/>
-              <a:p>
-                <a:r>
-                  <a:rPr lang="ko-KR" altLang="en-US">
-                    <a:noFill/>
-                  </a:rPr>
-                  <a:t> </a:t>
-                </a:r>
-              </a:p>
-            </p:txBody>
-          </p:sp>
-        </mc:Fallback>
-      </mc:AlternateContent>
-    </p:spTree>
-    <p:extLst>
-      <p:ext uri="{BB962C8B-B14F-4D97-AF65-F5344CB8AC3E}">
-        <p14:creationId xmlns:p14="http://schemas.microsoft.com/office/powerpoint/2010/main" val="1902446754"/>
       </p:ext>
     </p:extLst>
   </p:cSld>
